--- a/Introduccion a la Ingenieria/Clases/Clase 8 - Taller de aplicacion del ciclo de vida/Presentacion.pptx
+++ b/Introduccion a la Ingenieria/Clases/Clase 8 - Taller de aplicacion del ciclo de vida/Presentacion.pptx
@@ -17,6 +17,14 @@
     <p:sldId id="265" r:id="rId16"/>
     <p:sldId id="266" r:id="rId17"/>
     <p:sldId id="267" r:id="rId18"/>
+    <p:sldId id="268" r:id="rId19"/>
+    <p:sldId id="269" r:id="rId20"/>
+    <p:sldId id="270" r:id="rId21"/>
+    <p:sldId id="271" r:id="rId22"/>
+    <p:sldId id="272" r:id="rId23"/>
+    <p:sldId id="273" r:id="rId24"/>
+    <p:sldId id="274" r:id="rId25"/>
+    <p:sldId id="275" r:id="rId26"/>
   </p:sldIdLst>
   <p:sldSz cx="12191695" cy="6858000" type="screen4x3"/>
   <p:notesSz cx="6858000" cy="9144000"/>
@@ -3511,7 +3519,7 @@
         <p:spPr>
           <a:xfrm>
             <a:off x="0" y="0"/>
-            <a:ext cx="12191695" cy="1170432"/>
+            <a:ext cx="12191695" cy="960120"/>
           </a:xfrm>
           <a:prstGeom prst="rect">
             <a:avLst/>
@@ -3553,7 +3561,7 @@
         </p:nvSpPr>
         <p:spPr>
           <a:xfrm>
-            <a:off x="0" y="1170432"/>
+            <a:off x="0" y="960120"/>
             <a:ext cx="12191695" cy="41148"/>
           </a:xfrm>
           <a:prstGeom prst="rect">
@@ -3597,7 +3605,7 @@
         <p:spPr>
           <a:xfrm>
             <a:off x="457200" y="164592"/>
-            <a:ext cx="11277295" cy="384048"/>
+            <a:ext cx="11277295" cy="502920"/>
           </a:xfrm>
           <a:prstGeom prst="rect">
             <a:avLst/>
@@ -3617,7 +3625,7 @@
                 </a:solidFill>
                 <a:latin typeface="Calibri"/>
               </a:rPr>
-              <a:t>Cómo se expone en 3 minutos</a:t>
+              <a:t>La pregunta de entrada: 45 minutos y una fase saltada (2/2)</a:t>
             </a:r>
           </a:p>
         </p:txBody>
@@ -3630,8 +3638,8 @@
         </p:nvSpPr>
         <p:spPr>
           <a:xfrm>
-            <a:off x="457200" y="566928"/>
-            <a:ext cx="11277295" cy="411480"/>
+            <a:off x="457200" y="1170432"/>
+            <a:ext cx="11277295" cy="5230368"/>
           </a:xfrm>
           <a:prstGeom prst="rect">
             <a:avLst/>
@@ -3644,876 +3652,74 @@
           </a:bodyPr>
           <a:lstStyle/>
           <a:p>
-            <a:r>
-              <a:rPr sz="1400" b="0" i="0">
-                <a:solidFill>
-                  <a:srgbClr val="B8D8EE"/>
-                </a:solidFill>
-                <a:latin typeface="Calibri"/>
-              </a:rPr>
-              <a:t>Habla el vocero con la pantalla ya compartida · cronómetro en pantalla · se corta al llegar a cero</a:t>
-            </a:r>
-          </a:p>
-        </p:txBody>
-      </p:sp>
-      <p:sp>
-        <p:nvSpPr>
-          <p:cNvPr id="6" name="Rounded Rectangle 5"/>
-          <p:cNvSpPr/>
-          <p:nvPr/>
-        </p:nvSpPr>
-        <p:spPr>
-          <a:xfrm>
-            <a:off x="457200" y="1444752"/>
-            <a:ext cx="11277295" cy="908913"/>
-          </a:xfrm>
-          <a:prstGeom prst="roundRect">
-            <a:avLst>
-              <a:gd name="adj" fmla="val 12000"/>
-            </a:avLst>
-          </a:prstGeom>
-          <a:solidFill>
-            <a:srgbClr val="F2F2F2"/>
-          </a:solidFill>
-          <a:ln>
-            <a:noFill/>
-          </a:ln>
-        </p:spPr>
-        <p:style>
-          <a:lnRef idx="1">
-            <a:schemeClr val="accent1"/>
-          </a:lnRef>
-          <a:fillRef idx="3">
-            <a:schemeClr val="accent1"/>
-          </a:fillRef>
-          <a:effectRef idx="2">
-            <a:schemeClr val="accent1"/>
-          </a:effectRef>
-          <a:fontRef idx="minor">
-            <a:schemeClr val="lt1"/>
-          </a:fontRef>
-        </p:style>
-        <p:txBody>
-          <a:bodyPr rtlCol="0" anchor="ctr"/>
-          <a:lstStyle/>
-          <a:p>
-            <a:pPr algn="ctr"/>
-          </a:p>
-        </p:txBody>
-      </p:sp>
-      <p:sp>
-        <p:nvSpPr>
-          <p:cNvPr id="7" name="Rounded Rectangle 6"/>
-          <p:cNvSpPr/>
-          <p:nvPr/>
-        </p:nvSpPr>
-        <p:spPr>
-          <a:xfrm>
-            <a:off x="594360" y="1679752"/>
-            <a:ext cx="438912" cy="438912"/>
-          </a:xfrm>
-          <a:prstGeom prst="roundRect">
-            <a:avLst>
-              <a:gd name="adj" fmla="val 12000"/>
-            </a:avLst>
-          </a:prstGeom>
-          <a:solidFill>
-            <a:srgbClr val="095292"/>
-          </a:solidFill>
-          <a:ln>
-            <a:noFill/>
-          </a:ln>
-        </p:spPr>
-        <p:style>
-          <a:lnRef idx="1">
-            <a:schemeClr val="accent1"/>
-          </a:lnRef>
-          <a:fillRef idx="3">
-            <a:schemeClr val="accent1"/>
-          </a:fillRef>
-          <a:effectRef idx="2">
-            <a:schemeClr val="accent1"/>
-          </a:effectRef>
-          <a:fontRef idx="minor">
-            <a:schemeClr val="lt1"/>
-          </a:fontRef>
-        </p:style>
-        <p:txBody>
-          <a:bodyPr rtlCol="0" anchor="ctr"/>
-          <a:lstStyle/>
-          <a:p>
-            <a:pPr algn="ctr"/>
-          </a:p>
-        </p:txBody>
-      </p:sp>
-      <p:sp>
-        <p:nvSpPr>
-          <p:cNvPr id="8" name="TextBox 7"/>
-          <p:cNvSpPr txBox="1"/>
-          <p:nvPr/>
-        </p:nvSpPr>
-        <p:spPr>
-          <a:xfrm>
-            <a:off x="594360" y="1679752"/>
-            <a:ext cx="438912" cy="438912"/>
-          </a:xfrm>
-          <a:prstGeom prst="rect">
-            <a:avLst/>
-          </a:prstGeom>
-          <a:noFill/>
-        </p:spPr>
-        <p:txBody>
-          <a:bodyPr wrap="square" anchor="ctr"/>
-          <a:lstStyle/>
-          <a:p>
-            <a:pPr algn="ctr"/>
-            <a:r>
-              <a:rPr sz="1600" b="1" i="0">
-                <a:solidFill>
-                  <a:srgbClr val="FFFFFF"/>
-                </a:solidFill>
-                <a:latin typeface="Calibri"/>
-              </a:rPr>
-              <a:t>1</a:t>
-            </a:r>
-          </a:p>
-        </p:txBody>
-      </p:sp>
-      <p:sp>
-        <p:nvSpPr>
-          <p:cNvPr id="9" name="TextBox 8"/>
-          <p:cNvSpPr txBox="1"/>
-          <p:nvPr/>
-        </p:nvSpPr>
-        <p:spPr>
-          <a:xfrm>
-            <a:off x="1188720" y="1536192"/>
-            <a:ext cx="10271455" cy="744321"/>
-          </a:xfrm>
-          <a:prstGeom prst="rect">
-            <a:avLst/>
-          </a:prstGeom>
-          <a:noFill/>
-        </p:spPr>
-        <p:txBody>
-          <a:bodyPr wrap="square" anchor="ctr"/>
-          <a:lstStyle/>
-          <a:p>
-            <a:r>
-              <a:rPr sz="1500" b="1" i="0">
-                <a:solidFill>
-                  <a:srgbClr val="095292"/>
-                </a:solidFill>
-                <a:latin typeface="Calibri"/>
-              </a:rPr>
-              <a:t>30 s · Las dos alternativas</a:t>
-            </a:r>
-          </a:p>
-          <a:p>
             <a:pPr>
-              <a:spcBef>
-                <a:spcPts val="200"/>
-              </a:spcBef>
+              <a:spcAft>
+                <a:spcPts val="800"/>
+              </a:spcAft>
             </a:pPr>
             <a:r>
-              <a:rPr sz="1300" b="0" i="0">
-                <a:solidFill>
-                  <a:srgbClr val="333333"/>
-                </a:solidFill>
-                <a:latin typeface="Calibri"/>
-              </a:rPr>
-              <a:t>Una frase cada una. Sin adjetivos.</a:t>
-            </a:r>
-          </a:p>
-        </p:txBody>
-      </p:sp>
-      <p:sp>
-        <p:nvSpPr>
-          <p:cNvPr id="10" name="Rounded Rectangle 9"/>
-          <p:cNvSpPr/>
-          <p:nvPr/>
-        </p:nvSpPr>
-        <p:spPr>
-          <a:xfrm>
-            <a:off x="457200" y="2445105"/>
-            <a:ext cx="11277295" cy="908913"/>
-          </a:xfrm>
-          <a:prstGeom prst="roundRect">
-            <a:avLst>
-              <a:gd name="adj" fmla="val 12000"/>
-            </a:avLst>
-          </a:prstGeom>
-          <a:solidFill>
-            <a:srgbClr val="E8F4FA"/>
-          </a:solidFill>
-          <a:ln>
-            <a:noFill/>
-          </a:ln>
-        </p:spPr>
-        <p:style>
-          <a:lnRef idx="1">
-            <a:schemeClr val="accent1"/>
-          </a:lnRef>
-          <a:fillRef idx="3">
-            <a:schemeClr val="accent1"/>
-          </a:fillRef>
-          <a:effectRef idx="2">
-            <a:schemeClr val="accent1"/>
-          </a:effectRef>
-          <a:fontRef idx="minor">
-            <a:schemeClr val="lt1"/>
-          </a:fontRef>
-        </p:style>
-        <p:txBody>
-          <a:bodyPr rtlCol="0" anchor="ctr"/>
-          <a:lstStyle/>
-          <a:p>
-            <a:pPr algn="ctr"/>
-          </a:p>
-        </p:txBody>
-      </p:sp>
-      <p:sp>
-        <p:nvSpPr>
-          <p:cNvPr id="11" name="Rounded Rectangle 10"/>
-          <p:cNvSpPr/>
-          <p:nvPr/>
-        </p:nvSpPr>
-        <p:spPr>
-          <a:xfrm>
-            <a:off x="594360" y="2680106"/>
-            <a:ext cx="438912" cy="438912"/>
-          </a:xfrm>
-          <a:prstGeom prst="roundRect">
-            <a:avLst>
-              <a:gd name="adj" fmla="val 12000"/>
-            </a:avLst>
-          </a:prstGeom>
-          <a:solidFill>
-            <a:srgbClr val="095292"/>
-          </a:solidFill>
-          <a:ln>
-            <a:noFill/>
-          </a:ln>
-        </p:spPr>
-        <p:style>
-          <a:lnRef idx="1">
-            <a:schemeClr val="accent1"/>
-          </a:lnRef>
-          <a:fillRef idx="3">
-            <a:schemeClr val="accent1"/>
-          </a:fillRef>
-          <a:effectRef idx="2">
-            <a:schemeClr val="accent1"/>
-          </a:effectRef>
-          <a:fontRef idx="minor">
-            <a:schemeClr val="lt1"/>
-          </a:fontRef>
-        </p:style>
-        <p:txBody>
-          <a:bodyPr rtlCol="0" anchor="ctr"/>
-          <a:lstStyle/>
-          <a:p>
-            <a:pPr algn="ctr"/>
-          </a:p>
-        </p:txBody>
-      </p:sp>
-      <p:sp>
-        <p:nvSpPr>
-          <p:cNvPr id="12" name="TextBox 11"/>
-          <p:cNvSpPr txBox="1"/>
-          <p:nvPr/>
-        </p:nvSpPr>
-        <p:spPr>
-          <a:xfrm>
-            <a:off x="594360" y="2680106"/>
-            <a:ext cx="438912" cy="438912"/>
-          </a:xfrm>
-          <a:prstGeom prst="rect">
-            <a:avLst/>
-          </a:prstGeom>
-          <a:noFill/>
-        </p:spPr>
-        <p:txBody>
-          <a:bodyPr wrap="square" anchor="ctr"/>
-          <a:lstStyle/>
-          <a:p>
-            <a:pPr algn="ctr"/>
-            <a:r>
-              <a:rPr sz="1600" b="1" i="0">
-                <a:solidFill>
-                  <a:srgbClr val="FFFFFF"/>
-                </a:solidFill>
-                <a:latin typeface="Calibri"/>
-              </a:rPr>
-              <a:t>2</a:t>
-            </a:r>
-          </a:p>
-        </p:txBody>
-      </p:sp>
-      <p:sp>
-        <p:nvSpPr>
-          <p:cNvPr id="13" name="TextBox 12"/>
-          <p:cNvSpPr txBox="1"/>
-          <p:nvPr/>
-        </p:nvSpPr>
-        <p:spPr>
-          <a:xfrm>
-            <a:off x="1188720" y="2536545"/>
-            <a:ext cx="10271455" cy="744321"/>
-          </a:xfrm>
-          <a:prstGeom prst="rect">
-            <a:avLst/>
-          </a:prstGeom>
-          <a:noFill/>
-        </p:spPr>
-        <p:txBody>
-          <a:bodyPr wrap="square" anchor="ctr"/>
-          <a:lstStyle/>
-          <a:p>
-            <a:r>
-              <a:rPr sz="1500" b="1" i="0">
-                <a:solidFill>
-                  <a:srgbClr val="095292"/>
-                </a:solidFill>
-                <a:latin typeface="Calibri"/>
-              </a:rPr>
-              <a:t>40 s · Los criterios y los pesos</a:t>
+              <a:rPr sz="2000" b="0" i="0">
+                <a:solidFill>
+                  <a:srgbClr val="333333"/>
+                </a:solidFill>
+                <a:latin typeface="Calibri"/>
+              </a:rPr>
+              <a:t>–   Es la fase que en la sesión 7 se nombró de pasada y que nadie enseña en primer semestre.</a:t>
             </a:r>
           </a:p>
           <a:p>
             <a:pPr>
-              <a:spcBef>
-                <a:spcPts val="200"/>
-              </a:spcBef>
+              <a:spcAft>
+                <a:spcPts val="800"/>
+              </a:spcAft>
             </a:pPr>
             <a:r>
-              <a:rPr sz="1300" b="0" i="0">
-                <a:solidFill>
-                  <a:srgbClr val="333333"/>
-                </a:solidFill>
-                <a:latin typeface="Calibri"/>
-              </a:rPr>
-              <a:t>De dónde salieron: qué restricción o requisito.</a:t>
-            </a:r>
-          </a:p>
-        </p:txBody>
-      </p:sp>
-      <p:sp>
-        <p:nvSpPr>
-          <p:cNvPr id="14" name="Rounded Rectangle 13"/>
-          <p:cNvSpPr/>
-          <p:nvPr/>
-        </p:nvSpPr>
-        <p:spPr>
-          <a:xfrm>
-            <a:off x="457200" y="3445459"/>
-            <a:ext cx="11277295" cy="908913"/>
-          </a:xfrm>
-          <a:prstGeom prst="roundRect">
-            <a:avLst>
-              <a:gd name="adj" fmla="val 12000"/>
-            </a:avLst>
-          </a:prstGeom>
-          <a:solidFill>
-            <a:srgbClr val="F2F2F2"/>
-          </a:solidFill>
-          <a:ln>
-            <a:noFill/>
-          </a:ln>
-        </p:spPr>
-        <p:style>
-          <a:lnRef idx="1">
-            <a:schemeClr val="accent1"/>
-          </a:lnRef>
-          <a:fillRef idx="3">
-            <a:schemeClr val="accent1"/>
-          </a:fillRef>
-          <a:effectRef idx="2">
-            <a:schemeClr val="accent1"/>
-          </a:effectRef>
-          <a:fontRef idx="minor">
-            <a:schemeClr val="lt1"/>
-          </a:fontRef>
-        </p:style>
-        <p:txBody>
-          <a:bodyPr rtlCol="0" anchor="ctr"/>
-          <a:lstStyle/>
-          <a:p>
-            <a:pPr algn="ctr"/>
-          </a:p>
-        </p:txBody>
-      </p:sp>
-      <p:sp>
-        <p:nvSpPr>
-          <p:cNvPr id="15" name="Rounded Rectangle 14"/>
-          <p:cNvSpPr/>
-          <p:nvPr/>
-        </p:nvSpPr>
-        <p:spPr>
-          <a:xfrm>
-            <a:off x="594360" y="3680460"/>
-            <a:ext cx="438912" cy="438912"/>
-          </a:xfrm>
-          <a:prstGeom prst="roundRect">
-            <a:avLst>
-              <a:gd name="adj" fmla="val 12000"/>
-            </a:avLst>
-          </a:prstGeom>
-          <a:solidFill>
-            <a:srgbClr val="095292"/>
-          </a:solidFill>
-          <a:ln>
-            <a:noFill/>
-          </a:ln>
-        </p:spPr>
-        <p:style>
-          <a:lnRef idx="1">
-            <a:schemeClr val="accent1"/>
-          </a:lnRef>
-          <a:fillRef idx="3">
-            <a:schemeClr val="accent1"/>
-          </a:fillRef>
-          <a:effectRef idx="2">
-            <a:schemeClr val="accent1"/>
-          </a:effectRef>
-          <a:fontRef idx="minor">
-            <a:schemeClr val="lt1"/>
-          </a:fontRef>
-        </p:style>
-        <p:txBody>
-          <a:bodyPr rtlCol="0" anchor="ctr"/>
-          <a:lstStyle/>
-          <a:p>
-            <a:pPr algn="ctr"/>
-          </a:p>
-        </p:txBody>
-      </p:sp>
-      <p:sp>
-        <p:nvSpPr>
-          <p:cNvPr id="16" name="TextBox 15"/>
-          <p:cNvSpPr txBox="1"/>
-          <p:nvPr/>
-        </p:nvSpPr>
-        <p:spPr>
-          <a:xfrm>
-            <a:off x="594360" y="3680460"/>
-            <a:ext cx="438912" cy="438912"/>
-          </a:xfrm>
-          <a:prstGeom prst="rect">
-            <a:avLst/>
-          </a:prstGeom>
-          <a:noFill/>
-        </p:spPr>
-        <p:txBody>
-          <a:bodyPr wrap="square" anchor="ctr"/>
-          <a:lstStyle/>
-          <a:p>
-            <a:pPr algn="ctr"/>
-            <a:r>
-              <a:rPr sz="1600" b="1" i="0">
-                <a:solidFill>
-                  <a:srgbClr val="FFFFFF"/>
-                </a:solidFill>
-                <a:latin typeface="Calibri"/>
-              </a:rPr>
-              <a:t>3</a:t>
-            </a:r>
-          </a:p>
-        </p:txBody>
-      </p:sp>
-      <p:sp>
-        <p:nvSpPr>
-          <p:cNvPr id="17" name="TextBox 16"/>
-          <p:cNvSpPr txBox="1"/>
-          <p:nvPr/>
-        </p:nvSpPr>
-        <p:spPr>
-          <a:xfrm>
-            <a:off x="1188720" y="3536899"/>
-            <a:ext cx="10271455" cy="744321"/>
-          </a:xfrm>
-          <a:prstGeom prst="rect">
-            <a:avLst/>
-          </a:prstGeom>
-          <a:noFill/>
-        </p:spPr>
-        <p:txBody>
-          <a:bodyPr wrap="square" anchor="ctr"/>
-          <a:lstStyle/>
-          <a:p>
-            <a:r>
-              <a:rPr sz="1500" b="1" i="0">
-                <a:solidFill>
-                  <a:srgbClr val="095292"/>
-                </a:solidFill>
-                <a:latin typeface="Calibri"/>
-              </a:rPr>
-              <a:t>40 s · La decisión</a:t>
+              <a:rPr sz="2000" b="0" i="0">
+                <a:solidFill>
+                  <a:srgbClr val="333333"/>
+                </a:solidFill>
+                <a:latin typeface="Calibri"/>
+              </a:rPr>
+              <a:t>–   Sirve además para introducir una idea que vale para todo el semestre: cada transición entre fases es un lugar donde se rompen los proyectos, y por eso las fases tienen entregables.</a:t>
             </a:r>
           </a:p>
           <a:p>
             <a:pPr>
-              <a:spcBef>
-                <a:spcPts val="200"/>
-              </a:spcBef>
+              <a:spcAft>
+                <a:spcPts val="800"/>
+              </a:spcAft>
             </a:pPr>
             <a:r>
-              <a:rPr sz="1300" b="0" i="0">
-                <a:solidFill>
-                  <a:srgbClr val="333333"/>
-                </a:solidFill>
-                <a:latin typeface="Calibri"/>
-              </a:rPr>
-              <a:t>Cuál ganó y por qué, con una justificación concreta.</a:t>
-            </a:r>
-          </a:p>
-        </p:txBody>
-      </p:sp>
-      <p:sp>
-        <p:nvSpPr>
-          <p:cNvPr id="18" name="Rounded Rectangle 17"/>
-          <p:cNvSpPr/>
-          <p:nvPr/>
-        </p:nvSpPr>
-        <p:spPr>
-          <a:xfrm>
-            <a:off x="457200" y="4445812"/>
-            <a:ext cx="11277295" cy="908913"/>
-          </a:xfrm>
-          <a:prstGeom prst="roundRect">
-            <a:avLst>
-              <a:gd name="adj" fmla="val 12000"/>
-            </a:avLst>
-          </a:prstGeom>
-          <a:solidFill>
-            <a:srgbClr val="E8F4FA"/>
-          </a:solidFill>
-          <a:ln>
-            <a:noFill/>
-          </a:ln>
-        </p:spPr>
-        <p:style>
-          <a:lnRef idx="1">
-            <a:schemeClr val="accent1"/>
-          </a:lnRef>
-          <a:fillRef idx="3">
-            <a:schemeClr val="accent1"/>
-          </a:fillRef>
-          <a:effectRef idx="2">
-            <a:schemeClr val="accent1"/>
-          </a:effectRef>
-          <a:fontRef idx="minor">
-            <a:schemeClr val="lt1"/>
-          </a:fontRef>
-        </p:style>
-        <p:txBody>
-          <a:bodyPr rtlCol="0" anchor="ctr"/>
-          <a:lstStyle/>
-          <a:p>
-            <a:pPr algn="ctr"/>
-          </a:p>
-        </p:txBody>
-      </p:sp>
-      <p:sp>
-        <p:nvSpPr>
-          <p:cNvPr id="19" name="Rounded Rectangle 18"/>
-          <p:cNvSpPr/>
-          <p:nvPr/>
-        </p:nvSpPr>
-        <p:spPr>
-          <a:xfrm>
-            <a:off x="594360" y="4680813"/>
-            <a:ext cx="438912" cy="438912"/>
-          </a:xfrm>
-          <a:prstGeom prst="roundRect">
-            <a:avLst>
-              <a:gd name="adj" fmla="val 12000"/>
-            </a:avLst>
-          </a:prstGeom>
-          <a:solidFill>
-            <a:srgbClr val="095292"/>
-          </a:solidFill>
-          <a:ln>
-            <a:noFill/>
-          </a:ln>
-        </p:spPr>
-        <p:style>
-          <a:lnRef idx="1">
-            <a:schemeClr val="accent1"/>
-          </a:lnRef>
-          <a:fillRef idx="3">
-            <a:schemeClr val="accent1"/>
-          </a:fillRef>
-          <a:effectRef idx="2">
-            <a:schemeClr val="accent1"/>
-          </a:effectRef>
-          <a:fontRef idx="minor">
-            <a:schemeClr val="lt1"/>
-          </a:fontRef>
-        </p:style>
-        <p:txBody>
-          <a:bodyPr rtlCol="0" anchor="ctr"/>
-          <a:lstStyle/>
-          <a:p>
-            <a:pPr algn="ctr"/>
-          </a:p>
-        </p:txBody>
-      </p:sp>
-      <p:sp>
-        <p:nvSpPr>
-          <p:cNvPr id="20" name="TextBox 19"/>
-          <p:cNvSpPr txBox="1"/>
-          <p:nvPr/>
-        </p:nvSpPr>
-        <p:spPr>
-          <a:xfrm>
-            <a:off x="594360" y="4680813"/>
-            <a:ext cx="438912" cy="438912"/>
-          </a:xfrm>
-          <a:prstGeom prst="rect">
-            <a:avLst/>
-          </a:prstGeom>
-          <a:noFill/>
-        </p:spPr>
-        <p:txBody>
-          <a:bodyPr wrap="square" anchor="ctr"/>
-          <a:lstStyle/>
-          <a:p>
-            <a:pPr algn="ctr"/>
-            <a:r>
-              <a:rPr sz="1600" b="1" i="0">
-                <a:solidFill>
-                  <a:srgbClr val="FFFFFF"/>
-                </a:solidFill>
-                <a:latin typeface="Calibri"/>
-              </a:rPr>
-              <a:t>4</a:t>
-            </a:r>
-          </a:p>
-        </p:txBody>
-      </p:sp>
-      <p:sp>
-        <p:nvSpPr>
-          <p:cNvPr id="21" name="TextBox 20"/>
-          <p:cNvSpPr txBox="1"/>
-          <p:nvPr/>
-        </p:nvSpPr>
-        <p:spPr>
-          <a:xfrm>
-            <a:off x="1188720" y="4537252"/>
-            <a:ext cx="10271455" cy="744321"/>
-          </a:xfrm>
-          <a:prstGeom prst="rect">
-            <a:avLst/>
-          </a:prstGeom>
-          <a:noFill/>
-        </p:spPr>
-        <p:txBody>
-          <a:bodyPr wrap="square" anchor="ctr"/>
-          <a:lstStyle/>
-          <a:p>
-            <a:r>
-              <a:rPr sz="1500" b="1" i="0">
-                <a:solidFill>
-                  <a:srgbClr val="095292"/>
-                </a:solidFill>
-                <a:latin typeface="Calibri"/>
-              </a:rPr>
-              <a:t>40 s · Qué se pierde</a:t>
+              <a:rPr sz="2000" b="0" i="0">
+                <a:solidFill>
+                  <a:srgbClr val="333333"/>
+                </a:solidFill>
+                <a:latin typeface="Calibri"/>
+              </a:rPr>
+              <a:t>–   Recomendación de manejo: no dé el nombre de la empresa en la apertura.</a:t>
             </a:r>
           </a:p>
           <a:p>
             <a:pPr>
-              <a:spcBef>
-                <a:spcPts val="200"/>
-              </a:spcBef>
+              <a:spcAft>
+                <a:spcPts val="800"/>
+              </a:spcAft>
             </a:pPr>
             <a:r>
-              <a:rPr sz="1300" b="0" i="0">
-                <a:solidFill>
-                  <a:srgbClr val="333333"/>
-                </a:solidFill>
-                <a:latin typeface="Calibri"/>
-              </a:rPr>
-              <a:t>Lo que sacrificaron. Es el minuto obligatorio.</a:t>
-            </a:r>
-          </a:p>
-        </p:txBody>
-      </p:sp>
-      <p:sp>
-        <p:nvSpPr>
-          <p:cNvPr id="22" name="Rounded Rectangle 21"/>
-          <p:cNvSpPr/>
-          <p:nvPr/>
-        </p:nvSpPr>
-        <p:spPr>
-          <a:xfrm>
-            <a:off x="457200" y="5446166"/>
-            <a:ext cx="11277295" cy="908913"/>
-          </a:xfrm>
-          <a:prstGeom prst="roundRect">
-            <a:avLst>
-              <a:gd name="adj" fmla="val 12000"/>
-            </a:avLst>
-          </a:prstGeom>
-          <a:solidFill>
-            <a:srgbClr val="F2F2F2"/>
-          </a:solidFill>
-          <a:ln>
-            <a:noFill/>
-          </a:ln>
-        </p:spPr>
-        <p:style>
-          <a:lnRef idx="1">
-            <a:schemeClr val="accent1"/>
-          </a:lnRef>
-          <a:fillRef idx="3">
-            <a:schemeClr val="accent1"/>
-          </a:fillRef>
-          <a:effectRef idx="2">
-            <a:schemeClr val="accent1"/>
-          </a:effectRef>
-          <a:fontRef idx="minor">
-            <a:schemeClr val="lt1"/>
-          </a:fontRef>
-        </p:style>
-        <p:txBody>
-          <a:bodyPr rtlCol="0" anchor="ctr"/>
-          <a:lstStyle/>
-          <a:p>
-            <a:pPr algn="ctr"/>
-          </a:p>
-        </p:txBody>
-      </p:sp>
-      <p:sp>
-        <p:nvSpPr>
-          <p:cNvPr id="23" name="Rounded Rectangle 22"/>
-          <p:cNvSpPr/>
-          <p:nvPr/>
-        </p:nvSpPr>
-        <p:spPr>
-          <a:xfrm>
-            <a:off x="594360" y="5681167"/>
-            <a:ext cx="438912" cy="438912"/>
-          </a:xfrm>
-          <a:prstGeom prst="roundRect">
-            <a:avLst>
-              <a:gd name="adj" fmla="val 12000"/>
-            </a:avLst>
-          </a:prstGeom>
-          <a:solidFill>
-            <a:srgbClr val="095292"/>
-          </a:solidFill>
-          <a:ln>
-            <a:noFill/>
-          </a:ln>
-        </p:spPr>
-        <p:style>
-          <a:lnRef idx="1">
-            <a:schemeClr val="accent1"/>
-          </a:lnRef>
-          <a:fillRef idx="3">
-            <a:schemeClr val="accent1"/>
-          </a:fillRef>
-          <a:effectRef idx="2">
-            <a:schemeClr val="accent1"/>
-          </a:effectRef>
-          <a:fontRef idx="minor">
-            <a:schemeClr val="lt1"/>
-          </a:fontRef>
-        </p:style>
-        <p:txBody>
-          <a:bodyPr rtlCol="0" anchor="ctr"/>
-          <a:lstStyle/>
-          <a:p>
-            <a:pPr algn="ctr"/>
-          </a:p>
-        </p:txBody>
-      </p:sp>
-      <p:sp>
-        <p:nvSpPr>
-          <p:cNvPr id="24" name="TextBox 23"/>
-          <p:cNvSpPr txBox="1"/>
-          <p:nvPr/>
-        </p:nvSpPr>
-        <p:spPr>
-          <a:xfrm>
-            <a:off x="594360" y="5681167"/>
-            <a:ext cx="438912" cy="438912"/>
-          </a:xfrm>
-          <a:prstGeom prst="rect">
-            <a:avLst/>
-          </a:prstGeom>
-          <a:noFill/>
-        </p:spPr>
-        <p:txBody>
-          <a:bodyPr wrap="square" anchor="ctr"/>
-          <a:lstStyle/>
-          <a:p>
-            <a:pPr algn="ctr"/>
-            <a:r>
-              <a:rPr sz="1600" b="1" i="0">
-                <a:solidFill>
-                  <a:srgbClr val="FFFFFF"/>
-                </a:solidFill>
-                <a:latin typeface="Calibri"/>
-              </a:rPr>
-              <a:t>5</a:t>
-            </a:r>
-          </a:p>
-        </p:txBody>
-      </p:sp>
-      <p:sp>
-        <p:nvSpPr>
-          <p:cNvPr id="25" name="TextBox 24"/>
-          <p:cNvSpPr txBox="1"/>
-          <p:nvPr/>
-        </p:nvSpPr>
-        <p:spPr>
-          <a:xfrm>
-            <a:off x="1188720" y="5537606"/>
-            <a:ext cx="10271455" cy="744321"/>
-          </a:xfrm>
-          <a:prstGeom prst="rect">
-            <a:avLst/>
-          </a:prstGeom>
-          <a:noFill/>
-        </p:spPr>
-        <p:txBody>
-          <a:bodyPr wrap="square" anchor="ctr"/>
-          <a:lstStyle/>
-          <a:p>
-            <a:r>
-              <a:rPr sz="1500" b="1" i="0">
-                <a:solidFill>
-                  <a:srgbClr val="095292"/>
-                </a:solidFill>
-                <a:latin typeface="Calibri"/>
-              </a:rPr>
-              <a:t>30 s · Alcance y validación</a:t>
-            </a:r>
-          </a:p>
-          <a:p>
-            <a:pPr>
-              <a:spcBef>
-                <a:spcPts val="200"/>
-              </a:spcBef>
-            </a:pPr>
-            <a:r>
-              <a:rPr sz="1300" b="0" i="0">
-                <a:solidFill>
-                  <a:srgbClr val="333333"/>
-                </a:solidFill>
-                <a:latin typeface="Calibri"/>
-              </a:rPr>
-              <a:t>Qué se construye y con quién se va a probar.</a:t>
-            </a:r>
-          </a:p>
-        </p:txBody>
-      </p:sp>
-      <p:sp>
-        <p:nvSpPr>
-          <p:cNvPr id="26" name="TextBox 25"/>
+              <a:rPr sz="2000" b="0" i="0">
+                <a:solidFill>
+                  <a:srgbClr val="333333"/>
+                </a:solidFill>
+                <a:latin typeface="Calibri"/>
+              </a:rPr>
+              <a:t>–   La fuerza está en la pregunta, y el nombre lo pueden buscar ellos cuando se les pida citar la fuente.</a:t>
+            </a:r>
+          </a:p>
+        </p:txBody>
+      </p:sp>
+      <p:sp>
+        <p:nvSpPr>
+          <p:cNvPr id="6" name="TextBox 5"/>
           <p:cNvSpPr txBox="1"/>
           <p:nvPr/>
         </p:nvSpPr>
@@ -4687,7 +3893,7 @@
                 </a:solidFill>
                 <a:latin typeface="Calibri"/>
               </a:rPr>
-              <a:t>Para la Clase 9</a:t>
+              <a:t>Los cuatro casos: qué contar y cómo exigir la fuente (1/2)</a:t>
             </a:r>
           </a:p>
         </p:txBody>
@@ -4726,43 +3932,7 @@
                 </a:solidFill>
                 <a:latin typeface="Calibri"/>
               </a:rPr>
-              <a:t>–   </a:t>
-            </a:r>
-            <a:r>
-              <a:rPr sz="2000" b="1" i="0">
-                <a:solidFill>
-                  <a:srgbClr val="333333"/>
-                </a:solidFill>
-                <a:latin typeface="Calibri"/>
-              </a:rPr>
-              <a:t>Trabajo dirigido:</a:t>
-            </a:r>
-            <a:r>
-              <a:rPr sz="2000" b="0" i="0">
-                <a:solidFill>
-                  <a:srgbClr val="333333"/>
-                </a:solidFill>
-                <a:latin typeface="Calibri"/>
-              </a:rPr>
-              <a:t> Discusión de ejemplos reales — buscar </a:t>
-            </a:r>
-            <a:r>
-              <a:rPr sz="2000" b="1" i="0">
-                <a:solidFill>
-                  <a:srgbClr val="333333"/>
-                </a:solidFill>
-                <a:latin typeface="Calibri"/>
-              </a:rPr>
-              <a:t>un caso propio</a:t>
-            </a:r>
-            <a:r>
-              <a:rPr sz="2000" b="0" i="0">
-                <a:solidFill>
-                  <a:srgbClr val="333333"/>
-                </a:solidFill>
-                <a:latin typeface="Calibri"/>
-              </a:rPr>
-              <a:t> de proyecto que falló por saltarse una fase, con fuente verificable, y decir qué fase fue.</a:t>
+              <a:t>–   Cuatro casos, cinco minutos en total, un minuto y algo por caso.</a:t>
             </a:r>
           </a:p>
           <a:p>
@@ -4778,7 +3948,7 @@
                 </a:solidFill>
                 <a:latin typeface="Calibri"/>
               </a:rPr>
-              <a:t>–   </a:t>
+              <a:t>–   La tabla es densa a propósito: hoy la teoría son 20 minutos y el peso está en el taller. </a:t>
             </a:r>
             <a:r>
               <a:rPr sz="2000" b="1" i="0">
@@ -4787,7 +3957,7 @@
                 </a:solidFill>
                 <a:latin typeface="Calibri"/>
               </a:rPr>
-              <a:t>Trabajo independiente:</a:t>
+              <a:t>El sistema de equipajes del aeropuerto</a:t>
             </a:r>
             <a:r>
               <a:rPr sz="2000" b="0" i="0">
@@ -4796,7 +3966,7 @@
                 </a:solidFill>
                 <a:latin typeface="Calibri"/>
               </a:rPr>
-              <a:t> Ajuste de propuestas de solución: dejar en el documento del equipo la alternativa elegida con su alcance mínimo y el flujo dibujado, ya corregido con lo que salió en las exposiciones.</a:t>
+              <a:t> es el caso de requisitos y diseño.</a:t>
             </a:r>
           </a:p>
           <a:p>
@@ -4812,43 +3982,7 @@
                 </a:solidFill>
                 <a:latin typeface="Calibri"/>
               </a:rPr>
-              <a:t>–   </a:t>
-            </a:r>
-            <a:r>
-              <a:rPr sz="2000" b="1" i="0">
-                <a:solidFill>
-                  <a:srgbClr val="333333"/>
-                </a:solidFill>
-                <a:latin typeface="Calibri"/>
-              </a:rPr>
-              <a:t>Clase 9 · Estrategias de innovación en Ingeniería</a:t>
-            </a:r>
-            <a:r>
-              <a:rPr sz="2000" b="0" i="0">
-                <a:solidFill>
-                  <a:srgbClr val="333333"/>
-                </a:solidFill>
-                <a:latin typeface="Calibri"/>
-              </a:rPr>
-              <a:t> — los </a:t>
-            </a:r>
-            <a:r>
-              <a:rPr sz="2000" b="1" i="0">
-                <a:solidFill>
-                  <a:srgbClr val="333333"/>
-                </a:solidFill>
-                <a:latin typeface="Calibri"/>
-              </a:rPr>
-              <a:t>antecedentes</a:t>
-            </a:r>
-            <a:r>
-              <a:rPr sz="2000" b="0" i="0">
-                <a:solidFill>
-                  <a:srgbClr val="333333"/>
-                </a:solidFill>
-                <a:latin typeface="Calibri"/>
-              </a:rPr>
-              <a:t>: qué ya existe, quién lo intentó y cómo se busca eso con fuentes que se puedan verificar. Una respuesta de asistente de IA no es una fuente.</a:t>
+              <a:t>–   Un sistema automatizado de manejo de maletas de una escala sin precedentes, contratado con el plazo de apertura ya fijado y sin pruebas a escala real; retrasó la apertura del aeropuerto muchos meses, funcionó parcialmente durante años y terminó abandonado.</a:t>
             </a:r>
           </a:p>
           <a:p>
@@ -4864,7 +3998,7 @@
                 </a:solidFill>
                 <a:latin typeface="Calibri"/>
               </a:rPr>
-              <a:t>–   </a:t>
+              <a:t>–   La lección: </a:t>
             </a:r>
             <a:r>
               <a:rPr sz="2000" b="1" i="0">
@@ -4873,7 +4007,7 @@
                 </a:solidFill>
                 <a:latin typeface="Calibri"/>
               </a:rPr>
-              <a:t>Aviso:</a:t>
+              <a:t>el plazo se fijó antes de saber si era posible</a:t>
             </a:r>
             <a:r>
               <a:rPr sz="2000" b="0" i="0">
@@ -4882,7 +4016,25 @@
                 </a:solidFill>
                 <a:latin typeface="Calibri"/>
               </a:rPr>
-              <a:t> Para la sesión 9 traigan la alternativa elegida escrita y el flujo dibujado. Se va a buscar qué soluciones parecidas ya existen, y sin la propia decisión clara no hay con qué comparar.</a:t>
+              <a:t>, y ningún esfuerzo de construcción arregla eso. </a:t>
+            </a:r>
+            <a:r>
+              <a:rPr sz="2000" b="1" i="0">
+                <a:solidFill>
+                  <a:srgbClr val="333333"/>
+                </a:solidFill>
+                <a:latin typeface="Calibri"/>
+              </a:rPr>
+              <a:t>El sistema de expedientes de la agencia federal</a:t>
+            </a:r>
+            <a:r>
+              <a:rPr sz="2000" b="0" i="0">
+                <a:solidFill>
+                  <a:srgbClr val="333333"/>
+                </a:solidFill>
+                <a:latin typeface="Calibri"/>
+              </a:rPr>
+              <a:t> es el caso de requisitos puros: años de desarrollo</a:t>
             </a:r>
           </a:p>
           <a:p>
@@ -4898,7 +4050,23 @@
                 </a:solidFill>
                 <a:latin typeface="Calibri"/>
               </a:rPr>
-              <a:t>–   </a:t>
+              <a:t>–   Requisitos que cambiaban permanentemente, ninguna definición estable de qué debía hacer el sistema, y un abandono sin haber entrado en operación.</a:t>
+            </a:r>
+          </a:p>
+          <a:p>
+            <a:pPr>
+              <a:spcAft>
+                <a:spcPts val="800"/>
+              </a:spcAft>
+            </a:pPr>
+            <a:r>
+              <a:rPr sz="2000" b="0" i="0">
+                <a:solidFill>
+                  <a:srgbClr val="333333"/>
+                </a:solidFill>
+                <a:latin typeface="Calibri"/>
+              </a:rPr>
+              <a:t>–   Es el ejemplo perfecto de que </a:t>
             </a:r>
             <a:r>
               <a:rPr sz="2000" b="1" i="0">
@@ -4907,7 +4075,7 @@
                 </a:solidFill>
                 <a:latin typeface="Calibri"/>
               </a:rPr>
-              <a:t>Antes de salir:</a:t>
+              <a:t>sin criterios de aceptación no hay manera de terminar</a:t>
             </a:r>
             <a:r>
               <a:rPr sz="2000" b="0" i="0">
@@ -4916,7 +4084,25 @@
                 </a:solidFill>
                 <a:latin typeface="Calibri"/>
               </a:rPr>
-              <a:t> el enlace del documento del equipo en el chat, con permiso de lectura para el docente, y el nombre del vocero de hoy.</a:t>
+              <a:t>: un proyecto que no puede decir cuándo está listo, no está listo nunca. </a:t>
+            </a:r>
+            <a:r>
+              <a:rPr sz="2000" b="1" i="0">
+                <a:solidFill>
+                  <a:srgbClr val="333333"/>
+                </a:solidFill>
+                <a:latin typeface="Calibri"/>
+              </a:rPr>
+              <a:t>El portal público de salud en su lanzamiento</a:t>
+            </a:r>
+            <a:r>
+              <a:rPr sz="2000" b="0" i="0">
+                <a:solidFill>
+                  <a:srgbClr val="333333"/>
+                </a:solidFill>
+                <a:latin typeface="Calibri"/>
+              </a:rPr>
+              <a:t> es el caso de validación.</a:t>
             </a:r>
           </a:p>
         </p:txBody>
@@ -4991,7 +4177,2026 @@
         <p:spPr>
           <a:xfrm>
             <a:off x="0" y="0"/>
-            <a:ext cx="12191695" cy="164592"/>
+            <a:ext cx="12191695" cy="960120"/>
+          </a:xfrm>
+          <a:prstGeom prst="rect">
+            <a:avLst/>
+          </a:prstGeom>
+          <a:solidFill>
+            <a:srgbClr val="095292"/>
+          </a:solidFill>
+          <a:ln>
+            <a:noFill/>
+          </a:ln>
+        </p:spPr>
+        <p:style>
+          <a:lnRef idx="1">
+            <a:schemeClr val="accent1"/>
+          </a:lnRef>
+          <a:fillRef idx="3">
+            <a:schemeClr val="accent1"/>
+          </a:fillRef>
+          <a:effectRef idx="2">
+            <a:schemeClr val="accent1"/>
+          </a:effectRef>
+          <a:fontRef idx="minor">
+            <a:schemeClr val="lt1"/>
+          </a:fontRef>
+        </p:style>
+        <p:txBody>
+          <a:bodyPr rtlCol="0" anchor="ctr"/>
+          <a:lstStyle/>
+          <a:p>
+            <a:pPr algn="ctr"/>
+          </a:p>
+        </p:txBody>
+      </p:sp>
+      <p:sp>
+        <p:nvSpPr>
+          <p:cNvPr id="3" name="Rectangle 2"/>
+          <p:cNvSpPr/>
+          <p:nvPr/>
+        </p:nvSpPr>
+        <p:spPr>
+          <a:xfrm>
+            <a:off x="0" y="960120"/>
+            <a:ext cx="12191695" cy="41148"/>
+          </a:xfrm>
+          <a:prstGeom prst="rect">
+            <a:avLst/>
+          </a:prstGeom>
+          <a:solidFill>
+            <a:srgbClr val="FFD000"/>
+          </a:solidFill>
+          <a:ln>
+            <a:noFill/>
+          </a:ln>
+        </p:spPr>
+        <p:style>
+          <a:lnRef idx="1">
+            <a:schemeClr val="accent1"/>
+          </a:lnRef>
+          <a:fillRef idx="3">
+            <a:schemeClr val="accent1"/>
+          </a:fillRef>
+          <a:effectRef idx="2">
+            <a:schemeClr val="accent1"/>
+          </a:effectRef>
+          <a:fontRef idx="minor">
+            <a:schemeClr val="lt1"/>
+          </a:fontRef>
+        </p:style>
+        <p:txBody>
+          <a:bodyPr rtlCol="0" anchor="ctr"/>
+          <a:lstStyle/>
+          <a:p>
+            <a:pPr algn="ctr"/>
+          </a:p>
+        </p:txBody>
+      </p:sp>
+      <p:sp>
+        <p:nvSpPr>
+          <p:cNvPr id="4" name="TextBox 3"/>
+          <p:cNvSpPr txBox="1"/>
+          <p:nvPr/>
+        </p:nvSpPr>
+        <p:spPr>
+          <a:xfrm>
+            <a:off x="457200" y="164592"/>
+            <a:ext cx="11277295" cy="502920"/>
+          </a:xfrm>
+          <a:prstGeom prst="rect">
+            <a:avLst/>
+          </a:prstGeom>
+          <a:noFill/>
+        </p:spPr>
+        <p:txBody>
+          <a:bodyPr wrap="square">
+            <a:spAutoFit/>
+          </a:bodyPr>
+          <a:lstStyle/>
+          <a:p>
+            <a:r>
+              <a:rPr sz="2600" b="1" i="0">
+                <a:solidFill>
+                  <a:srgbClr val="FFFFFF"/>
+                </a:solidFill>
+                <a:latin typeface="Calibri"/>
+              </a:rPr>
+              <a:t>Los cuatro casos: qué contar y cómo exigir la fuente (2/2)</a:t>
+            </a:r>
+          </a:p>
+        </p:txBody>
+      </p:sp>
+      <p:sp>
+        <p:nvSpPr>
+          <p:cNvPr id="5" name="TextBox 4"/>
+          <p:cNvSpPr txBox="1"/>
+          <p:nvPr/>
+        </p:nvSpPr>
+        <p:spPr>
+          <a:xfrm>
+            <a:off x="457200" y="1170432"/>
+            <a:ext cx="11277295" cy="5230368"/>
+          </a:xfrm>
+          <a:prstGeom prst="rect">
+            <a:avLst/>
+          </a:prstGeom>
+          <a:noFill/>
+        </p:spPr>
+        <p:txBody>
+          <a:bodyPr wrap="square">
+            <a:spAutoFit/>
+          </a:bodyPr>
+          <a:lstStyle/>
+          <a:p>
+            <a:pPr>
+              <a:spcAft>
+                <a:spcPts val="800"/>
+              </a:spcAft>
+            </a:pPr>
+            <a:r>
+              <a:rPr sz="2000" b="0" i="0">
+                <a:solidFill>
+                  <a:srgbClr val="333333"/>
+                </a:solidFill>
+                <a:latin typeface="Calibri"/>
+              </a:rPr>
+              <a:t>–   La demanda del primer día era perfectamente previsible —una fecha anunciada, una población conocida— y aun así el sitio no aguantó.</a:t>
+            </a:r>
+          </a:p>
+          <a:p>
+            <a:pPr>
+              <a:spcAft>
+                <a:spcPts val="800"/>
+              </a:spcAft>
+            </a:pPr>
+            <a:r>
+              <a:rPr sz="2000" b="0" i="0">
+                <a:solidFill>
+                  <a:srgbClr val="333333"/>
+                </a:solidFill>
+                <a:latin typeface="Calibri"/>
+              </a:rPr>
+              <a:t>–   La lección para sus proyectos: </a:t>
+            </a:r>
+            <a:r>
+              <a:rPr sz="2000" b="1" i="0">
+                <a:solidFill>
+                  <a:srgbClr val="333333"/>
+                </a:solidFill>
+                <a:latin typeface="Calibri"/>
+              </a:rPr>
+              <a:t>probar que algo funciona con un usuario no es probar que funciona con muchos</a:t>
+            </a:r>
+          </a:p>
+          <a:p>
+            <a:pPr>
+              <a:spcAft>
+                <a:spcPts val="800"/>
+              </a:spcAft>
+            </a:pPr>
+            <a:r>
+              <a:rPr sz="2000" b="0" i="0">
+                <a:solidFill>
+                  <a:srgbClr val="333333"/>
+                </a:solidFill>
+                <a:latin typeface="Calibri"/>
+              </a:rPr>
+              <a:t>–   Y el volumen es un requisito no funcional que se valida aparte. </a:t>
+            </a:r>
+            <a:r>
+              <a:rPr sz="2000" b="1" i="0">
+                <a:solidFill>
+                  <a:srgbClr val="333333"/>
+                </a:solidFill>
+                <a:latin typeface="Calibri"/>
+              </a:rPr>
+              <a:t>La firma financiera</a:t>
+            </a:r>
+            <a:r>
+              <a:rPr sz="2000" b="0" i="0">
+                <a:solidFill>
+                  <a:srgbClr val="333333"/>
+                </a:solidFill>
+                <a:latin typeface="Calibri"/>
+              </a:rPr>
+              <a:t> es el caso de operación, y es el que rompe el prejuicio sobre el código.</a:t>
+            </a:r>
+          </a:p>
+          <a:p>
+            <a:pPr>
+              <a:spcAft>
+                <a:spcPts val="800"/>
+              </a:spcAft>
+            </a:pPr>
+            <a:r>
+              <a:rPr sz="2000" b="0" i="0">
+                <a:solidFill>
+                  <a:srgbClr val="333333"/>
+                </a:solidFill>
+                <a:latin typeface="Calibri"/>
+              </a:rPr>
+              <a:t>–   Súmele el detalle que lo hace inolvidable: </a:t>
+            </a:r>
+            <a:r>
+              <a:rPr sz="2000" b="1" i="0">
+                <a:solidFill>
+                  <a:srgbClr val="333333"/>
+                </a:solidFill>
+                <a:latin typeface="Calibri"/>
+              </a:rPr>
+              <a:t>el problema no fue escribir el software, fue instalarlo</a:t>
+            </a:r>
+            <a:r>
+              <a:rPr sz="2000" b="0" i="0">
+                <a:solidFill>
+                  <a:srgbClr val="333333"/>
+                </a:solidFill>
+                <a:latin typeface="Calibri"/>
+              </a:rPr>
+              <a:t>, y no existía una forma rápida de detenerlo.</a:t>
+            </a:r>
+          </a:p>
+          <a:p>
+            <a:pPr>
+              <a:spcAft>
+                <a:spcPts val="800"/>
+              </a:spcAft>
+            </a:pPr>
+            <a:r>
+              <a:rPr sz="2000" b="0" i="0">
+                <a:solidFill>
+                  <a:srgbClr val="333333"/>
+                </a:solidFill>
+                <a:latin typeface="Calibri"/>
+              </a:rPr>
+              <a:t>–   Y una exigencia metodológica que hay que repetir porque es la marca del curso: los cuatro casos son públicos y están documentados en informes oficiales y en prensa especializada, pero </a:t>
+            </a:r>
+            <a:r>
+              <a:rPr sz="2000" b="1" i="0">
+                <a:solidFill>
+                  <a:srgbClr val="333333"/>
+                </a:solidFill>
+                <a:latin typeface="Calibri"/>
+              </a:rPr>
+              <a:t>las cifras circulan con variaciones</a:t>
+            </a:r>
+            <a:r>
+              <a:rPr sz="2000" b="0" i="0">
+                <a:solidFill>
+                  <a:srgbClr val="333333"/>
+                </a:solidFill>
+                <a:latin typeface="Calibri"/>
+              </a:rPr>
+              <a:t>.</a:t>
+            </a:r>
+          </a:p>
+          <a:p>
+            <a:pPr>
+              <a:spcAft>
+                <a:spcPts val="800"/>
+              </a:spcAft>
+            </a:pPr>
+            <a:r>
+              <a:rPr sz="2000" b="0" i="0">
+                <a:solidFill>
+                  <a:srgbClr val="333333"/>
+                </a:solidFill>
+                <a:latin typeface="Calibri"/>
+              </a:rPr>
+              <a:t>–   Quien cite un monto o una fecha en la exposición tiene que decir de dónde salió y de qué año es.</a:t>
+            </a:r>
+          </a:p>
+          <a:p>
+            <a:pPr>
+              <a:spcAft>
+                <a:spcPts val="800"/>
+              </a:spcAft>
+            </a:pPr>
+            <a:r>
+              <a:rPr sz="2000" b="0" i="0">
+                <a:solidFill>
+                  <a:srgbClr val="333333"/>
+                </a:solidFill>
+                <a:latin typeface="Calibri"/>
+              </a:rPr>
+              <a:t>–   Es la misma regla de la sesión 5 con las cifras ambientales y de la sesión 4 con los numerales.</a:t>
+            </a:r>
+          </a:p>
+        </p:txBody>
+      </p:sp>
+      <p:sp>
+        <p:nvSpPr>
+          <p:cNvPr id="6" name="TextBox 5"/>
+          <p:cNvSpPr txBox="1"/>
+          <p:nvPr/>
+        </p:nvSpPr>
+        <p:spPr>
+          <a:xfrm>
+            <a:off x="11185855" y="6473952"/>
+            <a:ext cx="640080" cy="274320"/>
+          </a:xfrm>
+          <a:prstGeom prst="rect">
+            <a:avLst/>
+          </a:prstGeom>
+          <a:noFill/>
+        </p:spPr>
+        <p:txBody>
+          <a:bodyPr wrap="square">
+            <a:spAutoFit/>
+          </a:bodyPr>
+          <a:lstStyle/>
+          <a:p>
+            <a:pPr algn="r"/>
+            <a:r>
+              <a:rPr sz="1100" b="0" i="0">
+                <a:solidFill>
+                  <a:srgbClr val="666666"/>
+                </a:solidFill>
+                <a:latin typeface="Calibri"/>
+              </a:rPr>
+              <a:t>12</a:t>
+            </a:r>
+          </a:p>
+        </p:txBody>
+      </p:sp>
+    </p:spTree>
+  </p:cSld>
+  <p:clrMapOvr>
+    <a:masterClrMapping/>
+  </p:clrMapOvr>
+</p:sld>
+</file>
+
+<file path=ppt/slides/slide13.xml><?xml version="1.0" encoding="utf-8"?>
+<p:sld xmlns:a="http://schemas.openxmlformats.org/drawingml/2006/main" xmlns:p="http://schemas.openxmlformats.org/presentationml/2006/main" xmlns:r="http://schemas.openxmlformats.org/officeDocument/2006/relationships">
+  <p:cSld>
+    <p:bg>
+      <p:bgPr>
+        <a:solidFill>
+          <a:srgbClr val="FFFFFF"/>
+        </a:solidFill>
+        <a:effectLst/>
+      </p:bgPr>
+    </p:bg>
+    <p:spTree>
+      <p:nvGrpSpPr>
+        <p:cNvPr id="1" name=""/>
+        <p:cNvGrpSpPr/>
+        <p:nvPr/>
+      </p:nvGrpSpPr>
+      <p:grpSpPr/>
+      <p:sp>
+        <p:nvSpPr>
+          <p:cNvPr id="2" name="Rectangle 1"/>
+          <p:cNvSpPr/>
+          <p:nvPr/>
+        </p:nvSpPr>
+        <p:spPr>
+          <a:xfrm>
+            <a:off x="0" y="0"/>
+            <a:ext cx="12191695" cy="960120"/>
+          </a:xfrm>
+          <a:prstGeom prst="rect">
+            <a:avLst/>
+          </a:prstGeom>
+          <a:solidFill>
+            <a:srgbClr val="095292"/>
+          </a:solidFill>
+          <a:ln>
+            <a:noFill/>
+          </a:ln>
+        </p:spPr>
+        <p:style>
+          <a:lnRef idx="1">
+            <a:schemeClr val="accent1"/>
+          </a:lnRef>
+          <a:fillRef idx="3">
+            <a:schemeClr val="accent1"/>
+          </a:fillRef>
+          <a:effectRef idx="2">
+            <a:schemeClr val="accent1"/>
+          </a:effectRef>
+          <a:fontRef idx="minor">
+            <a:schemeClr val="lt1"/>
+          </a:fontRef>
+        </p:style>
+        <p:txBody>
+          <a:bodyPr rtlCol="0" anchor="ctr"/>
+          <a:lstStyle/>
+          <a:p>
+            <a:pPr algn="ctr"/>
+          </a:p>
+        </p:txBody>
+      </p:sp>
+      <p:sp>
+        <p:nvSpPr>
+          <p:cNvPr id="3" name="Rectangle 2"/>
+          <p:cNvSpPr/>
+          <p:nvPr/>
+        </p:nvSpPr>
+        <p:spPr>
+          <a:xfrm>
+            <a:off x="0" y="960120"/>
+            <a:ext cx="12191695" cy="41148"/>
+          </a:xfrm>
+          <a:prstGeom prst="rect">
+            <a:avLst/>
+          </a:prstGeom>
+          <a:solidFill>
+            <a:srgbClr val="FFD000"/>
+          </a:solidFill>
+          <a:ln>
+            <a:noFill/>
+          </a:ln>
+        </p:spPr>
+        <p:style>
+          <a:lnRef idx="1">
+            <a:schemeClr val="accent1"/>
+          </a:lnRef>
+          <a:fillRef idx="3">
+            <a:schemeClr val="accent1"/>
+          </a:fillRef>
+          <a:effectRef idx="2">
+            <a:schemeClr val="accent1"/>
+          </a:effectRef>
+          <a:fontRef idx="minor">
+            <a:schemeClr val="lt1"/>
+          </a:fontRef>
+        </p:style>
+        <p:txBody>
+          <a:bodyPr rtlCol="0" anchor="ctr"/>
+          <a:lstStyle/>
+          <a:p>
+            <a:pPr algn="ctr"/>
+          </a:p>
+        </p:txBody>
+      </p:sp>
+      <p:sp>
+        <p:nvSpPr>
+          <p:cNvPr id="4" name="TextBox 3"/>
+          <p:cNvSpPr txBox="1"/>
+          <p:nvPr/>
+        </p:nvSpPr>
+        <p:spPr>
+          <a:xfrm>
+            <a:off x="457200" y="164592"/>
+            <a:ext cx="11277295" cy="502920"/>
+          </a:xfrm>
+          <a:prstGeom prst="rect">
+            <a:avLst/>
+          </a:prstGeom>
+          <a:noFill/>
+        </p:spPr>
+        <p:txBody>
+          <a:bodyPr wrap="square">
+            <a:spAutoFit/>
+          </a:bodyPr>
+          <a:lstStyle/>
+          <a:p>
+            <a:r>
+              <a:rPr sz="2600" b="1" i="0">
+                <a:solidFill>
+                  <a:srgbClr val="FFFFFF"/>
+                </a:solidFill>
+                <a:latin typeface="Calibri"/>
+              </a:rPr>
+              <a:t>La matriz de decisión: cómo se decide sin que la decisión ya estuviera tomada (1/2)</a:t>
+            </a:r>
+          </a:p>
+        </p:txBody>
+      </p:sp>
+      <p:sp>
+        <p:nvSpPr>
+          <p:cNvPr id="5" name="TextBox 4"/>
+          <p:cNvSpPr txBox="1"/>
+          <p:nvPr/>
+        </p:nvSpPr>
+        <p:spPr>
+          <a:xfrm>
+            <a:off x="457200" y="1170432"/>
+            <a:ext cx="11277295" cy="5230368"/>
+          </a:xfrm>
+          <a:prstGeom prst="rect">
+            <a:avLst/>
+          </a:prstGeom>
+          <a:noFill/>
+        </p:spPr>
+        <p:txBody>
+          <a:bodyPr wrap="square">
+            <a:spAutoFit/>
+          </a:bodyPr>
+          <a:lstStyle/>
+          <a:p>
+            <a:pPr>
+              <a:spcAft>
+                <a:spcPts val="800"/>
+              </a:spcAft>
+            </a:pPr>
+            <a:r>
+              <a:rPr sz="2000" b="0" i="0">
+                <a:solidFill>
+                  <a:srgbClr val="333333"/>
+                </a:solidFill>
+                <a:latin typeface="Calibri"/>
+              </a:rPr>
+              <a:t>–   La matriz de decisión es una herramienta simple con una trampa sutil, y enseñar la trampa es más valioso que enseñar la herramienta.</a:t>
+            </a:r>
+          </a:p>
+          <a:p>
+            <a:pPr>
+              <a:spcAft>
+                <a:spcPts val="800"/>
+              </a:spcAft>
+            </a:pPr>
+            <a:r>
+              <a:rPr sz="2000" b="0" i="0">
+                <a:solidFill>
+                  <a:srgbClr val="333333"/>
+                </a:solidFill>
+                <a:latin typeface="Calibri"/>
+              </a:rPr>
+              <a:t>–   Los cinco pasos son: escribir las dos alternativas en una frase cada una; elegir de tres a cinco criterios; ponerle peso a cada criterio</a:t>
+            </a:r>
+          </a:p>
+          <a:p>
+            <a:pPr>
+              <a:spcAft>
+                <a:spcPts val="800"/>
+              </a:spcAft>
+            </a:pPr>
+            <a:r>
+              <a:rPr sz="2000" b="0" i="0">
+                <a:solidFill>
+                  <a:srgbClr val="333333"/>
+                </a:solidFill>
+                <a:latin typeface="Calibri"/>
+              </a:rPr>
+              <a:t>–   Calificar cada alternativa criterio por criterio con una escala corta y </a:t>
+            </a:r>
+            <a:r>
+              <a:rPr sz="2000" b="1" i="0">
+                <a:solidFill>
+                  <a:srgbClr val="333333"/>
+                </a:solidFill>
+                <a:latin typeface="Calibri"/>
+              </a:rPr>
+              <a:t>una media línea de justificación</a:t>
+            </a:r>
+            <a:r>
+              <a:rPr sz="2000" b="0" i="0">
+                <a:solidFill>
+                  <a:srgbClr val="333333"/>
+                </a:solidFill>
+                <a:latin typeface="Calibri"/>
+              </a:rPr>
+              <a:t>; y decidir, escribiendo qué se pierde. **La trampa está en el paso 3</a:t>
+            </a:r>
+          </a:p>
+          <a:p>
+            <a:pPr>
+              <a:spcAft>
+                <a:spcPts val="800"/>
+              </a:spcAft>
+            </a:pPr>
+            <a:r>
+              <a:rPr sz="2000" b="0" i="0">
+                <a:solidFill>
+                  <a:srgbClr val="333333"/>
+                </a:solidFill>
+                <a:latin typeface="Calibri"/>
+              </a:rPr>
+              <a:t>–   Y hay que decirla explícitamente: los pesos se deciden antes de mirar las alternativas.** Si se deciden después, el equipo —sin mala intención— acomoda los pesos para que gane la alternativa que ya quería.</a:t>
+            </a:r>
+          </a:p>
+          <a:p>
+            <a:pPr>
+              <a:spcAft>
+                <a:spcPts val="800"/>
+              </a:spcAft>
+            </a:pPr>
+            <a:r>
+              <a:rPr sz="2000" b="0" i="0">
+                <a:solidFill>
+                  <a:srgbClr val="333333"/>
+                </a:solidFill>
+                <a:latin typeface="Calibri"/>
+              </a:rPr>
+              <a:t>–   Es el sesgo más común en decisiones de ingeniería y produce documentos que parecen análisis y son justificaciones.</a:t>
+            </a:r>
+          </a:p>
+          <a:p>
+            <a:pPr>
+              <a:spcAft>
+                <a:spcPts val="800"/>
+              </a:spcAft>
+            </a:pPr>
+            <a:r>
+              <a:rPr sz="2000" b="0" i="0">
+                <a:solidFill>
+                  <a:srgbClr val="333333"/>
+                </a:solidFill>
+                <a:latin typeface="Calibri"/>
+              </a:rPr>
+              <a:t>–   La regla práctica en la sala: primero se escriben los criterios y los pesos en el documento</a:t>
+            </a:r>
+          </a:p>
+          <a:p>
+            <a:pPr>
+              <a:spcAft>
+                <a:spcPts val="800"/>
+              </a:spcAft>
+            </a:pPr>
+            <a:r>
+              <a:rPr sz="2000" b="0" i="0">
+                <a:solidFill>
+                  <a:srgbClr val="333333"/>
+                </a:solidFill>
+                <a:latin typeface="Calibri"/>
+              </a:rPr>
+              <a:t>–   Y solo después se califica. </a:t>
+            </a:r>
+            <a:r>
+              <a:rPr sz="2000" b="1" i="0">
+                <a:solidFill>
+                  <a:srgbClr val="333333"/>
+                </a:solidFill>
+                <a:latin typeface="Calibri"/>
+              </a:rPr>
+              <a:t>Los criterios no son gustos: salen de los requisitos no funcionales y de las restricciones.</a:t>
+            </a:r>
+            <a:r>
+              <a:rPr sz="2000" b="0" i="0">
+                <a:solidFill>
+                  <a:srgbClr val="333333"/>
+                </a:solidFill>
+                <a:latin typeface="Calibri"/>
+              </a:rPr>
+              <a:t> Para el caso de la biblioteca: funciona sin computador en el mostrador</a:t>
+            </a:r>
+          </a:p>
+        </p:txBody>
+      </p:sp>
+      <p:sp>
+        <p:nvSpPr>
+          <p:cNvPr id="6" name="TextBox 5"/>
+          <p:cNvSpPr txBox="1"/>
+          <p:nvPr/>
+        </p:nvSpPr>
+        <p:spPr>
+          <a:xfrm>
+            <a:off x="11185855" y="6473952"/>
+            <a:ext cx="640080" cy="274320"/>
+          </a:xfrm>
+          <a:prstGeom prst="rect">
+            <a:avLst/>
+          </a:prstGeom>
+          <a:noFill/>
+        </p:spPr>
+        <p:txBody>
+          <a:bodyPr wrap="square">
+            <a:spAutoFit/>
+          </a:bodyPr>
+          <a:lstStyle/>
+          <a:p>
+            <a:pPr algn="r"/>
+            <a:r>
+              <a:rPr sz="1100" b="0" i="0">
+                <a:solidFill>
+                  <a:srgbClr val="666666"/>
+                </a:solidFill>
+                <a:latin typeface="Calibri"/>
+              </a:rPr>
+              <a:t>13</a:t>
+            </a:r>
+          </a:p>
+        </p:txBody>
+      </p:sp>
+    </p:spTree>
+  </p:cSld>
+  <p:clrMapOvr>
+    <a:masterClrMapping/>
+  </p:clrMapOvr>
+</p:sld>
+</file>
+
+<file path=ppt/slides/slide14.xml><?xml version="1.0" encoding="utf-8"?>
+<p:sld xmlns:a="http://schemas.openxmlformats.org/drawingml/2006/main" xmlns:p="http://schemas.openxmlformats.org/presentationml/2006/main" xmlns:r="http://schemas.openxmlformats.org/officeDocument/2006/relationships">
+  <p:cSld>
+    <p:bg>
+      <p:bgPr>
+        <a:solidFill>
+          <a:srgbClr val="FFFFFF"/>
+        </a:solidFill>
+        <a:effectLst/>
+      </p:bgPr>
+    </p:bg>
+    <p:spTree>
+      <p:nvGrpSpPr>
+        <p:cNvPr id="1" name=""/>
+        <p:cNvGrpSpPr/>
+        <p:nvPr/>
+      </p:nvGrpSpPr>
+      <p:grpSpPr/>
+      <p:sp>
+        <p:nvSpPr>
+          <p:cNvPr id="2" name="Rectangle 1"/>
+          <p:cNvSpPr/>
+          <p:nvPr/>
+        </p:nvSpPr>
+        <p:spPr>
+          <a:xfrm>
+            <a:off x="0" y="0"/>
+            <a:ext cx="12191695" cy="960120"/>
+          </a:xfrm>
+          <a:prstGeom prst="rect">
+            <a:avLst/>
+          </a:prstGeom>
+          <a:solidFill>
+            <a:srgbClr val="095292"/>
+          </a:solidFill>
+          <a:ln>
+            <a:noFill/>
+          </a:ln>
+        </p:spPr>
+        <p:style>
+          <a:lnRef idx="1">
+            <a:schemeClr val="accent1"/>
+          </a:lnRef>
+          <a:fillRef idx="3">
+            <a:schemeClr val="accent1"/>
+          </a:fillRef>
+          <a:effectRef idx="2">
+            <a:schemeClr val="accent1"/>
+          </a:effectRef>
+          <a:fontRef idx="minor">
+            <a:schemeClr val="lt1"/>
+          </a:fontRef>
+        </p:style>
+        <p:txBody>
+          <a:bodyPr rtlCol="0" anchor="ctr"/>
+          <a:lstStyle/>
+          <a:p>
+            <a:pPr algn="ctr"/>
+          </a:p>
+        </p:txBody>
+      </p:sp>
+      <p:sp>
+        <p:nvSpPr>
+          <p:cNvPr id="3" name="Rectangle 2"/>
+          <p:cNvSpPr/>
+          <p:nvPr/>
+        </p:nvSpPr>
+        <p:spPr>
+          <a:xfrm>
+            <a:off x="0" y="960120"/>
+            <a:ext cx="12191695" cy="41148"/>
+          </a:xfrm>
+          <a:prstGeom prst="rect">
+            <a:avLst/>
+          </a:prstGeom>
+          <a:solidFill>
+            <a:srgbClr val="FFD000"/>
+          </a:solidFill>
+          <a:ln>
+            <a:noFill/>
+          </a:ln>
+        </p:spPr>
+        <p:style>
+          <a:lnRef idx="1">
+            <a:schemeClr val="accent1"/>
+          </a:lnRef>
+          <a:fillRef idx="3">
+            <a:schemeClr val="accent1"/>
+          </a:fillRef>
+          <a:effectRef idx="2">
+            <a:schemeClr val="accent1"/>
+          </a:effectRef>
+          <a:fontRef idx="minor">
+            <a:schemeClr val="lt1"/>
+          </a:fontRef>
+        </p:style>
+        <p:txBody>
+          <a:bodyPr rtlCol="0" anchor="ctr"/>
+          <a:lstStyle/>
+          <a:p>
+            <a:pPr algn="ctr"/>
+          </a:p>
+        </p:txBody>
+      </p:sp>
+      <p:sp>
+        <p:nvSpPr>
+          <p:cNvPr id="4" name="TextBox 3"/>
+          <p:cNvSpPr txBox="1"/>
+          <p:nvPr/>
+        </p:nvSpPr>
+        <p:spPr>
+          <a:xfrm>
+            <a:off x="457200" y="164592"/>
+            <a:ext cx="11277295" cy="502920"/>
+          </a:xfrm>
+          <a:prstGeom prst="rect">
+            <a:avLst/>
+          </a:prstGeom>
+          <a:noFill/>
+        </p:spPr>
+        <p:txBody>
+          <a:bodyPr wrap="square">
+            <a:spAutoFit/>
+          </a:bodyPr>
+          <a:lstStyle/>
+          <a:p>
+            <a:r>
+              <a:rPr sz="2600" b="1" i="0">
+                <a:solidFill>
+                  <a:srgbClr val="FFFFFF"/>
+                </a:solidFill>
+                <a:latin typeface="Calibri"/>
+              </a:rPr>
+              <a:t>La matriz de decisión: cómo se decide sin que la decisión ya estuviera tomada (2/2)</a:t>
+            </a:r>
+          </a:p>
+        </p:txBody>
+      </p:sp>
+      <p:sp>
+        <p:nvSpPr>
+          <p:cNvPr id="5" name="TextBox 4"/>
+          <p:cNvSpPr txBox="1"/>
+          <p:nvPr/>
+        </p:nvSpPr>
+        <p:spPr>
+          <a:xfrm>
+            <a:off x="457200" y="1170432"/>
+            <a:ext cx="11277295" cy="5230368"/>
+          </a:xfrm>
+          <a:prstGeom prst="rect">
+            <a:avLst/>
+          </a:prstGeom>
+          <a:noFill/>
+        </p:spPr>
+        <p:txBody>
+          <a:bodyPr wrap="square">
+            <a:spAutoFit/>
+          </a:bodyPr>
+          <a:lstStyle/>
+          <a:p>
+            <a:pPr>
+              <a:spcAft>
+                <a:spcPts val="800"/>
+              </a:spcAft>
+            </a:pPr>
+            <a:r>
+              <a:rPr sz="2000" b="0" i="0">
+                <a:solidFill>
+                  <a:srgbClr val="333333"/>
+                </a:solidFill>
+                <a:latin typeface="Calibri"/>
+              </a:rPr>
+              <a:t>–   Se aprende sin manual, se puede construir en las sesiones que quedan, cumple el requisito de datos ligeros, no exige que alguien atienda en horario fijo.</a:t>
+            </a:r>
+          </a:p>
+          <a:p>
+            <a:pPr>
+              <a:spcAft>
+                <a:spcPts val="800"/>
+              </a:spcAft>
+            </a:pPr>
+            <a:r>
+              <a:rPr sz="2000" b="0" i="0">
+                <a:solidFill>
+                  <a:srgbClr val="333333"/>
+                </a:solidFill>
+                <a:latin typeface="Calibri"/>
+              </a:rPr>
+              <a:t>–   Si un equipo pone «lo que más nos gusta» o «lo más innovador» como criterio, hay que reemplazarlo: no se puede calificar y no se puede defender.</a:t>
+            </a:r>
+          </a:p>
+          <a:p>
+            <a:pPr>
+              <a:spcAft>
+                <a:spcPts val="800"/>
+              </a:spcAft>
+            </a:pPr>
+            <a:r>
+              <a:rPr sz="2000" b="0" i="0">
+                <a:solidFill>
+                  <a:srgbClr val="333333"/>
+                </a:solidFill>
+                <a:latin typeface="Calibri"/>
+              </a:rPr>
+              <a:t>–   Y el paso 5 es el que separa una decisión profesional de una preferencia: </a:t>
+            </a:r>
+            <a:r>
+              <a:rPr sz="2000" b="1" i="0">
+                <a:solidFill>
+                  <a:srgbClr val="333333"/>
+                </a:solidFill>
+                <a:latin typeface="Calibri"/>
+              </a:rPr>
+              <a:t>toda decisión sacrifica algo, y nombrarlo es lo que la vuelve defendible</a:t>
+            </a:r>
+            <a:r>
+              <a:rPr sz="2000" b="0" i="0">
+                <a:solidFill>
+                  <a:srgbClr val="333333"/>
+                </a:solidFill>
+                <a:latin typeface="Calibri"/>
+              </a:rPr>
+              <a:t>.</a:t>
+            </a:r>
+          </a:p>
+          <a:p>
+            <a:pPr>
+              <a:spcAft>
+                <a:spcPts val="800"/>
+              </a:spcAft>
+            </a:pPr>
+            <a:r>
+              <a:rPr sz="2000" b="0" i="0">
+                <a:solidFill>
+                  <a:srgbClr val="333333"/>
+                </a:solidFill>
+                <a:latin typeface="Calibri"/>
+              </a:rPr>
+              <a:t>–   «Elegimos la lista publicada en vez de la aplicación; perdemos la actualización en tiempo real y ganamos que funcione sin conexión y sin capacitar a nadie.» Un equipo que puede decir qué perdió entendió que estaba decidiendo, no acertando.</a:t>
+            </a:r>
+          </a:p>
+        </p:txBody>
+      </p:sp>
+      <p:sp>
+        <p:nvSpPr>
+          <p:cNvPr id="6" name="TextBox 5"/>
+          <p:cNvSpPr txBox="1"/>
+          <p:nvPr/>
+        </p:nvSpPr>
+        <p:spPr>
+          <a:xfrm>
+            <a:off x="11185855" y="6473952"/>
+            <a:ext cx="640080" cy="274320"/>
+          </a:xfrm>
+          <a:prstGeom prst="rect">
+            <a:avLst/>
+          </a:prstGeom>
+          <a:noFill/>
+        </p:spPr>
+        <p:txBody>
+          <a:bodyPr wrap="square">
+            <a:spAutoFit/>
+          </a:bodyPr>
+          <a:lstStyle/>
+          <a:p>
+            <a:pPr algn="r"/>
+            <a:r>
+              <a:rPr sz="1100" b="0" i="0">
+                <a:solidFill>
+                  <a:srgbClr val="666666"/>
+                </a:solidFill>
+                <a:latin typeface="Calibri"/>
+              </a:rPr>
+              <a:t>14</a:t>
+            </a:r>
+          </a:p>
+        </p:txBody>
+      </p:sp>
+    </p:spTree>
+  </p:cSld>
+  <p:clrMapOvr>
+    <a:masterClrMapping/>
+  </p:clrMapOvr>
+</p:sld>
+</file>
+
+<file path=ppt/slides/slide15.xml><?xml version="1.0" encoding="utf-8"?>
+<p:sld xmlns:a="http://schemas.openxmlformats.org/drawingml/2006/main" xmlns:p="http://schemas.openxmlformats.org/presentationml/2006/main" xmlns:r="http://schemas.openxmlformats.org/officeDocument/2006/relationships">
+  <p:cSld>
+    <p:bg>
+      <p:bgPr>
+        <a:solidFill>
+          <a:srgbClr val="FFFFFF"/>
+        </a:solidFill>
+        <a:effectLst/>
+      </p:bgPr>
+    </p:bg>
+    <p:spTree>
+      <p:nvGrpSpPr>
+        <p:cNvPr id="1" name=""/>
+        <p:cNvGrpSpPr/>
+        <p:nvPr/>
+      </p:nvGrpSpPr>
+      <p:grpSpPr/>
+      <p:sp>
+        <p:nvSpPr>
+          <p:cNvPr id="2" name="Rectangle 1"/>
+          <p:cNvSpPr/>
+          <p:nvPr/>
+        </p:nvSpPr>
+        <p:spPr>
+          <a:xfrm>
+            <a:off x="0" y="0"/>
+            <a:ext cx="12191695" cy="960120"/>
+          </a:xfrm>
+          <a:prstGeom prst="rect">
+            <a:avLst/>
+          </a:prstGeom>
+          <a:solidFill>
+            <a:srgbClr val="095292"/>
+          </a:solidFill>
+          <a:ln>
+            <a:noFill/>
+          </a:ln>
+        </p:spPr>
+        <p:style>
+          <a:lnRef idx="1">
+            <a:schemeClr val="accent1"/>
+          </a:lnRef>
+          <a:fillRef idx="3">
+            <a:schemeClr val="accent1"/>
+          </a:fillRef>
+          <a:effectRef idx="2">
+            <a:schemeClr val="accent1"/>
+          </a:effectRef>
+          <a:fontRef idx="minor">
+            <a:schemeClr val="lt1"/>
+          </a:fontRef>
+        </p:style>
+        <p:txBody>
+          <a:bodyPr rtlCol="0" anchor="ctr"/>
+          <a:lstStyle/>
+          <a:p>
+            <a:pPr algn="ctr"/>
+          </a:p>
+        </p:txBody>
+      </p:sp>
+      <p:sp>
+        <p:nvSpPr>
+          <p:cNvPr id="3" name="Rectangle 2"/>
+          <p:cNvSpPr/>
+          <p:nvPr/>
+        </p:nvSpPr>
+        <p:spPr>
+          <a:xfrm>
+            <a:off x="0" y="960120"/>
+            <a:ext cx="12191695" cy="41148"/>
+          </a:xfrm>
+          <a:prstGeom prst="rect">
+            <a:avLst/>
+          </a:prstGeom>
+          <a:solidFill>
+            <a:srgbClr val="FFD000"/>
+          </a:solidFill>
+          <a:ln>
+            <a:noFill/>
+          </a:ln>
+        </p:spPr>
+        <p:style>
+          <a:lnRef idx="1">
+            <a:schemeClr val="accent1"/>
+          </a:lnRef>
+          <a:fillRef idx="3">
+            <a:schemeClr val="accent1"/>
+          </a:fillRef>
+          <a:effectRef idx="2">
+            <a:schemeClr val="accent1"/>
+          </a:effectRef>
+          <a:fontRef idx="minor">
+            <a:schemeClr val="lt1"/>
+          </a:fontRef>
+        </p:style>
+        <p:txBody>
+          <a:bodyPr rtlCol="0" anchor="ctr"/>
+          <a:lstStyle/>
+          <a:p>
+            <a:pPr algn="ctr"/>
+          </a:p>
+        </p:txBody>
+      </p:sp>
+      <p:sp>
+        <p:nvSpPr>
+          <p:cNvPr id="4" name="TextBox 3"/>
+          <p:cNvSpPr txBox="1"/>
+          <p:nvPr/>
+        </p:nvSpPr>
+        <p:spPr>
+          <a:xfrm>
+            <a:off x="457200" y="164592"/>
+            <a:ext cx="11277295" cy="502920"/>
+          </a:xfrm>
+          <a:prstGeom prst="rect">
+            <a:avLst/>
+          </a:prstGeom>
+          <a:noFill/>
+        </p:spPr>
+        <p:txBody>
+          <a:bodyPr wrap="square">
+            <a:spAutoFit/>
+          </a:bodyPr>
+          <a:lstStyle/>
+          <a:p>
+            <a:r>
+              <a:rPr sz="2600" b="1" i="0">
+                <a:solidFill>
+                  <a:srgbClr val="FFFFFF"/>
+                </a:solidFill>
+                <a:latin typeface="Calibri"/>
+              </a:rPr>
+              <a:t>Alcance mínimo y plan de validación: el entregable del taller (1/2)</a:t>
+            </a:r>
+          </a:p>
+        </p:txBody>
+      </p:sp>
+      <p:sp>
+        <p:nvSpPr>
+          <p:cNvPr id="5" name="TextBox 4"/>
+          <p:cNvSpPr txBox="1"/>
+          <p:nvPr/>
+        </p:nvSpPr>
+        <p:spPr>
+          <a:xfrm>
+            <a:off x="457200" y="1170432"/>
+            <a:ext cx="11277295" cy="5230368"/>
+          </a:xfrm>
+          <a:prstGeom prst="rect">
+            <a:avLst/>
+          </a:prstGeom>
+          <a:noFill/>
+        </p:spPr>
+        <p:txBody>
+          <a:bodyPr wrap="square">
+            <a:spAutoFit/>
+          </a:bodyPr>
+          <a:lstStyle/>
+          <a:p>
+            <a:pPr>
+              <a:spcAft>
+                <a:spcPts val="800"/>
+              </a:spcAft>
+            </a:pPr>
+            <a:r>
+              <a:rPr sz="2000" b="0" i="0">
+                <a:solidFill>
+                  <a:srgbClr val="333333"/>
+                </a:solidFill>
+                <a:latin typeface="Calibri"/>
+              </a:rPr>
+              <a:t>–   </a:t>
+            </a:r>
+            <a:r>
+              <a:rPr sz="2000" b="1" i="0">
+                <a:solidFill>
+                  <a:srgbClr val="333333"/>
+                </a:solidFill>
+                <a:latin typeface="Calibri"/>
+              </a:rPr>
+              <a:t>El alcance mínimo</a:t>
+            </a:r>
+            <a:r>
+              <a:rPr sz="2000" b="0" i="0">
+                <a:solidFill>
+                  <a:srgbClr val="333333"/>
+                </a:solidFill>
+                <a:latin typeface="Calibri"/>
+              </a:rPr>
+              <a:t> es el concepto que salva los proyectos de primer semestre, y hay que definirlo con precisión porque se confunde con «hacer poco».</a:t>
+            </a:r>
+          </a:p>
+          <a:p>
+            <a:pPr>
+              <a:spcAft>
+                <a:spcPts val="800"/>
+              </a:spcAft>
+            </a:pPr>
+            <a:r>
+              <a:rPr sz="2000" b="0" i="0">
+                <a:solidFill>
+                  <a:srgbClr val="333333"/>
+                </a:solidFill>
+                <a:latin typeface="Calibri"/>
+              </a:rPr>
+              <a:t>–   Es la versión más pequeña de la solución que </a:t>
+            </a:r>
+            <a:r>
+              <a:rPr sz="2000" b="1" i="0">
+                <a:solidFill>
+                  <a:srgbClr val="333333"/>
+                </a:solidFill>
+                <a:latin typeface="Calibri"/>
+              </a:rPr>
+              <a:t>ya resuelve algo</a:t>
+            </a:r>
+            <a:r>
+              <a:rPr sz="2000" b="0" i="0">
+                <a:solidFill>
+                  <a:srgbClr val="333333"/>
+                </a:solidFill>
+                <a:latin typeface="Calibri"/>
+              </a:rPr>
+              <a:t> del problema y se puede probar con un usuario real.</a:t>
+            </a:r>
+          </a:p>
+          <a:p>
+            <a:pPr>
+              <a:spcAft>
+                <a:spcPts val="800"/>
+              </a:spcAft>
+            </a:pPr>
+            <a:r>
+              <a:rPr sz="2000" b="0" i="0">
+                <a:solidFill>
+                  <a:srgbClr val="333333"/>
+                </a:solidFill>
+                <a:latin typeface="Calibri"/>
+              </a:rPr>
+              <a:t>–   La prueba para saber si está bien definido: *si construimos solo esto y lo ponemos delante de la persona que vive el problema, ¿le sirve de algo?* Si la respuesta es no, no es un alcance mínimo, es un pedazo.</a:t>
+            </a:r>
+          </a:p>
+          <a:p>
+            <a:pPr>
+              <a:spcAft>
+                <a:spcPts val="800"/>
+              </a:spcAft>
+            </a:pPr>
+            <a:r>
+              <a:rPr sz="2000" b="0" i="0">
+                <a:solidFill>
+                  <a:srgbClr val="333333"/>
+                </a:solidFill>
+                <a:latin typeface="Calibri"/>
+              </a:rPr>
+              <a:t>–   El método concreto que hay que dictarles: </a:t>
+            </a:r>
+            <a:r>
+              <a:rPr sz="2000" b="1" i="0">
+                <a:solidFill>
+                  <a:srgbClr val="333333"/>
+                </a:solidFill>
+                <a:latin typeface="Calibri"/>
+              </a:rPr>
+              <a:t>se toma un requisito funcional —el que ataca la causa elegida en el árbol de la sesión 6— y se construye solo eso, cumpliendo los requisitos no funcionales</a:t>
+            </a:r>
+            <a:r>
+              <a:rPr sz="2000" b="0" i="0">
+                <a:solidFill>
+                  <a:srgbClr val="333333"/>
+                </a:solidFill>
+                <a:latin typeface="Calibri"/>
+              </a:rPr>
+              <a:t>.</a:t>
+            </a:r>
+          </a:p>
+          <a:p>
+            <a:pPr>
+              <a:spcAft>
+                <a:spcPts val="800"/>
+              </a:spcAft>
+            </a:pPr>
+            <a:r>
+              <a:rPr sz="2000" b="0" i="0">
+                <a:solidFill>
+                  <a:srgbClr val="333333"/>
+                </a:solidFill>
+                <a:latin typeface="Calibri"/>
+              </a:rPr>
+              <a:t>–   Los otros dos requisitos se escriben en una lista titulada «versión siguiente».</a:t>
+            </a:r>
+          </a:p>
+          <a:p>
+            <a:pPr>
+              <a:spcAft>
+                <a:spcPts val="800"/>
+              </a:spcAft>
+            </a:pPr>
+            <a:r>
+              <a:rPr sz="2000" b="0" i="0">
+                <a:solidFill>
+                  <a:srgbClr val="333333"/>
+                </a:solidFill>
+                <a:latin typeface="Calibri"/>
+              </a:rPr>
+              <a:t>–   Esa lista no es una derrota: es la prueba de que el equipo sabe lo que dejó fuera, y en la Clase 15 se muestra.</a:t>
+            </a:r>
+          </a:p>
+          <a:p>
+            <a:pPr>
+              <a:spcAft>
+                <a:spcPts val="800"/>
+              </a:spcAft>
+            </a:pPr>
+            <a:r>
+              <a:rPr sz="2000" b="0" i="0">
+                <a:solidFill>
+                  <a:srgbClr val="333333"/>
+                </a:solidFill>
+                <a:latin typeface="Calibri"/>
+              </a:rPr>
+              <a:t>–   Vale la pena decírselo con estas palabras: **un proyecto que no declara lo que dejó fuera parece incompleto</a:t>
+            </a:r>
+          </a:p>
+        </p:txBody>
+      </p:sp>
+      <p:sp>
+        <p:nvSpPr>
+          <p:cNvPr id="6" name="TextBox 5"/>
+          <p:cNvSpPr txBox="1"/>
+          <p:nvPr/>
+        </p:nvSpPr>
+        <p:spPr>
+          <a:xfrm>
+            <a:off x="11185855" y="6473952"/>
+            <a:ext cx="640080" cy="274320"/>
+          </a:xfrm>
+          <a:prstGeom prst="rect">
+            <a:avLst/>
+          </a:prstGeom>
+          <a:noFill/>
+        </p:spPr>
+        <p:txBody>
+          <a:bodyPr wrap="square">
+            <a:spAutoFit/>
+          </a:bodyPr>
+          <a:lstStyle/>
+          <a:p>
+            <a:pPr algn="r"/>
+            <a:r>
+              <a:rPr sz="1100" b="0" i="0">
+                <a:solidFill>
+                  <a:srgbClr val="666666"/>
+                </a:solidFill>
+                <a:latin typeface="Calibri"/>
+              </a:rPr>
+              <a:t>15</a:t>
+            </a:r>
+          </a:p>
+        </p:txBody>
+      </p:sp>
+    </p:spTree>
+  </p:cSld>
+  <p:clrMapOvr>
+    <a:masterClrMapping/>
+  </p:clrMapOvr>
+</p:sld>
+</file>
+
+<file path=ppt/slides/slide16.xml><?xml version="1.0" encoding="utf-8"?>
+<p:sld xmlns:a="http://schemas.openxmlformats.org/drawingml/2006/main" xmlns:p="http://schemas.openxmlformats.org/presentationml/2006/main" xmlns:r="http://schemas.openxmlformats.org/officeDocument/2006/relationships">
+  <p:cSld>
+    <p:bg>
+      <p:bgPr>
+        <a:solidFill>
+          <a:srgbClr val="FFFFFF"/>
+        </a:solidFill>
+        <a:effectLst/>
+      </p:bgPr>
+    </p:bg>
+    <p:spTree>
+      <p:nvGrpSpPr>
+        <p:cNvPr id="1" name=""/>
+        <p:cNvGrpSpPr/>
+        <p:nvPr/>
+      </p:nvGrpSpPr>
+      <p:grpSpPr/>
+      <p:sp>
+        <p:nvSpPr>
+          <p:cNvPr id="2" name="Rectangle 1"/>
+          <p:cNvSpPr/>
+          <p:nvPr/>
+        </p:nvSpPr>
+        <p:spPr>
+          <a:xfrm>
+            <a:off x="0" y="0"/>
+            <a:ext cx="12191695" cy="960120"/>
+          </a:xfrm>
+          <a:prstGeom prst="rect">
+            <a:avLst/>
+          </a:prstGeom>
+          <a:solidFill>
+            <a:srgbClr val="095292"/>
+          </a:solidFill>
+          <a:ln>
+            <a:noFill/>
+          </a:ln>
+        </p:spPr>
+        <p:style>
+          <a:lnRef idx="1">
+            <a:schemeClr val="accent1"/>
+          </a:lnRef>
+          <a:fillRef idx="3">
+            <a:schemeClr val="accent1"/>
+          </a:fillRef>
+          <a:effectRef idx="2">
+            <a:schemeClr val="accent1"/>
+          </a:effectRef>
+          <a:fontRef idx="minor">
+            <a:schemeClr val="lt1"/>
+          </a:fontRef>
+        </p:style>
+        <p:txBody>
+          <a:bodyPr rtlCol="0" anchor="ctr"/>
+          <a:lstStyle/>
+          <a:p>
+            <a:pPr algn="ctr"/>
+          </a:p>
+        </p:txBody>
+      </p:sp>
+      <p:sp>
+        <p:nvSpPr>
+          <p:cNvPr id="3" name="Rectangle 2"/>
+          <p:cNvSpPr/>
+          <p:nvPr/>
+        </p:nvSpPr>
+        <p:spPr>
+          <a:xfrm>
+            <a:off x="0" y="960120"/>
+            <a:ext cx="12191695" cy="41148"/>
+          </a:xfrm>
+          <a:prstGeom prst="rect">
+            <a:avLst/>
+          </a:prstGeom>
+          <a:solidFill>
+            <a:srgbClr val="FFD000"/>
+          </a:solidFill>
+          <a:ln>
+            <a:noFill/>
+          </a:ln>
+        </p:spPr>
+        <p:style>
+          <a:lnRef idx="1">
+            <a:schemeClr val="accent1"/>
+          </a:lnRef>
+          <a:fillRef idx="3">
+            <a:schemeClr val="accent1"/>
+          </a:fillRef>
+          <a:effectRef idx="2">
+            <a:schemeClr val="accent1"/>
+          </a:effectRef>
+          <a:fontRef idx="minor">
+            <a:schemeClr val="lt1"/>
+          </a:fontRef>
+        </p:style>
+        <p:txBody>
+          <a:bodyPr rtlCol="0" anchor="ctr"/>
+          <a:lstStyle/>
+          <a:p>
+            <a:pPr algn="ctr"/>
+          </a:p>
+        </p:txBody>
+      </p:sp>
+      <p:sp>
+        <p:nvSpPr>
+          <p:cNvPr id="4" name="TextBox 3"/>
+          <p:cNvSpPr txBox="1"/>
+          <p:nvPr/>
+        </p:nvSpPr>
+        <p:spPr>
+          <a:xfrm>
+            <a:off x="457200" y="164592"/>
+            <a:ext cx="11277295" cy="502920"/>
+          </a:xfrm>
+          <a:prstGeom prst="rect">
+            <a:avLst/>
+          </a:prstGeom>
+          <a:noFill/>
+        </p:spPr>
+        <p:txBody>
+          <a:bodyPr wrap="square">
+            <a:spAutoFit/>
+          </a:bodyPr>
+          <a:lstStyle/>
+          <a:p>
+            <a:r>
+              <a:rPr sz="2600" b="1" i="0">
+                <a:solidFill>
+                  <a:srgbClr val="FFFFFF"/>
+                </a:solidFill>
+                <a:latin typeface="Calibri"/>
+              </a:rPr>
+              <a:t>Alcance mínimo y plan de validación: el entregable del taller (2/2)</a:t>
+            </a:r>
+          </a:p>
+        </p:txBody>
+      </p:sp>
+      <p:sp>
+        <p:nvSpPr>
+          <p:cNvPr id="5" name="TextBox 4"/>
+          <p:cNvSpPr txBox="1"/>
+          <p:nvPr/>
+        </p:nvSpPr>
+        <p:spPr>
+          <a:xfrm>
+            <a:off x="457200" y="1170432"/>
+            <a:ext cx="11277295" cy="5230368"/>
+          </a:xfrm>
+          <a:prstGeom prst="rect">
+            <a:avLst/>
+          </a:prstGeom>
+          <a:noFill/>
+        </p:spPr>
+        <p:txBody>
+          <a:bodyPr wrap="square">
+            <a:spAutoFit/>
+          </a:bodyPr>
+          <a:lstStyle/>
+          <a:p>
+            <a:pPr>
+              <a:spcAft>
+                <a:spcPts val="800"/>
+              </a:spcAft>
+            </a:pPr>
+            <a:r>
+              <a:rPr sz="2000" b="0" i="0">
+                <a:solidFill>
+                  <a:srgbClr val="333333"/>
+                </a:solidFill>
+                <a:latin typeface="Calibri"/>
+              </a:rPr>
+              <a:t>–   Uno que lo declara parece dirigido.</a:t>
+            </a:r>
+            <a:r>
+              <a:rPr sz="2000" b="1" i="0">
+                <a:solidFill>
+                  <a:srgbClr val="333333"/>
+                </a:solidFill>
+                <a:latin typeface="Calibri"/>
+              </a:rPr>
+              <a:t> </a:t>
+            </a:r>
+            <a:r>
+              <a:rPr sz="2000" b="0" i="0">
+                <a:solidFill>
+                  <a:srgbClr val="333333"/>
+                </a:solidFill>
+                <a:latin typeface="Calibri"/>
+              </a:rPr>
+              <a:t>El plan de validación** se escribe hoy y eso es deliberado: escribir cómo se va a probar algo antes de construirlo cambia lo que se construye.</a:t>
+            </a:r>
+          </a:p>
+          <a:p>
+            <a:pPr>
+              <a:spcAft>
+                <a:spcPts val="800"/>
+              </a:spcAft>
+            </a:pPr>
+            <a:r>
+              <a:rPr sz="2000" b="0" i="0">
+                <a:solidFill>
+                  <a:srgbClr val="333333"/>
+                </a:solidFill>
+                <a:latin typeface="Calibri"/>
+              </a:rPr>
+              <a:t>–   Son tres cosas: con quién se prueba —una persona ajena al equipo—, qué tareas se le piden —las de los criterios de aceptación de la sesión 7—, y qué se va a observar.</a:t>
+            </a:r>
+          </a:p>
+          <a:p>
+            <a:pPr>
+              <a:spcAft>
+                <a:spcPts val="800"/>
+              </a:spcAft>
+            </a:pPr>
+            <a:r>
+              <a:rPr sz="2000" b="0" i="0">
+                <a:solidFill>
+                  <a:srgbClr val="333333"/>
+                </a:solidFill>
+                <a:latin typeface="Calibri"/>
+              </a:rPr>
+              <a:t>–   Las dos trampas hay que nombrarlas con dureza porque las van a cometer todas. </a:t>
+            </a:r>
+            <a:r>
+              <a:rPr sz="2000" b="1" i="0">
+                <a:solidFill>
+                  <a:srgbClr val="333333"/>
+                </a:solidFill>
+                <a:latin typeface="Calibri"/>
+              </a:rPr>
+              <a:t>Probar con el propio equipo no prueba nada</a:t>
+            </a:r>
+            <a:r>
+              <a:rPr sz="2000" b="0" i="0">
+                <a:solidFill>
+                  <a:srgbClr val="333333"/>
+                </a:solidFill>
+                <a:latin typeface="Calibri"/>
+              </a:rPr>
+              <a:t>: quien construyó sabe dónde hay que tocar.</a:t>
+            </a:r>
+          </a:p>
+          <a:p>
+            <a:pPr>
+              <a:spcAft>
+                <a:spcPts val="800"/>
+              </a:spcAft>
+            </a:pPr>
+            <a:r>
+              <a:rPr sz="2000" b="0" i="0">
+                <a:solidFill>
+                  <a:srgbClr val="333333"/>
+                </a:solidFill>
+                <a:latin typeface="Calibri"/>
+              </a:rPr>
+              <a:t>–   Y </a:t>
+            </a:r>
+            <a:r>
+              <a:rPr sz="2000" b="1" i="0">
+                <a:solidFill>
+                  <a:srgbClr val="333333"/>
+                </a:solidFill>
+                <a:latin typeface="Calibri"/>
+              </a:rPr>
+              <a:t>preguntar «¿le gusta?» no sirve</a:t>
+            </a:r>
+            <a:r>
+              <a:rPr sz="2000" b="0" i="0">
+                <a:solidFill>
+                  <a:srgbClr val="333333"/>
+                </a:solidFill>
+                <a:latin typeface="Calibri"/>
+              </a:rPr>
+              <a:t>: la gente dice que sí por cortesía, sobre todo a estudiantes que le muestran su trabajo con ilusión.</a:t>
+            </a:r>
+          </a:p>
+          <a:p>
+            <a:pPr>
+              <a:spcAft>
+                <a:spcPts val="800"/>
+              </a:spcAft>
+            </a:pPr>
+            <a:r>
+              <a:rPr sz="2000" b="0" i="0">
+                <a:solidFill>
+                  <a:srgbClr val="333333"/>
+                </a:solidFill>
+                <a:latin typeface="Calibri"/>
+              </a:rPr>
+              <a:t>–   Se le pide que </a:t>
+            </a:r>
+            <a:r>
+              <a:rPr sz="2000" b="1" i="0">
+                <a:solidFill>
+                  <a:srgbClr val="333333"/>
+                </a:solidFill>
+                <a:latin typeface="Calibri"/>
+              </a:rPr>
+              <a:t>haga una tarea</a:t>
+            </a:r>
+            <a:r>
+              <a:rPr sz="2000" b="0" i="0">
+                <a:solidFill>
+                  <a:srgbClr val="333333"/>
+                </a:solidFill>
+                <a:latin typeface="Calibri"/>
+              </a:rPr>
+              <a:t> y se observa en silencio —dónde duda, dónde se equivoca, qué busca y no encuentra—.</a:t>
+            </a:r>
+          </a:p>
+          <a:p>
+            <a:pPr>
+              <a:spcAft>
+                <a:spcPts val="800"/>
+              </a:spcAft>
+            </a:pPr>
+            <a:r>
+              <a:rPr sz="2000" b="0" i="0">
+                <a:solidFill>
+                  <a:srgbClr val="333333"/>
+                </a:solidFill>
+                <a:latin typeface="Calibri"/>
+              </a:rPr>
+              <a:t>–   Lo que la persona hace vale; lo que opina, poco.</a:t>
+            </a:r>
+          </a:p>
+          <a:p>
+            <a:pPr>
+              <a:spcAft>
+                <a:spcPts val="800"/>
+              </a:spcAft>
+            </a:pPr>
+            <a:r>
+              <a:rPr sz="2000" b="0" i="0">
+                <a:solidFill>
+                  <a:srgbClr val="333333"/>
+                </a:solidFill>
+                <a:latin typeface="Calibri"/>
+              </a:rPr>
+              <a:t>–   Esa regla sola mejora todos los proyectos del curso.</a:t>
+            </a:r>
+          </a:p>
+        </p:txBody>
+      </p:sp>
+      <p:sp>
+        <p:nvSpPr>
+          <p:cNvPr id="6" name="TextBox 5"/>
+          <p:cNvSpPr txBox="1"/>
+          <p:nvPr/>
+        </p:nvSpPr>
+        <p:spPr>
+          <a:xfrm>
+            <a:off x="11185855" y="6473952"/>
+            <a:ext cx="640080" cy="274320"/>
+          </a:xfrm>
+          <a:prstGeom prst="rect">
+            <a:avLst/>
+          </a:prstGeom>
+          <a:noFill/>
+        </p:spPr>
+        <p:txBody>
+          <a:bodyPr wrap="square">
+            <a:spAutoFit/>
+          </a:bodyPr>
+          <a:lstStyle/>
+          <a:p>
+            <a:pPr algn="r"/>
+            <a:r>
+              <a:rPr sz="1100" b="0" i="0">
+                <a:solidFill>
+                  <a:srgbClr val="666666"/>
+                </a:solidFill>
+                <a:latin typeface="Calibri"/>
+              </a:rPr>
+              <a:t>16</a:t>
+            </a:r>
+          </a:p>
+        </p:txBody>
+      </p:sp>
+    </p:spTree>
+  </p:cSld>
+  <p:clrMapOvr>
+    <a:masterClrMapping/>
+  </p:clrMapOvr>
+</p:sld>
+</file>
+
+<file path=ppt/slides/slide17.xml><?xml version="1.0" encoding="utf-8"?>
+<p:sld xmlns:a="http://schemas.openxmlformats.org/drawingml/2006/main" xmlns:p="http://schemas.openxmlformats.org/presentationml/2006/main" xmlns:r="http://schemas.openxmlformats.org/officeDocument/2006/relationships">
+  <p:cSld>
+    <p:bg>
+      <p:bgPr>
+        <a:solidFill>
+          <a:srgbClr val="FFFFFF"/>
+        </a:solidFill>
+        <a:effectLst/>
+      </p:bgPr>
+    </p:bg>
+    <p:spTree>
+      <p:nvGrpSpPr>
+        <p:cNvPr id="1" name=""/>
+        <p:cNvGrpSpPr/>
+        <p:nvPr/>
+      </p:nvGrpSpPr>
+      <p:grpSpPr/>
+      <p:sp>
+        <p:nvSpPr>
+          <p:cNvPr id="2" name="Rectangle 1"/>
+          <p:cNvSpPr/>
+          <p:nvPr/>
+        </p:nvSpPr>
+        <p:spPr>
+          <a:xfrm>
+            <a:off x="0" y="0"/>
+            <a:ext cx="12191695" cy="1170432"/>
+          </a:xfrm>
+          <a:prstGeom prst="rect">
+            <a:avLst/>
+          </a:prstGeom>
+          <a:solidFill>
+            <a:srgbClr val="095292"/>
+          </a:solidFill>
+          <a:ln>
+            <a:noFill/>
+          </a:ln>
+        </p:spPr>
+        <p:style>
+          <a:lnRef idx="1">
+            <a:schemeClr val="accent1"/>
+          </a:lnRef>
+          <a:fillRef idx="3">
+            <a:schemeClr val="accent1"/>
+          </a:fillRef>
+          <a:effectRef idx="2">
+            <a:schemeClr val="accent1"/>
+          </a:effectRef>
+          <a:fontRef idx="minor">
+            <a:schemeClr val="lt1"/>
+          </a:fontRef>
+        </p:style>
+        <p:txBody>
+          <a:bodyPr rtlCol="0" anchor="ctr"/>
+          <a:lstStyle/>
+          <a:p>
+            <a:pPr algn="ctr"/>
+          </a:p>
+        </p:txBody>
+      </p:sp>
+      <p:sp>
+        <p:nvSpPr>
+          <p:cNvPr id="3" name="Rectangle 2"/>
+          <p:cNvSpPr/>
+          <p:nvPr/>
+        </p:nvSpPr>
+        <p:spPr>
+          <a:xfrm>
+            <a:off x="0" y="1170432"/>
+            <a:ext cx="12191695" cy="41148"/>
+          </a:xfrm>
+          <a:prstGeom prst="rect">
+            <a:avLst/>
+          </a:prstGeom>
+          <a:solidFill>
+            <a:srgbClr val="FFD000"/>
+          </a:solidFill>
+          <a:ln>
+            <a:noFill/>
+          </a:ln>
+        </p:spPr>
+        <p:style>
+          <a:lnRef idx="1">
+            <a:schemeClr val="accent1"/>
+          </a:lnRef>
+          <a:fillRef idx="3">
+            <a:schemeClr val="accent1"/>
+          </a:fillRef>
+          <a:effectRef idx="2">
+            <a:schemeClr val="accent1"/>
+          </a:effectRef>
+          <a:fontRef idx="minor">
+            <a:schemeClr val="lt1"/>
+          </a:fontRef>
+        </p:style>
+        <p:txBody>
+          <a:bodyPr rtlCol="0" anchor="ctr"/>
+          <a:lstStyle/>
+          <a:p>
+            <a:pPr algn="ctr"/>
+          </a:p>
+        </p:txBody>
+      </p:sp>
+      <p:sp>
+        <p:nvSpPr>
+          <p:cNvPr id="4" name="TextBox 3"/>
+          <p:cNvSpPr txBox="1"/>
+          <p:nvPr/>
+        </p:nvSpPr>
+        <p:spPr>
+          <a:xfrm>
+            <a:off x="457200" y="164592"/>
+            <a:ext cx="11277295" cy="384048"/>
+          </a:xfrm>
+          <a:prstGeom prst="rect">
+            <a:avLst/>
+          </a:prstGeom>
+          <a:noFill/>
+        </p:spPr>
+        <p:txBody>
+          <a:bodyPr wrap="square">
+            <a:spAutoFit/>
+          </a:bodyPr>
+          <a:lstStyle/>
+          <a:p>
+            <a:r>
+              <a:rPr sz="2600" b="1" i="0">
+                <a:solidFill>
+                  <a:srgbClr val="FFFFFF"/>
+                </a:solidFill>
+                <a:latin typeface="Calibri"/>
+              </a:rPr>
+              <a:t>Taller de hoy: Decisión de la solución y alcance mínimo</a:t>
+            </a:r>
+          </a:p>
+        </p:txBody>
+      </p:sp>
+      <p:sp>
+        <p:nvSpPr>
+          <p:cNvPr id="5" name="TextBox 4"/>
+          <p:cNvSpPr txBox="1"/>
+          <p:nvPr/>
+        </p:nvSpPr>
+        <p:spPr>
+          <a:xfrm>
+            <a:off x="457200" y="566928"/>
+            <a:ext cx="11277295" cy="411480"/>
+          </a:xfrm>
+          <a:prstGeom prst="rect">
+            <a:avLst/>
+          </a:prstGeom>
+          <a:noFill/>
+        </p:spPr>
+        <p:txBody>
+          <a:bodyPr wrap="square">
+            <a:spAutoFit/>
+          </a:bodyPr>
+          <a:lstStyle/>
+          <a:p>
+            <a:r>
+              <a:rPr sz="1400" b="0" i="0">
+                <a:solidFill>
+                  <a:srgbClr val="B8D8EE"/>
+                </a:solidFill>
+                <a:latin typeface="Calibri"/>
+              </a:rPr>
+              <a:t>40 min en equipos · 40 min con ritmo interno: alternativas, matriz, alcance, validación · matriz de decisión + alcance mínimo + plan de validación</a:t>
+            </a:r>
+          </a:p>
+        </p:txBody>
+      </p:sp>
+      <p:sp>
+        <p:nvSpPr>
+          <p:cNvPr id="6" name="Rounded Rectangle 5"/>
+          <p:cNvSpPr/>
+          <p:nvPr/>
+        </p:nvSpPr>
+        <p:spPr>
+          <a:xfrm>
+            <a:off x="457200" y="1472184"/>
+            <a:ext cx="11277295" cy="566928"/>
+          </a:xfrm>
+          <a:prstGeom prst="roundRect">
+            <a:avLst>
+              <a:gd name="adj" fmla="val 12000"/>
+            </a:avLst>
+          </a:prstGeom>
+          <a:solidFill>
+            <a:srgbClr val="F2F2F2"/>
+          </a:solidFill>
+          <a:ln>
+            <a:noFill/>
+          </a:ln>
+        </p:spPr>
+        <p:style>
+          <a:lnRef idx="1">
+            <a:schemeClr val="accent1"/>
+          </a:lnRef>
+          <a:fillRef idx="3">
+            <a:schemeClr val="accent1"/>
+          </a:fillRef>
+          <a:effectRef idx="2">
+            <a:schemeClr val="accent1"/>
+          </a:effectRef>
+          <a:fontRef idx="minor">
+            <a:schemeClr val="lt1"/>
+          </a:fontRef>
+        </p:style>
+        <p:txBody>
+          <a:bodyPr rtlCol="0" anchor="ctr"/>
+          <a:lstStyle/>
+          <a:p>
+            <a:pPr algn="ctr"/>
+          </a:p>
+        </p:txBody>
+      </p:sp>
+      <p:sp>
+        <p:nvSpPr>
+          <p:cNvPr id="7" name="Rectangle 6"/>
+          <p:cNvSpPr/>
+          <p:nvPr/>
+        </p:nvSpPr>
+        <p:spPr>
+          <a:xfrm>
+            <a:off x="640080" y="1618487"/>
+            <a:ext cx="274320" cy="274320"/>
+          </a:xfrm>
+          <a:prstGeom prst="rect">
+            <a:avLst/>
+          </a:prstGeom>
+          <a:solidFill>
+            <a:srgbClr val="FFFFFF"/>
+          </a:solidFill>
+          <a:ln>
+            <a:solidFill>
+              <a:srgbClr val="333333"/>
+            </a:solidFill>
+          </a:ln>
+        </p:spPr>
+        <p:style>
+          <a:lnRef idx="1">
+            <a:schemeClr val="accent1"/>
+          </a:lnRef>
+          <a:fillRef idx="3">
+            <a:schemeClr val="accent1"/>
+          </a:fillRef>
+          <a:effectRef idx="2">
+            <a:schemeClr val="accent1"/>
+          </a:effectRef>
+          <a:fontRef idx="minor">
+            <a:schemeClr val="lt1"/>
+          </a:fontRef>
+        </p:style>
+        <p:txBody>
+          <a:bodyPr rtlCol="0" anchor="ctr"/>
+          <a:lstStyle/>
+          <a:p>
+            <a:pPr algn="ctr"/>
+          </a:p>
+        </p:txBody>
+      </p:sp>
+      <p:sp>
+        <p:nvSpPr>
+          <p:cNvPr id="8" name="Rectangle 7"/>
+          <p:cNvSpPr/>
+          <p:nvPr/>
+        </p:nvSpPr>
+        <p:spPr>
+          <a:xfrm>
+            <a:off x="640080" y="1618487"/>
+            <a:ext cx="73152" cy="274320"/>
           </a:xfrm>
           <a:prstGeom prst="rect">
             <a:avLst/>
@@ -5025,40 +6230,16 @@
           </a:p>
         </p:txBody>
       </p:sp>
-      <p:pic>
-        <p:nvPicPr>
-          <p:cNvPr id="3" name="Picture 2" descr="logo_uniajc_color.png"/>
-          <p:cNvPicPr>
-            <a:picLocks noChangeAspect="1"/>
-          </p:cNvPicPr>
-          <p:nvPr/>
-        </p:nvPicPr>
-        <p:blipFill>
-          <a:blip r:embed="rId2"/>
-          <a:stretch>
-            <a:fillRect/>
-          </a:stretch>
-        </p:blipFill>
-        <p:spPr>
-          <a:xfrm>
-            <a:off x="10271455" y="5998464"/>
-            <a:ext cx="1463040" cy="643233"/>
-          </a:xfrm>
-          <a:prstGeom prst="rect">
-            <a:avLst/>
-          </a:prstGeom>
-        </p:spPr>
-      </p:pic>
-      <p:sp>
-        <p:nvSpPr>
-          <p:cNvPr id="4" name="TextBox 3"/>
+      <p:sp>
+        <p:nvSpPr>
+          <p:cNvPr id="9" name="TextBox 8"/>
           <p:cNvSpPr txBox="1"/>
           <p:nvPr/>
         </p:nvSpPr>
         <p:spPr>
           <a:xfrm>
-            <a:off x="457200" y="1737360"/>
-            <a:ext cx="11277295" cy="1097280"/>
+            <a:off x="1097280" y="1563624"/>
+            <a:ext cx="10362895" cy="402336"/>
           </a:xfrm>
           <a:prstGeom prst="rect">
             <a:avLst/>
@@ -5069,29 +6250,859 @@
           <a:bodyPr wrap="square" anchor="ctr"/>
           <a:lstStyle/>
           <a:p>
+            <a:r>
+              <a:rPr sz="1500" b="1" i="0">
+                <a:solidFill>
+                  <a:srgbClr val="333333"/>
+                </a:solidFill>
+                <a:latin typeface="Calibri"/>
+              </a:rPr>
+              <a:t>LAS DOS ALTERNATIVAS</a:t>
+            </a:r>
+            <a:r>
+              <a:rPr sz="1500" b="0" i="0">
+                <a:solidFill>
+                  <a:srgbClr val="333333"/>
+                </a:solidFill>
+                <a:latin typeface="Calibri"/>
+              </a:rPr>
+              <a:t> — Cada alternativa en </a:t>
+            </a:r>
+            <a:r>
+              <a:rPr sz="1500" b="1" i="0">
+                <a:solidFill>
+                  <a:srgbClr val="333333"/>
+                </a:solidFill>
+                <a:latin typeface="Calibri"/>
+              </a:rPr>
+              <a:t>una frase</a:t>
+            </a:r>
+            <a:r>
+              <a:rPr sz="1500" b="0" i="0">
+                <a:solidFill>
+                  <a:srgbClr val="333333"/>
+                </a:solidFill>
+                <a:latin typeface="Calibri"/>
+              </a:rPr>
+              <a:t>, sin adjetivos, diciendo qué hace y cómo resuelve la causa elegida en el árbol de la sesión 6.</a:t>
+            </a:r>
+          </a:p>
+        </p:txBody>
+      </p:sp>
+      <p:sp>
+        <p:nvSpPr>
+          <p:cNvPr id="10" name="Rounded Rectangle 9"/>
+          <p:cNvSpPr/>
+          <p:nvPr/>
+        </p:nvSpPr>
+        <p:spPr>
+          <a:xfrm>
+            <a:off x="457200" y="2148839"/>
+            <a:ext cx="11277295" cy="566928"/>
+          </a:xfrm>
+          <a:prstGeom prst="roundRect">
+            <a:avLst>
+              <a:gd name="adj" fmla="val 12000"/>
+            </a:avLst>
+          </a:prstGeom>
+          <a:solidFill>
+            <a:srgbClr val="F2F2F2"/>
+          </a:solidFill>
+          <a:ln>
+            <a:noFill/>
+          </a:ln>
+        </p:spPr>
+        <p:style>
+          <a:lnRef idx="1">
+            <a:schemeClr val="accent1"/>
+          </a:lnRef>
+          <a:fillRef idx="3">
+            <a:schemeClr val="accent1"/>
+          </a:fillRef>
+          <a:effectRef idx="2">
+            <a:schemeClr val="accent1"/>
+          </a:effectRef>
+          <a:fontRef idx="minor">
+            <a:schemeClr val="lt1"/>
+          </a:fontRef>
+        </p:style>
+        <p:txBody>
+          <a:bodyPr rtlCol="0" anchor="ctr"/>
+          <a:lstStyle/>
+          <a:p>
             <a:pPr algn="ctr"/>
-            <a:r>
-              <a:rPr sz="3400" b="1" i="0">
-                <a:solidFill>
-                  <a:srgbClr val="095292"/>
-                </a:solidFill>
-                <a:latin typeface="Calibri"/>
-              </a:rPr>
-              <a:t>Nos vemos en la sesión 9</a:t>
-            </a:r>
-          </a:p>
-        </p:txBody>
-      </p:sp>
-      <p:sp>
-        <p:nvSpPr>
-          <p:cNvPr id="5" name="TextBox 4"/>
+          </a:p>
+        </p:txBody>
+      </p:sp>
+      <p:sp>
+        <p:nvSpPr>
+          <p:cNvPr id="11" name="Rectangle 10"/>
+          <p:cNvSpPr/>
+          <p:nvPr/>
+        </p:nvSpPr>
+        <p:spPr>
+          <a:xfrm>
+            <a:off x="640080" y="2295144"/>
+            <a:ext cx="274320" cy="274320"/>
+          </a:xfrm>
+          <a:prstGeom prst="rect">
+            <a:avLst/>
+          </a:prstGeom>
+          <a:solidFill>
+            <a:srgbClr val="FFFFFF"/>
+          </a:solidFill>
+          <a:ln>
+            <a:solidFill>
+              <a:srgbClr val="333333"/>
+            </a:solidFill>
+          </a:ln>
+        </p:spPr>
+        <p:style>
+          <a:lnRef idx="1">
+            <a:schemeClr val="accent1"/>
+          </a:lnRef>
+          <a:fillRef idx="3">
+            <a:schemeClr val="accent1"/>
+          </a:fillRef>
+          <a:effectRef idx="2">
+            <a:schemeClr val="accent1"/>
+          </a:effectRef>
+          <a:fontRef idx="minor">
+            <a:schemeClr val="lt1"/>
+          </a:fontRef>
+        </p:style>
+        <p:txBody>
+          <a:bodyPr rtlCol="0" anchor="ctr"/>
+          <a:lstStyle/>
+          <a:p>
+            <a:pPr algn="ctr"/>
+          </a:p>
+        </p:txBody>
+      </p:sp>
+      <p:sp>
+        <p:nvSpPr>
+          <p:cNvPr id="12" name="Rectangle 11"/>
+          <p:cNvSpPr/>
+          <p:nvPr/>
+        </p:nvSpPr>
+        <p:spPr>
+          <a:xfrm>
+            <a:off x="640080" y="2295144"/>
+            <a:ext cx="73152" cy="274320"/>
+          </a:xfrm>
+          <a:prstGeom prst="rect">
+            <a:avLst/>
+          </a:prstGeom>
+          <a:solidFill>
+            <a:srgbClr val="269CCB"/>
+          </a:solidFill>
+          <a:ln>
+            <a:noFill/>
+          </a:ln>
+        </p:spPr>
+        <p:style>
+          <a:lnRef idx="1">
+            <a:schemeClr val="accent1"/>
+          </a:lnRef>
+          <a:fillRef idx="3">
+            <a:schemeClr val="accent1"/>
+          </a:fillRef>
+          <a:effectRef idx="2">
+            <a:schemeClr val="accent1"/>
+          </a:effectRef>
+          <a:fontRef idx="minor">
+            <a:schemeClr val="lt1"/>
+          </a:fontRef>
+        </p:style>
+        <p:txBody>
+          <a:bodyPr rtlCol="0" anchor="ctr"/>
+          <a:lstStyle/>
+          <a:p>
+            <a:pPr algn="ctr"/>
+          </a:p>
+        </p:txBody>
+      </p:sp>
+      <p:sp>
+        <p:nvSpPr>
+          <p:cNvPr id="13" name="TextBox 12"/>
           <p:cNvSpPr txBox="1"/>
           <p:nvPr/>
         </p:nvSpPr>
         <p:spPr>
           <a:xfrm>
-            <a:off x="457200" y="3017520"/>
-            <a:ext cx="11277295" cy="1645920"/>
+            <a:off x="1097280" y="2240279"/>
+            <a:ext cx="10362895" cy="402336"/>
+          </a:xfrm>
+          <a:prstGeom prst="rect">
+            <a:avLst/>
+          </a:prstGeom>
+          <a:noFill/>
+        </p:spPr>
+        <p:txBody>
+          <a:bodyPr wrap="square" anchor="ctr"/>
+          <a:lstStyle/>
+          <a:p>
+            <a:r>
+              <a:rPr sz="1500" b="1" i="0">
+                <a:solidFill>
+                  <a:srgbClr val="333333"/>
+                </a:solidFill>
+                <a:latin typeface="Calibri"/>
+              </a:rPr>
+              <a:t>LOS CRITERIOS Y SUS PESOS</a:t>
+            </a:r>
+            <a:r>
+              <a:rPr sz="1500" b="0" i="0">
+                <a:solidFill>
+                  <a:srgbClr val="333333"/>
+                </a:solidFill>
+                <a:latin typeface="Calibri"/>
+              </a:rPr>
+              <a:t> — De 3 a 5 criterios sacados de sus </a:t>
+            </a:r>
+            <a:r>
+              <a:rPr sz="1500" b="1" i="0">
+                <a:solidFill>
+                  <a:srgbClr val="333333"/>
+                </a:solidFill>
+                <a:latin typeface="Calibri"/>
+              </a:rPr>
+              <a:t>requisitos no funcionales y restricciones</a:t>
+            </a:r>
+            <a:r>
+              <a:rPr sz="1500" b="0" i="0">
+                <a:solidFill>
+                  <a:srgbClr val="333333"/>
+                </a:solidFill>
+                <a:latin typeface="Calibri"/>
+              </a:rPr>
+              <a:t>, cada uno con un peso, </a:t>
+            </a:r>
+            <a:r>
+              <a:rPr sz="1500" b="1" i="0">
+                <a:solidFill>
+                  <a:srgbClr val="333333"/>
+                </a:solidFill>
+                <a:latin typeface="Calibri"/>
+              </a:rPr>
+              <a:t>escritos antes de calificar</a:t>
+            </a:r>
+            <a:r>
+              <a:rPr sz="1500" b="0" i="0">
+                <a:solidFill>
+                  <a:srgbClr val="333333"/>
+                </a:solidFill>
+                <a:latin typeface="Calibri"/>
+              </a:rPr>
+              <a:t>.</a:t>
+            </a:r>
+          </a:p>
+        </p:txBody>
+      </p:sp>
+      <p:sp>
+        <p:nvSpPr>
+          <p:cNvPr id="14" name="Rounded Rectangle 13"/>
+          <p:cNvSpPr/>
+          <p:nvPr/>
+        </p:nvSpPr>
+        <p:spPr>
+          <a:xfrm>
+            <a:off x="457200" y="2825496"/>
+            <a:ext cx="11277295" cy="566928"/>
+          </a:xfrm>
+          <a:prstGeom prst="roundRect">
+            <a:avLst>
+              <a:gd name="adj" fmla="val 12000"/>
+            </a:avLst>
+          </a:prstGeom>
+          <a:solidFill>
+            <a:srgbClr val="F2F2F2"/>
+          </a:solidFill>
+          <a:ln>
+            <a:noFill/>
+          </a:ln>
+        </p:spPr>
+        <p:style>
+          <a:lnRef idx="1">
+            <a:schemeClr val="accent1"/>
+          </a:lnRef>
+          <a:fillRef idx="3">
+            <a:schemeClr val="accent1"/>
+          </a:fillRef>
+          <a:effectRef idx="2">
+            <a:schemeClr val="accent1"/>
+          </a:effectRef>
+          <a:fontRef idx="minor">
+            <a:schemeClr val="lt1"/>
+          </a:fontRef>
+        </p:style>
+        <p:txBody>
+          <a:bodyPr rtlCol="0" anchor="ctr"/>
+          <a:lstStyle/>
+          <a:p>
+            <a:pPr algn="ctr"/>
+          </a:p>
+        </p:txBody>
+      </p:sp>
+      <p:sp>
+        <p:nvSpPr>
+          <p:cNvPr id="15" name="Rectangle 14"/>
+          <p:cNvSpPr/>
+          <p:nvPr/>
+        </p:nvSpPr>
+        <p:spPr>
+          <a:xfrm>
+            <a:off x="640080" y="2971800"/>
+            <a:ext cx="274320" cy="274320"/>
+          </a:xfrm>
+          <a:prstGeom prst="rect">
+            <a:avLst/>
+          </a:prstGeom>
+          <a:solidFill>
+            <a:srgbClr val="FFFFFF"/>
+          </a:solidFill>
+          <a:ln>
+            <a:solidFill>
+              <a:srgbClr val="333333"/>
+            </a:solidFill>
+          </a:ln>
+        </p:spPr>
+        <p:style>
+          <a:lnRef idx="1">
+            <a:schemeClr val="accent1"/>
+          </a:lnRef>
+          <a:fillRef idx="3">
+            <a:schemeClr val="accent1"/>
+          </a:fillRef>
+          <a:effectRef idx="2">
+            <a:schemeClr val="accent1"/>
+          </a:effectRef>
+          <a:fontRef idx="minor">
+            <a:schemeClr val="lt1"/>
+          </a:fontRef>
+        </p:style>
+        <p:txBody>
+          <a:bodyPr rtlCol="0" anchor="ctr"/>
+          <a:lstStyle/>
+          <a:p>
+            <a:pPr algn="ctr"/>
+          </a:p>
+        </p:txBody>
+      </p:sp>
+      <p:sp>
+        <p:nvSpPr>
+          <p:cNvPr id="16" name="Rectangle 15"/>
+          <p:cNvSpPr/>
+          <p:nvPr/>
+        </p:nvSpPr>
+        <p:spPr>
+          <a:xfrm>
+            <a:off x="640080" y="2971800"/>
+            <a:ext cx="73152" cy="274320"/>
+          </a:xfrm>
+          <a:prstGeom prst="rect">
+            <a:avLst/>
+          </a:prstGeom>
+          <a:solidFill>
+            <a:srgbClr val="269CCB"/>
+          </a:solidFill>
+          <a:ln>
+            <a:noFill/>
+          </a:ln>
+        </p:spPr>
+        <p:style>
+          <a:lnRef idx="1">
+            <a:schemeClr val="accent1"/>
+          </a:lnRef>
+          <a:fillRef idx="3">
+            <a:schemeClr val="accent1"/>
+          </a:fillRef>
+          <a:effectRef idx="2">
+            <a:schemeClr val="accent1"/>
+          </a:effectRef>
+          <a:fontRef idx="minor">
+            <a:schemeClr val="lt1"/>
+          </a:fontRef>
+        </p:style>
+        <p:txBody>
+          <a:bodyPr rtlCol="0" anchor="ctr"/>
+          <a:lstStyle/>
+          <a:p>
+            <a:pPr algn="ctr"/>
+          </a:p>
+        </p:txBody>
+      </p:sp>
+      <p:sp>
+        <p:nvSpPr>
+          <p:cNvPr id="17" name="TextBox 16"/>
+          <p:cNvSpPr txBox="1"/>
+          <p:nvPr/>
+        </p:nvSpPr>
+        <p:spPr>
+          <a:xfrm>
+            <a:off x="1097280" y="2916936"/>
+            <a:ext cx="10362895" cy="402336"/>
+          </a:xfrm>
+          <a:prstGeom prst="rect">
+            <a:avLst/>
+          </a:prstGeom>
+          <a:noFill/>
+        </p:spPr>
+        <p:txBody>
+          <a:bodyPr wrap="square" anchor="ctr"/>
+          <a:lstStyle/>
+          <a:p>
+            <a:r>
+              <a:rPr sz="1500" b="1" i="0">
+                <a:solidFill>
+                  <a:srgbClr val="333333"/>
+                </a:solidFill>
+                <a:latin typeface="Calibri"/>
+              </a:rPr>
+              <a:t>LA MATRIZ Y LA DECISIÓN</a:t>
+            </a:r>
+            <a:r>
+              <a:rPr sz="1500" b="0" i="0">
+                <a:solidFill>
+                  <a:srgbClr val="333333"/>
+                </a:solidFill>
+                <a:latin typeface="Calibri"/>
+              </a:rPr>
+              <a:t> — Cada alternativa calificada criterio por criterio (escala 1-3) con </a:t>
+            </a:r>
+            <a:r>
+              <a:rPr sz="1500" b="1" i="0">
+                <a:solidFill>
+                  <a:srgbClr val="333333"/>
+                </a:solidFill>
+                <a:latin typeface="Calibri"/>
+              </a:rPr>
+              <a:t>media línea de justificación por casilla</a:t>
+            </a:r>
+            <a:r>
+              <a:rPr sz="1500" b="0" i="0">
+                <a:solidFill>
+                  <a:srgbClr val="333333"/>
+                </a:solidFill>
+                <a:latin typeface="Calibri"/>
+              </a:rPr>
+              <a:t>, el resultado, y la decisión.</a:t>
+            </a:r>
+          </a:p>
+        </p:txBody>
+      </p:sp>
+      <p:sp>
+        <p:nvSpPr>
+          <p:cNvPr id="18" name="Rounded Rectangle 17"/>
+          <p:cNvSpPr/>
+          <p:nvPr/>
+        </p:nvSpPr>
+        <p:spPr>
+          <a:xfrm>
+            <a:off x="457200" y="3502152"/>
+            <a:ext cx="11277295" cy="566928"/>
+          </a:xfrm>
+          <a:prstGeom prst="roundRect">
+            <a:avLst>
+              <a:gd name="adj" fmla="val 12000"/>
+            </a:avLst>
+          </a:prstGeom>
+          <a:solidFill>
+            <a:srgbClr val="F2F2F2"/>
+          </a:solidFill>
+          <a:ln>
+            <a:noFill/>
+          </a:ln>
+        </p:spPr>
+        <p:style>
+          <a:lnRef idx="1">
+            <a:schemeClr val="accent1"/>
+          </a:lnRef>
+          <a:fillRef idx="3">
+            <a:schemeClr val="accent1"/>
+          </a:fillRef>
+          <a:effectRef idx="2">
+            <a:schemeClr val="accent1"/>
+          </a:effectRef>
+          <a:fontRef idx="minor">
+            <a:schemeClr val="lt1"/>
+          </a:fontRef>
+        </p:style>
+        <p:txBody>
+          <a:bodyPr rtlCol="0" anchor="ctr"/>
+          <a:lstStyle/>
+          <a:p>
+            <a:pPr algn="ctr"/>
+          </a:p>
+        </p:txBody>
+      </p:sp>
+      <p:sp>
+        <p:nvSpPr>
+          <p:cNvPr id="19" name="Rectangle 18"/>
+          <p:cNvSpPr/>
+          <p:nvPr/>
+        </p:nvSpPr>
+        <p:spPr>
+          <a:xfrm>
+            <a:off x="640080" y="3648456"/>
+            <a:ext cx="274320" cy="274320"/>
+          </a:xfrm>
+          <a:prstGeom prst="rect">
+            <a:avLst/>
+          </a:prstGeom>
+          <a:solidFill>
+            <a:srgbClr val="FFFFFF"/>
+          </a:solidFill>
+          <a:ln>
+            <a:solidFill>
+              <a:srgbClr val="333333"/>
+            </a:solidFill>
+          </a:ln>
+        </p:spPr>
+        <p:style>
+          <a:lnRef idx="1">
+            <a:schemeClr val="accent1"/>
+          </a:lnRef>
+          <a:fillRef idx="3">
+            <a:schemeClr val="accent1"/>
+          </a:fillRef>
+          <a:effectRef idx="2">
+            <a:schemeClr val="accent1"/>
+          </a:effectRef>
+          <a:fontRef idx="minor">
+            <a:schemeClr val="lt1"/>
+          </a:fontRef>
+        </p:style>
+        <p:txBody>
+          <a:bodyPr rtlCol="0" anchor="ctr"/>
+          <a:lstStyle/>
+          <a:p>
+            <a:pPr algn="ctr"/>
+          </a:p>
+        </p:txBody>
+      </p:sp>
+      <p:sp>
+        <p:nvSpPr>
+          <p:cNvPr id="20" name="Rectangle 19"/>
+          <p:cNvSpPr/>
+          <p:nvPr/>
+        </p:nvSpPr>
+        <p:spPr>
+          <a:xfrm>
+            <a:off x="640080" y="3648456"/>
+            <a:ext cx="73152" cy="274320"/>
+          </a:xfrm>
+          <a:prstGeom prst="rect">
+            <a:avLst/>
+          </a:prstGeom>
+          <a:solidFill>
+            <a:srgbClr val="269CCB"/>
+          </a:solidFill>
+          <a:ln>
+            <a:noFill/>
+          </a:ln>
+        </p:spPr>
+        <p:style>
+          <a:lnRef idx="1">
+            <a:schemeClr val="accent1"/>
+          </a:lnRef>
+          <a:fillRef idx="3">
+            <a:schemeClr val="accent1"/>
+          </a:fillRef>
+          <a:effectRef idx="2">
+            <a:schemeClr val="accent1"/>
+          </a:effectRef>
+          <a:fontRef idx="minor">
+            <a:schemeClr val="lt1"/>
+          </a:fontRef>
+        </p:style>
+        <p:txBody>
+          <a:bodyPr rtlCol="0" anchor="ctr"/>
+          <a:lstStyle/>
+          <a:p>
+            <a:pPr algn="ctr"/>
+          </a:p>
+        </p:txBody>
+      </p:sp>
+      <p:sp>
+        <p:nvSpPr>
+          <p:cNvPr id="21" name="TextBox 20"/>
+          <p:cNvSpPr txBox="1"/>
+          <p:nvPr/>
+        </p:nvSpPr>
+        <p:spPr>
+          <a:xfrm>
+            <a:off x="1097280" y="3593592"/>
+            <a:ext cx="10362895" cy="402336"/>
+          </a:xfrm>
+          <a:prstGeom prst="rect">
+            <a:avLst/>
+          </a:prstGeom>
+          <a:noFill/>
+        </p:spPr>
+        <p:txBody>
+          <a:bodyPr wrap="square" anchor="ctr"/>
+          <a:lstStyle/>
+          <a:p>
+            <a:r>
+              <a:rPr sz="1500" b="1" i="0">
+                <a:solidFill>
+                  <a:srgbClr val="333333"/>
+                </a:solidFill>
+                <a:latin typeface="Calibri"/>
+              </a:rPr>
+              <a:t>QUÉ SE PIERDE</a:t>
+            </a:r>
+            <a:r>
+              <a:rPr sz="1500" b="0" i="0">
+                <a:solidFill>
+                  <a:srgbClr val="333333"/>
+                </a:solidFill>
+                <a:latin typeface="Calibri"/>
+              </a:rPr>
+              <a:t> — Lo que la decisión sacrifica, en dos o tres líneas. Toda decisión sacrifica algo.</a:t>
+            </a:r>
+          </a:p>
+        </p:txBody>
+      </p:sp>
+      <p:sp>
+        <p:nvSpPr>
+          <p:cNvPr id="22" name="Rounded Rectangle 21"/>
+          <p:cNvSpPr/>
+          <p:nvPr/>
+        </p:nvSpPr>
+        <p:spPr>
+          <a:xfrm>
+            <a:off x="457200" y="4178808"/>
+            <a:ext cx="11277295" cy="566928"/>
+          </a:xfrm>
+          <a:prstGeom prst="roundRect">
+            <a:avLst>
+              <a:gd name="adj" fmla="val 12000"/>
+            </a:avLst>
+          </a:prstGeom>
+          <a:solidFill>
+            <a:srgbClr val="F2F2F2"/>
+          </a:solidFill>
+          <a:ln>
+            <a:noFill/>
+          </a:ln>
+        </p:spPr>
+        <p:style>
+          <a:lnRef idx="1">
+            <a:schemeClr val="accent1"/>
+          </a:lnRef>
+          <a:fillRef idx="3">
+            <a:schemeClr val="accent1"/>
+          </a:fillRef>
+          <a:effectRef idx="2">
+            <a:schemeClr val="accent1"/>
+          </a:effectRef>
+          <a:fontRef idx="minor">
+            <a:schemeClr val="lt1"/>
+          </a:fontRef>
+        </p:style>
+        <p:txBody>
+          <a:bodyPr rtlCol="0" anchor="ctr"/>
+          <a:lstStyle/>
+          <a:p>
+            <a:pPr algn="ctr"/>
+          </a:p>
+        </p:txBody>
+      </p:sp>
+      <p:sp>
+        <p:nvSpPr>
+          <p:cNvPr id="23" name="Rectangle 22"/>
+          <p:cNvSpPr/>
+          <p:nvPr/>
+        </p:nvSpPr>
+        <p:spPr>
+          <a:xfrm>
+            <a:off x="640080" y="4325112"/>
+            <a:ext cx="274320" cy="274320"/>
+          </a:xfrm>
+          <a:prstGeom prst="rect">
+            <a:avLst/>
+          </a:prstGeom>
+          <a:solidFill>
+            <a:srgbClr val="FFFFFF"/>
+          </a:solidFill>
+          <a:ln>
+            <a:solidFill>
+              <a:srgbClr val="333333"/>
+            </a:solidFill>
+          </a:ln>
+        </p:spPr>
+        <p:style>
+          <a:lnRef idx="1">
+            <a:schemeClr val="accent1"/>
+          </a:lnRef>
+          <a:fillRef idx="3">
+            <a:schemeClr val="accent1"/>
+          </a:fillRef>
+          <a:effectRef idx="2">
+            <a:schemeClr val="accent1"/>
+          </a:effectRef>
+          <a:fontRef idx="minor">
+            <a:schemeClr val="lt1"/>
+          </a:fontRef>
+        </p:style>
+        <p:txBody>
+          <a:bodyPr rtlCol="0" anchor="ctr"/>
+          <a:lstStyle/>
+          <a:p>
+            <a:pPr algn="ctr"/>
+          </a:p>
+        </p:txBody>
+      </p:sp>
+      <p:sp>
+        <p:nvSpPr>
+          <p:cNvPr id="24" name="Rectangle 23"/>
+          <p:cNvSpPr/>
+          <p:nvPr/>
+        </p:nvSpPr>
+        <p:spPr>
+          <a:xfrm>
+            <a:off x="640080" y="4325112"/>
+            <a:ext cx="73152" cy="274320"/>
+          </a:xfrm>
+          <a:prstGeom prst="rect">
+            <a:avLst/>
+          </a:prstGeom>
+          <a:solidFill>
+            <a:srgbClr val="269CCB"/>
+          </a:solidFill>
+          <a:ln>
+            <a:noFill/>
+          </a:ln>
+        </p:spPr>
+        <p:style>
+          <a:lnRef idx="1">
+            <a:schemeClr val="accent1"/>
+          </a:lnRef>
+          <a:fillRef idx="3">
+            <a:schemeClr val="accent1"/>
+          </a:fillRef>
+          <a:effectRef idx="2">
+            <a:schemeClr val="accent1"/>
+          </a:effectRef>
+          <a:fontRef idx="minor">
+            <a:schemeClr val="lt1"/>
+          </a:fontRef>
+        </p:style>
+        <p:txBody>
+          <a:bodyPr rtlCol="0" anchor="ctr"/>
+          <a:lstStyle/>
+          <a:p>
+            <a:pPr algn="ctr"/>
+          </a:p>
+        </p:txBody>
+      </p:sp>
+      <p:sp>
+        <p:nvSpPr>
+          <p:cNvPr id="25" name="TextBox 24"/>
+          <p:cNvSpPr txBox="1"/>
+          <p:nvPr/>
+        </p:nvSpPr>
+        <p:spPr>
+          <a:xfrm>
+            <a:off x="1097280" y="4270248"/>
+            <a:ext cx="10362895" cy="402336"/>
+          </a:xfrm>
+          <a:prstGeom prst="rect">
+            <a:avLst/>
+          </a:prstGeom>
+          <a:noFill/>
+        </p:spPr>
+        <p:txBody>
+          <a:bodyPr wrap="square" anchor="ctr"/>
+          <a:lstStyle/>
+          <a:p>
+            <a:r>
+              <a:rPr sz="1500" b="1" i="0">
+                <a:solidFill>
+                  <a:srgbClr val="333333"/>
+                </a:solidFill>
+                <a:latin typeface="Calibri"/>
+              </a:rPr>
+              <a:t>ALCANCE MÍNIMO Y PLAN DE VALIDACIÓN</a:t>
+            </a:r>
+            <a:r>
+              <a:rPr sz="1500" b="0" i="0">
+                <a:solidFill>
+                  <a:srgbClr val="333333"/>
+                </a:solidFill>
+                <a:latin typeface="Calibri"/>
+              </a:rPr>
+              <a:t> — Qué se construye este semestre (un requisito funcional completo, cumpliendo los no funcionales), la lista de lo que queda para «versión siguiente», y el plan de validación: </a:t>
+            </a:r>
+            <a:r>
+              <a:rPr sz="1500" b="1" i="0">
+                <a:solidFill>
+                  <a:srgbClr val="333333"/>
+                </a:solidFill>
+                <a:latin typeface="Calibri"/>
+              </a:rPr>
+              <a:t>con quién</a:t>
+            </a:r>
+            <a:r>
+              <a:rPr sz="1500" b="0" i="0">
+                <a:solidFill>
+                  <a:srgbClr val="333333"/>
+                </a:solidFill>
+                <a:latin typeface="Calibri"/>
+              </a:rPr>
+              <a:t> se prueba, </a:t>
+            </a:r>
+            <a:r>
+              <a:rPr sz="1500" b="1" i="0">
+                <a:solidFill>
+                  <a:srgbClr val="333333"/>
+                </a:solidFill>
+                <a:latin typeface="Calibri"/>
+              </a:rPr>
+              <a:t>qué tareas</a:t>
+            </a:r>
+            <a:r>
+              <a:rPr sz="1500" b="0" i="0">
+                <a:solidFill>
+                  <a:srgbClr val="333333"/>
+                </a:solidFill>
+                <a:latin typeface="Calibri"/>
+              </a:rPr>
+              <a:t> se le piden y </a:t>
+            </a:r>
+            <a:r>
+              <a:rPr sz="1500" b="1" i="0">
+                <a:solidFill>
+                  <a:srgbClr val="333333"/>
+                </a:solidFill>
+                <a:latin typeface="Calibri"/>
+              </a:rPr>
+              <a:t>qué se observa</a:t>
+            </a:r>
+            <a:r>
+              <a:rPr sz="1500" b="0" i="0">
+                <a:solidFill>
+                  <a:srgbClr val="333333"/>
+                </a:solidFill>
+                <a:latin typeface="Calibri"/>
+              </a:rPr>
+              <a:t>.</a:t>
+            </a:r>
+          </a:p>
+        </p:txBody>
+      </p:sp>
+      <p:sp>
+        <p:nvSpPr>
+          <p:cNvPr id="26" name="TextBox 25"/>
+          <p:cNvSpPr txBox="1"/>
+          <p:nvPr/>
+        </p:nvSpPr>
+        <p:spPr>
+          <a:xfrm>
+            <a:off x="11185855" y="6473952"/>
+            <a:ext cx="640080" cy="274320"/>
           </a:xfrm>
           <a:prstGeom prst="rect">
             <a:avLst/>
@@ -5104,49 +7115,141 @@
           </a:bodyPr>
           <a:lstStyle/>
           <a:p>
-            <a:pPr algn="ctr">
-              <a:spcAft>
-                <a:spcPts val="600"/>
-              </a:spcAft>
-            </a:pPr>
-            <a:r>
-              <a:rPr sz="1600" b="0" i="0">
-                <a:solidFill>
-                  <a:srgbClr val="333333"/>
-                </a:solidFill>
-                <a:latin typeface="Calibri"/>
-              </a:rPr>
-              <a:t>Taller de aplicación del ciclo de vida · Clase 8</a:t>
-            </a:r>
-          </a:p>
-          <a:p>
-            <a:pPr algn="ctr">
-              <a:spcAft>
-                <a:spcPts val="600"/>
-              </a:spcAft>
-            </a:pPr>
-            <a:r>
-              <a:rPr sz="1600" b="0" i="0">
-                <a:solidFill>
-                  <a:srgbClr val="333333"/>
-                </a:solidFill>
-                <a:latin typeface="Calibri"/>
-              </a:rPr>
-              <a:t>FI300101 · UNIAJC · Ingeniería de Sistemas</a:t>
-            </a:r>
-          </a:p>
-        </p:txBody>
-      </p:sp>
-      <p:sp>
-        <p:nvSpPr>
-          <p:cNvPr id="6" name="TextBox 5"/>
+            <a:pPr algn="r"/>
+            <a:r>
+              <a:rPr sz="1100" b="0" i="0">
+                <a:solidFill>
+                  <a:srgbClr val="666666"/>
+                </a:solidFill>
+                <a:latin typeface="Calibri"/>
+              </a:rPr>
+              <a:t>17</a:t>
+            </a:r>
+          </a:p>
+        </p:txBody>
+      </p:sp>
+    </p:spTree>
+  </p:cSld>
+  <p:clrMapOvr>
+    <a:masterClrMapping/>
+  </p:clrMapOvr>
+</p:sld>
+</file>
+
+<file path=ppt/slides/slide18.xml><?xml version="1.0" encoding="utf-8"?>
+<p:sld xmlns:a="http://schemas.openxmlformats.org/drawingml/2006/main" xmlns:p="http://schemas.openxmlformats.org/presentationml/2006/main" xmlns:r="http://schemas.openxmlformats.org/officeDocument/2006/relationships">
+  <p:cSld>
+    <p:bg>
+      <p:bgPr>
+        <a:solidFill>
+          <a:srgbClr val="FFFFFF"/>
+        </a:solidFill>
+        <a:effectLst/>
+      </p:bgPr>
+    </p:bg>
+    <p:spTree>
+      <p:nvGrpSpPr>
+        <p:cNvPr id="1" name=""/>
+        <p:cNvGrpSpPr/>
+        <p:nvPr/>
+      </p:nvGrpSpPr>
+      <p:grpSpPr/>
+      <p:sp>
+        <p:nvSpPr>
+          <p:cNvPr id="2" name="Rectangle 1"/>
+          <p:cNvSpPr/>
+          <p:nvPr/>
+        </p:nvSpPr>
+        <p:spPr>
+          <a:xfrm>
+            <a:off x="0" y="0"/>
+            <a:ext cx="12191695" cy="1170432"/>
+          </a:xfrm>
+          <a:prstGeom prst="rect">
+            <a:avLst/>
+          </a:prstGeom>
+          <a:solidFill>
+            <a:srgbClr val="095292"/>
+          </a:solidFill>
+          <a:ln>
+            <a:noFill/>
+          </a:ln>
+        </p:spPr>
+        <p:style>
+          <a:lnRef idx="1">
+            <a:schemeClr val="accent1"/>
+          </a:lnRef>
+          <a:fillRef idx="3">
+            <a:schemeClr val="accent1"/>
+          </a:fillRef>
+          <a:effectRef idx="2">
+            <a:schemeClr val="accent1"/>
+          </a:effectRef>
+          <a:fontRef idx="minor">
+            <a:schemeClr val="lt1"/>
+          </a:fontRef>
+        </p:style>
+        <p:txBody>
+          <a:bodyPr rtlCol="0" anchor="ctr"/>
+          <a:lstStyle/>
+          <a:p>
+            <a:pPr algn="ctr"/>
+          </a:p>
+        </p:txBody>
+      </p:sp>
+      <p:sp>
+        <p:nvSpPr>
+          <p:cNvPr id="3" name="Rectangle 2"/>
+          <p:cNvSpPr/>
+          <p:nvPr/>
+        </p:nvSpPr>
+        <p:spPr>
+          <a:xfrm>
+            <a:off x="0" y="1170432"/>
+            <a:ext cx="12191695" cy="41148"/>
+          </a:xfrm>
+          <a:prstGeom prst="rect">
+            <a:avLst/>
+          </a:prstGeom>
+          <a:solidFill>
+            <a:srgbClr val="FFD000"/>
+          </a:solidFill>
+          <a:ln>
+            <a:noFill/>
+          </a:ln>
+        </p:spPr>
+        <p:style>
+          <a:lnRef idx="1">
+            <a:schemeClr val="accent1"/>
+          </a:lnRef>
+          <a:fillRef idx="3">
+            <a:schemeClr val="accent1"/>
+          </a:fillRef>
+          <a:effectRef idx="2">
+            <a:schemeClr val="accent1"/>
+          </a:effectRef>
+          <a:fontRef idx="minor">
+            <a:schemeClr val="lt1"/>
+          </a:fontRef>
+        </p:style>
+        <p:txBody>
+          <a:bodyPr rtlCol="0" anchor="ctr"/>
+          <a:lstStyle/>
+          <a:p>
+            <a:pPr algn="ctr"/>
+          </a:p>
+        </p:txBody>
+      </p:sp>
+      <p:sp>
+        <p:nvSpPr>
+          <p:cNvPr id="4" name="TextBox 3"/>
           <p:cNvSpPr txBox="1"/>
           <p:nvPr/>
         </p:nvSpPr>
         <p:spPr>
           <a:xfrm>
-            <a:off x="457200" y="4754880"/>
-            <a:ext cx="11277295" cy="640080"/>
+            <a:off x="457200" y="164592"/>
+            <a:ext cx="11277295" cy="384048"/>
           </a:xfrm>
           <a:prstGeom prst="rect">
             <a:avLst/>
@@ -5159,15 +7262,1348 @@
           </a:bodyPr>
           <a:lstStyle/>
           <a:p>
+            <a:r>
+              <a:rPr sz="2600" b="1" i="0">
+                <a:solidFill>
+                  <a:srgbClr val="FFFFFF"/>
+                </a:solidFill>
+                <a:latin typeface="Calibri"/>
+              </a:rPr>
+              <a:t>Cómo se expone en 3 minutos</a:t>
+            </a:r>
+          </a:p>
+        </p:txBody>
+      </p:sp>
+      <p:sp>
+        <p:nvSpPr>
+          <p:cNvPr id="5" name="TextBox 4"/>
+          <p:cNvSpPr txBox="1"/>
+          <p:nvPr/>
+        </p:nvSpPr>
+        <p:spPr>
+          <a:xfrm>
+            <a:off x="457200" y="566928"/>
+            <a:ext cx="11277295" cy="411480"/>
+          </a:xfrm>
+          <a:prstGeom prst="rect">
+            <a:avLst/>
+          </a:prstGeom>
+          <a:noFill/>
+        </p:spPr>
+        <p:txBody>
+          <a:bodyPr wrap="square">
+            <a:spAutoFit/>
+          </a:bodyPr>
+          <a:lstStyle/>
+          <a:p>
+            <a:r>
+              <a:rPr sz="1400" b="0" i="0">
+                <a:solidFill>
+                  <a:srgbClr val="B8D8EE"/>
+                </a:solidFill>
+                <a:latin typeface="Calibri"/>
+              </a:rPr>
+              <a:t>Habla el vocero con la pantalla ya compartida · cronómetro en pantalla · se corta al llegar a cero</a:t>
+            </a:r>
+          </a:p>
+        </p:txBody>
+      </p:sp>
+      <p:sp>
+        <p:nvSpPr>
+          <p:cNvPr id="6" name="Rounded Rectangle 5"/>
+          <p:cNvSpPr/>
+          <p:nvPr/>
+        </p:nvSpPr>
+        <p:spPr>
+          <a:xfrm>
+            <a:off x="457200" y="1444752"/>
+            <a:ext cx="11277295" cy="908913"/>
+          </a:xfrm>
+          <a:prstGeom prst="roundRect">
+            <a:avLst>
+              <a:gd name="adj" fmla="val 12000"/>
+            </a:avLst>
+          </a:prstGeom>
+          <a:solidFill>
+            <a:srgbClr val="F2F2F2"/>
+          </a:solidFill>
+          <a:ln>
+            <a:noFill/>
+          </a:ln>
+        </p:spPr>
+        <p:style>
+          <a:lnRef idx="1">
+            <a:schemeClr val="accent1"/>
+          </a:lnRef>
+          <a:fillRef idx="3">
+            <a:schemeClr val="accent1"/>
+          </a:fillRef>
+          <a:effectRef idx="2">
+            <a:schemeClr val="accent1"/>
+          </a:effectRef>
+          <a:fontRef idx="minor">
+            <a:schemeClr val="lt1"/>
+          </a:fontRef>
+        </p:style>
+        <p:txBody>
+          <a:bodyPr rtlCol="0" anchor="ctr"/>
+          <a:lstStyle/>
+          <a:p>
             <a:pPr algn="ctr"/>
+          </a:p>
+        </p:txBody>
+      </p:sp>
+      <p:sp>
+        <p:nvSpPr>
+          <p:cNvPr id="7" name="Rounded Rectangle 6"/>
+          <p:cNvSpPr/>
+          <p:nvPr/>
+        </p:nvSpPr>
+        <p:spPr>
+          <a:xfrm>
+            <a:off x="594360" y="1679752"/>
+            <a:ext cx="438912" cy="438912"/>
+          </a:xfrm>
+          <a:prstGeom prst="roundRect">
+            <a:avLst>
+              <a:gd name="adj" fmla="val 12000"/>
+            </a:avLst>
+          </a:prstGeom>
+          <a:solidFill>
+            <a:srgbClr val="095292"/>
+          </a:solidFill>
+          <a:ln>
+            <a:noFill/>
+          </a:ln>
+        </p:spPr>
+        <p:style>
+          <a:lnRef idx="1">
+            <a:schemeClr val="accent1"/>
+          </a:lnRef>
+          <a:fillRef idx="3">
+            <a:schemeClr val="accent1"/>
+          </a:fillRef>
+          <a:effectRef idx="2">
+            <a:schemeClr val="accent1"/>
+          </a:effectRef>
+          <a:fontRef idx="minor">
+            <a:schemeClr val="lt1"/>
+          </a:fontRef>
+        </p:style>
+        <p:txBody>
+          <a:bodyPr rtlCol="0" anchor="ctr"/>
+          <a:lstStyle/>
+          <a:p>
+            <a:pPr algn="ctr"/>
+          </a:p>
+        </p:txBody>
+      </p:sp>
+      <p:sp>
+        <p:nvSpPr>
+          <p:cNvPr id="8" name="TextBox 7"/>
+          <p:cNvSpPr txBox="1"/>
+          <p:nvPr/>
+        </p:nvSpPr>
+        <p:spPr>
+          <a:xfrm>
+            <a:off x="594360" y="1679752"/>
+            <a:ext cx="438912" cy="438912"/>
+          </a:xfrm>
+          <a:prstGeom prst="rect">
+            <a:avLst/>
+          </a:prstGeom>
+          <a:noFill/>
+        </p:spPr>
+        <p:txBody>
+          <a:bodyPr wrap="square" anchor="ctr"/>
+          <a:lstStyle/>
+          <a:p>
+            <a:pPr algn="ctr"/>
+            <a:r>
+              <a:rPr sz="1600" b="1" i="0">
+                <a:solidFill>
+                  <a:srgbClr val="FFFFFF"/>
+                </a:solidFill>
+                <a:latin typeface="Calibri"/>
+              </a:rPr>
+              <a:t>1</a:t>
+            </a:r>
+          </a:p>
+        </p:txBody>
+      </p:sp>
+      <p:sp>
+        <p:nvSpPr>
+          <p:cNvPr id="9" name="TextBox 8"/>
+          <p:cNvSpPr txBox="1"/>
+          <p:nvPr/>
+        </p:nvSpPr>
+        <p:spPr>
+          <a:xfrm>
+            <a:off x="1188720" y="1536192"/>
+            <a:ext cx="10271455" cy="744321"/>
+          </a:xfrm>
+          <a:prstGeom prst="rect">
+            <a:avLst/>
+          </a:prstGeom>
+          <a:noFill/>
+        </p:spPr>
+        <p:txBody>
+          <a:bodyPr wrap="square" anchor="ctr"/>
+          <a:lstStyle/>
+          <a:p>
+            <a:r>
+              <a:rPr sz="1500" b="1" i="0">
+                <a:solidFill>
+                  <a:srgbClr val="095292"/>
+                </a:solidFill>
+                <a:latin typeface="Calibri"/>
+              </a:rPr>
+              <a:t>30 s · Las dos alternativas</a:t>
+            </a:r>
+          </a:p>
+          <a:p>
+            <a:pPr>
+              <a:spcBef>
+                <a:spcPts val="200"/>
+              </a:spcBef>
+            </a:pPr>
+            <a:r>
+              <a:rPr sz="1300" b="0" i="0">
+                <a:solidFill>
+                  <a:srgbClr val="333333"/>
+                </a:solidFill>
+                <a:latin typeface="Calibri"/>
+              </a:rPr>
+              <a:t>Una frase cada una. Sin adjetivos.</a:t>
+            </a:r>
+          </a:p>
+        </p:txBody>
+      </p:sp>
+      <p:sp>
+        <p:nvSpPr>
+          <p:cNvPr id="10" name="Rounded Rectangle 9"/>
+          <p:cNvSpPr/>
+          <p:nvPr/>
+        </p:nvSpPr>
+        <p:spPr>
+          <a:xfrm>
+            <a:off x="457200" y="2445105"/>
+            <a:ext cx="11277295" cy="908913"/>
+          </a:xfrm>
+          <a:prstGeom prst="roundRect">
+            <a:avLst>
+              <a:gd name="adj" fmla="val 12000"/>
+            </a:avLst>
+          </a:prstGeom>
+          <a:solidFill>
+            <a:srgbClr val="E8F4FA"/>
+          </a:solidFill>
+          <a:ln>
+            <a:noFill/>
+          </a:ln>
+        </p:spPr>
+        <p:style>
+          <a:lnRef idx="1">
+            <a:schemeClr val="accent1"/>
+          </a:lnRef>
+          <a:fillRef idx="3">
+            <a:schemeClr val="accent1"/>
+          </a:fillRef>
+          <a:effectRef idx="2">
+            <a:schemeClr val="accent1"/>
+          </a:effectRef>
+          <a:fontRef idx="minor">
+            <a:schemeClr val="lt1"/>
+          </a:fontRef>
+        </p:style>
+        <p:txBody>
+          <a:bodyPr rtlCol="0" anchor="ctr"/>
+          <a:lstStyle/>
+          <a:p>
+            <a:pPr algn="ctr"/>
+          </a:p>
+        </p:txBody>
+      </p:sp>
+      <p:sp>
+        <p:nvSpPr>
+          <p:cNvPr id="11" name="Rounded Rectangle 10"/>
+          <p:cNvSpPr/>
+          <p:nvPr/>
+        </p:nvSpPr>
+        <p:spPr>
+          <a:xfrm>
+            <a:off x="594360" y="2680106"/>
+            <a:ext cx="438912" cy="438912"/>
+          </a:xfrm>
+          <a:prstGeom prst="roundRect">
+            <a:avLst>
+              <a:gd name="adj" fmla="val 12000"/>
+            </a:avLst>
+          </a:prstGeom>
+          <a:solidFill>
+            <a:srgbClr val="095292"/>
+          </a:solidFill>
+          <a:ln>
+            <a:noFill/>
+          </a:ln>
+        </p:spPr>
+        <p:style>
+          <a:lnRef idx="1">
+            <a:schemeClr val="accent1"/>
+          </a:lnRef>
+          <a:fillRef idx="3">
+            <a:schemeClr val="accent1"/>
+          </a:fillRef>
+          <a:effectRef idx="2">
+            <a:schemeClr val="accent1"/>
+          </a:effectRef>
+          <a:fontRef idx="minor">
+            <a:schemeClr val="lt1"/>
+          </a:fontRef>
+        </p:style>
+        <p:txBody>
+          <a:bodyPr rtlCol="0" anchor="ctr"/>
+          <a:lstStyle/>
+          <a:p>
+            <a:pPr algn="ctr"/>
+          </a:p>
+        </p:txBody>
+      </p:sp>
+      <p:sp>
+        <p:nvSpPr>
+          <p:cNvPr id="12" name="TextBox 11"/>
+          <p:cNvSpPr txBox="1"/>
+          <p:nvPr/>
+        </p:nvSpPr>
+        <p:spPr>
+          <a:xfrm>
+            <a:off x="594360" y="2680106"/>
+            <a:ext cx="438912" cy="438912"/>
+          </a:xfrm>
+          <a:prstGeom prst="rect">
+            <a:avLst/>
+          </a:prstGeom>
+          <a:noFill/>
+        </p:spPr>
+        <p:txBody>
+          <a:bodyPr wrap="square" anchor="ctr"/>
+          <a:lstStyle/>
+          <a:p>
+            <a:pPr algn="ctr"/>
+            <a:r>
+              <a:rPr sz="1600" b="1" i="0">
+                <a:solidFill>
+                  <a:srgbClr val="FFFFFF"/>
+                </a:solidFill>
+                <a:latin typeface="Calibri"/>
+              </a:rPr>
+              <a:t>2</a:t>
+            </a:r>
+          </a:p>
+        </p:txBody>
+      </p:sp>
+      <p:sp>
+        <p:nvSpPr>
+          <p:cNvPr id="13" name="TextBox 12"/>
+          <p:cNvSpPr txBox="1"/>
+          <p:nvPr/>
+        </p:nvSpPr>
+        <p:spPr>
+          <a:xfrm>
+            <a:off x="1188720" y="2536545"/>
+            <a:ext cx="10271455" cy="744321"/>
+          </a:xfrm>
+          <a:prstGeom prst="rect">
+            <a:avLst/>
+          </a:prstGeom>
+          <a:noFill/>
+        </p:spPr>
+        <p:txBody>
+          <a:bodyPr wrap="square" anchor="ctr"/>
+          <a:lstStyle/>
+          <a:p>
+            <a:r>
+              <a:rPr sz="1500" b="1" i="0">
+                <a:solidFill>
+                  <a:srgbClr val="095292"/>
+                </a:solidFill>
+                <a:latin typeface="Calibri"/>
+              </a:rPr>
+              <a:t>40 s · Los criterios y los pesos</a:t>
+            </a:r>
+          </a:p>
+          <a:p>
+            <a:pPr>
+              <a:spcBef>
+                <a:spcPts val="200"/>
+              </a:spcBef>
+            </a:pPr>
+            <a:r>
+              <a:rPr sz="1300" b="0" i="0">
+                <a:solidFill>
+                  <a:srgbClr val="333333"/>
+                </a:solidFill>
+                <a:latin typeface="Calibri"/>
+              </a:rPr>
+              <a:t>De dónde salieron: qué restricción o requisito.</a:t>
+            </a:r>
+          </a:p>
+        </p:txBody>
+      </p:sp>
+      <p:sp>
+        <p:nvSpPr>
+          <p:cNvPr id="14" name="Rounded Rectangle 13"/>
+          <p:cNvSpPr/>
+          <p:nvPr/>
+        </p:nvSpPr>
+        <p:spPr>
+          <a:xfrm>
+            <a:off x="457200" y="3445459"/>
+            <a:ext cx="11277295" cy="908913"/>
+          </a:xfrm>
+          <a:prstGeom prst="roundRect">
+            <a:avLst>
+              <a:gd name="adj" fmla="val 12000"/>
+            </a:avLst>
+          </a:prstGeom>
+          <a:solidFill>
+            <a:srgbClr val="F2F2F2"/>
+          </a:solidFill>
+          <a:ln>
+            <a:noFill/>
+          </a:ln>
+        </p:spPr>
+        <p:style>
+          <a:lnRef idx="1">
+            <a:schemeClr val="accent1"/>
+          </a:lnRef>
+          <a:fillRef idx="3">
+            <a:schemeClr val="accent1"/>
+          </a:fillRef>
+          <a:effectRef idx="2">
+            <a:schemeClr val="accent1"/>
+          </a:effectRef>
+          <a:fontRef idx="minor">
+            <a:schemeClr val="lt1"/>
+          </a:fontRef>
+        </p:style>
+        <p:txBody>
+          <a:bodyPr rtlCol="0" anchor="ctr"/>
+          <a:lstStyle/>
+          <a:p>
+            <a:pPr algn="ctr"/>
+          </a:p>
+        </p:txBody>
+      </p:sp>
+      <p:sp>
+        <p:nvSpPr>
+          <p:cNvPr id="15" name="Rounded Rectangle 14"/>
+          <p:cNvSpPr/>
+          <p:nvPr/>
+        </p:nvSpPr>
+        <p:spPr>
+          <a:xfrm>
+            <a:off x="594360" y="3680460"/>
+            <a:ext cx="438912" cy="438912"/>
+          </a:xfrm>
+          <a:prstGeom prst="roundRect">
+            <a:avLst>
+              <a:gd name="adj" fmla="val 12000"/>
+            </a:avLst>
+          </a:prstGeom>
+          <a:solidFill>
+            <a:srgbClr val="095292"/>
+          </a:solidFill>
+          <a:ln>
+            <a:noFill/>
+          </a:ln>
+        </p:spPr>
+        <p:style>
+          <a:lnRef idx="1">
+            <a:schemeClr val="accent1"/>
+          </a:lnRef>
+          <a:fillRef idx="3">
+            <a:schemeClr val="accent1"/>
+          </a:fillRef>
+          <a:effectRef idx="2">
+            <a:schemeClr val="accent1"/>
+          </a:effectRef>
+          <a:fontRef idx="minor">
+            <a:schemeClr val="lt1"/>
+          </a:fontRef>
+        </p:style>
+        <p:txBody>
+          <a:bodyPr rtlCol="0" anchor="ctr"/>
+          <a:lstStyle/>
+          <a:p>
+            <a:pPr algn="ctr"/>
+          </a:p>
+        </p:txBody>
+      </p:sp>
+      <p:sp>
+        <p:nvSpPr>
+          <p:cNvPr id="16" name="TextBox 15"/>
+          <p:cNvSpPr txBox="1"/>
+          <p:nvPr/>
+        </p:nvSpPr>
+        <p:spPr>
+          <a:xfrm>
+            <a:off x="594360" y="3680460"/>
+            <a:ext cx="438912" cy="438912"/>
+          </a:xfrm>
+          <a:prstGeom prst="rect">
+            <a:avLst/>
+          </a:prstGeom>
+          <a:noFill/>
+        </p:spPr>
+        <p:txBody>
+          <a:bodyPr wrap="square" anchor="ctr"/>
+          <a:lstStyle/>
+          <a:p>
+            <a:pPr algn="ctr"/>
+            <a:r>
+              <a:rPr sz="1600" b="1" i="0">
+                <a:solidFill>
+                  <a:srgbClr val="FFFFFF"/>
+                </a:solidFill>
+                <a:latin typeface="Calibri"/>
+              </a:rPr>
+              <a:t>3</a:t>
+            </a:r>
+          </a:p>
+        </p:txBody>
+      </p:sp>
+      <p:sp>
+        <p:nvSpPr>
+          <p:cNvPr id="17" name="TextBox 16"/>
+          <p:cNvSpPr txBox="1"/>
+          <p:nvPr/>
+        </p:nvSpPr>
+        <p:spPr>
+          <a:xfrm>
+            <a:off x="1188720" y="3536899"/>
+            <a:ext cx="10271455" cy="744321"/>
+          </a:xfrm>
+          <a:prstGeom prst="rect">
+            <a:avLst/>
+          </a:prstGeom>
+          <a:noFill/>
+        </p:spPr>
+        <p:txBody>
+          <a:bodyPr wrap="square" anchor="ctr"/>
+          <a:lstStyle/>
+          <a:p>
+            <a:r>
+              <a:rPr sz="1500" b="1" i="0">
+                <a:solidFill>
+                  <a:srgbClr val="095292"/>
+                </a:solidFill>
+                <a:latin typeface="Calibri"/>
+              </a:rPr>
+              <a:t>40 s · La decisión</a:t>
+            </a:r>
+          </a:p>
+          <a:p>
+            <a:pPr>
+              <a:spcBef>
+                <a:spcPts val="200"/>
+              </a:spcBef>
+            </a:pPr>
+            <a:r>
+              <a:rPr sz="1300" b="0" i="0">
+                <a:solidFill>
+                  <a:srgbClr val="333333"/>
+                </a:solidFill>
+                <a:latin typeface="Calibri"/>
+              </a:rPr>
+              <a:t>Cuál ganó y por qué, con una justificación concreta.</a:t>
+            </a:r>
+          </a:p>
+        </p:txBody>
+      </p:sp>
+      <p:sp>
+        <p:nvSpPr>
+          <p:cNvPr id="18" name="Rounded Rectangle 17"/>
+          <p:cNvSpPr/>
+          <p:nvPr/>
+        </p:nvSpPr>
+        <p:spPr>
+          <a:xfrm>
+            <a:off x="457200" y="4445812"/>
+            <a:ext cx="11277295" cy="908913"/>
+          </a:xfrm>
+          <a:prstGeom prst="roundRect">
+            <a:avLst>
+              <a:gd name="adj" fmla="val 12000"/>
+            </a:avLst>
+          </a:prstGeom>
+          <a:solidFill>
+            <a:srgbClr val="E8F4FA"/>
+          </a:solidFill>
+          <a:ln>
+            <a:noFill/>
+          </a:ln>
+        </p:spPr>
+        <p:style>
+          <a:lnRef idx="1">
+            <a:schemeClr val="accent1"/>
+          </a:lnRef>
+          <a:fillRef idx="3">
+            <a:schemeClr val="accent1"/>
+          </a:fillRef>
+          <a:effectRef idx="2">
+            <a:schemeClr val="accent1"/>
+          </a:effectRef>
+          <a:fontRef idx="minor">
+            <a:schemeClr val="lt1"/>
+          </a:fontRef>
+        </p:style>
+        <p:txBody>
+          <a:bodyPr rtlCol="0" anchor="ctr"/>
+          <a:lstStyle/>
+          <a:p>
+            <a:pPr algn="ctr"/>
+          </a:p>
+        </p:txBody>
+      </p:sp>
+      <p:sp>
+        <p:nvSpPr>
+          <p:cNvPr id="19" name="Rounded Rectangle 18"/>
+          <p:cNvSpPr/>
+          <p:nvPr/>
+        </p:nvSpPr>
+        <p:spPr>
+          <a:xfrm>
+            <a:off x="594360" y="4680813"/>
+            <a:ext cx="438912" cy="438912"/>
+          </a:xfrm>
+          <a:prstGeom prst="roundRect">
+            <a:avLst>
+              <a:gd name="adj" fmla="val 12000"/>
+            </a:avLst>
+          </a:prstGeom>
+          <a:solidFill>
+            <a:srgbClr val="095292"/>
+          </a:solidFill>
+          <a:ln>
+            <a:noFill/>
+          </a:ln>
+        </p:spPr>
+        <p:style>
+          <a:lnRef idx="1">
+            <a:schemeClr val="accent1"/>
+          </a:lnRef>
+          <a:fillRef idx="3">
+            <a:schemeClr val="accent1"/>
+          </a:fillRef>
+          <a:effectRef idx="2">
+            <a:schemeClr val="accent1"/>
+          </a:effectRef>
+          <a:fontRef idx="minor">
+            <a:schemeClr val="lt1"/>
+          </a:fontRef>
+        </p:style>
+        <p:txBody>
+          <a:bodyPr rtlCol="0" anchor="ctr"/>
+          <a:lstStyle/>
+          <a:p>
+            <a:pPr algn="ctr"/>
+          </a:p>
+        </p:txBody>
+      </p:sp>
+      <p:sp>
+        <p:nvSpPr>
+          <p:cNvPr id="20" name="TextBox 19"/>
+          <p:cNvSpPr txBox="1"/>
+          <p:nvPr/>
+        </p:nvSpPr>
+        <p:spPr>
+          <a:xfrm>
+            <a:off x="594360" y="4680813"/>
+            <a:ext cx="438912" cy="438912"/>
+          </a:xfrm>
+          <a:prstGeom prst="rect">
+            <a:avLst/>
+          </a:prstGeom>
+          <a:noFill/>
+        </p:spPr>
+        <p:txBody>
+          <a:bodyPr wrap="square" anchor="ctr"/>
+          <a:lstStyle/>
+          <a:p>
+            <a:pPr algn="ctr"/>
+            <a:r>
+              <a:rPr sz="1600" b="1" i="0">
+                <a:solidFill>
+                  <a:srgbClr val="FFFFFF"/>
+                </a:solidFill>
+                <a:latin typeface="Calibri"/>
+              </a:rPr>
+              <a:t>4</a:t>
+            </a:r>
+          </a:p>
+        </p:txBody>
+      </p:sp>
+      <p:sp>
+        <p:nvSpPr>
+          <p:cNvPr id="21" name="TextBox 20"/>
+          <p:cNvSpPr txBox="1"/>
+          <p:nvPr/>
+        </p:nvSpPr>
+        <p:spPr>
+          <a:xfrm>
+            <a:off x="1188720" y="4537252"/>
+            <a:ext cx="10271455" cy="744321"/>
+          </a:xfrm>
+          <a:prstGeom prst="rect">
+            <a:avLst/>
+          </a:prstGeom>
+          <a:noFill/>
+        </p:spPr>
+        <p:txBody>
+          <a:bodyPr wrap="square" anchor="ctr"/>
+          <a:lstStyle/>
+          <a:p>
+            <a:r>
+              <a:rPr sz="1500" b="1" i="0">
+                <a:solidFill>
+                  <a:srgbClr val="095292"/>
+                </a:solidFill>
+                <a:latin typeface="Calibri"/>
+              </a:rPr>
+              <a:t>40 s · Qué se pierde</a:t>
+            </a:r>
+          </a:p>
+          <a:p>
+            <a:pPr>
+              <a:spcBef>
+                <a:spcPts val="200"/>
+              </a:spcBef>
+            </a:pPr>
+            <a:r>
+              <a:rPr sz="1300" b="0" i="0">
+                <a:solidFill>
+                  <a:srgbClr val="333333"/>
+                </a:solidFill>
+                <a:latin typeface="Calibri"/>
+              </a:rPr>
+              <a:t>Lo que sacrificaron. Es el minuto obligatorio.</a:t>
+            </a:r>
+          </a:p>
+        </p:txBody>
+      </p:sp>
+      <p:sp>
+        <p:nvSpPr>
+          <p:cNvPr id="22" name="Rounded Rectangle 21"/>
+          <p:cNvSpPr/>
+          <p:nvPr/>
+        </p:nvSpPr>
+        <p:spPr>
+          <a:xfrm>
+            <a:off x="457200" y="5446166"/>
+            <a:ext cx="11277295" cy="908913"/>
+          </a:xfrm>
+          <a:prstGeom prst="roundRect">
+            <a:avLst>
+              <a:gd name="adj" fmla="val 12000"/>
+            </a:avLst>
+          </a:prstGeom>
+          <a:solidFill>
+            <a:srgbClr val="F2F2F2"/>
+          </a:solidFill>
+          <a:ln>
+            <a:noFill/>
+          </a:ln>
+        </p:spPr>
+        <p:style>
+          <a:lnRef idx="1">
+            <a:schemeClr val="accent1"/>
+          </a:lnRef>
+          <a:fillRef idx="3">
+            <a:schemeClr val="accent1"/>
+          </a:fillRef>
+          <a:effectRef idx="2">
+            <a:schemeClr val="accent1"/>
+          </a:effectRef>
+          <a:fontRef idx="minor">
+            <a:schemeClr val="lt1"/>
+          </a:fontRef>
+        </p:style>
+        <p:txBody>
+          <a:bodyPr rtlCol="0" anchor="ctr"/>
+          <a:lstStyle/>
+          <a:p>
+            <a:pPr algn="ctr"/>
+          </a:p>
+        </p:txBody>
+      </p:sp>
+      <p:sp>
+        <p:nvSpPr>
+          <p:cNvPr id="23" name="Rounded Rectangle 22"/>
+          <p:cNvSpPr/>
+          <p:nvPr/>
+        </p:nvSpPr>
+        <p:spPr>
+          <a:xfrm>
+            <a:off x="594360" y="5681167"/>
+            <a:ext cx="438912" cy="438912"/>
+          </a:xfrm>
+          <a:prstGeom prst="roundRect">
+            <a:avLst>
+              <a:gd name="adj" fmla="val 12000"/>
+            </a:avLst>
+          </a:prstGeom>
+          <a:solidFill>
+            <a:srgbClr val="095292"/>
+          </a:solidFill>
+          <a:ln>
+            <a:noFill/>
+          </a:ln>
+        </p:spPr>
+        <p:style>
+          <a:lnRef idx="1">
+            <a:schemeClr val="accent1"/>
+          </a:lnRef>
+          <a:fillRef idx="3">
+            <a:schemeClr val="accent1"/>
+          </a:fillRef>
+          <a:effectRef idx="2">
+            <a:schemeClr val="accent1"/>
+          </a:effectRef>
+          <a:fontRef idx="minor">
+            <a:schemeClr val="lt1"/>
+          </a:fontRef>
+        </p:style>
+        <p:txBody>
+          <a:bodyPr rtlCol="0" anchor="ctr"/>
+          <a:lstStyle/>
+          <a:p>
+            <a:pPr algn="ctr"/>
+          </a:p>
+        </p:txBody>
+      </p:sp>
+      <p:sp>
+        <p:nvSpPr>
+          <p:cNvPr id="24" name="TextBox 23"/>
+          <p:cNvSpPr txBox="1"/>
+          <p:nvPr/>
+        </p:nvSpPr>
+        <p:spPr>
+          <a:xfrm>
+            <a:off x="594360" y="5681167"/>
+            <a:ext cx="438912" cy="438912"/>
+          </a:xfrm>
+          <a:prstGeom prst="rect">
+            <a:avLst/>
+          </a:prstGeom>
+          <a:noFill/>
+        </p:spPr>
+        <p:txBody>
+          <a:bodyPr wrap="square" anchor="ctr"/>
+          <a:lstStyle/>
+          <a:p>
+            <a:pPr algn="ctr"/>
+            <a:r>
+              <a:rPr sz="1600" b="1" i="0">
+                <a:solidFill>
+                  <a:srgbClr val="FFFFFF"/>
+                </a:solidFill>
+                <a:latin typeface="Calibri"/>
+              </a:rPr>
+              <a:t>5</a:t>
+            </a:r>
+          </a:p>
+        </p:txBody>
+      </p:sp>
+      <p:sp>
+        <p:nvSpPr>
+          <p:cNvPr id="25" name="TextBox 24"/>
+          <p:cNvSpPr txBox="1"/>
+          <p:nvPr/>
+        </p:nvSpPr>
+        <p:spPr>
+          <a:xfrm>
+            <a:off x="1188720" y="5537606"/>
+            <a:ext cx="10271455" cy="744321"/>
+          </a:xfrm>
+          <a:prstGeom prst="rect">
+            <a:avLst/>
+          </a:prstGeom>
+          <a:noFill/>
+        </p:spPr>
+        <p:txBody>
+          <a:bodyPr wrap="square" anchor="ctr"/>
+          <a:lstStyle/>
+          <a:p>
+            <a:r>
+              <a:rPr sz="1500" b="1" i="0">
+                <a:solidFill>
+                  <a:srgbClr val="095292"/>
+                </a:solidFill>
+                <a:latin typeface="Calibri"/>
+              </a:rPr>
+              <a:t>30 s · Alcance y validación</a:t>
+            </a:r>
+          </a:p>
+          <a:p>
+            <a:pPr>
+              <a:spcBef>
+                <a:spcPts val="200"/>
+              </a:spcBef>
+            </a:pPr>
+            <a:r>
+              <a:rPr sz="1300" b="0" i="0">
+                <a:solidFill>
+                  <a:srgbClr val="333333"/>
+                </a:solidFill>
+                <a:latin typeface="Calibri"/>
+              </a:rPr>
+              <a:t>Qué se construye y con quién se va a probar.</a:t>
+            </a:r>
+          </a:p>
+        </p:txBody>
+      </p:sp>
+      <p:sp>
+        <p:nvSpPr>
+          <p:cNvPr id="26" name="TextBox 25"/>
+          <p:cNvSpPr txBox="1"/>
+          <p:nvPr/>
+        </p:nvSpPr>
+        <p:spPr>
+          <a:xfrm>
+            <a:off x="11185855" y="6473952"/>
+            <a:ext cx="640080" cy="274320"/>
+          </a:xfrm>
+          <a:prstGeom prst="rect">
+            <a:avLst/>
+          </a:prstGeom>
+          <a:noFill/>
+        </p:spPr>
+        <p:txBody>
+          <a:bodyPr wrap="square">
+            <a:spAutoFit/>
+          </a:bodyPr>
+          <a:lstStyle/>
+          <a:p>
+            <a:pPr algn="r"/>
+            <a:r>
+              <a:rPr sz="1100" b="0" i="0">
+                <a:solidFill>
+                  <a:srgbClr val="666666"/>
+                </a:solidFill>
+                <a:latin typeface="Calibri"/>
+              </a:rPr>
+              <a:t>18</a:t>
+            </a:r>
+          </a:p>
+        </p:txBody>
+      </p:sp>
+    </p:spTree>
+  </p:cSld>
+  <p:clrMapOvr>
+    <a:masterClrMapping/>
+  </p:clrMapOvr>
+</p:sld>
+</file>
+
+<file path=ppt/slides/slide19.xml><?xml version="1.0" encoding="utf-8"?>
+<p:sld xmlns:a="http://schemas.openxmlformats.org/drawingml/2006/main" xmlns:p="http://schemas.openxmlformats.org/presentationml/2006/main" xmlns:r="http://schemas.openxmlformats.org/officeDocument/2006/relationships">
+  <p:cSld>
+    <p:bg>
+      <p:bgPr>
+        <a:solidFill>
+          <a:srgbClr val="FFFFFF"/>
+        </a:solidFill>
+        <a:effectLst/>
+      </p:bgPr>
+    </p:bg>
+    <p:spTree>
+      <p:nvGrpSpPr>
+        <p:cNvPr id="1" name=""/>
+        <p:cNvGrpSpPr/>
+        <p:nvPr/>
+      </p:nvGrpSpPr>
+      <p:grpSpPr/>
+      <p:sp>
+        <p:nvSpPr>
+          <p:cNvPr id="2" name="Rectangle 1"/>
+          <p:cNvSpPr/>
+          <p:nvPr/>
+        </p:nvSpPr>
+        <p:spPr>
+          <a:xfrm>
+            <a:off x="0" y="0"/>
+            <a:ext cx="12191695" cy="960120"/>
+          </a:xfrm>
+          <a:prstGeom prst="rect">
+            <a:avLst/>
+          </a:prstGeom>
+          <a:solidFill>
+            <a:srgbClr val="095292"/>
+          </a:solidFill>
+          <a:ln>
+            <a:noFill/>
+          </a:ln>
+        </p:spPr>
+        <p:style>
+          <a:lnRef idx="1">
+            <a:schemeClr val="accent1"/>
+          </a:lnRef>
+          <a:fillRef idx="3">
+            <a:schemeClr val="accent1"/>
+          </a:fillRef>
+          <a:effectRef idx="2">
+            <a:schemeClr val="accent1"/>
+          </a:effectRef>
+          <a:fontRef idx="minor">
+            <a:schemeClr val="lt1"/>
+          </a:fontRef>
+        </p:style>
+        <p:txBody>
+          <a:bodyPr rtlCol="0" anchor="ctr"/>
+          <a:lstStyle/>
+          <a:p>
+            <a:pPr algn="ctr"/>
+          </a:p>
+        </p:txBody>
+      </p:sp>
+      <p:sp>
+        <p:nvSpPr>
+          <p:cNvPr id="3" name="Rectangle 2"/>
+          <p:cNvSpPr/>
+          <p:nvPr/>
+        </p:nvSpPr>
+        <p:spPr>
+          <a:xfrm>
+            <a:off x="0" y="960120"/>
+            <a:ext cx="12191695" cy="41148"/>
+          </a:xfrm>
+          <a:prstGeom prst="rect">
+            <a:avLst/>
+          </a:prstGeom>
+          <a:solidFill>
+            <a:srgbClr val="FFD000"/>
+          </a:solidFill>
+          <a:ln>
+            <a:noFill/>
+          </a:ln>
+        </p:spPr>
+        <p:style>
+          <a:lnRef idx="1">
+            <a:schemeClr val="accent1"/>
+          </a:lnRef>
+          <a:fillRef idx="3">
+            <a:schemeClr val="accent1"/>
+          </a:fillRef>
+          <a:effectRef idx="2">
+            <a:schemeClr val="accent1"/>
+          </a:effectRef>
+          <a:fontRef idx="minor">
+            <a:schemeClr val="lt1"/>
+          </a:fontRef>
+        </p:style>
+        <p:txBody>
+          <a:bodyPr rtlCol="0" anchor="ctr"/>
+          <a:lstStyle/>
+          <a:p>
+            <a:pPr algn="ctr"/>
+          </a:p>
+        </p:txBody>
+      </p:sp>
+      <p:sp>
+        <p:nvSpPr>
+          <p:cNvPr id="4" name="TextBox 3"/>
+          <p:cNvSpPr txBox="1"/>
+          <p:nvPr/>
+        </p:nvSpPr>
+        <p:spPr>
+          <a:xfrm>
+            <a:off x="457200" y="164592"/>
+            <a:ext cx="11277295" cy="502920"/>
+          </a:xfrm>
+          <a:prstGeom prst="rect">
+            <a:avLst/>
+          </a:prstGeom>
+          <a:noFill/>
+        </p:spPr>
+        <p:txBody>
+          <a:bodyPr wrap="square">
+            <a:spAutoFit/>
+          </a:bodyPr>
+          <a:lstStyle/>
+          <a:p>
+            <a:r>
+              <a:rPr sz="2600" b="1" i="0">
+                <a:solidFill>
+                  <a:srgbClr val="FFFFFF"/>
+                </a:solidFill>
+                <a:latin typeface="Calibri"/>
+              </a:rPr>
+              <a:t>Para la Clase 9</a:t>
+            </a:r>
+          </a:p>
+        </p:txBody>
+      </p:sp>
+      <p:sp>
+        <p:nvSpPr>
+          <p:cNvPr id="5" name="TextBox 4"/>
+          <p:cNvSpPr txBox="1"/>
+          <p:nvPr/>
+        </p:nvSpPr>
+        <p:spPr>
+          <a:xfrm>
+            <a:off x="457200" y="1170432"/>
+            <a:ext cx="11277295" cy="5230368"/>
+          </a:xfrm>
+          <a:prstGeom prst="rect">
+            <a:avLst/>
+          </a:prstGeom>
+          <a:noFill/>
+        </p:spPr>
+        <p:txBody>
+          <a:bodyPr wrap="square">
+            <a:spAutoFit/>
+          </a:bodyPr>
+          <a:lstStyle/>
+          <a:p>
+            <a:pPr>
+              <a:spcAft>
+                <a:spcPts val="800"/>
+              </a:spcAft>
+            </a:pPr>
+            <a:r>
+              <a:rPr sz="2000" b="0" i="0">
+                <a:solidFill>
+                  <a:srgbClr val="333333"/>
+                </a:solidFill>
+                <a:latin typeface="Calibri"/>
+              </a:rPr>
+              <a:t>–   </a:t>
+            </a:r>
             <a:r>
               <a:rPr sz="2000" b="1" i="0">
                 <a:solidFill>
-                  <a:srgbClr val="269CCB"/>
-                </a:solidFill>
-                <a:latin typeface="Calibri"/>
-              </a:rPr>
-              <a:t>Decidir no es acertar: es poder defender lo que se eligió y lo que se perdió</a:t>
+                  <a:srgbClr val="333333"/>
+                </a:solidFill>
+                <a:latin typeface="Calibri"/>
+              </a:rPr>
+              <a:t>Trabajo dirigido:</a:t>
+            </a:r>
+            <a:r>
+              <a:rPr sz="2000" b="0" i="0">
+                <a:solidFill>
+                  <a:srgbClr val="333333"/>
+                </a:solidFill>
+                <a:latin typeface="Calibri"/>
+              </a:rPr>
+              <a:t> Discusión de ejemplos reales — buscar </a:t>
+            </a:r>
+            <a:r>
+              <a:rPr sz="2000" b="1" i="0">
+                <a:solidFill>
+                  <a:srgbClr val="333333"/>
+                </a:solidFill>
+                <a:latin typeface="Calibri"/>
+              </a:rPr>
+              <a:t>un caso propio</a:t>
+            </a:r>
+            <a:r>
+              <a:rPr sz="2000" b="0" i="0">
+                <a:solidFill>
+                  <a:srgbClr val="333333"/>
+                </a:solidFill>
+                <a:latin typeface="Calibri"/>
+              </a:rPr>
+              <a:t> de proyecto que falló por saltarse una fase, con fuente verificable, y decir qué fase fue.</a:t>
+            </a:r>
+          </a:p>
+          <a:p>
+            <a:pPr>
+              <a:spcAft>
+                <a:spcPts val="800"/>
+              </a:spcAft>
+            </a:pPr>
+            <a:r>
+              <a:rPr sz="2000" b="0" i="0">
+                <a:solidFill>
+                  <a:srgbClr val="333333"/>
+                </a:solidFill>
+                <a:latin typeface="Calibri"/>
+              </a:rPr>
+              <a:t>–   </a:t>
+            </a:r>
+            <a:r>
+              <a:rPr sz="2000" b="1" i="0">
+                <a:solidFill>
+                  <a:srgbClr val="333333"/>
+                </a:solidFill>
+                <a:latin typeface="Calibri"/>
+              </a:rPr>
+              <a:t>Trabajo independiente:</a:t>
+            </a:r>
+            <a:r>
+              <a:rPr sz="2000" b="0" i="0">
+                <a:solidFill>
+                  <a:srgbClr val="333333"/>
+                </a:solidFill>
+                <a:latin typeface="Calibri"/>
+              </a:rPr>
+              <a:t> Ajuste de propuestas de solución: dejar en el documento del equipo la alternativa elegida con su alcance mínimo y el flujo dibujado, ya corregido con lo que salió en las exposiciones.</a:t>
+            </a:r>
+          </a:p>
+          <a:p>
+            <a:pPr>
+              <a:spcAft>
+                <a:spcPts val="800"/>
+              </a:spcAft>
+            </a:pPr>
+            <a:r>
+              <a:rPr sz="2000" b="0" i="0">
+                <a:solidFill>
+                  <a:srgbClr val="333333"/>
+                </a:solidFill>
+                <a:latin typeface="Calibri"/>
+              </a:rPr>
+              <a:t>–   </a:t>
+            </a:r>
+            <a:r>
+              <a:rPr sz="2000" b="1" i="0">
+                <a:solidFill>
+                  <a:srgbClr val="333333"/>
+                </a:solidFill>
+                <a:latin typeface="Calibri"/>
+              </a:rPr>
+              <a:t>Clase 9 · Estrategias de innovación en Ingeniería</a:t>
+            </a:r>
+            <a:r>
+              <a:rPr sz="2000" b="0" i="0">
+                <a:solidFill>
+                  <a:srgbClr val="333333"/>
+                </a:solidFill>
+                <a:latin typeface="Calibri"/>
+              </a:rPr>
+              <a:t> — los </a:t>
+            </a:r>
+            <a:r>
+              <a:rPr sz="2000" b="1" i="0">
+                <a:solidFill>
+                  <a:srgbClr val="333333"/>
+                </a:solidFill>
+                <a:latin typeface="Calibri"/>
+              </a:rPr>
+              <a:t>antecedentes</a:t>
+            </a:r>
+            <a:r>
+              <a:rPr sz="2000" b="0" i="0">
+                <a:solidFill>
+                  <a:srgbClr val="333333"/>
+                </a:solidFill>
+                <a:latin typeface="Calibri"/>
+              </a:rPr>
+              <a:t>: qué ya existe, quién lo intentó y cómo se busca eso con fuentes que se puedan verificar. Una respuesta de asistente de IA no es una fuente.</a:t>
+            </a:r>
+          </a:p>
+          <a:p>
+            <a:pPr>
+              <a:spcAft>
+                <a:spcPts val="800"/>
+              </a:spcAft>
+            </a:pPr>
+            <a:r>
+              <a:rPr sz="2000" b="0" i="0">
+                <a:solidFill>
+                  <a:srgbClr val="333333"/>
+                </a:solidFill>
+                <a:latin typeface="Calibri"/>
+              </a:rPr>
+              <a:t>–   </a:t>
+            </a:r>
+            <a:r>
+              <a:rPr sz="2000" b="1" i="0">
+                <a:solidFill>
+                  <a:srgbClr val="333333"/>
+                </a:solidFill>
+                <a:latin typeface="Calibri"/>
+              </a:rPr>
+              <a:t>Aviso:</a:t>
+            </a:r>
+            <a:r>
+              <a:rPr sz="2000" b="0" i="0">
+                <a:solidFill>
+                  <a:srgbClr val="333333"/>
+                </a:solidFill>
+                <a:latin typeface="Calibri"/>
+              </a:rPr>
+              <a:t> Para la sesión 9 traigan la alternativa elegida escrita y el flujo dibujado. Se va a buscar qué soluciones parecidas ya existen, y sin la propia decisión clara no hay con qué comparar.</a:t>
+            </a:r>
+          </a:p>
+          <a:p>
+            <a:pPr>
+              <a:spcAft>
+                <a:spcPts val="800"/>
+              </a:spcAft>
+            </a:pPr>
+            <a:r>
+              <a:rPr sz="2000" b="0" i="0">
+                <a:solidFill>
+                  <a:srgbClr val="333333"/>
+                </a:solidFill>
+                <a:latin typeface="Calibri"/>
+              </a:rPr>
+              <a:t>–   </a:t>
+            </a:r>
+            <a:r>
+              <a:rPr sz="2000" b="1" i="0">
+                <a:solidFill>
+                  <a:srgbClr val="333333"/>
+                </a:solidFill>
+                <a:latin typeface="Calibri"/>
+              </a:rPr>
+              <a:t>Antes de salir:</a:t>
+            </a:r>
+            <a:r>
+              <a:rPr sz="2000" b="0" i="0">
+                <a:solidFill>
+                  <a:srgbClr val="333333"/>
+                </a:solidFill>
+                <a:latin typeface="Calibri"/>
+              </a:rPr>
+              <a:t> el enlace del documento del equipo en el chat, con permiso de lectura para el docente, y el nombre del vocero de hoy.</a:t>
+            </a:r>
+          </a:p>
+        </p:txBody>
+      </p:sp>
+      <p:sp>
+        <p:nvSpPr>
+          <p:cNvPr id="6" name="TextBox 5"/>
+          <p:cNvSpPr txBox="1"/>
+          <p:nvPr/>
+        </p:nvSpPr>
+        <p:spPr>
+          <a:xfrm>
+            <a:off x="11185855" y="6473952"/>
+            <a:ext cx="640080" cy="274320"/>
+          </a:xfrm>
+          <a:prstGeom prst="rect">
+            <a:avLst/>
+          </a:prstGeom>
+          <a:noFill/>
+        </p:spPr>
+        <p:txBody>
+          <a:bodyPr wrap="square">
+            <a:spAutoFit/>
+          </a:bodyPr>
+          <a:lstStyle/>
+          <a:p>
+            <a:pPr algn="r"/>
+            <a:r>
+              <a:rPr sz="1100" b="0" i="0">
+                <a:solidFill>
+                  <a:srgbClr val="666666"/>
+                </a:solidFill>
+                <a:latin typeface="Calibri"/>
+              </a:rPr>
+              <a:t>19</a:t>
             </a:r>
           </a:p>
         </p:txBody>
@@ -6063,6 +9499,222 @@
                 <a:latin typeface="Calibri"/>
               </a:rPr>
               <a:t>2</a:t>
+            </a:r>
+          </a:p>
+        </p:txBody>
+      </p:sp>
+    </p:spTree>
+  </p:cSld>
+  <p:clrMapOvr>
+    <a:masterClrMapping/>
+  </p:clrMapOvr>
+</p:sld>
+</file>
+
+<file path=ppt/slides/slide20.xml><?xml version="1.0" encoding="utf-8"?>
+<p:sld xmlns:a="http://schemas.openxmlformats.org/drawingml/2006/main" xmlns:p="http://schemas.openxmlformats.org/presentationml/2006/main" xmlns:r="http://schemas.openxmlformats.org/officeDocument/2006/relationships">
+  <p:cSld>
+    <p:bg>
+      <p:bgPr>
+        <a:solidFill>
+          <a:srgbClr val="FFFFFF"/>
+        </a:solidFill>
+        <a:effectLst/>
+      </p:bgPr>
+    </p:bg>
+    <p:spTree>
+      <p:nvGrpSpPr>
+        <p:cNvPr id="1" name=""/>
+        <p:cNvGrpSpPr/>
+        <p:nvPr/>
+      </p:nvGrpSpPr>
+      <p:grpSpPr/>
+      <p:sp>
+        <p:nvSpPr>
+          <p:cNvPr id="2" name="Rectangle 1"/>
+          <p:cNvSpPr/>
+          <p:nvPr/>
+        </p:nvSpPr>
+        <p:spPr>
+          <a:xfrm>
+            <a:off x="0" y="0"/>
+            <a:ext cx="12191695" cy="164592"/>
+          </a:xfrm>
+          <a:prstGeom prst="rect">
+            <a:avLst/>
+          </a:prstGeom>
+          <a:solidFill>
+            <a:srgbClr val="269CCB"/>
+          </a:solidFill>
+          <a:ln>
+            <a:noFill/>
+          </a:ln>
+        </p:spPr>
+        <p:style>
+          <a:lnRef idx="1">
+            <a:schemeClr val="accent1"/>
+          </a:lnRef>
+          <a:fillRef idx="3">
+            <a:schemeClr val="accent1"/>
+          </a:fillRef>
+          <a:effectRef idx="2">
+            <a:schemeClr val="accent1"/>
+          </a:effectRef>
+          <a:fontRef idx="minor">
+            <a:schemeClr val="lt1"/>
+          </a:fontRef>
+        </p:style>
+        <p:txBody>
+          <a:bodyPr rtlCol="0" anchor="ctr"/>
+          <a:lstStyle/>
+          <a:p>
+            <a:pPr algn="ctr"/>
+          </a:p>
+        </p:txBody>
+      </p:sp>
+      <p:pic>
+        <p:nvPicPr>
+          <p:cNvPr id="3" name="Picture 2" descr="logo_uniajc_color.png"/>
+          <p:cNvPicPr>
+            <a:picLocks noChangeAspect="1"/>
+          </p:cNvPicPr>
+          <p:nvPr/>
+        </p:nvPicPr>
+        <p:blipFill>
+          <a:blip r:embed="rId2"/>
+          <a:stretch>
+            <a:fillRect/>
+          </a:stretch>
+        </p:blipFill>
+        <p:spPr>
+          <a:xfrm>
+            <a:off x="10271455" y="5998464"/>
+            <a:ext cx="1463040" cy="643233"/>
+          </a:xfrm>
+          <a:prstGeom prst="rect">
+            <a:avLst/>
+          </a:prstGeom>
+        </p:spPr>
+      </p:pic>
+      <p:sp>
+        <p:nvSpPr>
+          <p:cNvPr id="4" name="TextBox 3"/>
+          <p:cNvSpPr txBox="1"/>
+          <p:nvPr/>
+        </p:nvSpPr>
+        <p:spPr>
+          <a:xfrm>
+            <a:off x="457200" y="1737360"/>
+            <a:ext cx="11277295" cy="1097280"/>
+          </a:xfrm>
+          <a:prstGeom prst="rect">
+            <a:avLst/>
+          </a:prstGeom>
+          <a:noFill/>
+        </p:spPr>
+        <p:txBody>
+          <a:bodyPr wrap="square" anchor="ctr"/>
+          <a:lstStyle/>
+          <a:p>
+            <a:pPr algn="ctr"/>
+            <a:r>
+              <a:rPr sz="3400" b="1" i="0">
+                <a:solidFill>
+                  <a:srgbClr val="095292"/>
+                </a:solidFill>
+                <a:latin typeface="Calibri"/>
+              </a:rPr>
+              <a:t>Nos vemos en la sesión 9</a:t>
+            </a:r>
+          </a:p>
+        </p:txBody>
+      </p:sp>
+      <p:sp>
+        <p:nvSpPr>
+          <p:cNvPr id="5" name="TextBox 4"/>
+          <p:cNvSpPr txBox="1"/>
+          <p:nvPr/>
+        </p:nvSpPr>
+        <p:spPr>
+          <a:xfrm>
+            <a:off x="457200" y="3017520"/>
+            <a:ext cx="11277295" cy="1645920"/>
+          </a:xfrm>
+          <a:prstGeom prst="rect">
+            <a:avLst/>
+          </a:prstGeom>
+          <a:noFill/>
+        </p:spPr>
+        <p:txBody>
+          <a:bodyPr wrap="square">
+            <a:spAutoFit/>
+          </a:bodyPr>
+          <a:lstStyle/>
+          <a:p>
+            <a:pPr algn="ctr">
+              <a:spcAft>
+                <a:spcPts val="600"/>
+              </a:spcAft>
+            </a:pPr>
+            <a:r>
+              <a:rPr sz="1600" b="0" i="0">
+                <a:solidFill>
+                  <a:srgbClr val="333333"/>
+                </a:solidFill>
+                <a:latin typeface="Calibri"/>
+              </a:rPr>
+              <a:t>Taller de aplicación del ciclo de vida · Clase 8</a:t>
+            </a:r>
+          </a:p>
+          <a:p>
+            <a:pPr algn="ctr">
+              <a:spcAft>
+                <a:spcPts val="600"/>
+              </a:spcAft>
+            </a:pPr>
+            <a:r>
+              <a:rPr sz="1600" b="0" i="0">
+                <a:solidFill>
+                  <a:srgbClr val="333333"/>
+                </a:solidFill>
+                <a:latin typeface="Calibri"/>
+              </a:rPr>
+              <a:t>FI300101 · UNIAJC · Ingeniería de Sistemas</a:t>
+            </a:r>
+          </a:p>
+        </p:txBody>
+      </p:sp>
+      <p:sp>
+        <p:nvSpPr>
+          <p:cNvPr id="6" name="TextBox 5"/>
+          <p:cNvSpPr txBox="1"/>
+          <p:nvPr/>
+        </p:nvSpPr>
+        <p:spPr>
+          <a:xfrm>
+            <a:off x="457200" y="4754880"/>
+            <a:ext cx="11277295" cy="640080"/>
+          </a:xfrm>
+          <a:prstGeom prst="rect">
+            <a:avLst/>
+          </a:prstGeom>
+          <a:noFill/>
+        </p:spPr>
+        <p:txBody>
+          <a:bodyPr wrap="square">
+            <a:spAutoFit/>
+          </a:bodyPr>
+          <a:lstStyle/>
+          <a:p>
+            <a:pPr algn="ctr"/>
+            <a:r>
+              <a:rPr sz="2000" b="1" i="0">
+                <a:solidFill>
+                  <a:srgbClr val="269CCB"/>
+                </a:solidFill>
+                <a:latin typeface="Calibri"/>
+              </a:rPr>
+              <a:t>Decidir no es acertar: es poder defender lo que se eligió y lo que se perdió</a:t>
             </a:r>
           </a:p>
         </p:txBody>
@@ -9972,7 +13624,7 @@
         <p:spPr>
           <a:xfrm>
             <a:off x="0" y="0"/>
-            <a:ext cx="12191695" cy="1170432"/>
+            <a:ext cx="12191695" cy="960120"/>
           </a:xfrm>
           <a:prstGeom prst="rect">
             <a:avLst/>
@@ -10014,7 +13666,7 @@
         </p:nvSpPr>
         <p:spPr>
           <a:xfrm>
-            <a:off x="0" y="1170432"/>
+            <a:off x="0" y="960120"/>
             <a:ext cx="12191695" cy="41148"/>
           </a:xfrm>
           <a:prstGeom prst="rect">
@@ -10058,7 +13710,7 @@
         <p:spPr>
           <a:xfrm>
             <a:off x="457200" y="164592"/>
-            <a:ext cx="11277295" cy="384048"/>
+            <a:ext cx="11277295" cy="502920"/>
           </a:xfrm>
           <a:prstGeom prst="rect">
             <a:avLst/>
@@ -10078,7 +13730,7 @@
                 </a:solidFill>
                 <a:latin typeface="Calibri"/>
               </a:rPr>
-              <a:t>Taller de hoy: Decisión de la solución y alcance mínimo</a:t>
+              <a:t>La pregunta de entrada: 45 minutos y una fase saltada (1/2)</a:t>
             </a:r>
           </a:p>
         </p:txBody>
@@ -10091,8 +13743,8 @@
         </p:nvSpPr>
         <p:spPr>
           <a:xfrm>
-            <a:off x="457200" y="566928"/>
-            <a:ext cx="11277295" cy="411480"/>
+            <a:off x="457200" y="1170432"/>
+            <a:ext cx="11277295" cy="5230368"/>
           </a:xfrm>
           <a:prstGeom prst="rect">
             <a:avLst/>
@@ -10105,410 +13757,113 @@
           </a:bodyPr>
           <a:lstStyle/>
           <a:p>
-            <a:r>
-              <a:rPr sz="1400" b="0" i="0">
-                <a:solidFill>
-                  <a:srgbClr val="B8D8EE"/>
-                </a:solidFill>
-                <a:latin typeface="Calibri"/>
-              </a:rPr>
-              <a:t>40 min en equipos · 40 min con ritmo interno: alternativas, matriz, alcance, validación · matriz de decisión + alcance mínimo + plan de validación</a:t>
-            </a:r>
-          </a:p>
-        </p:txBody>
-      </p:sp>
-      <p:sp>
-        <p:nvSpPr>
-          <p:cNvPr id="6" name="Rounded Rectangle 5"/>
-          <p:cNvSpPr/>
-          <p:nvPr/>
-        </p:nvSpPr>
-        <p:spPr>
-          <a:xfrm>
-            <a:off x="457200" y="1472184"/>
-            <a:ext cx="11277295" cy="566928"/>
-          </a:xfrm>
-          <a:prstGeom prst="roundRect">
-            <a:avLst>
-              <a:gd name="adj" fmla="val 12000"/>
-            </a:avLst>
-          </a:prstGeom>
-          <a:solidFill>
-            <a:srgbClr val="F2F2F2"/>
-          </a:solidFill>
-          <a:ln>
-            <a:noFill/>
-          </a:ln>
-        </p:spPr>
-        <p:style>
-          <a:lnRef idx="1">
-            <a:schemeClr val="accent1"/>
-          </a:lnRef>
-          <a:fillRef idx="3">
-            <a:schemeClr val="accent1"/>
-          </a:fillRef>
-          <a:effectRef idx="2">
-            <a:schemeClr val="accent1"/>
-          </a:effectRef>
-          <a:fontRef idx="minor">
-            <a:schemeClr val="lt1"/>
-          </a:fontRef>
-        </p:style>
-        <p:txBody>
-          <a:bodyPr rtlCol="0" anchor="ctr"/>
-          <a:lstStyle/>
-          <a:p>
-            <a:pPr algn="ctr"/>
-          </a:p>
-        </p:txBody>
-      </p:sp>
-      <p:sp>
-        <p:nvSpPr>
-          <p:cNvPr id="7" name="Rectangle 6"/>
-          <p:cNvSpPr/>
-          <p:nvPr/>
-        </p:nvSpPr>
-        <p:spPr>
-          <a:xfrm>
-            <a:off x="640080" y="1618487"/>
-            <a:ext cx="274320" cy="274320"/>
-          </a:xfrm>
-          <a:prstGeom prst="rect">
-            <a:avLst/>
-          </a:prstGeom>
-          <a:solidFill>
-            <a:srgbClr val="FFFFFF"/>
-          </a:solidFill>
-          <a:ln>
-            <a:solidFill>
-              <a:srgbClr val="333333"/>
-            </a:solidFill>
-          </a:ln>
-        </p:spPr>
-        <p:style>
-          <a:lnRef idx="1">
-            <a:schemeClr val="accent1"/>
-          </a:lnRef>
-          <a:fillRef idx="3">
-            <a:schemeClr val="accent1"/>
-          </a:fillRef>
-          <a:effectRef idx="2">
-            <a:schemeClr val="accent1"/>
-          </a:effectRef>
-          <a:fontRef idx="minor">
-            <a:schemeClr val="lt1"/>
-          </a:fontRef>
-        </p:style>
-        <p:txBody>
-          <a:bodyPr rtlCol="0" anchor="ctr"/>
-          <a:lstStyle/>
-          <a:p>
-            <a:pPr algn="ctr"/>
-          </a:p>
-        </p:txBody>
-      </p:sp>
-      <p:sp>
-        <p:nvSpPr>
-          <p:cNvPr id="8" name="Rectangle 7"/>
-          <p:cNvSpPr/>
-          <p:nvPr/>
-        </p:nvSpPr>
-        <p:spPr>
-          <a:xfrm>
-            <a:off x="640080" y="1618487"/>
-            <a:ext cx="73152" cy="274320"/>
-          </a:xfrm>
-          <a:prstGeom prst="rect">
-            <a:avLst/>
-          </a:prstGeom>
-          <a:solidFill>
-            <a:srgbClr val="269CCB"/>
-          </a:solidFill>
-          <a:ln>
-            <a:noFill/>
-          </a:ln>
-        </p:spPr>
-        <p:style>
-          <a:lnRef idx="1">
-            <a:schemeClr val="accent1"/>
-          </a:lnRef>
-          <a:fillRef idx="3">
-            <a:schemeClr val="accent1"/>
-          </a:fillRef>
-          <a:effectRef idx="2">
-            <a:schemeClr val="accent1"/>
-          </a:effectRef>
-          <a:fontRef idx="minor">
-            <a:schemeClr val="lt1"/>
-          </a:fontRef>
-        </p:style>
-        <p:txBody>
-          <a:bodyPr rtlCol="0" anchor="ctr"/>
-          <a:lstStyle/>
-          <a:p>
-            <a:pPr algn="ctr"/>
-          </a:p>
-        </p:txBody>
-      </p:sp>
-      <p:sp>
-        <p:nvSpPr>
-          <p:cNvPr id="9" name="TextBox 8"/>
-          <p:cNvSpPr txBox="1"/>
-          <p:nvPr/>
-        </p:nvSpPr>
-        <p:spPr>
-          <a:xfrm>
-            <a:off x="1097280" y="1563624"/>
-            <a:ext cx="10362895" cy="402336"/>
-          </a:xfrm>
-          <a:prstGeom prst="rect">
-            <a:avLst/>
-          </a:prstGeom>
-          <a:noFill/>
-        </p:spPr>
-        <p:txBody>
-          <a:bodyPr wrap="square" anchor="ctr"/>
-          <a:lstStyle/>
-          <a:p>
-            <a:r>
-              <a:rPr sz="1500" b="1" i="0">
-                <a:solidFill>
-                  <a:srgbClr val="333333"/>
-                </a:solidFill>
-                <a:latin typeface="Calibri"/>
-              </a:rPr>
-              <a:t>LAS DOS ALTERNATIVAS</a:t>
-            </a:r>
-            <a:r>
-              <a:rPr sz="1500" b="0" i="0">
-                <a:solidFill>
-                  <a:srgbClr val="333333"/>
-                </a:solidFill>
-                <a:latin typeface="Calibri"/>
-              </a:rPr>
-              <a:t> — Cada alternativa en </a:t>
-            </a:r>
-            <a:r>
-              <a:rPr sz="1500" b="1" i="0">
-                <a:solidFill>
-                  <a:srgbClr val="333333"/>
-                </a:solidFill>
-                <a:latin typeface="Calibri"/>
-              </a:rPr>
-              <a:t>una frase</a:t>
-            </a:r>
-            <a:r>
-              <a:rPr sz="1500" b="0" i="0">
-                <a:solidFill>
-                  <a:srgbClr val="333333"/>
-                </a:solidFill>
-                <a:latin typeface="Calibri"/>
-              </a:rPr>
-              <a:t>, sin adjetivos, diciendo qué hace y cómo resuelve la causa elegida en el árbol de la sesión 6.</a:t>
-            </a:r>
-          </a:p>
-        </p:txBody>
-      </p:sp>
-      <p:sp>
-        <p:nvSpPr>
-          <p:cNvPr id="10" name="Rounded Rectangle 9"/>
-          <p:cNvSpPr/>
-          <p:nvPr/>
-        </p:nvSpPr>
-        <p:spPr>
-          <a:xfrm>
-            <a:off x="457200" y="2148839"/>
-            <a:ext cx="11277295" cy="566928"/>
-          </a:xfrm>
-          <a:prstGeom prst="roundRect">
-            <a:avLst>
-              <a:gd name="adj" fmla="val 12000"/>
-            </a:avLst>
-          </a:prstGeom>
-          <a:solidFill>
-            <a:srgbClr val="F2F2F2"/>
-          </a:solidFill>
-          <a:ln>
-            <a:noFill/>
-          </a:ln>
-        </p:spPr>
-        <p:style>
-          <a:lnRef idx="1">
-            <a:schemeClr val="accent1"/>
-          </a:lnRef>
-          <a:fillRef idx="3">
-            <a:schemeClr val="accent1"/>
-          </a:fillRef>
-          <a:effectRef idx="2">
-            <a:schemeClr val="accent1"/>
-          </a:effectRef>
-          <a:fontRef idx="minor">
-            <a:schemeClr val="lt1"/>
-          </a:fontRef>
-        </p:style>
-        <p:txBody>
-          <a:bodyPr rtlCol="0" anchor="ctr"/>
-          <a:lstStyle/>
-          <a:p>
-            <a:pPr algn="ctr"/>
-          </a:p>
-        </p:txBody>
-      </p:sp>
-      <p:sp>
-        <p:nvSpPr>
-          <p:cNvPr id="11" name="Rectangle 10"/>
-          <p:cNvSpPr/>
-          <p:nvPr/>
-        </p:nvSpPr>
-        <p:spPr>
-          <a:xfrm>
-            <a:off x="640080" y="2295144"/>
-            <a:ext cx="274320" cy="274320"/>
-          </a:xfrm>
-          <a:prstGeom prst="rect">
-            <a:avLst/>
-          </a:prstGeom>
-          <a:solidFill>
-            <a:srgbClr val="FFFFFF"/>
-          </a:solidFill>
-          <a:ln>
-            <a:solidFill>
-              <a:srgbClr val="333333"/>
-            </a:solidFill>
-          </a:ln>
-        </p:spPr>
-        <p:style>
-          <a:lnRef idx="1">
-            <a:schemeClr val="accent1"/>
-          </a:lnRef>
-          <a:fillRef idx="3">
-            <a:schemeClr val="accent1"/>
-          </a:fillRef>
-          <a:effectRef idx="2">
-            <a:schemeClr val="accent1"/>
-          </a:effectRef>
-          <a:fontRef idx="minor">
-            <a:schemeClr val="lt1"/>
-          </a:fontRef>
-        </p:style>
-        <p:txBody>
-          <a:bodyPr rtlCol="0" anchor="ctr"/>
-          <a:lstStyle/>
-          <a:p>
-            <a:pPr algn="ctr"/>
-          </a:p>
-        </p:txBody>
-      </p:sp>
-      <p:sp>
-        <p:nvSpPr>
-          <p:cNvPr id="12" name="Rectangle 11"/>
-          <p:cNvSpPr/>
-          <p:nvPr/>
-        </p:nvSpPr>
-        <p:spPr>
-          <a:xfrm>
-            <a:off x="640080" y="2295144"/>
-            <a:ext cx="73152" cy="274320"/>
-          </a:xfrm>
-          <a:prstGeom prst="rect">
-            <a:avLst/>
-          </a:prstGeom>
-          <a:solidFill>
-            <a:srgbClr val="269CCB"/>
-          </a:solidFill>
-          <a:ln>
-            <a:noFill/>
-          </a:ln>
-        </p:spPr>
-        <p:style>
-          <a:lnRef idx="1">
-            <a:schemeClr val="accent1"/>
-          </a:lnRef>
-          <a:fillRef idx="3">
-            <a:schemeClr val="accent1"/>
-          </a:fillRef>
-          <a:effectRef idx="2">
-            <a:schemeClr val="accent1"/>
-          </a:effectRef>
-          <a:fontRef idx="minor">
-            <a:schemeClr val="lt1"/>
-          </a:fontRef>
-        </p:style>
-        <p:txBody>
-          <a:bodyPr rtlCol="0" anchor="ctr"/>
-          <a:lstStyle/>
-          <a:p>
-            <a:pPr algn="ctr"/>
-          </a:p>
-        </p:txBody>
-      </p:sp>
-      <p:sp>
-        <p:nvSpPr>
-          <p:cNvPr id="13" name="TextBox 12"/>
-          <p:cNvSpPr txBox="1"/>
-          <p:nvPr/>
-        </p:nvSpPr>
-        <p:spPr>
-          <a:xfrm>
-            <a:off x="1097280" y="2240279"/>
-            <a:ext cx="10362895" cy="402336"/>
-          </a:xfrm>
-          <a:prstGeom prst="rect">
-            <a:avLst/>
-          </a:prstGeom>
-          <a:noFill/>
-        </p:spPr>
-        <p:txBody>
-          <a:bodyPr wrap="square" anchor="ctr"/>
-          <a:lstStyle/>
-          <a:p>
-            <a:r>
-              <a:rPr sz="1500" b="1" i="0">
-                <a:solidFill>
-                  <a:srgbClr val="333333"/>
-                </a:solidFill>
-                <a:latin typeface="Calibri"/>
-              </a:rPr>
-              <a:t>LOS CRITERIOS Y SUS PESOS</a:t>
-            </a:r>
-            <a:r>
-              <a:rPr sz="1500" b="0" i="0">
-                <a:solidFill>
-                  <a:srgbClr val="333333"/>
-                </a:solidFill>
-                <a:latin typeface="Calibri"/>
-              </a:rPr>
-              <a:t> — De 3 a 5 criterios sacados de sus </a:t>
-            </a:r>
-            <a:r>
-              <a:rPr sz="1500" b="1" i="0">
-                <a:solidFill>
-                  <a:srgbClr val="333333"/>
-                </a:solidFill>
-                <a:latin typeface="Calibri"/>
-              </a:rPr>
-              <a:t>requisitos no funcionales y restricciones</a:t>
-            </a:r>
-            <a:r>
-              <a:rPr sz="1500" b="0" i="0">
-                <a:solidFill>
-                  <a:srgbClr val="333333"/>
-                </a:solidFill>
-                <a:latin typeface="Calibri"/>
-              </a:rPr>
-              <a:t>, cada uno con un peso, </a:t>
-            </a:r>
-            <a:r>
-              <a:rPr sz="1500" b="1" i="0">
-                <a:solidFill>
-                  <a:srgbClr val="333333"/>
-                </a:solidFill>
-                <a:latin typeface="Calibri"/>
-              </a:rPr>
-              <a:t>escritos antes de calificar</a:t>
-            </a:r>
-            <a:r>
-              <a:rPr sz="1500" b="0" i="0">
+            <a:pPr>
+              <a:spcAft>
+                <a:spcPts val="800"/>
+              </a:spcAft>
+            </a:pPr>
+            <a:r>
+              <a:rPr sz="2000" b="0" i="0">
+                <a:solidFill>
+                  <a:srgbClr val="333333"/>
+                </a:solidFill>
+                <a:latin typeface="Calibri"/>
+              </a:rPr>
+              <a:t>–   El caso de la firma financiera de 2012 es el mejor gancho posible para esta sesión porque desarma la idea de que los desastres los causa código malo.</a:t>
+            </a:r>
+          </a:p>
+          <a:p>
+            <a:pPr>
+              <a:spcAft>
+                <a:spcPts val="800"/>
+              </a:spcAft>
+            </a:pPr>
+            <a:r>
+              <a:rPr sz="2000" b="0" i="0">
+                <a:solidFill>
+                  <a:srgbClr val="333333"/>
+                </a:solidFill>
+                <a:latin typeface="Calibri"/>
+              </a:rPr>
+              <a:t>–   El código llevaba años funcionando.</a:t>
+            </a:r>
+          </a:p>
+          <a:p>
+            <a:pPr>
+              <a:spcAft>
+                <a:spcPts val="800"/>
+              </a:spcAft>
+            </a:pPr>
+            <a:r>
+              <a:rPr sz="2000" b="0" i="0">
+                <a:solidFill>
+                  <a:srgbClr val="333333"/>
+                </a:solidFill>
+                <a:latin typeface="Calibri"/>
+              </a:rPr>
+              <a:t>–   Lo que falló fue el </a:t>
+            </a:r>
+            <a:r>
+              <a:rPr sz="2000" b="1" i="0">
+                <a:solidFill>
+                  <a:srgbClr val="333333"/>
+                </a:solidFill>
+                <a:latin typeface="Calibri"/>
+              </a:rPr>
+              <a:t>paso controlado de una fase a la siguiente</a:t>
+            </a:r>
+            <a:r>
+              <a:rPr sz="2000" b="0" i="0">
+                <a:solidFill>
+                  <a:srgbClr val="333333"/>
+                </a:solidFill>
+                <a:latin typeface="Calibri"/>
+              </a:rPr>
+              <a:t>: un despliegue que dejó una versión antigua activa en uno de los servidores, un sistema automático operando a velocidad de máquina, y ninguna manera de frenar rápido cuando empezó a hacer daño.</a:t>
+            </a:r>
+          </a:p>
+          <a:p>
+            <a:pPr>
+              <a:spcAft>
+                <a:spcPts val="800"/>
+              </a:spcAft>
+            </a:pPr>
+            <a:r>
+              <a:rPr sz="2000" b="0" i="0">
+                <a:solidFill>
+                  <a:srgbClr val="333333"/>
+                </a:solidFill>
+                <a:latin typeface="Calibri"/>
+              </a:rPr>
+              <a:t>–   En cuestión de minutos las pérdidas fueron enormes y la firma no sobrevivió como empresa independiente.</a:t>
+            </a:r>
+          </a:p>
+          <a:p>
+            <a:pPr>
+              <a:spcAft>
+                <a:spcPts val="800"/>
+              </a:spcAft>
+            </a:pPr>
+            <a:r>
+              <a:rPr sz="2000" b="0" i="0">
+                <a:solidFill>
+                  <a:srgbClr val="333333"/>
+                </a:solidFill>
+                <a:latin typeface="Calibri"/>
+              </a:rPr>
+              <a:t>–   La pregunta del muro —«¿en qué fase estaba el error?»— va a producir respuestas que dicen «en la programación», y ahí está la lección: </a:t>
+            </a:r>
+            <a:r>
+              <a:rPr sz="2000" b="1" i="0">
+                <a:solidFill>
+                  <a:srgbClr val="333333"/>
+                </a:solidFill>
+                <a:latin typeface="Calibri"/>
+              </a:rPr>
+              <a:t>el error no estaba en el código, estaba en la operación</a:t>
+            </a:r>
+            <a:r>
+              <a:rPr sz="2000" b="0" i="0">
                 <a:solidFill>
                   <a:srgbClr val="333333"/>
                 </a:solidFill>
@@ -10521,601 +13876,7 @@
       </p:sp>
       <p:sp>
         <p:nvSpPr>
-          <p:cNvPr id="14" name="Rounded Rectangle 13"/>
-          <p:cNvSpPr/>
-          <p:nvPr/>
-        </p:nvSpPr>
-        <p:spPr>
-          <a:xfrm>
-            <a:off x="457200" y="2825496"/>
-            <a:ext cx="11277295" cy="566928"/>
-          </a:xfrm>
-          <a:prstGeom prst="roundRect">
-            <a:avLst>
-              <a:gd name="adj" fmla="val 12000"/>
-            </a:avLst>
-          </a:prstGeom>
-          <a:solidFill>
-            <a:srgbClr val="F2F2F2"/>
-          </a:solidFill>
-          <a:ln>
-            <a:noFill/>
-          </a:ln>
-        </p:spPr>
-        <p:style>
-          <a:lnRef idx="1">
-            <a:schemeClr val="accent1"/>
-          </a:lnRef>
-          <a:fillRef idx="3">
-            <a:schemeClr val="accent1"/>
-          </a:fillRef>
-          <a:effectRef idx="2">
-            <a:schemeClr val="accent1"/>
-          </a:effectRef>
-          <a:fontRef idx="minor">
-            <a:schemeClr val="lt1"/>
-          </a:fontRef>
-        </p:style>
-        <p:txBody>
-          <a:bodyPr rtlCol="0" anchor="ctr"/>
-          <a:lstStyle/>
-          <a:p>
-            <a:pPr algn="ctr"/>
-          </a:p>
-        </p:txBody>
-      </p:sp>
-      <p:sp>
-        <p:nvSpPr>
-          <p:cNvPr id="15" name="Rectangle 14"/>
-          <p:cNvSpPr/>
-          <p:nvPr/>
-        </p:nvSpPr>
-        <p:spPr>
-          <a:xfrm>
-            <a:off x="640080" y="2971800"/>
-            <a:ext cx="274320" cy="274320"/>
-          </a:xfrm>
-          <a:prstGeom prst="rect">
-            <a:avLst/>
-          </a:prstGeom>
-          <a:solidFill>
-            <a:srgbClr val="FFFFFF"/>
-          </a:solidFill>
-          <a:ln>
-            <a:solidFill>
-              <a:srgbClr val="333333"/>
-            </a:solidFill>
-          </a:ln>
-        </p:spPr>
-        <p:style>
-          <a:lnRef idx="1">
-            <a:schemeClr val="accent1"/>
-          </a:lnRef>
-          <a:fillRef idx="3">
-            <a:schemeClr val="accent1"/>
-          </a:fillRef>
-          <a:effectRef idx="2">
-            <a:schemeClr val="accent1"/>
-          </a:effectRef>
-          <a:fontRef idx="minor">
-            <a:schemeClr val="lt1"/>
-          </a:fontRef>
-        </p:style>
-        <p:txBody>
-          <a:bodyPr rtlCol="0" anchor="ctr"/>
-          <a:lstStyle/>
-          <a:p>
-            <a:pPr algn="ctr"/>
-          </a:p>
-        </p:txBody>
-      </p:sp>
-      <p:sp>
-        <p:nvSpPr>
-          <p:cNvPr id="16" name="Rectangle 15"/>
-          <p:cNvSpPr/>
-          <p:nvPr/>
-        </p:nvSpPr>
-        <p:spPr>
-          <a:xfrm>
-            <a:off x="640080" y="2971800"/>
-            <a:ext cx="73152" cy="274320"/>
-          </a:xfrm>
-          <a:prstGeom prst="rect">
-            <a:avLst/>
-          </a:prstGeom>
-          <a:solidFill>
-            <a:srgbClr val="269CCB"/>
-          </a:solidFill>
-          <a:ln>
-            <a:noFill/>
-          </a:ln>
-        </p:spPr>
-        <p:style>
-          <a:lnRef idx="1">
-            <a:schemeClr val="accent1"/>
-          </a:lnRef>
-          <a:fillRef idx="3">
-            <a:schemeClr val="accent1"/>
-          </a:fillRef>
-          <a:effectRef idx="2">
-            <a:schemeClr val="accent1"/>
-          </a:effectRef>
-          <a:fontRef idx="minor">
-            <a:schemeClr val="lt1"/>
-          </a:fontRef>
-        </p:style>
-        <p:txBody>
-          <a:bodyPr rtlCol="0" anchor="ctr"/>
-          <a:lstStyle/>
-          <a:p>
-            <a:pPr algn="ctr"/>
-          </a:p>
-        </p:txBody>
-      </p:sp>
-      <p:sp>
-        <p:nvSpPr>
-          <p:cNvPr id="17" name="TextBox 16"/>
-          <p:cNvSpPr txBox="1"/>
-          <p:nvPr/>
-        </p:nvSpPr>
-        <p:spPr>
-          <a:xfrm>
-            <a:off x="1097280" y="2916936"/>
-            <a:ext cx="10362895" cy="402336"/>
-          </a:xfrm>
-          <a:prstGeom prst="rect">
-            <a:avLst/>
-          </a:prstGeom>
-          <a:noFill/>
-        </p:spPr>
-        <p:txBody>
-          <a:bodyPr wrap="square" anchor="ctr"/>
-          <a:lstStyle/>
-          <a:p>
-            <a:r>
-              <a:rPr sz="1500" b="1" i="0">
-                <a:solidFill>
-                  <a:srgbClr val="333333"/>
-                </a:solidFill>
-                <a:latin typeface="Calibri"/>
-              </a:rPr>
-              <a:t>LA MATRIZ Y LA DECISIÓN</a:t>
-            </a:r>
-            <a:r>
-              <a:rPr sz="1500" b="0" i="0">
-                <a:solidFill>
-                  <a:srgbClr val="333333"/>
-                </a:solidFill>
-                <a:latin typeface="Calibri"/>
-              </a:rPr>
-              <a:t> — Cada alternativa calificada criterio por criterio (escala 1-3) con </a:t>
-            </a:r>
-            <a:r>
-              <a:rPr sz="1500" b="1" i="0">
-                <a:solidFill>
-                  <a:srgbClr val="333333"/>
-                </a:solidFill>
-                <a:latin typeface="Calibri"/>
-              </a:rPr>
-              <a:t>media línea de justificación por casilla</a:t>
-            </a:r>
-            <a:r>
-              <a:rPr sz="1500" b="0" i="0">
-                <a:solidFill>
-                  <a:srgbClr val="333333"/>
-                </a:solidFill>
-                <a:latin typeface="Calibri"/>
-              </a:rPr>
-              <a:t>, el resultado, y la decisión.</a:t>
-            </a:r>
-          </a:p>
-        </p:txBody>
-      </p:sp>
-      <p:sp>
-        <p:nvSpPr>
-          <p:cNvPr id="18" name="Rounded Rectangle 17"/>
-          <p:cNvSpPr/>
-          <p:nvPr/>
-        </p:nvSpPr>
-        <p:spPr>
-          <a:xfrm>
-            <a:off x="457200" y="3502152"/>
-            <a:ext cx="11277295" cy="566928"/>
-          </a:xfrm>
-          <a:prstGeom prst="roundRect">
-            <a:avLst>
-              <a:gd name="adj" fmla="val 12000"/>
-            </a:avLst>
-          </a:prstGeom>
-          <a:solidFill>
-            <a:srgbClr val="F2F2F2"/>
-          </a:solidFill>
-          <a:ln>
-            <a:noFill/>
-          </a:ln>
-        </p:spPr>
-        <p:style>
-          <a:lnRef idx="1">
-            <a:schemeClr val="accent1"/>
-          </a:lnRef>
-          <a:fillRef idx="3">
-            <a:schemeClr val="accent1"/>
-          </a:fillRef>
-          <a:effectRef idx="2">
-            <a:schemeClr val="accent1"/>
-          </a:effectRef>
-          <a:fontRef idx="minor">
-            <a:schemeClr val="lt1"/>
-          </a:fontRef>
-        </p:style>
-        <p:txBody>
-          <a:bodyPr rtlCol="0" anchor="ctr"/>
-          <a:lstStyle/>
-          <a:p>
-            <a:pPr algn="ctr"/>
-          </a:p>
-        </p:txBody>
-      </p:sp>
-      <p:sp>
-        <p:nvSpPr>
-          <p:cNvPr id="19" name="Rectangle 18"/>
-          <p:cNvSpPr/>
-          <p:nvPr/>
-        </p:nvSpPr>
-        <p:spPr>
-          <a:xfrm>
-            <a:off x="640080" y="3648456"/>
-            <a:ext cx="274320" cy="274320"/>
-          </a:xfrm>
-          <a:prstGeom prst="rect">
-            <a:avLst/>
-          </a:prstGeom>
-          <a:solidFill>
-            <a:srgbClr val="FFFFFF"/>
-          </a:solidFill>
-          <a:ln>
-            <a:solidFill>
-              <a:srgbClr val="333333"/>
-            </a:solidFill>
-          </a:ln>
-        </p:spPr>
-        <p:style>
-          <a:lnRef idx="1">
-            <a:schemeClr val="accent1"/>
-          </a:lnRef>
-          <a:fillRef idx="3">
-            <a:schemeClr val="accent1"/>
-          </a:fillRef>
-          <a:effectRef idx="2">
-            <a:schemeClr val="accent1"/>
-          </a:effectRef>
-          <a:fontRef idx="minor">
-            <a:schemeClr val="lt1"/>
-          </a:fontRef>
-        </p:style>
-        <p:txBody>
-          <a:bodyPr rtlCol="0" anchor="ctr"/>
-          <a:lstStyle/>
-          <a:p>
-            <a:pPr algn="ctr"/>
-          </a:p>
-        </p:txBody>
-      </p:sp>
-      <p:sp>
-        <p:nvSpPr>
-          <p:cNvPr id="20" name="Rectangle 19"/>
-          <p:cNvSpPr/>
-          <p:nvPr/>
-        </p:nvSpPr>
-        <p:spPr>
-          <a:xfrm>
-            <a:off x="640080" y="3648456"/>
-            <a:ext cx="73152" cy="274320"/>
-          </a:xfrm>
-          <a:prstGeom prst="rect">
-            <a:avLst/>
-          </a:prstGeom>
-          <a:solidFill>
-            <a:srgbClr val="269CCB"/>
-          </a:solidFill>
-          <a:ln>
-            <a:noFill/>
-          </a:ln>
-        </p:spPr>
-        <p:style>
-          <a:lnRef idx="1">
-            <a:schemeClr val="accent1"/>
-          </a:lnRef>
-          <a:fillRef idx="3">
-            <a:schemeClr val="accent1"/>
-          </a:fillRef>
-          <a:effectRef idx="2">
-            <a:schemeClr val="accent1"/>
-          </a:effectRef>
-          <a:fontRef idx="minor">
-            <a:schemeClr val="lt1"/>
-          </a:fontRef>
-        </p:style>
-        <p:txBody>
-          <a:bodyPr rtlCol="0" anchor="ctr"/>
-          <a:lstStyle/>
-          <a:p>
-            <a:pPr algn="ctr"/>
-          </a:p>
-        </p:txBody>
-      </p:sp>
-      <p:sp>
-        <p:nvSpPr>
-          <p:cNvPr id="21" name="TextBox 20"/>
-          <p:cNvSpPr txBox="1"/>
-          <p:nvPr/>
-        </p:nvSpPr>
-        <p:spPr>
-          <a:xfrm>
-            <a:off x="1097280" y="3593592"/>
-            <a:ext cx="10362895" cy="402336"/>
-          </a:xfrm>
-          <a:prstGeom prst="rect">
-            <a:avLst/>
-          </a:prstGeom>
-          <a:noFill/>
-        </p:spPr>
-        <p:txBody>
-          <a:bodyPr wrap="square" anchor="ctr"/>
-          <a:lstStyle/>
-          <a:p>
-            <a:r>
-              <a:rPr sz="1500" b="1" i="0">
-                <a:solidFill>
-                  <a:srgbClr val="333333"/>
-                </a:solidFill>
-                <a:latin typeface="Calibri"/>
-              </a:rPr>
-              <a:t>QUÉ SE PIERDE</a:t>
-            </a:r>
-            <a:r>
-              <a:rPr sz="1500" b="0" i="0">
-                <a:solidFill>
-                  <a:srgbClr val="333333"/>
-                </a:solidFill>
-                <a:latin typeface="Calibri"/>
-              </a:rPr>
-              <a:t> — Lo que la decisión sacrifica, en dos o tres líneas. Toda decisión sacrifica algo.</a:t>
-            </a:r>
-          </a:p>
-        </p:txBody>
-      </p:sp>
-      <p:sp>
-        <p:nvSpPr>
-          <p:cNvPr id="22" name="Rounded Rectangle 21"/>
-          <p:cNvSpPr/>
-          <p:nvPr/>
-        </p:nvSpPr>
-        <p:spPr>
-          <a:xfrm>
-            <a:off x="457200" y="4178808"/>
-            <a:ext cx="11277295" cy="566928"/>
-          </a:xfrm>
-          <a:prstGeom prst="roundRect">
-            <a:avLst>
-              <a:gd name="adj" fmla="val 12000"/>
-            </a:avLst>
-          </a:prstGeom>
-          <a:solidFill>
-            <a:srgbClr val="F2F2F2"/>
-          </a:solidFill>
-          <a:ln>
-            <a:noFill/>
-          </a:ln>
-        </p:spPr>
-        <p:style>
-          <a:lnRef idx="1">
-            <a:schemeClr val="accent1"/>
-          </a:lnRef>
-          <a:fillRef idx="3">
-            <a:schemeClr val="accent1"/>
-          </a:fillRef>
-          <a:effectRef idx="2">
-            <a:schemeClr val="accent1"/>
-          </a:effectRef>
-          <a:fontRef idx="minor">
-            <a:schemeClr val="lt1"/>
-          </a:fontRef>
-        </p:style>
-        <p:txBody>
-          <a:bodyPr rtlCol="0" anchor="ctr"/>
-          <a:lstStyle/>
-          <a:p>
-            <a:pPr algn="ctr"/>
-          </a:p>
-        </p:txBody>
-      </p:sp>
-      <p:sp>
-        <p:nvSpPr>
-          <p:cNvPr id="23" name="Rectangle 22"/>
-          <p:cNvSpPr/>
-          <p:nvPr/>
-        </p:nvSpPr>
-        <p:spPr>
-          <a:xfrm>
-            <a:off x="640080" y="4325112"/>
-            <a:ext cx="274320" cy="274320"/>
-          </a:xfrm>
-          <a:prstGeom prst="rect">
-            <a:avLst/>
-          </a:prstGeom>
-          <a:solidFill>
-            <a:srgbClr val="FFFFFF"/>
-          </a:solidFill>
-          <a:ln>
-            <a:solidFill>
-              <a:srgbClr val="333333"/>
-            </a:solidFill>
-          </a:ln>
-        </p:spPr>
-        <p:style>
-          <a:lnRef idx="1">
-            <a:schemeClr val="accent1"/>
-          </a:lnRef>
-          <a:fillRef idx="3">
-            <a:schemeClr val="accent1"/>
-          </a:fillRef>
-          <a:effectRef idx="2">
-            <a:schemeClr val="accent1"/>
-          </a:effectRef>
-          <a:fontRef idx="minor">
-            <a:schemeClr val="lt1"/>
-          </a:fontRef>
-        </p:style>
-        <p:txBody>
-          <a:bodyPr rtlCol="0" anchor="ctr"/>
-          <a:lstStyle/>
-          <a:p>
-            <a:pPr algn="ctr"/>
-          </a:p>
-        </p:txBody>
-      </p:sp>
-      <p:sp>
-        <p:nvSpPr>
-          <p:cNvPr id="24" name="Rectangle 23"/>
-          <p:cNvSpPr/>
-          <p:nvPr/>
-        </p:nvSpPr>
-        <p:spPr>
-          <a:xfrm>
-            <a:off x="640080" y="4325112"/>
-            <a:ext cx="73152" cy="274320"/>
-          </a:xfrm>
-          <a:prstGeom prst="rect">
-            <a:avLst/>
-          </a:prstGeom>
-          <a:solidFill>
-            <a:srgbClr val="269CCB"/>
-          </a:solidFill>
-          <a:ln>
-            <a:noFill/>
-          </a:ln>
-        </p:spPr>
-        <p:style>
-          <a:lnRef idx="1">
-            <a:schemeClr val="accent1"/>
-          </a:lnRef>
-          <a:fillRef idx="3">
-            <a:schemeClr val="accent1"/>
-          </a:fillRef>
-          <a:effectRef idx="2">
-            <a:schemeClr val="accent1"/>
-          </a:effectRef>
-          <a:fontRef idx="minor">
-            <a:schemeClr val="lt1"/>
-          </a:fontRef>
-        </p:style>
-        <p:txBody>
-          <a:bodyPr rtlCol="0" anchor="ctr"/>
-          <a:lstStyle/>
-          <a:p>
-            <a:pPr algn="ctr"/>
-          </a:p>
-        </p:txBody>
-      </p:sp>
-      <p:sp>
-        <p:nvSpPr>
-          <p:cNvPr id="25" name="TextBox 24"/>
-          <p:cNvSpPr txBox="1"/>
-          <p:nvPr/>
-        </p:nvSpPr>
-        <p:spPr>
-          <a:xfrm>
-            <a:off x="1097280" y="4270248"/>
-            <a:ext cx="10362895" cy="402336"/>
-          </a:xfrm>
-          <a:prstGeom prst="rect">
-            <a:avLst/>
-          </a:prstGeom>
-          <a:noFill/>
-        </p:spPr>
-        <p:txBody>
-          <a:bodyPr wrap="square" anchor="ctr"/>
-          <a:lstStyle/>
-          <a:p>
-            <a:r>
-              <a:rPr sz="1500" b="1" i="0">
-                <a:solidFill>
-                  <a:srgbClr val="333333"/>
-                </a:solidFill>
-                <a:latin typeface="Calibri"/>
-              </a:rPr>
-              <a:t>ALCANCE MÍNIMO Y PLAN DE VALIDACIÓN</a:t>
-            </a:r>
-            <a:r>
-              <a:rPr sz="1500" b="0" i="0">
-                <a:solidFill>
-                  <a:srgbClr val="333333"/>
-                </a:solidFill>
-                <a:latin typeface="Calibri"/>
-              </a:rPr>
-              <a:t> — Qué se construye este semestre (un requisito funcional completo, cumpliendo los no funcionales), la lista de lo que queda para «versión siguiente», y el plan de validación: </a:t>
-            </a:r>
-            <a:r>
-              <a:rPr sz="1500" b="1" i="0">
-                <a:solidFill>
-                  <a:srgbClr val="333333"/>
-                </a:solidFill>
-                <a:latin typeface="Calibri"/>
-              </a:rPr>
-              <a:t>con quién</a:t>
-            </a:r>
-            <a:r>
-              <a:rPr sz="1500" b="0" i="0">
-                <a:solidFill>
-                  <a:srgbClr val="333333"/>
-                </a:solidFill>
-                <a:latin typeface="Calibri"/>
-              </a:rPr>
-              <a:t> se prueba, </a:t>
-            </a:r>
-            <a:r>
-              <a:rPr sz="1500" b="1" i="0">
-                <a:solidFill>
-                  <a:srgbClr val="333333"/>
-                </a:solidFill>
-                <a:latin typeface="Calibri"/>
-              </a:rPr>
-              <a:t>qué tareas</a:t>
-            </a:r>
-            <a:r>
-              <a:rPr sz="1500" b="0" i="0">
-                <a:solidFill>
-                  <a:srgbClr val="333333"/>
-                </a:solidFill>
-                <a:latin typeface="Calibri"/>
-              </a:rPr>
-              <a:t> se le piden y </a:t>
-            </a:r>
-            <a:r>
-              <a:rPr sz="1500" b="1" i="0">
-                <a:solidFill>
-                  <a:srgbClr val="333333"/>
-                </a:solidFill>
-                <a:latin typeface="Calibri"/>
-              </a:rPr>
-              <a:t>qué se observa</a:t>
-            </a:r>
-            <a:r>
-              <a:rPr sz="1500" b="0" i="0">
-                <a:solidFill>
-                  <a:srgbClr val="333333"/>
-                </a:solidFill>
-                <a:latin typeface="Calibri"/>
-              </a:rPr>
-              <a:t>.</a:t>
-            </a:r>
-          </a:p>
-        </p:txBody>
-      </p:sp>
-      <p:sp>
-        <p:nvSpPr>
-          <p:cNvPr id="26" name="TextBox 25"/>
+          <p:cNvPr id="6" name="TextBox 5"/>
           <p:cNvSpPr txBox="1"/>
           <p:nvPr/>
         </p:nvSpPr>

--- a/Introduccion a la Ingenieria/Clases/Clase 8 - Taller de aplicacion del ciclo de vida/Presentacion.pptx
+++ b/Introduccion a la Ingenieria/Clases/Clase 8 - Taller de aplicacion del ciclo de vida/Presentacion.pptx
@@ -24,7 +24,6 @@
     <p:sldId id="272" r:id="rId23"/>
     <p:sldId id="273" r:id="rId24"/>
     <p:sldId id="274" r:id="rId25"/>
-    <p:sldId id="275" r:id="rId26"/>
   </p:sldIdLst>
   <p:sldSz cx="12191695" cy="6858000" type="screen4x3"/>
   <p:notesSz cx="6858000" cy="9144000"/>
@@ -3625,7 +3624,7 @@
                 </a:solidFill>
                 <a:latin typeface="Calibri"/>
               </a:rPr>
-              <a:t>La pregunta de entrada: 45 minutos y una fase saltada (2/2)</a:t>
+              <a:t>Los cuatro casos: qué contar y cómo exigir la fuente (1/2)</a:t>
             </a:r>
           </a:p>
         </p:txBody>
@@ -3664,7 +3663,25 @@
                 </a:solidFill>
                 <a:latin typeface="Calibri"/>
               </a:rPr>
-              <a:t>–   Es la fase que en la sesión 7 se nombró de pasada y que nadie enseña en primer semestre.</a:t>
+              <a:t>–   La tabla es densa a propósito: hoy la teoría son 20 minutos y el peso está en el taller. </a:t>
+            </a:r>
+            <a:r>
+              <a:rPr sz="2000" b="1" i="0">
+                <a:solidFill>
+                  <a:srgbClr val="333333"/>
+                </a:solidFill>
+                <a:latin typeface="Calibri"/>
+              </a:rPr>
+              <a:t>El sistema de equipajes del aeropuerto</a:t>
+            </a:r>
+            <a:r>
+              <a:rPr sz="2000" b="0" i="0">
+                <a:solidFill>
+                  <a:srgbClr val="333333"/>
+                </a:solidFill>
+                <a:latin typeface="Calibri"/>
+              </a:rPr>
+              <a:t> es el caso de requisitos y diseño.</a:t>
             </a:r>
           </a:p>
           <a:p>
@@ -3680,7 +3697,43 @@
                 </a:solidFill>
                 <a:latin typeface="Calibri"/>
               </a:rPr>
-              <a:t>–   Sirve además para introducir una idea que vale para todo el semestre: cada transición entre fases es un lugar donde se rompen los proyectos, y por eso las fases tienen entregables.</a:t>
+              <a:t>–   La lección: </a:t>
+            </a:r>
+            <a:r>
+              <a:rPr sz="2000" b="1" i="0">
+                <a:solidFill>
+                  <a:srgbClr val="333333"/>
+                </a:solidFill>
+                <a:latin typeface="Calibri"/>
+              </a:rPr>
+              <a:t>el plazo se fijó antes de saber si era posible</a:t>
+            </a:r>
+            <a:r>
+              <a:rPr sz="2000" b="0" i="0">
+                <a:solidFill>
+                  <a:srgbClr val="333333"/>
+                </a:solidFill>
+                <a:latin typeface="Calibri"/>
+              </a:rPr>
+              <a:t>, y ningún esfuerzo de construcción arregla eso. </a:t>
+            </a:r>
+            <a:r>
+              <a:rPr sz="2000" b="1" i="0">
+                <a:solidFill>
+                  <a:srgbClr val="333333"/>
+                </a:solidFill>
+                <a:latin typeface="Calibri"/>
+              </a:rPr>
+              <a:t>El sistema de expedientes de la agencia federal</a:t>
+            </a:r>
+            <a:r>
+              <a:rPr sz="2000" b="0" i="0">
+                <a:solidFill>
+                  <a:srgbClr val="333333"/>
+                </a:solidFill>
+                <a:latin typeface="Calibri"/>
+              </a:rPr>
+              <a:t> es el caso de requisitos puros: años de desarrollo</a:t>
             </a:r>
           </a:p>
           <a:p>
@@ -3696,7 +3749,7 @@
                 </a:solidFill>
                 <a:latin typeface="Calibri"/>
               </a:rPr>
-              <a:t>–   Recomendación de manejo: no dé el nombre de la empresa en la apertura.</a:t>
+              <a:t>–   Requisitos que cambiaban permanentemente, ninguna definición estable de qué debía hacer el sistema, y un abandono sin haber entrado en operación.</a:t>
             </a:r>
           </a:p>
           <a:p>
@@ -3712,7 +3765,68 @@
                 </a:solidFill>
                 <a:latin typeface="Calibri"/>
               </a:rPr>
-              <a:t>–   La fuerza está en la pregunta, y el nombre lo pueden buscar ellos cuando se les pida citar la fuente.</a:t>
+              <a:t>–   Es el ejemplo perfecto de que </a:t>
+            </a:r>
+            <a:r>
+              <a:rPr sz="2000" b="1" i="0">
+                <a:solidFill>
+                  <a:srgbClr val="333333"/>
+                </a:solidFill>
+                <a:latin typeface="Calibri"/>
+              </a:rPr>
+              <a:t>sin criterios de aceptación no hay manera de terminar</a:t>
+            </a:r>
+            <a:r>
+              <a:rPr sz="2000" b="0" i="0">
+                <a:solidFill>
+                  <a:srgbClr val="333333"/>
+                </a:solidFill>
+                <a:latin typeface="Calibri"/>
+              </a:rPr>
+              <a:t>: un proyecto que no puede decir cuándo está listo, no está listo nunca. </a:t>
+            </a:r>
+            <a:r>
+              <a:rPr sz="2000" b="1" i="0">
+                <a:solidFill>
+                  <a:srgbClr val="333333"/>
+                </a:solidFill>
+                <a:latin typeface="Calibri"/>
+              </a:rPr>
+              <a:t>El portal público de salud en su lanzamiento</a:t>
+            </a:r>
+            <a:r>
+              <a:rPr sz="2000" b="0" i="0">
+                <a:solidFill>
+                  <a:srgbClr val="333333"/>
+                </a:solidFill>
+                <a:latin typeface="Calibri"/>
+              </a:rPr>
+              <a:t> es el caso de validación.</a:t>
+            </a:r>
+          </a:p>
+          <a:p>
+            <a:pPr>
+              <a:spcAft>
+                <a:spcPts val="800"/>
+              </a:spcAft>
+            </a:pPr>
+            <a:r>
+              <a:rPr sz="2000" b="0" i="0">
+                <a:solidFill>
+                  <a:srgbClr val="333333"/>
+                </a:solidFill>
+                <a:latin typeface="Calibri"/>
+              </a:rPr>
+              <a:t>–   La lección para sus proyectos: </a:t>
+            </a:r>
+            <a:r>
+              <a:rPr sz="2000" b="1" i="0">
+                <a:solidFill>
+                  <a:srgbClr val="333333"/>
+                </a:solidFill>
+                <a:latin typeface="Calibri"/>
+              </a:rPr>
+              <a:t>probar que algo funciona con un usuario no es probar que funciona con muchos</a:t>
             </a:r>
           </a:p>
         </p:txBody>
@@ -3893,7 +4007,7 @@
                 </a:solidFill>
                 <a:latin typeface="Calibri"/>
               </a:rPr>
-              <a:t>Los cuatro casos: qué contar y cómo exigir la fuente (1/2)</a:t>
+              <a:t>Los cuatro casos: qué contar y cómo exigir la fuente (2/2)</a:t>
             </a:r>
           </a:p>
         </p:txBody>
@@ -3932,7 +4046,25 @@
                 </a:solidFill>
                 <a:latin typeface="Calibri"/>
               </a:rPr>
-              <a:t>–   Cuatro casos, cinco minutos en total, un minuto y algo por caso.</a:t>
+              <a:t>–   Y el volumen es un requisito no funcional que se valida aparte. </a:t>
+            </a:r>
+            <a:r>
+              <a:rPr sz="2000" b="1" i="0">
+                <a:solidFill>
+                  <a:srgbClr val="333333"/>
+                </a:solidFill>
+                <a:latin typeface="Calibri"/>
+              </a:rPr>
+              <a:t>La firma financiera</a:t>
+            </a:r>
+            <a:r>
+              <a:rPr sz="2000" b="0" i="0">
+                <a:solidFill>
+                  <a:srgbClr val="333333"/>
+                </a:solidFill>
+                <a:latin typeface="Calibri"/>
+              </a:rPr>
+              <a:t> es el caso de operación, y es el que rompe el prejuicio sobre el código.</a:t>
             </a:r>
           </a:p>
           <a:p>
@@ -3948,7 +4080,7 @@
                 </a:solidFill>
                 <a:latin typeface="Calibri"/>
               </a:rPr>
-              <a:t>–   La tabla es densa a propósito: hoy la teoría son 20 minutos y el peso está en el taller. </a:t>
+              <a:t>–   Súmele el detalle que lo hace inolvidable: </a:t>
             </a:r>
             <a:r>
               <a:rPr sz="2000" b="1" i="0">
@@ -3957,7 +4089,7 @@
                 </a:solidFill>
                 <a:latin typeface="Calibri"/>
               </a:rPr>
-              <a:t>El sistema de equipajes del aeropuerto</a:t>
+              <a:t>el problema no fue escribir el software, fue instalarlo</a:t>
             </a:r>
             <a:r>
               <a:rPr sz="2000" b="0" i="0">
@@ -3966,7 +4098,7 @@
                 </a:solidFill>
                 <a:latin typeface="Calibri"/>
               </a:rPr>
-              <a:t> es el caso de requisitos y diseño.</a:t>
+              <a:t>, y no existía una forma rápida de detenerlo.</a:t>
             </a:r>
           </a:p>
           <a:p>
@@ -3982,7 +4114,25 @@
                 </a:solidFill>
                 <a:latin typeface="Calibri"/>
               </a:rPr>
-              <a:t>–   Un sistema automatizado de manejo de maletas de una escala sin precedentes, contratado con el plazo de apertura ya fijado y sin pruebas a escala real; retrasó la apertura del aeropuerto muchos meses, funcionó parcialmente durante años y terminó abandonado.</a:t>
+              <a:t>–   Y una exigencia metodológica que hay que repetir porque es la marca del curso: los cuatro casos son públicos y están documentados en informes oficiales y en prensa especializada, pero </a:t>
+            </a:r>
+            <a:r>
+              <a:rPr sz="2000" b="1" i="0">
+                <a:solidFill>
+                  <a:srgbClr val="333333"/>
+                </a:solidFill>
+                <a:latin typeface="Calibri"/>
+              </a:rPr>
+              <a:t>las cifras circulan con variaciones</a:t>
+            </a:r>
+            <a:r>
+              <a:rPr sz="2000" b="0" i="0">
+                <a:solidFill>
+                  <a:srgbClr val="333333"/>
+                </a:solidFill>
+                <a:latin typeface="Calibri"/>
+              </a:rPr>
+              <a:t>.</a:t>
             </a:r>
           </a:p>
           <a:p>
@@ -3998,43 +4148,7 @@
                 </a:solidFill>
                 <a:latin typeface="Calibri"/>
               </a:rPr>
-              <a:t>–   La lección: </a:t>
-            </a:r>
-            <a:r>
-              <a:rPr sz="2000" b="1" i="0">
-                <a:solidFill>
-                  <a:srgbClr val="333333"/>
-                </a:solidFill>
-                <a:latin typeface="Calibri"/>
-              </a:rPr>
-              <a:t>el plazo se fijó antes de saber si era posible</a:t>
-            </a:r>
-            <a:r>
-              <a:rPr sz="2000" b="0" i="0">
-                <a:solidFill>
-                  <a:srgbClr val="333333"/>
-                </a:solidFill>
-                <a:latin typeface="Calibri"/>
-              </a:rPr>
-              <a:t>, y ningún esfuerzo de construcción arregla eso. </a:t>
-            </a:r>
-            <a:r>
-              <a:rPr sz="2000" b="1" i="0">
-                <a:solidFill>
-                  <a:srgbClr val="333333"/>
-                </a:solidFill>
-                <a:latin typeface="Calibri"/>
-              </a:rPr>
-              <a:t>El sistema de expedientes de la agencia federal</a:t>
-            </a:r>
-            <a:r>
-              <a:rPr sz="2000" b="0" i="0">
-                <a:solidFill>
-                  <a:srgbClr val="333333"/>
-                </a:solidFill>
-                <a:latin typeface="Calibri"/>
-              </a:rPr>
-              <a:t> es el caso de requisitos puros: años de desarrollo</a:t>
+              <a:t>–   Quien cite un monto o una fecha en la exposición tiene que decir de dónde salió y de qué año es.</a:t>
             </a:r>
           </a:p>
           <a:p>
@@ -4050,59 +4164,7 @@
                 </a:solidFill>
                 <a:latin typeface="Calibri"/>
               </a:rPr>
-              <a:t>–   Requisitos que cambiaban permanentemente, ninguna definición estable de qué debía hacer el sistema, y un abandono sin haber entrado en operación.</a:t>
-            </a:r>
-          </a:p>
-          <a:p>
-            <a:pPr>
-              <a:spcAft>
-                <a:spcPts val="800"/>
-              </a:spcAft>
-            </a:pPr>
-            <a:r>
-              <a:rPr sz="2000" b="0" i="0">
-                <a:solidFill>
-                  <a:srgbClr val="333333"/>
-                </a:solidFill>
-                <a:latin typeface="Calibri"/>
-              </a:rPr>
-              <a:t>–   Es el ejemplo perfecto de que </a:t>
-            </a:r>
-            <a:r>
-              <a:rPr sz="2000" b="1" i="0">
-                <a:solidFill>
-                  <a:srgbClr val="333333"/>
-                </a:solidFill>
-                <a:latin typeface="Calibri"/>
-              </a:rPr>
-              <a:t>sin criterios de aceptación no hay manera de terminar</a:t>
-            </a:r>
-            <a:r>
-              <a:rPr sz="2000" b="0" i="0">
-                <a:solidFill>
-                  <a:srgbClr val="333333"/>
-                </a:solidFill>
-                <a:latin typeface="Calibri"/>
-              </a:rPr>
-              <a:t>: un proyecto que no puede decir cuándo está listo, no está listo nunca. </a:t>
-            </a:r>
-            <a:r>
-              <a:rPr sz="2000" b="1" i="0">
-                <a:solidFill>
-                  <a:srgbClr val="333333"/>
-                </a:solidFill>
-                <a:latin typeface="Calibri"/>
-              </a:rPr>
-              <a:t>El portal público de salud en su lanzamiento</a:t>
-            </a:r>
-            <a:r>
-              <a:rPr sz="2000" b="0" i="0">
-                <a:solidFill>
-                  <a:srgbClr val="333333"/>
-                </a:solidFill>
-                <a:latin typeface="Calibri"/>
-              </a:rPr>
-              <a:t> es el caso de validación.</a:t>
+              <a:t>–   Es la misma regla de la sesión 5 con las cifras ambientales y de la sesión 4 con los numerales.</a:t>
             </a:r>
           </a:p>
         </p:txBody>
@@ -4283,7 +4345,7 @@
                 </a:solidFill>
                 <a:latin typeface="Calibri"/>
               </a:rPr>
-              <a:t>Los cuatro casos: qué contar y cómo exigir la fuente (2/2)</a:t>
+              <a:t>La matriz de decisión: cómo se decide sin que la decisión ya estuviera tomada (1/2)</a:t>
             </a:r>
           </a:p>
         </p:txBody>
@@ -4322,7 +4384,7 @@
                 </a:solidFill>
                 <a:latin typeface="Calibri"/>
               </a:rPr>
-              <a:t>–   La demanda del primer día era perfectamente previsible —una fecha anunciada, una población conocida— y aun así el sitio no aguantó.</a:t>
+              <a:t>–   La matriz de decisión es una herramienta simple con una trampa sutil, y enseñar la trampa es más valioso que enseñar la herramienta.</a:t>
             </a:r>
           </a:p>
           <a:p>
@@ -4338,16 +4400,7 @@
                 </a:solidFill>
                 <a:latin typeface="Calibri"/>
               </a:rPr>
-              <a:t>–   La lección para sus proyectos: </a:t>
-            </a:r>
-            <a:r>
-              <a:rPr sz="2000" b="1" i="0">
-                <a:solidFill>
-                  <a:srgbClr val="333333"/>
-                </a:solidFill>
-                <a:latin typeface="Calibri"/>
-              </a:rPr>
-              <a:t>probar que algo funciona con un usuario no es probar que funciona con muchos</a:t>
+              <a:t>–   Los cinco pasos son: escribir las dos alternativas en una frase cada una; elegir de tres a cinco criterios; ponerle peso a cada criterio</a:t>
             </a:r>
           </a:p>
           <a:p>
@@ -4363,7 +4416,7 @@
                 </a:solidFill>
                 <a:latin typeface="Calibri"/>
               </a:rPr>
-              <a:t>–   Y el volumen es un requisito no funcional que se valida aparte. </a:t>
+              <a:t>–   Calificar cada alternativa criterio por criterio con una escala corta y </a:t>
             </a:r>
             <a:r>
               <a:rPr sz="2000" b="1" i="0">
@@ -4372,7 +4425,7 @@
                 </a:solidFill>
                 <a:latin typeface="Calibri"/>
               </a:rPr>
-              <a:t>La firma financiera</a:t>
+              <a:t>una media línea de justificación</a:t>
             </a:r>
             <a:r>
               <a:rPr sz="2000" b="0" i="0">
@@ -4381,7 +4434,7 @@
                 </a:solidFill>
                 <a:latin typeface="Calibri"/>
               </a:rPr>
-              <a:t> es el caso de operación, y es el que rompe el prejuicio sobre el código.</a:t>
+              <a:t>; y decidir, escribiendo qué se pierde. **La trampa está en el paso 3</a:t>
             </a:r>
           </a:p>
           <a:p>
@@ -4397,25 +4450,7 @@
                 </a:solidFill>
                 <a:latin typeface="Calibri"/>
               </a:rPr>
-              <a:t>–   Súmele el detalle que lo hace inolvidable: </a:t>
-            </a:r>
-            <a:r>
-              <a:rPr sz="2000" b="1" i="0">
-                <a:solidFill>
-                  <a:srgbClr val="333333"/>
-                </a:solidFill>
-                <a:latin typeface="Calibri"/>
-              </a:rPr>
-              <a:t>el problema no fue escribir el software, fue instalarlo</a:t>
-            </a:r>
-            <a:r>
-              <a:rPr sz="2000" b="0" i="0">
-                <a:solidFill>
-                  <a:srgbClr val="333333"/>
-                </a:solidFill>
-                <a:latin typeface="Calibri"/>
-              </a:rPr>
-              <a:t>, y no existía una forma rápida de detenerlo.</a:t>
+              <a:t>–   Y hay que decirla explícitamente: los pesos se deciden antes de mirar las alternativas.** Si se deciden después, el equipo —sin mala intención— acomoda los pesos para que gane la alternativa que ya quería.</a:t>
             </a:r>
           </a:p>
           <a:p>
@@ -4431,57 +4466,7 @@
                 </a:solidFill>
                 <a:latin typeface="Calibri"/>
               </a:rPr>
-              <a:t>–   Y una exigencia metodológica que hay que repetir porque es la marca del curso: los cuatro casos son públicos y están documentados en informes oficiales y en prensa especializada, pero </a:t>
-            </a:r>
-            <a:r>
-              <a:rPr sz="2000" b="1" i="0">
-                <a:solidFill>
-                  <a:srgbClr val="333333"/>
-                </a:solidFill>
-                <a:latin typeface="Calibri"/>
-              </a:rPr>
-              <a:t>las cifras circulan con variaciones</a:t>
-            </a:r>
-            <a:r>
-              <a:rPr sz="2000" b="0" i="0">
-                <a:solidFill>
-                  <a:srgbClr val="333333"/>
-                </a:solidFill>
-                <a:latin typeface="Calibri"/>
-              </a:rPr>
-              <a:t>.</a:t>
-            </a:r>
-          </a:p>
-          <a:p>
-            <a:pPr>
-              <a:spcAft>
-                <a:spcPts val="800"/>
-              </a:spcAft>
-            </a:pPr>
-            <a:r>
-              <a:rPr sz="2000" b="0" i="0">
-                <a:solidFill>
-                  <a:srgbClr val="333333"/>
-                </a:solidFill>
-                <a:latin typeface="Calibri"/>
-              </a:rPr>
-              <a:t>–   Quien cite un monto o una fecha en la exposición tiene que decir de dónde salió y de qué año es.</a:t>
-            </a:r>
-          </a:p>
-          <a:p>
-            <a:pPr>
-              <a:spcAft>
-                <a:spcPts val="800"/>
-              </a:spcAft>
-            </a:pPr>
-            <a:r>
-              <a:rPr sz="2000" b="0" i="0">
-                <a:solidFill>
-                  <a:srgbClr val="333333"/>
-                </a:solidFill>
-                <a:latin typeface="Calibri"/>
-              </a:rPr>
-              <a:t>–   Es la misma regla de la sesión 5 con las cifras ambientales y de la sesión 4 con los numerales.</a:t>
+              <a:t>–   Es el sesgo más común en decisiones de ingeniería y produce documentos que parecen análisis y son justificaciones.</a:t>
             </a:r>
           </a:p>
         </p:txBody>
@@ -4662,7 +4647,7 @@
                 </a:solidFill>
                 <a:latin typeface="Calibri"/>
               </a:rPr>
-              <a:t>La matriz de decisión: cómo se decide sin que la decisión ya estuviera tomada (1/2)</a:t>
+              <a:t>La matriz de decisión: cómo se decide sin que la decisión ya estuviera tomada (2/2)</a:t>
             </a:r>
           </a:p>
         </p:txBody>
@@ -4701,7 +4686,7 @@
                 </a:solidFill>
                 <a:latin typeface="Calibri"/>
               </a:rPr>
-              <a:t>–   La matriz de decisión es una herramienta simple con una trampa sutil, y enseñar la trampa es más valioso que enseñar la herramienta.</a:t>
+              <a:t>–   La regla práctica en la sala: primero se escriben los criterios y los pesos en el documento</a:t>
             </a:r>
           </a:p>
           <a:p>
@@ -4717,7 +4702,25 @@
                 </a:solidFill>
                 <a:latin typeface="Calibri"/>
               </a:rPr>
-              <a:t>–   Los cinco pasos son: escribir las dos alternativas en una frase cada una; elegir de tres a cinco criterios; ponerle peso a cada criterio</a:t>
+              <a:t>–   Y solo después se califica. </a:t>
+            </a:r>
+            <a:r>
+              <a:rPr sz="2000" b="1" i="0">
+                <a:solidFill>
+                  <a:srgbClr val="333333"/>
+                </a:solidFill>
+                <a:latin typeface="Calibri"/>
+              </a:rPr>
+              <a:t>Los criterios no son gustos: salen de los requisitos no funcionales y de las restricciones.</a:t>
+            </a:r>
+            <a:r>
+              <a:rPr sz="2000" b="0" i="0">
+                <a:solidFill>
+                  <a:srgbClr val="333333"/>
+                </a:solidFill>
+                <a:latin typeface="Calibri"/>
+              </a:rPr>
+              <a:t> Para el caso de la biblioteca: funciona sin computador en el mostrador</a:t>
             </a:r>
           </a:p>
           <a:p>
@@ -4733,25 +4736,7 @@
                 </a:solidFill>
                 <a:latin typeface="Calibri"/>
               </a:rPr>
-              <a:t>–   Calificar cada alternativa criterio por criterio con una escala corta y </a:t>
-            </a:r>
-            <a:r>
-              <a:rPr sz="2000" b="1" i="0">
-                <a:solidFill>
-                  <a:srgbClr val="333333"/>
-                </a:solidFill>
-                <a:latin typeface="Calibri"/>
-              </a:rPr>
-              <a:t>una media línea de justificación</a:t>
-            </a:r>
-            <a:r>
-              <a:rPr sz="2000" b="0" i="0">
-                <a:solidFill>
-                  <a:srgbClr val="333333"/>
-                </a:solidFill>
-                <a:latin typeface="Calibri"/>
-              </a:rPr>
-              <a:t>; y decidir, escribiendo qué se pierde. **La trampa está en el paso 3</a:t>
+              <a:t>–   Se aprende sin manual, se puede construir en las sesiones que quedan, cumple el requisito de datos ligeros, no exige que alguien atienda en horario fijo.</a:t>
             </a:r>
           </a:p>
           <a:p>
@@ -4767,7 +4752,7 @@
                 </a:solidFill>
                 <a:latin typeface="Calibri"/>
               </a:rPr>
-              <a:t>–   Y hay que decirla explícitamente: los pesos se deciden antes de mirar las alternativas.** Si se deciden después, el equipo —sin mala intención— acomoda los pesos para que gane la alternativa que ya quería.</a:t>
+              <a:t>–   Si un equipo pone «lo que más nos gusta» o «lo más innovador» como criterio, hay que reemplazarlo: no se puede calificar y no se puede defender.</a:t>
             </a:r>
           </a:p>
           <a:p>
@@ -4783,15 +4768,17 @@
                 </a:solidFill>
                 <a:latin typeface="Calibri"/>
               </a:rPr>
-              <a:t>–   Es el sesgo más común en decisiones de ingeniería y produce documentos que parecen análisis y son justificaciones.</a:t>
-            </a:r>
-          </a:p>
-          <a:p>
-            <a:pPr>
-              <a:spcAft>
-                <a:spcPts val="800"/>
-              </a:spcAft>
-            </a:pPr>
+              <a:t>–   Y el paso 5 es el que separa una decisión profesional de una preferencia: </a:t>
+            </a:r>
+            <a:r>
+              <a:rPr sz="2000" b="1" i="0">
+                <a:solidFill>
+                  <a:srgbClr val="333333"/>
+                </a:solidFill>
+                <a:latin typeface="Calibri"/>
+              </a:rPr>
+              <a:t>toda decisión sacrifica algo, y nombrarlo es lo que la vuelve defendible</a:t>
+            </a:r>
             <a:r>
               <a:rPr sz="2000" b="0" i="0">
                 <a:solidFill>
@@ -4799,41 +4786,7 @@
                 </a:solidFill>
                 <a:latin typeface="Calibri"/>
               </a:rPr>
-              <a:t>–   La regla práctica en la sala: primero se escriben los criterios y los pesos en el documento</a:t>
-            </a:r>
-          </a:p>
-          <a:p>
-            <a:pPr>
-              <a:spcAft>
-                <a:spcPts val="800"/>
-              </a:spcAft>
-            </a:pPr>
-            <a:r>
-              <a:rPr sz="2000" b="0" i="0">
-                <a:solidFill>
-                  <a:srgbClr val="333333"/>
-                </a:solidFill>
-                <a:latin typeface="Calibri"/>
-              </a:rPr>
-              <a:t>–   Y solo después se califica. </a:t>
-            </a:r>
-            <a:r>
-              <a:rPr sz="2000" b="1" i="0">
-                <a:solidFill>
-                  <a:srgbClr val="333333"/>
-                </a:solidFill>
-                <a:latin typeface="Calibri"/>
-              </a:rPr>
-              <a:t>Los criterios no son gustos: salen de los requisitos no funcionales y de las restricciones.</a:t>
-            </a:r>
-            <a:r>
-              <a:rPr sz="2000" b="0" i="0">
-                <a:solidFill>
-                  <a:srgbClr val="333333"/>
-                </a:solidFill>
-                <a:latin typeface="Calibri"/>
-              </a:rPr>
-              <a:t> Para el caso de la biblioteca: funciona sin computador en el mostrador</a:t>
+              <a:t>.</a:t>
             </a:r>
           </a:p>
         </p:txBody>
@@ -5014,7 +4967,7 @@
                 </a:solidFill>
                 <a:latin typeface="Calibri"/>
               </a:rPr>
-              <a:t>La matriz de decisión: cómo se decide sin que la decisión ya estuviera tomada (2/2)</a:t>
+              <a:t>Alcance mínimo y plan de validación: el entregable del taller (1/2)</a:t>
             </a:r>
           </a:p>
         </p:txBody>
@@ -5053,7 +5006,25 @@
                 </a:solidFill>
                 <a:latin typeface="Calibri"/>
               </a:rPr>
-              <a:t>–   Se aprende sin manual, se puede construir en las sesiones que quedan, cumple el requisito de datos ligeros, no exige que alguien atienda en horario fijo.</a:t>
+              <a:t>–   </a:t>
+            </a:r>
+            <a:r>
+              <a:rPr sz="2000" b="1" i="0">
+                <a:solidFill>
+                  <a:srgbClr val="333333"/>
+                </a:solidFill>
+                <a:latin typeface="Calibri"/>
+              </a:rPr>
+              <a:t>El alcance mínimo</a:t>
+            </a:r>
+            <a:r>
+              <a:rPr sz="2000" b="0" i="0">
+                <a:solidFill>
+                  <a:srgbClr val="333333"/>
+                </a:solidFill>
+                <a:latin typeface="Calibri"/>
+              </a:rPr>
+              <a:t> es el concepto que salva los proyectos de primer semestre, y hay que definirlo con precisión porque se confunde con «hacer poco».</a:t>
             </a:r>
           </a:p>
           <a:p>
@@ -5069,7 +5040,25 @@
                 </a:solidFill>
                 <a:latin typeface="Calibri"/>
               </a:rPr>
-              <a:t>–   Si un equipo pone «lo que más nos gusta» o «lo más innovador» como criterio, hay que reemplazarlo: no se puede calificar y no se puede defender.</a:t>
+              <a:t>–   Es la versión más pequeña de la solución que </a:t>
+            </a:r>
+            <a:r>
+              <a:rPr sz="2000" b="1" i="0">
+                <a:solidFill>
+                  <a:srgbClr val="333333"/>
+                </a:solidFill>
+                <a:latin typeface="Calibri"/>
+              </a:rPr>
+              <a:t>ya resuelve algo</a:t>
+            </a:r>
+            <a:r>
+              <a:rPr sz="2000" b="0" i="0">
+                <a:solidFill>
+                  <a:srgbClr val="333333"/>
+                </a:solidFill>
+                <a:latin typeface="Calibri"/>
+              </a:rPr>
+              <a:t> del problema y se puede probar con un usuario real.</a:t>
             </a:r>
           </a:p>
           <a:p>
@@ -5085,25 +5074,7 @@
                 </a:solidFill>
                 <a:latin typeface="Calibri"/>
               </a:rPr>
-              <a:t>–   Y el paso 5 es el que separa una decisión profesional de una preferencia: </a:t>
-            </a:r>
-            <a:r>
-              <a:rPr sz="2000" b="1" i="0">
-                <a:solidFill>
-                  <a:srgbClr val="333333"/>
-                </a:solidFill>
-                <a:latin typeface="Calibri"/>
-              </a:rPr>
-              <a:t>toda decisión sacrifica algo, y nombrarlo es lo que la vuelve defendible</a:t>
-            </a:r>
-            <a:r>
-              <a:rPr sz="2000" b="0" i="0">
-                <a:solidFill>
-                  <a:srgbClr val="333333"/>
-                </a:solidFill>
-                <a:latin typeface="Calibri"/>
-              </a:rPr>
-              <a:t>.</a:t>
+              <a:t>–   La prueba para saber si está bien definido: *si construimos solo esto y lo ponemos delante de la persona que vive el problema, ¿le sirve de algo?* Si la respuesta es no, no es un alcance mínimo, es un pedazo.</a:t>
             </a:r>
           </a:p>
           <a:p>
@@ -5119,7 +5090,25 @@
                 </a:solidFill>
                 <a:latin typeface="Calibri"/>
               </a:rPr>
-              <a:t>–   «Elegimos la lista publicada en vez de la aplicación; perdemos la actualización en tiempo real y ganamos que funcione sin conexión y sin capacitar a nadie.» Un equipo que puede decir qué perdió entendió que estaba decidiendo, no acertando.</a:t>
+              <a:t>–   El método concreto que hay que dictarles: </a:t>
+            </a:r>
+            <a:r>
+              <a:rPr sz="2000" b="1" i="0">
+                <a:solidFill>
+                  <a:srgbClr val="333333"/>
+                </a:solidFill>
+                <a:latin typeface="Calibri"/>
+              </a:rPr>
+              <a:t>se toma un requisito funcional —el que ataca la causa elegida en el árbol de la sesión 6— y se construye solo eso, cumpliendo los requisitos no funcionales</a:t>
+            </a:r>
+            <a:r>
+              <a:rPr sz="2000" b="0" i="0">
+                <a:solidFill>
+                  <a:srgbClr val="333333"/>
+                </a:solidFill>
+                <a:latin typeface="Calibri"/>
+              </a:rPr>
+              <a:t>.</a:t>
             </a:r>
           </a:p>
         </p:txBody>
@@ -5300,7 +5289,7 @@
                 </a:solidFill>
                 <a:latin typeface="Calibri"/>
               </a:rPr>
-              <a:t>Alcance mínimo y plan de validación: el entregable del taller (1/2)</a:t>
+              <a:t>Alcance mínimo y plan de validación: el entregable del taller (2/2)</a:t>
             </a:r>
           </a:p>
         </p:txBody>
@@ -5339,25 +5328,7 @@
                 </a:solidFill>
                 <a:latin typeface="Calibri"/>
               </a:rPr>
-              <a:t>–   </a:t>
-            </a:r>
-            <a:r>
-              <a:rPr sz="2000" b="1" i="0">
-                <a:solidFill>
-                  <a:srgbClr val="333333"/>
-                </a:solidFill>
-                <a:latin typeface="Calibri"/>
-              </a:rPr>
-              <a:t>El alcance mínimo</a:t>
-            </a:r>
-            <a:r>
-              <a:rPr sz="2000" b="0" i="0">
-                <a:solidFill>
-                  <a:srgbClr val="333333"/>
-                </a:solidFill>
-                <a:latin typeface="Calibri"/>
-              </a:rPr>
-              <a:t> es el concepto que salva los proyectos de primer semestre, y hay que definirlo con precisión porque se confunde con «hacer poco».</a:t>
+              <a:t>–   Los otros dos requisitos se escriben en una lista titulada «versión siguiente».</a:t>
             </a:r>
           </a:p>
           <a:p>
@@ -5373,25 +5344,7 @@
                 </a:solidFill>
                 <a:latin typeface="Calibri"/>
               </a:rPr>
-              <a:t>–   Es la versión más pequeña de la solución que </a:t>
-            </a:r>
-            <a:r>
-              <a:rPr sz="2000" b="1" i="0">
-                <a:solidFill>
-                  <a:srgbClr val="333333"/>
-                </a:solidFill>
-                <a:latin typeface="Calibri"/>
-              </a:rPr>
-              <a:t>ya resuelve algo</a:t>
-            </a:r>
-            <a:r>
-              <a:rPr sz="2000" b="0" i="0">
-                <a:solidFill>
-                  <a:srgbClr val="333333"/>
-                </a:solidFill>
-                <a:latin typeface="Calibri"/>
-              </a:rPr>
-              <a:t> del problema y se puede probar con un usuario real.</a:t>
+              <a:t>–   Son tres cosas: con quién se prueba —una persona ajena al equipo—, qué tareas se le piden —las de los criterios de aceptación de la sesión 7—, y qué se va a observar.</a:t>
             </a:r>
           </a:p>
           <a:p>
@@ -5407,7 +5360,25 @@
                 </a:solidFill>
                 <a:latin typeface="Calibri"/>
               </a:rPr>
-              <a:t>–   La prueba para saber si está bien definido: *si construimos solo esto y lo ponemos delante de la persona que vive el problema, ¿le sirve de algo?* Si la respuesta es no, no es un alcance mínimo, es un pedazo.</a:t>
+              <a:t>–   Las dos trampas hay que nombrarlas con dureza porque las van a cometer todas. </a:t>
+            </a:r>
+            <a:r>
+              <a:rPr sz="2000" b="1" i="0">
+                <a:solidFill>
+                  <a:srgbClr val="333333"/>
+                </a:solidFill>
+                <a:latin typeface="Calibri"/>
+              </a:rPr>
+              <a:t>Probar con el propio equipo no prueba nada</a:t>
+            </a:r>
+            <a:r>
+              <a:rPr sz="2000" b="0" i="0">
+                <a:solidFill>
+                  <a:srgbClr val="333333"/>
+                </a:solidFill>
+                <a:latin typeface="Calibri"/>
+              </a:rPr>
+              <a:t>: quien construyó sabe dónde hay que tocar.</a:t>
             </a:r>
           </a:p>
           <a:p>
@@ -5423,7 +5394,7 @@
                 </a:solidFill>
                 <a:latin typeface="Calibri"/>
               </a:rPr>
-              <a:t>–   El método concreto que hay que dictarles: </a:t>
+              <a:t>–   Y </a:t>
             </a:r>
             <a:r>
               <a:rPr sz="2000" b="1" i="0">
@@ -5432,7 +5403,7 @@
                 </a:solidFill>
                 <a:latin typeface="Calibri"/>
               </a:rPr>
-              <a:t>se toma un requisito funcional —el que ataca la causa elegida en el árbol de la sesión 6— y se construye solo eso, cumpliendo los requisitos no funcionales</a:t>
+              <a:t>preguntar «¿le gusta?» no sirve</a:t>
             </a:r>
             <a:r>
               <a:rPr sz="2000" b="0" i="0">
@@ -5441,55 +5412,7 @@
                 </a:solidFill>
                 <a:latin typeface="Calibri"/>
               </a:rPr>
-              <a:t>.</a:t>
-            </a:r>
-          </a:p>
-          <a:p>
-            <a:pPr>
-              <a:spcAft>
-                <a:spcPts val="800"/>
-              </a:spcAft>
-            </a:pPr>
-            <a:r>
-              <a:rPr sz="2000" b="0" i="0">
-                <a:solidFill>
-                  <a:srgbClr val="333333"/>
-                </a:solidFill>
-                <a:latin typeface="Calibri"/>
-              </a:rPr>
-              <a:t>–   Los otros dos requisitos se escriben en una lista titulada «versión siguiente».</a:t>
-            </a:r>
-          </a:p>
-          <a:p>
-            <a:pPr>
-              <a:spcAft>
-                <a:spcPts val="800"/>
-              </a:spcAft>
-            </a:pPr>
-            <a:r>
-              <a:rPr sz="2000" b="0" i="0">
-                <a:solidFill>
-                  <a:srgbClr val="333333"/>
-                </a:solidFill>
-                <a:latin typeface="Calibri"/>
-              </a:rPr>
-              <a:t>–   Esa lista no es una derrota: es la prueba de que el equipo sabe lo que dejó fuera, y en la Clase 15 se muestra.</a:t>
-            </a:r>
-          </a:p>
-          <a:p>
-            <a:pPr>
-              <a:spcAft>
-                <a:spcPts val="800"/>
-              </a:spcAft>
-            </a:pPr>
-            <a:r>
-              <a:rPr sz="2000" b="0" i="0">
-                <a:solidFill>
-                  <a:srgbClr val="333333"/>
-                </a:solidFill>
-                <a:latin typeface="Calibri"/>
-              </a:rPr>
-              <a:t>–   Vale la pena decírselo con estas palabras: **un proyecto que no declara lo que dejó fuera parece incompleto</a:t>
+              <a:t>: la gente dice que sí por cortesía, sobre todo a estudiantes que le muestran su trabajo con ilusión.</a:t>
             </a:r>
           </a:p>
         </p:txBody>
@@ -5564,7 +5487,7 @@
         <p:spPr>
           <a:xfrm>
             <a:off x="0" y="0"/>
-            <a:ext cx="12191695" cy="960120"/>
+            <a:ext cx="12191695" cy="1170432"/>
           </a:xfrm>
           <a:prstGeom prst="rect">
             <a:avLst/>
@@ -5606,7 +5529,7 @@
         </p:nvSpPr>
         <p:spPr>
           <a:xfrm>
-            <a:off x="0" y="960120"/>
+            <a:off x="0" y="1170432"/>
             <a:ext cx="12191695" cy="41148"/>
           </a:xfrm>
           <a:prstGeom prst="rect">
@@ -5650,7 +5573,7 @@
         <p:spPr>
           <a:xfrm>
             <a:off x="457200" y="164592"/>
-            <a:ext cx="11277295" cy="502920"/>
+            <a:ext cx="11277295" cy="384048"/>
           </a:xfrm>
           <a:prstGeom prst="rect">
             <a:avLst/>
@@ -5670,7 +5593,7 @@
                 </a:solidFill>
                 <a:latin typeface="Calibri"/>
               </a:rPr>
-              <a:t>Alcance mínimo y plan de validación: el entregable del taller (2/2)</a:t>
+              <a:t>Taller de hoy: Decisión de la solución y alcance mínimo</a:t>
             </a:r>
           </a:p>
         </p:txBody>
@@ -5683,8 +5606,8 @@
         </p:nvSpPr>
         <p:spPr>
           <a:xfrm>
-            <a:off x="457200" y="1170432"/>
-            <a:ext cx="11277295" cy="5230368"/>
+            <a:off x="457200" y="566928"/>
+            <a:ext cx="11277295" cy="411480"/>
           </a:xfrm>
           <a:prstGeom prst="rect">
             <a:avLst/>
@@ -5697,194 +5620,1017 @@
           </a:bodyPr>
           <a:lstStyle/>
           <a:p>
-            <a:pPr>
-              <a:spcAft>
-                <a:spcPts val="800"/>
-              </a:spcAft>
-            </a:pPr>
-            <a:r>
-              <a:rPr sz="2000" b="0" i="0">
-                <a:solidFill>
-                  <a:srgbClr val="333333"/>
-                </a:solidFill>
-                <a:latin typeface="Calibri"/>
-              </a:rPr>
-              <a:t>–   Uno que lo declara parece dirigido.</a:t>
-            </a:r>
-            <a:r>
-              <a:rPr sz="2000" b="1" i="0">
-                <a:solidFill>
-                  <a:srgbClr val="333333"/>
-                </a:solidFill>
-                <a:latin typeface="Calibri"/>
-              </a:rPr>
-              <a:t> </a:t>
-            </a:r>
-            <a:r>
-              <a:rPr sz="2000" b="0" i="0">
-                <a:solidFill>
-                  <a:srgbClr val="333333"/>
-                </a:solidFill>
-                <a:latin typeface="Calibri"/>
-              </a:rPr>
-              <a:t>El plan de validación** se escribe hoy y eso es deliberado: escribir cómo se va a probar algo antes de construirlo cambia lo que se construye.</a:t>
-            </a:r>
-          </a:p>
-          <a:p>
-            <a:pPr>
-              <a:spcAft>
-                <a:spcPts val="800"/>
-              </a:spcAft>
-            </a:pPr>
-            <a:r>
-              <a:rPr sz="2000" b="0" i="0">
-                <a:solidFill>
-                  <a:srgbClr val="333333"/>
-                </a:solidFill>
-                <a:latin typeface="Calibri"/>
-              </a:rPr>
-              <a:t>–   Son tres cosas: con quién se prueba —una persona ajena al equipo—, qué tareas se le piden —las de los criterios de aceptación de la sesión 7—, y qué se va a observar.</a:t>
-            </a:r>
-          </a:p>
-          <a:p>
-            <a:pPr>
-              <a:spcAft>
-                <a:spcPts val="800"/>
-              </a:spcAft>
-            </a:pPr>
-            <a:r>
-              <a:rPr sz="2000" b="0" i="0">
-                <a:solidFill>
-                  <a:srgbClr val="333333"/>
-                </a:solidFill>
-                <a:latin typeface="Calibri"/>
-              </a:rPr>
-              <a:t>–   Las dos trampas hay que nombrarlas con dureza porque las van a cometer todas. </a:t>
-            </a:r>
-            <a:r>
-              <a:rPr sz="2000" b="1" i="0">
-                <a:solidFill>
-                  <a:srgbClr val="333333"/>
-                </a:solidFill>
-                <a:latin typeface="Calibri"/>
-              </a:rPr>
-              <a:t>Probar con el propio equipo no prueba nada</a:t>
-            </a:r>
-            <a:r>
-              <a:rPr sz="2000" b="0" i="0">
-                <a:solidFill>
-                  <a:srgbClr val="333333"/>
-                </a:solidFill>
-                <a:latin typeface="Calibri"/>
-              </a:rPr>
-              <a:t>: quien construyó sabe dónde hay que tocar.</a:t>
-            </a:r>
-          </a:p>
-          <a:p>
-            <a:pPr>
-              <a:spcAft>
-                <a:spcPts val="800"/>
-              </a:spcAft>
-            </a:pPr>
-            <a:r>
-              <a:rPr sz="2000" b="0" i="0">
-                <a:solidFill>
-                  <a:srgbClr val="333333"/>
-                </a:solidFill>
-                <a:latin typeface="Calibri"/>
-              </a:rPr>
-              <a:t>–   Y </a:t>
-            </a:r>
-            <a:r>
-              <a:rPr sz="2000" b="1" i="0">
-                <a:solidFill>
-                  <a:srgbClr val="333333"/>
-                </a:solidFill>
-                <a:latin typeface="Calibri"/>
-              </a:rPr>
-              <a:t>preguntar «¿le gusta?» no sirve</a:t>
-            </a:r>
-            <a:r>
-              <a:rPr sz="2000" b="0" i="0">
-                <a:solidFill>
-                  <a:srgbClr val="333333"/>
-                </a:solidFill>
-                <a:latin typeface="Calibri"/>
-              </a:rPr>
-              <a:t>: la gente dice que sí por cortesía, sobre todo a estudiantes que le muestran su trabajo con ilusión.</a:t>
-            </a:r>
-          </a:p>
-          <a:p>
-            <a:pPr>
-              <a:spcAft>
-                <a:spcPts val="800"/>
-              </a:spcAft>
-            </a:pPr>
-            <a:r>
-              <a:rPr sz="2000" b="0" i="0">
-                <a:solidFill>
-                  <a:srgbClr val="333333"/>
-                </a:solidFill>
-                <a:latin typeface="Calibri"/>
-              </a:rPr>
-              <a:t>–   Se le pide que </a:t>
-            </a:r>
-            <a:r>
-              <a:rPr sz="2000" b="1" i="0">
-                <a:solidFill>
-                  <a:srgbClr val="333333"/>
-                </a:solidFill>
-                <a:latin typeface="Calibri"/>
-              </a:rPr>
-              <a:t>haga una tarea</a:t>
-            </a:r>
-            <a:r>
-              <a:rPr sz="2000" b="0" i="0">
-                <a:solidFill>
-                  <a:srgbClr val="333333"/>
-                </a:solidFill>
-                <a:latin typeface="Calibri"/>
-              </a:rPr>
-              <a:t> y se observa en silencio —dónde duda, dónde se equivoca, qué busca y no encuentra—.</a:t>
-            </a:r>
-          </a:p>
-          <a:p>
-            <a:pPr>
-              <a:spcAft>
-                <a:spcPts val="800"/>
-              </a:spcAft>
-            </a:pPr>
-            <a:r>
-              <a:rPr sz="2000" b="0" i="0">
-                <a:solidFill>
-                  <a:srgbClr val="333333"/>
-                </a:solidFill>
-                <a:latin typeface="Calibri"/>
-              </a:rPr>
-              <a:t>–   Lo que la persona hace vale; lo que opina, poco.</a:t>
-            </a:r>
-          </a:p>
-          <a:p>
-            <a:pPr>
-              <a:spcAft>
-                <a:spcPts val="800"/>
-              </a:spcAft>
-            </a:pPr>
-            <a:r>
-              <a:rPr sz="2000" b="0" i="0">
-                <a:solidFill>
-                  <a:srgbClr val="333333"/>
-                </a:solidFill>
-                <a:latin typeface="Calibri"/>
-              </a:rPr>
-              <a:t>–   Esa regla sola mejora todos los proyectos del curso.</a:t>
-            </a:r>
-          </a:p>
-        </p:txBody>
-      </p:sp>
-      <p:sp>
-        <p:nvSpPr>
-          <p:cNvPr id="6" name="TextBox 5"/>
+            <a:r>
+              <a:rPr sz="1400" b="0" i="0">
+                <a:solidFill>
+                  <a:srgbClr val="B8D8EE"/>
+                </a:solidFill>
+                <a:latin typeface="Calibri"/>
+              </a:rPr>
+              <a:t>40 min en equipos · 40 min con ritmo interno: alternativas, matriz, alcance, validación · matriz de decisión + alcance mínimo + plan de validación</a:t>
+            </a:r>
+          </a:p>
+        </p:txBody>
+      </p:sp>
+      <p:sp>
+        <p:nvSpPr>
+          <p:cNvPr id="6" name="Rounded Rectangle 5"/>
+          <p:cNvSpPr/>
+          <p:nvPr/>
+        </p:nvSpPr>
+        <p:spPr>
+          <a:xfrm>
+            <a:off x="457200" y="1472184"/>
+            <a:ext cx="11277295" cy="566928"/>
+          </a:xfrm>
+          <a:prstGeom prst="roundRect">
+            <a:avLst>
+              <a:gd name="adj" fmla="val 12000"/>
+            </a:avLst>
+          </a:prstGeom>
+          <a:solidFill>
+            <a:srgbClr val="F2F2F2"/>
+          </a:solidFill>
+          <a:ln>
+            <a:noFill/>
+          </a:ln>
+        </p:spPr>
+        <p:style>
+          <a:lnRef idx="1">
+            <a:schemeClr val="accent1"/>
+          </a:lnRef>
+          <a:fillRef idx="3">
+            <a:schemeClr val="accent1"/>
+          </a:fillRef>
+          <a:effectRef idx="2">
+            <a:schemeClr val="accent1"/>
+          </a:effectRef>
+          <a:fontRef idx="minor">
+            <a:schemeClr val="lt1"/>
+          </a:fontRef>
+        </p:style>
+        <p:txBody>
+          <a:bodyPr rtlCol="0" anchor="ctr"/>
+          <a:lstStyle/>
+          <a:p>
+            <a:pPr algn="ctr"/>
+          </a:p>
+        </p:txBody>
+      </p:sp>
+      <p:sp>
+        <p:nvSpPr>
+          <p:cNvPr id="7" name="Rectangle 6"/>
+          <p:cNvSpPr/>
+          <p:nvPr/>
+        </p:nvSpPr>
+        <p:spPr>
+          <a:xfrm>
+            <a:off x="640080" y="1618487"/>
+            <a:ext cx="274320" cy="274320"/>
+          </a:xfrm>
+          <a:prstGeom prst="rect">
+            <a:avLst/>
+          </a:prstGeom>
+          <a:solidFill>
+            <a:srgbClr val="FFFFFF"/>
+          </a:solidFill>
+          <a:ln>
+            <a:solidFill>
+              <a:srgbClr val="333333"/>
+            </a:solidFill>
+          </a:ln>
+        </p:spPr>
+        <p:style>
+          <a:lnRef idx="1">
+            <a:schemeClr val="accent1"/>
+          </a:lnRef>
+          <a:fillRef idx="3">
+            <a:schemeClr val="accent1"/>
+          </a:fillRef>
+          <a:effectRef idx="2">
+            <a:schemeClr val="accent1"/>
+          </a:effectRef>
+          <a:fontRef idx="minor">
+            <a:schemeClr val="lt1"/>
+          </a:fontRef>
+        </p:style>
+        <p:txBody>
+          <a:bodyPr rtlCol="0" anchor="ctr"/>
+          <a:lstStyle/>
+          <a:p>
+            <a:pPr algn="ctr"/>
+          </a:p>
+        </p:txBody>
+      </p:sp>
+      <p:sp>
+        <p:nvSpPr>
+          <p:cNvPr id="8" name="Rectangle 7"/>
+          <p:cNvSpPr/>
+          <p:nvPr/>
+        </p:nvSpPr>
+        <p:spPr>
+          <a:xfrm>
+            <a:off x="640080" y="1618487"/>
+            <a:ext cx="73152" cy="274320"/>
+          </a:xfrm>
+          <a:prstGeom prst="rect">
+            <a:avLst/>
+          </a:prstGeom>
+          <a:solidFill>
+            <a:srgbClr val="269CCB"/>
+          </a:solidFill>
+          <a:ln>
+            <a:noFill/>
+          </a:ln>
+        </p:spPr>
+        <p:style>
+          <a:lnRef idx="1">
+            <a:schemeClr val="accent1"/>
+          </a:lnRef>
+          <a:fillRef idx="3">
+            <a:schemeClr val="accent1"/>
+          </a:fillRef>
+          <a:effectRef idx="2">
+            <a:schemeClr val="accent1"/>
+          </a:effectRef>
+          <a:fontRef idx="minor">
+            <a:schemeClr val="lt1"/>
+          </a:fontRef>
+        </p:style>
+        <p:txBody>
+          <a:bodyPr rtlCol="0" anchor="ctr"/>
+          <a:lstStyle/>
+          <a:p>
+            <a:pPr algn="ctr"/>
+          </a:p>
+        </p:txBody>
+      </p:sp>
+      <p:sp>
+        <p:nvSpPr>
+          <p:cNvPr id="9" name="TextBox 8"/>
+          <p:cNvSpPr txBox="1"/>
+          <p:nvPr/>
+        </p:nvSpPr>
+        <p:spPr>
+          <a:xfrm>
+            <a:off x="1097280" y="1563624"/>
+            <a:ext cx="10362895" cy="402336"/>
+          </a:xfrm>
+          <a:prstGeom prst="rect">
+            <a:avLst/>
+          </a:prstGeom>
+          <a:noFill/>
+        </p:spPr>
+        <p:txBody>
+          <a:bodyPr wrap="square" anchor="ctr"/>
+          <a:lstStyle/>
+          <a:p>
+            <a:r>
+              <a:rPr sz="1500" b="1" i="0">
+                <a:solidFill>
+                  <a:srgbClr val="333333"/>
+                </a:solidFill>
+                <a:latin typeface="Calibri"/>
+              </a:rPr>
+              <a:t>LAS DOS ALTERNATIVAS</a:t>
+            </a:r>
+            <a:r>
+              <a:rPr sz="1500" b="0" i="0">
+                <a:solidFill>
+                  <a:srgbClr val="333333"/>
+                </a:solidFill>
+                <a:latin typeface="Calibri"/>
+              </a:rPr>
+              <a:t> — Cada alternativa en </a:t>
+            </a:r>
+            <a:r>
+              <a:rPr sz="1500" b="1" i="0">
+                <a:solidFill>
+                  <a:srgbClr val="333333"/>
+                </a:solidFill>
+                <a:latin typeface="Calibri"/>
+              </a:rPr>
+              <a:t>una frase</a:t>
+            </a:r>
+            <a:r>
+              <a:rPr sz="1500" b="0" i="0">
+                <a:solidFill>
+                  <a:srgbClr val="333333"/>
+                </a:solidFill>
+                <a:latin typeface="Calibri"/>
+              </a:rPr>
+              <a:t>, sin adjetivos, diciendo qué hace y cómo resuelve la causa elegida en el árbol de la sesión 6.</a:t>
+            </a:r>
+          </a:p>
+        </p:txBody>
+      </p:sp>
+      <p:sp>
+        <p:nvSpPr>
+          <p:cNvPr id="10" name="Rounded Rectangle 9"/>
+          <p:cNvSpPr/>
+          <p:nvPr/>
+        </p:nvSpPr>
+        <p:spPr>
+          <a:xfrm>
+            <a:off x="457200" y="2148839"/>
+            <a:ext cx="11277295" cy="566928"/>
+          </a:xfrm>
+          <a:prstGeom prst="roundRect">
+            <a:avLst>
+              <a:gd name="adj" fmla="val 12000"/>
+            </a:avLst>
+          </a:prstGeom>
+          <a:solidFill>
+            <a:srgbClr val="F2F2F2"/>
+          </a:solidFill>
+          <a:ln>
+            <a:noFill/>
+          </a:ln>
+        </p:spPr>
+        <p:style>
+          <a:lnRef idx="1">
+            <a:schemeClr val="accent1"/>
+          </a:lnRef>
+          <a:fillRef idx="3">
+            <a:schemeClr val="accent1"/>
+          </a:fillRef>
+          <a:effectRef idx="2">
+            <a:schemeClr val="accent1"/>
+          </a:effectRef>
+          <a:fontRef idx="minor">
+            <a:schemeClr val="lt1"/>
+          </a:fontRef>
+        </p:style>
+        <p:txBody>
+          <a:bodyPr rtlCol="0" anchor="ctr"/>
+          <a:lstStyle/>
+          <a:p>
+            <a:pPr algn="ctr"/>
+          </a:p>
+        </p:txBody>
+      </p:sp>
+      <p:sp>
+        <p:nvSpPr>
+          <p:cNvPr id="11" name="Rectangle 10"/>
+          <p:cNvSpPr/>
+          <p:nvPr/>
+        </p:nvSpPr>
+        <p:spPr>
+          <a:xfrm>
+            <a:off x="640080" y="2295144"/>
+            <a:ext cx="274320" cy="274320"/>
+          </a:xfrm>
+          <a:prstGeom prst="rect">
+            <a:avLst/>
+          </a:prstGeom>
+          <a:solidFill>
+            <a:srgbClr val="FFFFFF"/>
+          </a:solidFill>
+          <a:ln>
+            <a:solidFill>
+              <a:srgbClr val="333333"/>
+            </a:solidFill>
+          </a:ln>
+        </p:spPr>
+        <p:style>
+          <a:lnRef idx="1">
+            <a:schemeClr val="accent1"/>
+          </a:lnRef>
+          <a:fillRef idx="3">
+            <a:schemeClr val="accent1"/>
+          </a:fillRef>
+          <a:effectRef idx="2">
+            <a:schemeClr val="accent1"/>
+          </a:effectRef>
+          <a:fontRef idx="minor">
+            <a:schemeClr val="lt1"/>
+          </a:fontRef>
+        </p:style>
+        <p:txBody>
+          <a:bodyPr rtlCol="0" anchor="ctr"/>
+          <a:lstStyle/>
+          <a:p>
+            <a:pPr algn="ctr"/>
+          </a:p>
+        </p:txBody>
+      </p:sp>
+      <p:sp>
+        <p:nvSpPr>
+          <p:cNvPr id="12" name="Rectangle 11"/>
+          <p:cNvSpPr/>
+          <p:nvPr/>
+        </p:nvSpPr>
+        <p:spPr>
+          <a:xfrm>
+            <a:off x="640080" y="2295144"/>
+            <a:ext cx="73152" cy="274320"/>
+          </a:xfrm>
+          <a:prstGeom prst="rect">
+            <a:avLst/>
+          </a:prstGeom>
+          <a:solidFill>
+            <a:srgbClr val="269CCB"/>
+          </a:solidFill>
+          <a:ln>
+            <a:noFill/>
+          </a:ln>
+        </p:spPr>
+        <p:style>
+          <a:lnRef idx="1">
+            <a:schemeClr val="accent1"/>
+          </a:lnRef>
+          <a:fillRef idx="3">
+            <a:schemeClr val="accent1"/>
+          </a:fillRef>
+          <a:effectRef idx="2">
+            <a:schemeClr val="accent1"/>
+          </a:effectRef>
+          <a:fontRef idx="minor">
+            <a:schemeClr val="lt1"/>
+          </a:fontRef>
+        </p:style>
+        <p:txBody>
+          <a:bodyPr rtlCol="0" anchor="ctr"/>
+          <a:lstStyle/>
+          <a:p>
+            <a:pPr algn="ctr"/>
+          </a:p>
+        </p:txBody>
+      </p:sp>
+      <p:sp>
+        <p:nvSpPr>
+          <p:cNvPr id="13" name="TextBox 12"/>
+          <p:cNvSpPr txBox="1"/>
+          <p:nvPr/>
+        </p:nvSpPr>
+        <p:spPr>
+          <a:xfrm>
+            <a:off x="1097280" y="2240279"/>
+            <a:ext cx="10362895" cy="402336"/>
+          </a:xfrm>
+          <a:prstGeom prst="rect">
+            <a:avLst/>
+          </a:prstGeom>
+          <a:noFill/>
+        </p:spPr>
+        <p:txBody>
+          <a:bodyPr wrap="square" anchor="ctr"/>
+          <a:lstStyle/>
+          <a:p>
+            <a:r>
+              <a:rPr sz="1500" b="1" i="0">
+                <a:solidFill>
+                  <a:srgbClr val="333333"/>
+                </a:solidFill>
+                <a:latin typeface="Calibri"/>
+              </a:rPr>
+              <a:t>LOS CRITERIOS Y SUS PESOS</a:t>
+            </a:r>
+            <a:r>
+              <a:rPr sz="1500" b="0" i="0">
+                <a:solidFill>
+                  <a:srgbClr val="333333"/>
+                </a:solidFill>
+                <a:latin typeface="Calibri"/>
+              </a:rPr>
+              <a:t> — De 3 a 5 criterios sacados de sus </a:t>
+            </a:r>
+            <a:r>
+              <a:rPr sz="1500" b="1" i="0">
+                <a:solidFill>
+                  <a:srgbClr val="333333"/>
+                </a:solidFill>
+                <a:latin typeface="Calibri"/>
+              </a:rPr>
+              <a:t>requisitos no funcionales y restricciones</a:t>
+            </a:r>
+            <a:r>
+              <a:rPr sz="1500" b="0" i="0">
+                <a:solidFill>
+                  <a:srgbClr val="333333"/>
+                </a:solidFill>
+                <a:latin typeface="Calibri"/>
+              </a:rPr>
+              <a:t>, cada uno con un peso, </a:t>
+            </a:r>
+            <a:r>
+              <a:rPr sz="1500" b="1" i="0">
+                <a:solidFill>
+                  <a:srgbClr val="333333"/>
+                </a:solidFill>
+                <a:latin typeface="Calibri"/>
+              </a:rPr>
+              <a:t>escritos antes de calificar</a:t>
+            </a:r>
+            <a:r>
+              <a:rPr sz="1500" b="0" i="0">
+                <a:solidFill>
+                  <a:srgbClr val="333333"/>
+                </a:solidFill>
+                <a:latin typeface="Calibri"/>
+              </a:rPr>
+              <a:t>.</a:t>
+            </a:r>
+          </a:p>
+        </p:txBody>
+      </p:sp>
+      <p:sp>
+        <p:nvSpPr>
+          <p:cNvPr id="14" name="Rounded Rectangle 13"/>
+          <p:cNvSpPr/>
+          <p:nvPr/>
+        </p:nvSpPr>
+        <p:spPr>
+          <a:xfrm>
+            <a:off x="457200" y="2825496"/>
+            <a:ext cx="11277295" cy="566928"/>
+          </a:xfrm>
+          <a:prstGeom prst="roundRect">
+            <a:avLst>
+              <a:gd name="adj" fmla="val 12000"/>
+            </a:avLst>
+          </a:prstGeom>
+          <a:solidFill>
+            <a:srgbClr val="F2F2F2"/>
+          </a:solidFill>
+          <a:ln>
+            <a:noFill/>
+          </a:ln>
+        </p:spPr>
+        <p:style>
+          <a:lnRef idx="1">
+            <a:schemeClr val="accent1"/>
+          </a:lnRef>
+          <a:fillRef idx="3">
+            <a:schemeClr val="accent1"/>
+          </a:fillRef>
+          <a:effectRef idx="2">
+            <a:schemeClr val="accent1"/>
+          </a:effectRef>
+          <a:fontRef idx="minor">
+            <a:schemeClr val="lt1"/>
+          </a:fontRef>
+        </p:style>
+        <p:txBody>
+          <a:bodyPr rtlCol="0" anchor="ctr"/>
+          <a:lstStyle/>
+          <a:p>
+            <a:pPr algn="ctr"/>
+          </a:p>
+        </p:txBody>
+      </p:sp>
+      <p:sp>
+        <p:nvSpPr>
+          <p:cNvPr id="15" name="Rectangle 14"/>
+          <p:cNvSpPr/>
+          <p:nvPr/>
+        </p:nvSpPr>
+        <p:spPr>
+          <a:xfrm>
+            <a:off x="640080" y="2971800"/>
+            <a:ext cx="274320" cy="274320"/>
+          </a:xfrm>
+          <a:prstGeom prst="rect">
+            <a:avLst/>
+          </a:prstGeom>
+          <a:solidFill>
+            <a:srgbClr val="FFFFFF"/>
+          </a:solidFill>
+          <a:ln>
+            <a:solidFill>
+              <a:srgbClr val="333333"/>
+            </a:solidFill>
+          </a:ln>
+        </p:spPr>
+        <p:style>
+          <a:lnRef idx="1">
+            <a:schemeClr val="accent1"/>
+          </a:lnRef>
+          <a:fillRef idx="3">
+            <a:schemeClr val="accent1"/>
+          </a:fillRef>
+          <a:effectRef idx="2">
+            <a:schemeClr val="accent1"/>
+          </a:effectRef>
+          <a:fontRef idx="minor">
+            <a:schemeClr val="lt1"/>
+          </a:fontRef>
+        </p:style>
+        <p:txBody>
+          <a:bodyPr rtlCol="0" anchor="ctr"/>
+          <a:lstStyle/>
+          <a:p>
+            <a:pPr algn="ctr"/>
+          </a:p>
+        </p:txBody>
+      </p:sp>
+      <p:sp>
+        <p:nvSpPr>
+          <p:cNvPr id="16" name="Rectangle 15"/>
+          <p:cNvSpPr/>
+          <p:nvPr/>
+        </p:nvSpPr>
+        <p:spPr>
+          <a:xfrm>
+            <a:off x="640080" y="2971800"/>
+            <a:ext cx="73152" cy="274320"/>
+          </a:xfrm>
+          <a:prstGeom prst="rect">
+            <a:avLst/>
+          </a:prstGeom>
+          <a:solidFill>
+            <a:srgbClr val="269CCB"/>
+          </a:solidFill>
+          <a:ln>
+            <a:noFill/>
+          </a:ln>
+        </p:spPr>
+        <p:style>
+          <a:lnRef idx="1">
+            <a:schemeClr val="accent1"/>
+          </a:lnRef>
+          <a:fillRef idx="3">
+            <a:schemeClr val="accent1"/>
+          </a:fillRef>
+          <a:effectRef idx="2">
+            <a:schemeClr val="accent1"/>
+          </a:effectRef>
+          <a:fontRef idx="minor">
+            <a:schemeClr val="lt1"/>
+          </a:fontRef>
+        </p:style>
+        <p:txBody>
+          <a:bodyPr rtlCol="0" anchor="ctr"/>
+          <a:lstStyle/>
+          <a:p>
+            <a:pPr algn="ctr"/>
+          </a:p>
+        </p:txBody>
+      </p:sp>
+      <p:sp>
+        <p:nvSpPr>
+          <p:cNvPr id="17" name="TextBox 16"/>
+          <p:cNvSpPr txBox="1"/>
+          <p:nvPr/>
+        </p:nvSpPr>
+        <p:spPr>
+          <a:xfrm>
+            <a:off x="1097280" y="2916936"/>
+            <a:ext cx="10362895" cy="402336"/>
+          </a:xfrm>
+          <a:prstGeom prst="rect">
+            <a:avLst/>
+          </a:prstGeom>
+          <a:noFill/>
+        </p:spPr>
+        <p:txBody>
+          <a:bodyPr wrap="square" anchor="ctr"/>
+          <a:lstStyle/>
+          <a:p>
+            <a:r>
+              <a:rPr sz="1500" b="1" i="0">
+                <a:solidFill>
+                  <a:srgbClr val="333333"/>
+                </a:solidFill>
+                <a:latin typeface="Calibri"/>
+              </a:rPr>
+              <a:t>LA MATRIZ Y LA DECISIÓN</a:t>
+            </a:r>
+            <a:r>
+              <a:rPr sz="1500" b="0" i="0">
+                <a:solidFill>
+                  <a:srgbClr val="333333"/>
+                </a:solidFill>
+                <a:latin typeface="Calibri"/>
+              </a:rPr>
+              <a:t> — Cada alternativa calificada criterio por criterio (escala 1-3) con </a:t>
+            </a:r>
+            <a:r>
+              <a:rPr sz="1500" b="1" i="0">
+                <a:solidFill>
+                  <a:srgbClr val="333333"/>
+                </a:solidFill>
+                <a:latin typeface="Calibri"/>
+              </a:rPr>
+              <a:t>media línea de justificación por casilla</a:t>
+            </a:r>
+            <a:r>
+              <a:rPr sz="1500" b="0" i="0">
+                <a:solidFill>
+                  <a:srgbClr val="333333"/>
+                </a:solidFill>
+                <a:latin typeface="Calibri"/>
+              </a:rPr>
+              <a:t>, el resultado, y la decisión.</a:t>
+            </a:r>
+          </a:p>
+        </p:txBody>
+      </p:sp>
+      <p:sp>
+        <p:nvSpPr>
+          <p:cNvPr id="18" name="Rounded Rectangle 17"/>
+          <p:cNvSpPr/>
+          <p:nvPr/>
+        </p:nvSpPr>
+        <p:spPr>
+          <a:xfrm>
+            <a:off x="457200" y="3502152"/>
+            <a:ext cx="11277295" cy="566928"/>
+          </a:xfrm>
+          <a:prstGeom prst="roundRect">
+            <a:avLst>
+              <a:gd name="adj" fmla="val 12000"/>
+            </a:avLst>
+          </a:prstGeom>
+          <a:solidFill>
+            <a:srgbClr val="F2F2F2"/>
+          </a:solidFill>
+          <a:ln>
+            <a:noFill/>
+          </a:ln>
+        </p:spPr>
+        <p:style>
+          <a:lnRef idx="1">
+            <a:schemeClr val="accent1"/>
+          </a:lnRef>
+          <a:fillRef idx="3">
+            <a:schemeClr val="accent1"/>
+          </a:fillRef>
+          <a:effectRef idx="2">
+            <a:schemeClr val="accent1"/>
+          </a:effectRef>
+          <a:fontRef idx="minor">
+            <a:schemeClr val="lt1"/>
+          </a:fontRef>
+        </p:style>
+        <p:txBody>
+          <a:bodyPr rtlCol="0" anchor="ctr"/>
+          <a:lstStyle/>
+          <a:p>
+            <a:pPr algn="ctr"/>
+          </a:p>
+        </p:txBody>
+      </p:sp>
+      <p:sp>
+        <p:nvSpPr>
+          <p:cNvPr id="19" name="Rectangle 18"/>
+          <p:cNvSpPr/>
+          <p:nvPr/>
+        </p:nvSpPr>
+        <p:spPr>
+          <a:xfrm>
+            <a:off x="640080" y="3648456"/>
+            <a:ext cx="274320" cy="274320"/>
+          </a:xfrm>
+          <a:prstGeom prst="rect">
+            <a:avLst/>
+          </a:prstGeom>
+          <a:solidFill>
+            <a:srgbClr val="FFFFFF"/>
+          </a:solidFill>
+          <a:ln>
+            <a:solidFill>
+              <a:srgbClr val="333333"/>
+            </a:solidFill>
+          </a:ln>
+        </p:spPr>
+        <p:style>
+          <a:lnRef idx="1">
+            <a:schemeClr val="accent1"/>
+          </a:lnRef>
+          <a:fillRef idx="3">
+            <a:schemeClr val="accent1"/>
+          </a:fillRef>
+          <a:effectRef idx="2">
+            <a:schemeClr val="accent1"/>
+          </a:effectRef>
+          <a:fontRef idx="minor">
+            <a:schemeClr val="lt1"/>
+          </a:fontRef>
+        </p:style>
+        <p:txBody>
+          <a:bodyPr rtlCol="0" anchor="ctr"/>
+          <a:lstStyle/>
+          <a:p>
+            <a:pPr algn="ctr"/>
+          </a:p>
+        </p:txBody>
+      </p:sp>
+      <p:sp>
+        <p:nvSpPr>
+          <p:cNvPr id="20" name="Rectangle 19"/>
+          <p:cNvSpPr/>
+          <p:nvPr/>
+        </p:nvSpPr>
+        <p:spPr>
+          <a:xfrm>
+            <a:off x="640080" y="3648456"/>
+            <a:ext cx="73152" cy="274320"/>
+          </a:xfrm>
+          <a:prstGeom prst="rect">
+            <a:avLst/>
+          </a:prstGeom>
+          <a:solidFill>
+            <a:srgbClr val="269CCB"/>
+          </a:solidFill>
+          <a:ln>
+            <a:noFill/>
+          </a:ln>
+        </p:spPr>
+        <p:style>
+          <a:lnRef idx="1">
+            <a:schemeClr val="accent1"/>
+          </a:lnRef>
+          <a:fillRef idx="3">
+            <a:schemeClr val="accent1"/>
+          </a:fillRef>
+          <a:effectRef idx="2">
+            <a:schemeClr val="accent1"/>
+          </a:effectRef>
+          <a:fontRef idx="minor">
+            <a:schemeClr val="lt1"/>
+          </a:fontRef>
+        </p:style>
+        <p:txBody>
+          <a:bodyPr rtlCol="0" anchor="ctr"/>
+          <a:lstStyle/>
+          <a:p>
+            <a:pPr algn="ctr"/>
+          </a:p>
+        </p:txBody>
+      </p:sp>
+      <p:sp>
+        <p:nvSpPr>
+          <p:cNvPr id="21" name="TextBox 20"/>
+          <p:cNvSpPr txBox="1"/>
+          <p:nvPr/>
+        </p:nvSpPr>
+        <p:spPr>
+          <a:xfrm>
+            <a:off x="1097280" y="3593592"/>
+            <a:ext cx="10362895" cy="402336"/>
+          </a:xfrm>
+          <a:prstGeom prst="rect">
+            <a:avLst/>
+          </a:prstGeom>
+          <a:noFill/>
+        </p:spPr>
+        <p:txBody>
+          <a:bodyPr wrap="square" anchor="ctr"/>
+          <a:lstStyle/>
+          <a:p>
+            <a:r>
+              <a:rPr sz="1500" b="1" i="0">
+                <a:solidFill>
+                  <a:srgbClr val="333333"/>
+                </a:solidFill>
+                <a:latin typeface="Calibri"/>
+              </a:rPr>
+              <a:t>QUÉ SE PIERDE</a:t>
+            </a:r>
+            <a:r>
+              <a:rPr sz="1500" b="0" i="0">
+                <a:solidFill>
+                  <a:srgbClr val="333333"/>
+                </a:solidFill>
+                <a:latin typeface="Calibri"/>
+              </a:rPr>
+              <a:t> — Lo que la decisión sacrifica, en dos o tres líneas. Toda decisión sacrifica algo.</a:t>
+            </a:r>
+          </a:p>
+        </p:txBody>
+      </p:sp>
+      <p:sp>
+        <p:nvSpPr>
+          <p:cNvPr id="22" name="Rounded Rectangle 21"/>
+          <p:cNvSpPr/>
+          <p:nvPr/>
+        </p:nvSpPr>
+        <p:spPr>
+          <a:xfrm>
+            <a:off x="457200" y="4178808"/>
+            <a:ext cx="11277295" cy="566928"/>
+          </a:xfrm>
+          <a:prstGeom prst="roundRect">
+            <a:avLst>
+              <a:gd name="adj" fmla="val 12000"/>
+            </a:avLst>
+          </a:prstGeom>
+          <a:solidFill>
+            <a:srgbClr val="F2F2F2"/>
+          </a:solidFill>
+          <a:ln>
+            <a:noFill/>
+          </a:ln>
+        </p:spPr>
+        <p:style>
+          <a:lnRef idx="1">
+            <a:schemeClr val="accent1"/>
+          </a:lnRef>
+          <a:fillRef idx="3">
+            <a:schemeClr val="accent1"/>
+          </a:fillRef>
+          <a:effectRef idx="2">
+            <a:schemeClr val="accent1"/>
+          </a:effectRef>
+          <a:fontRef idx="minor">
+            <a:schemeClr val="lt1"/>
+          </a:fontRef>
+        </p:style>
+        <p:txBody>
+          <a:bodyPr rtlCol="0" anchor="ctr"/>
+          <a:lstStyle/>
+          <a:p>
+            <a:pPr algn="ctr"/>
+          </a:p>
+        </p:txBody>
+      </p:sp>
+      <p:sp>
+        <p:nvSpPr>
+          <p:cNvPr id="23" name="Rectangle 22"/>
+          <p:cNvSpPr/>
+          <p:nvPr/>
+        </p:nvSpPr>
+        <p:spPr>
+          <a:xfrm>
+            <a:off x="640080" y="4325112"/>
+            <a:ext cx="274320" cy="274320"/>
+          </a:xfrm>
+          <a:prstGeom prst="rect">
+            <a:avLst/>
+          </a:prstGeom>
+          <a:solidFill>
+            <a:srgbClr val="FFFFFF"/>
+          </a:solidFill>
+          <a:ln>
+            <a:solidFill>
+              <a:srgbClr val="333333"/>
+            </a:solidFill>
+          </a:ln>
+        </p:spPr>
+        <p:style>
+          <a:lnRef idx="1">
+            <a:schemeClr val="accent1"/>
+          </a:lnRef>
+          <a:fillRef idx="3">
+            <a:schemeClr val="accent1"/>
+          </a:fillRef>
+          <a:effectRef idx="2">
+            <a:schemeClr val="accent1"/>
+          </a:effectRef>
+          <a:fontRef idx="minor">
+            <a:schemeClr val="lt1"/>
+          </a:fontRef>
+        </p:style>
+        <p:txBody>
+          <a:bodyPr rtlCol="0" anchor="ctr"/>
+          <a:lstStyle/>
+          <a:p>
+            <a:pPr algn="ctr"/>
+          </a:p>
+        </p:txBody>
+      </p:sp>
+      <p:sp>
+        <p:nvSpPr>
+          <p:cNvPr id="24" name="Rectangle 23"/>
+          <p:cNvSpPr/>
+          <p:nvPr/>
+        </p:nvSpPr>
+        <p:spPr>
+          <a:xfrm>
+            <a:off x="640080" y="4325112"/>
+            <a:ext cx="73152" cy="274320"/>
+          </a:xfrm>
+          <a:prstGeom prst="rect">
+            <a:avLst/>
+          </a:prstGeom>
+          <a:solidFill>
+            <a:srgbClr val="269CCB"/>
+          </a:solidFill>
+          <a:ln>
+            <a:noFill/>
+          </a:ln>
+        </p:spPr>
+        <p:style>
+          <a:lnRef idx="1">
+            <a:schemeClr val="accent1"/>
+          </a:lnRef>
+          <a:fillRef idx="3">
+            <a:schemeClr val="accent1"/>
+          </a:fillRef>
+          <a:effectRef idx="2">
+            <a:schemeClr val="accent1"/>
+          </a:effectRef>
+          <a:fontRef idx="minor">
+            <a:schemeClr val="lt1"/>
+          </a:fontRef>
+        </p:style>
+        <p:txBody>
+          <a:bodyPr rtlCol="0" anchor="ctr"/>
+          <a:lstStyle/>
+          <a:p>
+            <a:pPr algn="ctr"/>
+          </a:p>
+        </p:txBody>
+      </p:sp>
+      <p:sp>
+        <p:nvSpPr>
+          <p:cNvPr id="25" name="TextBox 24"/>
+          <p:cNvSpPr txBox="1"/>
+          <p:nvPr/>
+        </p:nvSpPr>
+        <p:spPr>
+          <a:xfrm>
+            <a:off x="1097280" y="4270248"/>
+            <a:ext cx="10362895" cy="402336"/>
+          </a:xfrm>
+          <a:prstGeom prst="rect">
+            <a:avLst/>
+          </a:prstGeom>
+          <a:noFill/>
+        </p:spPr>
+        <p:txBody>
+          <a:bodyPr wrap="square" anchor="ctr"/>
+          <a:lstStyle/>
+          <a:p>
+            <a:r>
+              <a:rPr sz="1500" b="1" i="0">
+                <a:solidFill>
+                  <a:srgbClr val="333333"/>
+                </a:solidFill>
+                <a:latin typeface="Calibri"/>
+              </a:rPr>
+              <a:t>ALCANCE MÍNIMO Y PLAN DE VALIDACIÓN</a:t>
+            </a:r>
+            <a:r>
+              <a:rPr sz="1500" b="0" i="0">
+                <a:solidFill>
+                  <a:srgbClr val="333333"/>
+                </a:solidFill>
+                <a:latin typeface="Calibri"/>
+              </a:rPr>
+              <a:t> — Qué se construye este semestre (un requisito funcional completo, cumpliendo los no funcionales), la lista de lo que queda para «versión siguiente», y el plan de validación: </a:t>
+            </a:r>
+            <a:r>
+              <a:rPr sz="1500" b="1" i="0">
+                <a:solidFill>
+                  <a:srgbClr val="333333"/>
+                </a:solidFill>
+                <a:latin typeface="Calibri"/>
+              </a:rPr>
+              <a:t>con quién</a:t>
+            </a:r>
+            <a:r>
+              <a:rPr sz="1500" b="0" i="0">
+                <a:solidFill>
+                  <a:srgbClr val="333333"/>
+                </a:solidFill>
+                <a:latin typeface="Calibri"/>
+              </a:rPr>
+              <a:t> se prueba, </a:t>
+            </a:r>
+            <a:r>
+              <a:rPr sz="1500" b="1" i="0">
+                <a:solidFill>
+                  <a:srgbClr val="333333"/>
+                </a:solidFill>
+                <a:latin typeface="Calibri"/>
+              </a:rPr>
+              <a:t>qué tareas</a:t>
+            </a:r>
+            <a:r>
+              <a:rPr sz="1500" b="0" i="0">
+                <a:solidFill>
+                  <a:srgbClr val="333333"/>
+                </a:solidFill>
+                <a:latin typeface="Calibri"/>
+              </a:rPr>
+              <a:t> se le piden y </a:t>
+            </a:r>
+            <a:r>
+              <a:rPr sz="1500" b="1" i="0">
+                <a:solidFill>
+                  <a:srgbClr val="333333"/>
+                </a:solidFill>
+                <a:latin typeface="Calibri"/>
+              </a:rPr>
+              <a:t>qué se observa</a:t>
+            </a:r>
+            <a:r>
+              <a:rPr sz="1500" b="0" i="0">
+                <a:solidFill>
+                  <a:srgbClr val="333333"/>
+                </a:solidFill>
+                <a:latin typeface="Calibri"/>
+              </a:rPr>
+              <a:t>.</a:t>
+            </a:r>
+          </a:p>
+        </p:txBody>
+      </p:sp>
+      <p:sp>
+        <p:nvSpPr>
+          <p:cNvPr id="26" name="TextBox 25"/>
           <p:cNvSpPr txBox="1"/>
           <p:nvPr/>
         </p:nvSpPr>
@@ -6058,7 +6804,7 @@
                 </a:solidFill>
                 <a:latin typeface="Calibri"/>
               </a:rPr>
-              <a:t>Taller de hoy: Decisión de la solución y alcance mínimo</a:t>
+              <a:t>Cómo se expone en 3 minutos</a:t>
             </a:r>
           </a:p>
         </p:txBody>
@@ -6092,7 +6838,7 @@
                 </a:solidFill>
                 <a:latin typeface="Calibri"/>
               </a:rPr>
-              <a:t>40 min en equipos · 40 min con ritmo interno: alternativas, matriz, alcance, validación · matriz de decisión + alcance mínimo + plan de validación</a:t>
+              <a:t>Habla el vocero con la pantalla ya compartida · cronómetro en pantalla · se corta al llegar a cero</a:t>
             </a:r>
           </a:p>
         </p:txBody>
@@ -6105,8 +6851,8 @@
         </p:nvSpPr>
         <p:spPr>
           <a:xfrm>
-            <a:off x="457200" y="1472184"/>
-            <a:ext cx="11277295" cy="566928"/>
+            <a:off x="457200" y="1444752"/>
+            <a:ext cx="11277295" cy="908913"/>
           </a:xfrm>
           <a:prstGeom prst="roundRect">
             <a:avLst>
@@ -6144,25 +6890,25 @@
       </p:sp>
       <p:sp>
         <p:nvSpPr>
-          <p:cNvPr id="7" name="Rectangle 6"/>
+          <p:cNvPr id="7" name="Rounded Rectangle 6"/>
           <p:cNvSpPr/>
           <p:nvPr/>
         </p:nvSpPr>
         <p:spPr>
           <a:xfrm>
-            <a:off x="640080" y="1618487"/>
-            <a:ext cx="274320" cy="274320"/>
-          </a:xfrm>
-          <a:prstGeom prst="rect">
-            <a:avLst/>
+            <a:off x="594360" y="1679752"/>
+            <a:ext cx="438912" cy="438912"/>
+          </a:xfrm>
+          <a:prstGeom prst="roundRect">
+            <a:avLst>
+              <a:gd name="adj" fmla="val 12000"/>
+            </a:avLst>
           </a:prstGeom>
           <a:solidFill>
-            <a:srgbClr val="FFFFFF"/>
+            <a:srgbClr val="095292"/>
           </a:solidFill>
           <a:ln>
-            <a:solidFill>
-              <a:srgbClr val="333333"/>
-            </a:solidFill>
+            <a:noFill/>
           </a:ln>
         </p:spPr>
         <p:style>
@@ -6189,20 +6935,103 @@
       </p:sp>
       <p:sp>
         <p:nvSpPr>
-          <p:cNvPr id="8" name="Rectangle 7"/>
+          <p:cNvPr id="8" name="TextBox 7"/>
+          <p:cNvSpPr txBox="1"/>
+          <p:nvPr/>
+        </p:nvSpPr>
+        <p:spPr>
+          <a:xfrm>
+            <a:off x="594360" y="1679752"/>
+            <a:ext cx="438912" cy="438912"/>
+          </a:xfrm>
+          <a:prstGeom prst="rect">
+            <a:avLst/>
+          </a:prstGeom>
+          <a:noFill/>
+        </p:spPr>
+        <p:txBody>
+          <a:bodyPr wrap="square" anchor="ctr"/>
+          <a:lstStyle/>
+          <a:p>
+            <a:pPr algn="ctr"/>
+            <a:r>
+              <a:rPr sz="1600" b="1" i="0">
+                <a:solidFill>
+                  <a:srgbClr val="FFFFFF"/>
+                </a:solidFill>
+                <a:latin typeface="Calibri"/>
+              </a:rPr>
+              <a:t>1</a:t>
+            </a:r>
+          </a:p>
+        </p:txBody>
+      </p:sp>
+      <p:sp>
+        <p:nvSpPr>
+          <p:cNvPr id="9" name="TextBox 8"/>
+          <p:cNvSpPr txBox="1"/>
+          <p:nvPr/>
+        </p:nvSpPr>
+        <p:spPr>
+          <a:xfrm>
+            <a:off x="1188720" y="1536192"/>
+            <a:ext cx="10271455" cy="744321"/>
+          </a:xfrm>
+          <a:prstGeom prst="rect">
+            <a:avLst/>
+          </a:prstGeom>
+          <a:noFill/>
+        </p:spPr>
+        <p:txBody>
+          <a:bodyPr wrap="square" anchor="ctr"/>
+          <a:lstStyle/>
+          <a:p>
+            <a:r>
+              <a:rPr sz="1500" b="1" i="0">
+                <a:solidFill>
+                  <a:srgbClr val="095292"/>
+                </a:solidFill>
+                <a:latin typeface="Calibri"/>
+              </a:rPr>
+              <a:t>30 s · Las dos alternativas</a:t>
+            </a:r>
+          </a:p>
+          <a:p>
+            <a:pPr>
+              <a:spcBef>
+                <a:spcPts val="200"/>
+              </a:spcBef>
+            </a:pPr>
+            <a:r>
+              <a:rPr sz="1300" b="0" i="0">
+                <a:solidFill>
+                  <a:srgbClr val="333333"/>
+                </a:solidFill>
+                <a:latin typeface="Calibri"/>
+              </a:rPr>
+              <a:t>Una frase cada una. Sin adjetivos.</a:t>
+            </a:r>
+          </a:p>
+        </p:txBody>
+      </p:sp>
+      <p:sp>
+        <p:nvSpPr>
+          <p:cNvPr id="10" name="Rounded Rectangle 9"/>
           <p:cNvSpPr/>
           <p:nvPr/>
         </p:nvSpPr>
         <p:spPr>
           <a:xfrm>
-            <a:off x="640080" y="1618487"/>
-            <a:ext cx="73152" cy="274320"/>
-          </a:xfrm>
-          <a:prstGeom prst="rect">
-            <a:avLst/>
+            <a:off x="457200" y="2445105"/>
+            <a:ext cx="11277295" cy="908913"/>
+          </a:xfrm>
+          <a:prstGeom prst="roundRect">
+            <a:avLst>
+              <a:gd name="adj" fmla="val 12000"/>
+            </a:avLst>
           </a:prstGeom>
           <a:solidFill>
-            <a:srgbClr val="269CCB"/>
+            <a:srgbClr val="E8F4FA"/>
           </a:solidFill>
           <a:ln>
             <a:noFill/>
@@ -6232,14 +7061,59 @@
       </p:sp>
       <p:sp>
         <p:nvSpPr>
-          <p:cNvPr id="9" name="TextBox 8"/>
+          <p:cNvPr id="11" name="Rounded Rectangle 10"/>
+          <p:cNvSpPr/>
+          <p:nvPr/>
+        </p:nvSpPr>
+        <p:spPr>
+          <a:xfrm>
+            <a:off x="594360" y="2680106"/>
+            <a:ext cx="438912" cy="438912"/>
+          </a:xfrm>
+          <a:prstGeom prst="roundRect">
+            <a:avLst>
+              <a:gd name="adj" fmla="val 12000"/>
+            </a:avLst>
+          </a:prstGeom>
+          <a:solidFill>
+            <a:srgbClr val="095292"/>
+          </a:solidFill>
+          <a:ln>
+            <a:noFill/>
+          </a:ln>
+        </p:spPr>
+        <p:style>
+          <a:lnRef idx="1">
+            <a:schemeClr val="accent1"/>
+          </a:lnRef>
+          <a:fillRef idx="3">
+            <a:schemeClr val="accent1"/>
+          </a:fillRef>
+          <a:effectRef idx="2">
+            <a:schemeClr val="accent1"/>
+          </a:effectRef>
+          <a:fontRef idx="minor">
+            <a:schemeClr val="lt1"/>
+          </a:fontRef>
+        </p:style>
+        <p:txBody>
+          <a:bodyPr rtlCol="0" anchor="ctr"/>
+          <a:lstStyle/>
+          <a:p>
+            <a:pPr algn="ctr"/>
+          </a:p>
+        </p:txBody>
+      </p:sp>
+      <p:sp>
+        <p:nvSpPr>
+          <p:cNvPr id="12" name="TextBox 11"/>
           <p:cNvSpPr txBox="1"/>
           <p:nvPr/>
         </p:nvSpPr>
         <p:spPr>
           <a:xfrm>
-            <a:off x="1097280" y="1563624"/>
-            <a:ext cx="10362895" cy="402336"/>
+            <a:off x="594360" y="2680106"/>
+            <a:ext cx="438912" cy="438912"/>
           </a:xfrm>
           <a:prstGeom prst="rect">
             <a:avLst/>
@@ -6250,55 +7124,77 @@
           <a:bodyPr wrap="square" anchor="ctr"/>
           <a:lstStyle/>
           <a:p>
+            <a:pPr algn="ctr"/>
+            <a:r>
+              <a:rPr sz="1600" b="1" i="0">
+                <a:solidFill>
+                  <a:srgbClr val="FFFFFF"/>
+                </a:solidFill>
+                <a:latin typeface="Calibri"/>
+              </a:rPr>
+              <a:t>2</a:t>
+            </a:r>
+          </a:p>
+        </p:txBody>
+      </p:sp>
+      <p:sp>
+        <p:nvSpPr>
+          <p:cNvPr id="13" name="TextBox 12"/>
+          <p:cNvSpPr txBox="1"/>
+          <p:nvPr/>
+        </p:nvSpPr>
+        <p:spPr>
+          <a:xfrm>
+            <a:off x="1188720" y="2536545"/>
+            <a:ext cx="10271455" cy="744321"/>
+          </a:xfrm>
+          <a:prstGeom prst="rect">
+            <a:avLst/>
+          </a:prstGeom>
+          <a:noFill/>
+        </p:spPr>
+        <p:txBody>
+          <a:bodyPr wrap="square" anchor="ctr"/>
+          <a:lstStyle/>
+          <a:p>
             <a:r>
               <a:rPr sz="1500" b="1" i="0">
                 <a:solidFill>
-                  <a:srgbClr val="333333"/>
-                </a:solidFill>
-                <a:latin typeface="Calibri"/>
-              </a:rPr>
-              <a:t>LAS DOS ALTERNATIVAS</a:t>
-            </a:r>
-            <a:r>
-              <a:rPr sz="1500" b="0" i="0">
-                <a:solidFill>
-                  <a:srgbClr val="333333"/>
-                </a:solidFill>
-                <a:latin typeface="Calibri"/>
-              </a:rPr>
-              <a:t> — Cada alternativa en </a:t>
-            </a:r>
-            <a:r>
-              <a:rPr sz="1500" b="1" i="0">
-                <a:solidFill>
-                  <a:srgbClr val="333333"/>
-                </a:solidFill>
-                <a:latin typeface="Calibri"/>
-              </a:rPr>
-              <a:t>una frase</a:t>
-            </a:r>
-            <a:r>
-              <a:rPr sz="1500" b="0" i="0">
-                <a:solidFill>
-                  <a:srgbClr val="333333"/>
-                </a:solidFill>
-                <a:latin typeface="Calibri"/>
-              </a:rPr>
-              <a:t>, sin adjetivos, diciendo qué hace y cómo resuelve la causa elegida en el árbol de la sesión 6.</a:t>
-            </a:r>
-          </a:p>
-        </p:txBody>
-      </p:sp>
-      <p:sp>
-        <p:nvSpPr>
-          <p:cNvPr id="10" name="Rounded Rectangle 9"/>
+                  <a:srgbClr val="095292"/>
+                </a:solidFill>
+                <a:latin typeface="Calibri"/>
+              </a:rPr>
+              <a:t>40 s · Los criterios y los pesos</a:t>
+            </a:r>
+          </a:p>
+          <a:p>
+            <a:pPr>
+              <a:spcBef>
+                <a:spcPts val="200"/>
+              </a:spcBef>
+            </a:pPr>
+            <a:r>
+              <a:rPr sz="1300" b="0" i="0">
+                <a:solidFill>
+                  <a:srgbClr val="333333"/>
+                </a:solidFill>
+                <a:latin typeface="Calibri"/>
+              </a:rPr>
+              <a:t>De dónde salieron: qué restricción o requisito.</a:t>
+            </a:r>
+          </a:p>
+        </p:txBody>
+      </p:sp>
+      <p:sp>
+        <p:nvSpPr>
+          <p:cNvPr id="14" name="Rounded Rectangle 13"/>
           <p:cNvSpPr/>
           <p:nvPr/>
         </p:nvSpPr>
         <p:spPr>
           <a:xfrm>
-            <a:off x="457200" y="2148839"/>
-            <a:ext cx="11277295" cy="566928"/>
+            <a:off x="457200" y="3445459"/>
+            <a:ext cx="11277295" cy="908913"/>
           </a:xfrm>
           <a:prstGeom prst="roundRect">
             <a:avLst>
@@ -6336,25 +7232,25 @@
       </p:sp>
       <p:sp>
         <p:nvSpPr>
-          <p:cNvPr id="11" name="Rectangle 10"/>
+          <p:cNvPr id="15" name="Rounded Rectangle 14"/>
           <p:cNvSpPr/>
           <p:nvPr/>
         </p:nvSpPr>
         <p:spPr>
           <a:xfrm>
-            <a:off x="640080" y="2295144"/>
-            <a:ext cx="274320" cy="274320"/>
-          </a:xfrm>
-          <a:prstGeom prst="rect">
-            <a:avLst/>
+            <a:off x="594360" y="3680460"/>
+            <a:ext cx="438912" cy="438912"/>
+          </a:xfrm>
+          <a:prstGeom prst="roundRect">
+            <a:avLst>
+              <a:gd name="adj" fmla="val 12000"/>
+            </a:avLst>
           </a:prstGeom>
           <a:solidFill>
-            <a:srgbClr val="FFFFFF"/>
+            <a:srgbClr val="095292"/>
           </a:solidFill>
           <a:ln>
-            <a:solidFill>
-              <a:srgbClr val="333333"/>
-            </a:solidFill>
+            <a:noFill/>
           </a:ln>
         </p:spPr>
         <p:style>
@@ -6381,20 +7277,103 @@
       </p:sp>
       <p:sp>
         <p:nvSpPr>
-          <p:cNvPr id="12" name="Rectangle 11"/>
+          <p:cNvPr id="16" name="TextBox 15"/>
+          <p:cNvSpPr txBox="1"/>
+          <p:nvPr/>
+        </p:nvSpPr>
+        <p:spPr>
+          <a:xfrm>
+            <a:off x="594360" y="3680460"/>
+            <a:ext cx="438912" cy="438912"/>
+          </a:xfrm>
+          <a:prstGeom prst="rect">
+            <a:avLst/>
+          </a:prstGeom>
+          <a:noFill/>
+        </p:spPr>
+        <p:txBody>
+          <a:bodyPr wrap="square" anchor="ctr"/>
+          <a:lstStyle/>
+          <a:p>
+            <a:pPr algn="ctr"/>
+            <a:r>
+              <a:rPr sz="1600" b="1" i="0">
+                <a:solidFill>
+                  <a:srgbClr val="FFFFFF"/>
+                </a:solidFill>
+                <a:latin typeface="Calibri"/>
+              </a:rPr>
+              <a:t>3</a:t>
+            </a:r>
+          </a:p>
+        </p:txBody>
+      </p:sp>
+      <p:sp>
+        <p:nvSpPr>
+          <p:cNvPr id="17" name="TextBox 16"/>
+          <p:cNvSpPr txBox="1"/>
+          <p:nvPr/>
+        </p:nvSpPr>
+        <p:spPr>
+          <a:xfrm>
+            <a:off x="1188720" y="3536899"/>
+            <a:ext cx="10271455" cy="744321"/>
+          </a:xfrm>
+          <a:prstGeom prst="rect">
+            <a:avLst/>
+          </a:prstGeom>
+          <a:noFill/>
+        </p:spPr>
+        <p:txBody>
+          <a:bodyPr wrap="square" anchor="ctr"/>
+          <a:lstStyle/>
+          <a:p>
+            <a:r>
+              <a:rPr sz="1500" b="1" i="0">
+                <a:solidFill>
+                  <a:srgbClr val="095292"/>
+                </a:solidFill>
+                <a:latin typeface="Calibri"/>
+              </a:rPr>
+              <a:t>40 s · La decisión</a:t>
+            </a:r>
+          </a:p>
+          <a:p>
+            <a:pPr>
+              <a:spcBef>
+                <a:spcPts val="200"/>
+              </a:spcBef>
+            </a:pPr>
+            <a:r>
+              <a:rPr sz="1300" b="0" i="0">
+                <a:solidFill>
+                  <a:srgbClr val="333333"/>
+                </a:solidFill>
+                <a:latin typeface="Calibri"/>
+              </a:rPr>
+              <a:t>Cuál ganó y por qué, con una justificación concreta.</a:t>
+            </a:r>
+          </a:p>
+        </p:txBody>
+      </p:sp>
+      <p:sp>
+        <p:nvSpPr>
+          <p:cNvPr id="18" name="Rounded Rectangle 17"/>
           <p:cNvSpPr/>
           <p:nvPr/>
         </p:nvSpPr>
         <p:spPr>
           <a:xfrm>
-            <a:off x="640080" y="2295144"/>
-            <a:ext cx="73152" cy="274320"/>
-          </a:xfrm>
-          <a:prstGeom prst="rect">
-            <a:avLst/>
+            <a:off x="457200" y="4445812"/>
+            <a:ext cx="11277295" cy="908913"/>
+          </a:xfrm>
+          <a:prstGeom prst="roundRect">
+            <a:avLst>
+              <a:gd name="adj" fmla="val 12000"/>
+            </a:avLst>
           </a:prstGeom>
           <a:solidFill>
-            <a:srgbClr val="269CCB"/>
+            <a:srgbClr val="E8F4FA"/>
           </a:solidFill>
           <a:ln>
             <a:noFill/>
@@ -6424,14 +7403,59 @@
       </p:sp>
       <p:sp>
         <p:nvSpPr>
-          <p:cNvPr id="13" name="TextBox 12"/>
+          <p:cNvPr id="19" name="Rounded Rectangle 18"/>
+          <p:cNvSpPr/>
+          <p:nvPr/>
+        </p:nvSpPr>
+        <p:spPr>
+          <a:xfrm>
+            <a:off x="594360" y="4680813"/>
+            <a:ext cx="438912" cy="438912"/>
+          </a:xfrm>
+          <a:prstGeom prst="roundRect">
+            <a:avLst>
+              <a:gd name="adj" fmla="val 12000"/>
+            </a:avLst>
+          </a:prstGeom>
+          <a:solidFill>
+            <a:srgbClr val="095292"/>
+          </a:solidFill>
+          <a:ln>
+            <a:noFill/>
+          </a:ln>
+        </p:spPr>
+        <p:style>
+          <a:lnRef idx="1">
+            <a:schemeClr val="accent1"/>
+          </a:lnRef>
+          <a:fillRef idx="3">
+            <a:schemeClr val="accent1"/>
+          </a:fillRef>
+          <a:effectRef idx="2">
+            <a:schemeClr val="accent1"/>
+          </a:effectRef>
+          <a:fontRef idx="minor">
+            <a:schemeClr val="lt1"/>
+          </a:fontRef>
+        </p:style>
+        <p:txBody>
+          <a:bodyPr rtlCol="0" anchor="ctr"/>
+          <a:lstStyle/>
+          <a:p>
+            <a:pPr algn="ctr"/>
+          </a:p>
+        </p:txBody>
+      </p:sp>
+      <p:sp>
+        <p:nvSpPr>
+          <p:cNvPr id="20" name="TextBox 19"/>
           <p:cNvSpPr txBox="1"/>
           <p:nvPr/>
         </p:nvSpPr>
         <p:spPr>
           <a:xfrm>
-            <a:off x="1097280" y="2240279"/>
-            <a:ext cx="10362895" cy="402336"/>
+            <a:off x="594360" y="4680813"/>
+            <a:ext cx="438912" cy="438912"/>
           </a:xfrm>
           <a:prstGeom prst="rect">
             <a:avLst/>
@@ -6442,73 +7466,77 @@
           <a:bodyPr wrap="square" anchor="ctr"/>
           <a:lstStyle/>
           <a:p>
+            <a:pPr algn="ctr"/>
+            <a:r>
+              <a:rPr sz="1600" b="1" i="0">
+                <a:solidFill>
+                  <a:srgbClr val="FFFFFF"/>
+                </a:solidFill>
+                <a:latin typeface="Calibri"/>
+              </a:rPr>
+              <a:t>4</a:t>
+            </a:r>
+          </a:p>
+        </p:txBody>
+      </p:sp>
+      <p:sp>
+        <p:nvSpPr>
+          <p:cNvPr id="21" name="TextBox 20"/>
+          <p:cNvSpPr txBox="1"/>
+          <p:nvPr/>
+        </p:nvSpPr>
+        <p:spPr>
+          <a:xfrm>
+            <a:off x="1188720" y="4537252"/>
+            <a:ext cx="10271455" cy="744321"/>
+          </a:xfrm>
+          <a:prstGeom prst="rect">
+            <a:avLst/>
+          </a:prstGeom>
+          <a:noFill/>
+        </p:spPr>
+        <p:txBody>
+          <a:bodyPr wrap="square" anchor="ctr"/>
+          <a:lstStyle/>
+          <a:p>
             <a:r>
               <a:rPr sz="1500" b="1" i="0">
                 <a:solidFill>
-                  <a:srgbClr val="333333"/>
-                </a:solidFill>
-                <a:latin typeface="Calibri"/>
-              </a:rPr>
-              <a:t>LOS CRITERIOS Y SUS PESOS</a:t>
-            </a:r>
-            <a:r>
-              <a:rPr sz="1500" b="0" i="0">
-                <a:solidFill>
-                  <a:srgbClr val="333333"/>
-                </a:solidFill>
-                <a:latin typeface="Calibri"/>
-              </a:rPr>
-              <a:t> — De 3 a 5 criterios sacados de sus </a:t>
-            </a:r>
-            <a:r>
-              <a:rPr sz="1500" b="1" i="0">
-                <a:solidFill>
-                  <a:srgbClr val="333333"/>
-                </a:solidFill>
-                <a:latin typeface="Calibri"/>
-              </a:rPr>
-              <a:t>requisitos no funcionales y restricciones</a:t>
-            </a:r>
-            <a:r>
-              <a:rPr sz="1500" b="0" i="0">
-                <a:solidFill>
-                  <a:srgbClr val="333333"/>
-                </a:solidFill>
-                <a:latin typeface="Calibri"/>
-              </a:rPr>
-              <a:t>, cada uno con un peso, </a:t>
-            </a:r>
-            <a:r>
-              <a:rPr sz="1500" b="1" i="0">
-                <a:solidFill>
-                  <a:srgbClr val="333333"/>
-                </a:solidFill>
-                <a:latin typeface="Calibri"/>
-              </a:rPr>
-              <a:t>escritos antes de calificar</a:t>
-            </a:r>
-            <a:r>
-              <a:rPr sz="1500" b="0" i="0">
-                <a:solidFill>
-                  <a:srgbClr val="333333"/>
-                </a:solidFill>
-                <a:latin typeface="Calibri"/>
-              </a:rPr>
-              <a:t>.</a:t>
-            </a:r>
-          </a:p>
-        </p:txBody>
-      </p:sp>
-      <p:sp>
-        <p:nvSpPr>
-          <p:cNvPr id="14" name="Rounded Rectangle 13"/>
+                  <a:srgbClr val="095292"/>
+                </a:solidFill>
+                <a:latin typeface="Calibri"/>
+              </a:rPr>
+              <a:t>40 s · Qué se pierde</a:t>
+            </a:r>
+          </a:p>
+          <a:p>
+            <a:pPr>
+              <a:spcBef>
+                <a:spcPts val="200"/>
+              </a:spcBef>
+            </a:pPr>
+            <a:r>
+              <a:rPr sz="1300" b="0" i="0">
+                <a:solidFill>
+                  <a:srgbClr val="333333"/>
+                </a:solidFill>
+                <a:latin typeface="Calibri"/>
+              </a:rPr>
+              <a:t>Lo que sacrificaron. Es el minuto obligatorio.</a:t>
+            </a:r>
+          </a:p>
+        </p:txBody>
+      </p:sp>
+      <p:sp>
+        <p:nvSpPr>
+          <p:cNvPr id="22" name="Rounded Rectangle 21"/>
           <p:cNvSpPr/>
           <p:nvPr/>
         </p:nvSpPr>
         <p:spPr>
           <a:xfrm>
-            <a:off x="457200" y="2825496"/>
-            <a:ext cx="11277295" cy="566928"/>
+            <a:off x="457200" y="5446166"/>
+            <a:ext cx="11277295" cy="908913"/>
           </a:xfrm>
           <a:prstGeom prst="roundRect">
             <a:avLst>
@@ -6546,25 +7574,25 @@
       </p:sp>
       <p:sp>
         <p:nvSpPr>
-          <p:cNvPr id="15" name="Rectangle 14"/>
+          <p:cNvPr id="23" name="Rounded Rectangle 22"/>
           <p:cNvSpPr/>
           <p:nvPr/>
         </p:nvSpPr>
         <p:spPr>
           <a:xfrm>
-            <a:off x="640080" y="2971800"/>
-            <a:ext cx="274320" cy="274320"/>
-          </a:xfrm>
-          <a:prstGeom prst="rect">
-            <a:avLst/>
+            <a:off x="594360" y="5681167"/>
+            <a:ext cx="438912" cy="438912"/>
+          </a:xfrm>
+          <a:prstGeom prst="roundRect">
+            <a:avLst>
+              <a:gd name="adj" fmla="val 12000"/>
+            </a:avLst>
           </a:prstGeom>
           <a:solidFill>
-            <a:srgbClr val="FFFFFF"/>
+            <a:srgbClr val="095292"/>
           </a:solidFill>
           <a:ln>
-            <a:solidFill>
-              <a:srgbClr val="333333"/>
-            </a:solidFill>
+            <a:noFill/>
           </a:ln>
         </p:spPr>
         <p:style>
@@ -6591,410 +7619,34 @@
       </p:sp>
       <p:sp>
         <p:nvSpPr>
-          <p:cNvPr id="16" name="Rectangle 15"/>
-          <p:cNvSpPr/>
-          <p:nvPr/>
-        </p:nvSpPr>
-        <p:spPr>
-          <a:xfrm>
-            <a:off x="640080" y="2971800"/>
-            <a:ext cx="73152" cy="274320"/>
-          </a:xfrm>
-          <a:prstGeom prst="rect">
-            <a:avLst/>
-          </a:prstGeom>
-          <a:solidFill>
-            <a:srgbClr val="269CCB"/>
-          </a:solidFill>
-          <a:ln>
-            <a:noFill/>
-          </a:ln>
-        </p:spPr>
-        <p:style>
-          <a:lnRef idx="1">
-            <a:schemeClr val="accent1"/>
-          </a:lnRef>
-          <a:fillRef idx="3">
-            <a:schemeClr val="accent1"/>
-          </a:fillRef>
-          <a:effectRef idx="2">
-            <a:schemeClr val="accent1"/>
-          </a:effectRef>
-          <a:fontRef idx="minor">
-            <a:schemeClr val="lt1"/>
-          </a:fontRef>
-        </p:style>
-        <p:txBody>
-          <a:bodyPr rtlCol="0" anchor="ctr"/>
+          <p:cNvPr id="24" name="TextBox 23"/>
+          <p:cNvSpPr txBox="1"/>
+          <p:nvPr/>
+        </p:nvSpPr>
+        <p:spPr>
+          <a:xfrm>
+            <a:off x="594360" y="5681167"/>
+            <a:ext cx="438912" cy="438912"/>
+          </a:xfrm>
+          <a:prstGeom prst="rect">
+            <a:avLst/>
+          </a:prstGeom>
+          <a:noFill/>
+        </p:spPr>
+        <p:txBody>
+          <a:bodyPr wrap="square" anchor="ctr"/>
           <a:lstStyle/>
           <a:p>
             <a:pPr algn="ctr"/>
-          </a:p>
-        </p:txBody>
-      </p:sp>
-      <p:sp>
-        <p:nvSpPr>
-          <p:cNvPr id="17" name="TextBox 16"/>
-          <p:cNvSpPr txBox="1"/>
-          <p:nvPr/>
-        </p:nvSpPr>
-        <p:spPr>
-          <a:xfrm>
-            <a:off x="1097280" y="2916936"/>
-            <a:ext cx="10362895" cy="402336"/>
-          </a:xfrm>
-          <a:prstGeom prst="rect">
-            <a:avLst/>
-          </a:prstGeom>
-          <a:noFill/>
-        </p:spPr>
-        <p:txBody>
-          <a:bodyPr wrap="square" anchor="ctr"/>
-          <a:lstStyle/>
-          <a:p>
-            <a:r>
-              <a:rPr sz="1500" b="1" i="0">
-                <a:solidFill>
-                  <a:srgbClr val="333333"/>
-                </a:solidFill>
-                <a:latin typeface="Calibri"/>
-              </a:rPr>
-              <a:t>LA MATRIZ Y LA DECISIÓN</a:t>
-            </a:r>
-            <a:r>
-              <a:rPr sz="1500" b="0" i="0">
-                <a:solidFill>
-                  <a:srgbClr val="333333"/>
-                </a:solidFill>
-                <a:latin typeface="Calibri"/>
-              </a:rPr>
-              <a:t> — Cada alternativa calificada criterio por criterio (escala 1-3) con </a:t>
-            </a:r>
-            <a:r>
-              <a:rPr sz="1500" b="1" i="0">
-                <a:solidFill>
-                  <a:srgbClr val="333333"/>
-                </a:solidFill>
-                <a:latin typeface="Calibri"/>
-              </a:rPr>
-              <a:t>media línea de justificación por casilla</a:t>
-            </a:r>
-            <a:r>
-              <a:rPr sz="1500" b="0" i="0">
-                <a:solidFill>
-                  <a:srgbClr val="333333"/>
-                </a:solidFill>
-                <a:latin typeface="Calibri"/>
-              </a:rPr>
-              <a:t>, el resultado, y la decisión.</a:t>
-            </a:r>
-          </a:p>
-        </p:txBody>
-      </p:sp>
-      <p:sp>
-        <p:nvSpPr>
-          <p:cNvPr id="18" name="Rounded Rectangle 17"/>
-          <p:cNvSpPr/>
-          <p:nvPr/>
-        </p:nvSpPr>
-        <p:spPr>
-          <a:xfrm>
-            <a:off x="457200" y="3502152"/>
-            <a:ext cx="11277295" cy="566928"/>
-          </a:xfrm>
-          <a:prstGeom prst="roundRect">
-            <a:avLst>
-              <a:gd name="adj" fmla="val 12000"/>
-            </a:avLst>
-          </a:prstGeom>
-          <a:solidFill>
-            <a:srgbClr val="F2F2F2"/>
-          </a:solidFill>
-          <a:ln>
-            <a:noFill/>
-          </a:ln>
-        </p:spPr>
-        <p:style>
-          <a:lnRef idx="1">
-            <a:schemeClr val="accent1"/>
-          </a:lnRef>
-          <a:fillRef idx="3">
-            <a:schemeClr val="accent1"/>
-          </a:fillRef>
-          <a:effectRef idx="2">
-            <a:schemeClr val="accent1"/>
-          </a:effectRef>
-          <a:fontRef idx="minor">
-            <a:schemeClr val="lt1"/>
-          </a:fontRef>
-        </p:style>
-        <p:txBody>
-          <a:bodyPr rtlCol="0" anchor="ctr"/>
-          <a:lstStyle/>
-          <a:p>
-            <a:pPr algn="ctr"/>
-          </a:p>
-        </p:txBody>
-      </p:sp>
-      <p:sp>
-        <p:nvSpPr>
-          <p:cNvPr id="19" name="Rectangle 18"/>
-          <p:cNvSpPr/>
-          <p:nvPr/>
-        </p:nvSpPr>
-        <p:spPr>
-          <a:xfrm>
-            <a:off x="640080" y="3648456"/>
-            <a:ext cx="274320" cy="274320"/>
-          </a:xfrm>
-          <a:prstGeom prst="rect">
-            <a:avLst/>
-          </a:prstGeom>
-          <a:solidFill>
-            <a:srgbClr val="FFFFFF"/>
-          </a:solidFill>
-          <a:ln>
-            <a:solidFill>
-              <a:srgbClr val="333333"/>
-            </a:solidFill>
-          </a:ln>
-        </p:spPr>
-        <p:style>
-          <a:lnRef idx="1">
-            <a:schemeClr val="accent1"/>
-          </a:lnRef>
-          <a:fillRef idx="3">
-            <a:schemeClr val="accent1"/>
-          </a:fillRef>
-          <a:effectRef idx="2">
-            <a:schemeClr val="accent1"/>
-          </a:effectRef>
-          <a:fontRef idx="minor">
-            <a:schemeClr val="lt1"/>
-          </a:fontRef>
-        </p:style>
-        <p:txBody>
-          <a:bodyPr rtlCol="0" anchor="ctr"/>
-          <a:lstStyle/>
-          <a:p>
-            <a:pPr algn="ctr"/>
-          </a:p>
-        </p:txBody>
-      </p:sp>
-      <p:sp>
-        <p:nvSpPr>
-          <p:cNvPr id="20" name="Rectangle 19"/>
-          <p:cNvSpPr/>
-          <p:nvPr/>
-        </p:nvSpPr>
-        <p:spPr>
-          <a:xfrm>
-            <a:off x="640080" y="3648456"/>
-            <a:ext cx="73152" cy="274320"/>
-          </a:xfrm>
-          <a:prstGeom prst="rect">
-            <a:avLst/>
-          </a:prstGeom>
-          <a:solidFill>
-            <a:srgbClr val="269CCB"/>
-          </a:solidFill>
-          <a:ln>
-            <a:noFill/>
-          </a:ln>
-        </p:spPr>
-        <p:style>
-          <a:lnRef idx="1">
-            <a:schemeClr val="accent1"/>
-          </a:lnRef>
-          <a:fillRef idx="3">
-            <a:schemeClr val="accent1"/>
-          </a:fillRef>
-          <a:effectRef idx="2">
-            <a:schemeClr val="accent1"/>
-          </a:effectRef>
-          <a:fontRef idx="minor">
-            <a:schemeClr val="lt1"/>
-          </a:fontRef>
-        </p:style>
-        <p:txBody>
-          <a:bodyPr rtlCol="0" anchor="ctr"/>
-          <a:lstStyle/>
-          <a:p>
-            <a:pPr algn="ctr"/>
-          </a:p>
-        </p:txBody>
-      </p:sp>
-      <p:sp>
-        <p:nvSpPr>
-          <p:cNvPr id="21" name="TextBox 20"/>
-          <p:cNvSpPr txBox="1"/>
-          <p:nvPr/>
-        </p:nvSpPr>
-        <p:spPr>
-          <a:xfrm>
-            <a:off x="1097280" y="3593592"/>
-            <a:ext cx="10362895" cy="402336"/>
-          </a:xfrm>
-          <a:prstGeom prst="rect">
-            <a:avLst/>
-          </a:prstGeom>
-          <a:noFill/>
-        </p:spPr>
-        <p:txBody>
-          <a:bodyPr wrap="square" anchor="ctr"/>
-          <a:lstStyle/>
-          <a:p>
-            <a:r>
-              <a:rPr sz="1500" b="1" i="0">
-                <a:solidFill>
-                  <a:srgbClr val="333333"/>
-                </a:solidFill>
-                <a:latin typeface="Calibri"/>
-              </a:rPr>
-              <a:t>QUÉ SE PIERDE</a:t>
-            </a:r>
-            <a:r>
-              <a:rPr sz="1500" b="0" i="0">
-                <a:solidFill>
-                  <a:srgbClr val="333333"/>
-                </a:solidFill>
-                <a:latin typeface="Calibri"/>
-              </a:rPr>
-              <a:t> — Lo que la decisión sacrifica, en dos o tres líneas. Toda decisión sacrifica algo.</a:t>
-            </a:r>
-          </a:p>
-        </p:txBody>
-      </p:sp>
-      <p:sp>
-        <p:nvSpPr>
-          <p:cNvPr id="22" name="Rounded Rectangle 21"/>
-          <p:cNvSpPr/>
-          <p:nvPr/>
-        </p:nvSpPr>
-        <p:spPr>
-          <a:xfrm>
-            <a:off x="457200" y="4178808"/>
-            <a:ext cx="11277295" cy="566928"/>
-          </a:xfrm>
-          <a:prstGeom prst="roundRect">
-            <a:avLst>
-              <a:gd name="adj" fmla="val 12000"/>
-            </a:avLst>
-          </a:prstGeom>
-          <a:solidFill>
-            <a:srgbClr val="F2F2F2"/>
-          </a:solidFill>
-          <a:ln>
-            <a:noFill/>
-          </a:ln>
-        </p:spPr>
-        <p:style>
-          <a:lnRef idx="1">
-            <a:schemeClr val="accent1"/>
-          </a:lnRef>
-          <a:fillRef idx="3">
-            <a:schemeClr val="accent1"/>
-          </a:fillRef>
-          <a:effectRef idx="2">
-            <a:schemeClr val="accent1"/>
-          </a:effectRef>
-          <a:fontRef idx="minor">
-            <a:schemeClr val="lt1"/>
-          </a:fontRef>
-        </p:style>
-        <p:txBody>
-          <a:bodyPr rtlCol="0" anchor="ctr"/>
-          <a:lstStyle/>
-          <a:p>
-            <a:pPr algn="ctr"/>
-          </a:p>
-        </p:txBody>
-      </p:sp>
-      <p:sp>
-        <p:nvSpPr>
-          <p:cNvPr id="23" name="Rectangle 22"/>
-          <p:cNvSpPr/>
-          <p:nvPr/>
-        </p:nvSpPr>
-        <p:spPr>
-          <a:xfrm>
-            <a:off x="640080" y="4325112"/>
-            <a:ext cx="274320" cy="274320"/>
-          </a:xfrm>
-          <a:prstGeom prst="rect">
-            <a:avLst/>
-          </a:prstGeom>
-          <a:solidFill>
-            <a:srgbClr val="FFFFFF"/>
-          </a:solidFill>
-          <a:ln>
-            <a:solidFill>
-              <a:srgbClr val="333333"/>
-            </a:solidFill>
-          </a:ln>
-        </p:spPr>
-        <p:style>
-          <a:lnRef idx="1">
-            <a:schemeClr val="accent1"/>
-          </a:lnRef>
-          <a:fillRef idx="3">
-            <a:schemeClr val="accent1"/>
-          </a:fillRef>
-          <a:effectRef idx="2">
-            <a:schemeClr val="accent1"/>
-          </a:effectRef>
-          <a:fontRef idx="minor">
-            <a:schemeClr val="lt1"/>
-          </a:fontRef>
-        </p:style>
-        <p:txBody>
-          <a:bodyPr rtlCol="0" anchor="ctr"/>
-          <a:lstStyle/>
-          <a:p>
-            <a:pPr algn="ctr"/>
-          </a:p>
-        </p:txBody>
-      </p:sp>
-      <p:sp>
-        <p:nvSpPr>
-          <p:cNvPr id="24" name="Rectangle 23"/>
-          <p:cNvSpPr/>
-          <p:nvPr/>
-        </p:nvSpPr>
-        <p:spPr>
-          <a:xfrm>
-            <a:off x="640080" y="4325112"/>
-            <a:ext cx="73152" cy="274320"/>
-          </a:xfrm>
-          <a:prstGeom prst="rect">
-            <a:avLst/>
-          </a:prstGeom>
-          <a:solidFill>
-            <a:srgbClr val="269CCB"/>
-          </a:solidFill>
-          <a:ln>
-            <a:noFill/>
-          </a:ln>
-        </p:spPr>
-        <p:style>
-          <a:lnRef idx="1">
-            <a:schemeClr val="accent1"/>
-          </a:lnRef>
-          <a:fillRef idx="3">
-            <a:schemeClr val="accent1"/>
-          </a:fillRef>
-          <a:effectRef idx="2">
-            <a:schemeClr val="accent1"/>
-          </a:effectRef>
-          <a:fontRef idx="minor">
-            <a:schemeClr val="lt1"/>
-          </a:fontRef>
-        </p:style>
-        <p:txBody>
-          <a:bodyPr rtlCol="0" anchor="ctr"/>
-          <a:lstStyle/>
-          <a:p>
-            <a:pPr algn="ctr"/>
+            <a:r>
+              <a:rPr sz="1600" b="1" i="0">
+                <a:solidFill>
+                  <a:srgbClr val="FFFFFF"/>
+                </a:solidFill>
+                <a:latin typeface="Calibri"/>
+              </a:rPr>
+              <a:t>5</a:t>
+            </a:r>
           </a:p>
         </p:txBody>
       </p:sp>
@@ -7006,8 +7658,8 @@
         </p:nvSpPr>
         <p:spPr>
           <a:xfrm>
-            <a:off x="1097280" y="4270248"/>
-            <a:ext cx="10362895" cy="402336"/>
+            <a:off x="1188720" y="5537606"/>
+            <a:ext cx="10271455" cy="744321"/>
           </a:xfrm>
           <a:prstGeom prst="rect">
             <a:avLst/>
@@ -7021,74 +7673,27 @@
             <a:r>
               <a:rPr sz="1500" b="1" i="0">
                 <a:solidFill>
-                  <a:srgbClr val="333333"/>
-                </a:solidFill>
-                <a:latin typeface="Calibri"/>
-              </a:rPr>
-              <a:t>ALCANCE MÍNIMO Y PLAN DE VALIDACIÓN</a:t>
-            </a:r>
-            <a:r>
-              <a:rPr sz="1500" b="0" i="0">
-                <a:solidFill>
-                  <a:srgbClr val="333333"/>
-                </a:solidFill>
-                <a:latin typeface="Calibri"/>
-              </a:rPr>
-              <a:t> — Qué se construye este semestre (un requisito funcional completo, cumpliendo los no funcionales), la lista de lo que queda para «versión siguiente», y el plan de validación: </a:t>
-            </a:r>
-            <a:r>
-              <a:rPr sz="1500" b="1" i="0">
-                <a:solidFill>
-                  <a:srgbClr val="333333"/>
-                </a:solidFill>
-                <a:latin typeface="Calibri"/>
-              </a:rPr>
-              <a:t>con quién</a:t>
-            </a:r>
-            <a:r>
-              <a:rPr sz="1500" b="0" i="0">
-                <a:solidFill>
-                  <a:srgbClr val="333333"/>
-                </a:solidFill>
-                <a:latin typeface="Calibri"/>
-              </a:rPr>
-              <a:t> se prueba, </a:t>
-            </a:r>
-            <a:r>
-              <a:rPr sz="1500" b="1" i="0">
-                <a:solidFill>
-                  <a:srgbClr val="333333"/>
-                </a:solidFill>
-                <a:latin typeface="Calibri"/>
-              </a:rPr>
-              <a:t>qué tareas</a:t>
-            </a:r>
-            <a:r>
-              <a:rPr sz="1500" b="0" i="0">
-                <a:solidFill>
-                  <a:srgbClr val="333333"/>
-                </a:solidFill>
-                <a:latin typeface="Calibri"/>
-              </a:rPr>
-              <a:t> se le piden y </a:t>
-            </a:r>
-            <a:r>
-              <a:rPr sz="1500" b="1" i="0">
-                <a:solidFill>
-                  <a:srgbClr val="333333"/>
-                </a:solidFill>
-                <a:latin typeface="Calibri"/>
-              </a:rPr>
-              <a:t>qué se observa</a:t>
-            </a:r>
-            <a:r>
-              <a:rPr sz="1500" b="0" i="0">
-                <a:solidFill>
-                  <a:srgbClr val="333333"/>
-                </a:solidFill>
-                <a:latin typeface="Calibri"/>
-              </a:rPr>
-              <a:t>.</a:t>
+                  <a:srgbClr val="095292"/>
+                </a:solidFill>
+                <a:latin typeface="Calibri"/>
+              </a:rPr>
+              <a:t>30 s · Alcance y validación</a:t>
+            </a:r>
+          </a:p>
+          <a:p>
+            <a:pPr>
+              <a:spcBef>
+                <a:spcPts val="200"/>
+              </a:spcBef>
+            </a:pPr>
+            <a:r>
+              <a:rPr sz="1300" b="0" i="0">
+                <a:solidFill>
+                  <a:srgbClr val="333333"/>
+                </a:solidFill>
+                <a:latin typeface="Calibri"/>
+              </a:rPr>
+              <a:t>Qué se construye y con quién se va a probar.</a:t>
             </a:r>
           </a:p>
         </p:txBody>
@@ -7163,7 +7768,7 @@
         <p:spPr>
           <a:xfrm>
             <a:off x="0" y="0"/>
-            <a:ext cx="12191695" cy="1170432"/>
+            <a:ext cx="12191695" cy="960120"/>
           </a:xfrm>
           <a:prstGeom prst="rect">
             <a:avLst/>
@@ -7205,7 +7810,7 @@
         </p:nvSpPr>
         <p:spPr>
           <a:xfrm>
-            <a:off x="0" y="1170432"/>
+            <a:off x="0" y="960120"/>
             <a:ext cx="12191695" cy="41148"/>
           </a:xfrm>
           <a:prstGeom prst="rect">
@@ -7249,7 +7854,7 @@
         <p:spPr>
           <a:xfrm>
             <a:off x="457200" y="164592"/>
-            <a:ext cx="11277295" cy="384048"/>
+            <a:ext cx="11277295" cy="502920"/>
           </a:xfrm>
           <a:prstGeom prst="rect">
             <a:avLst/>
@@ -7269,7 +7874,7 @@
                 </a:solidFill>
                 <a:latin typeface="Calibri"/>
               </a:rPr>
-              <a:t>Cómo se expone en 3 minutos</a:t>
+              <a:t>Para la Clase 9</a:t>
             </a:r>
           </a:p>
         </p:txBody>
@@ -7282,8 +7887,8 @@
         </p:nvSpPr>
         <p:spPr>
           <a:xfrm>
-            <a:off x="457200" y="566928"/>
-            <a:ext cx="11277295" cy="411480"/>
+            <a:off x="457200" y="1170432"/>
+            <a:ext cx="11277295" cy="5230368"/>
           </a:xfrm>
           <a:prstGeom prst="rect">
             <a:avLst/>
@@ -7296,876 +7901,216 @@
           </a:bodyPr>
           <a:lstStyle/>
           <a:p>
-            <a:r>
-              <a:rPr sz="1400" b="0" i="0">
-                <a:solidFill>
-                  <a:srgbClr val="B8D8EE"/>
-                </a:solidFill>
-                <a:latin typeface="Calibri"/>
-              </a:rPr>
-              <a:t>Habla el vocero con la pantalla ya compartida · cronómetro en pantalla · se corta al llegar a cero</a:t>
-            </a:r>
-          </a:p>
-        </p:txBody>
-      </p:sp>
-      <p:sp>
-        <p:nvSpPr>
-          <p:cNvPr id="6" name="Rounded Rectangle 5"/>
-          <p:cNvSpPr/>
-          <p:nvPr/>
-        </p:nvSpPr>
-        <p:spPr>
-          <a:xfrm>
-            <a:off x="457200" y="1444752"/>
-            <a:ext cx="11277295" cy="908913"/>
-          </a:xfrm>
-          <a:prstGeom prst="roundRect">
-            <a:avLst>
-              <a:gd name="adj" fmla="val 12000"/>
-            </a:avLst>
-          </a:prstGeom>
-          <a:solidFill>
-            <a:srgbClr val="F2F2F2"/>
-          </a:solidFill>
-          <a:ln>
-            <a:noFill/>
-          </a:ln>
-        </p:spPr>
-        <p:style>
-          <a:lnRef idx="1">
-            <a:schemeClr val="accent1"/>
-          </a:lnRef>
-          <a:fillRef idx="3">
-            <a:schemeClr val="accent1"/>
-          </a:fillRef>
-          <a:effectRef idx="2">
-            <a:schemeClr val="accent1"/>
-          </a:effectRef>
-          <a:fontRef idx="minor">
-            <a:schemeClr val="lt1"/>
-          </a:fontRef>
-        </p:style>
-        <p:txBody>
-          <a:bodyPr rtlCol="0" anchor="ctr"/>
-          <a:lstStyle/>
-          <a:p>
-            <a:pPr algn="ctr"/>
-          </a:p>
-        </p:txBody>
-      </p:sp>
-      <p:sp>
-        <p:nvSpPr>
-          <p:cNvPr id="7" name="Rounded Rectangle 6"/>
-          <p:cNvSpPr/>
-          <p:nvPr/>
-        </p:nvSpPr>
-        <p:spPr>
-          <a:xfrm>
-            <a:off x="594360" y="1679752"/>
-            <a:ext cx="438912" cy="438912"/>
-          </a:xfrm>
-          <a:prstGeom prst="roundRect">
-            <a:avLst>
-              <a:gd name="adj" fmla="val 12000"/>
-            </a:avLst>
-          </a:prstGeom>
-          <a:solidFill>
-            <a:srgbClr val="095292"/>
-          </a:solidFill>
-          <a:ln>
-            <a:noFill/>
-          </a:ln>
-        </p:spPr>
-        <p:style>
-          <a:lnRef idx="1">
-            <a:schemeClr val="accent1"/>
-          </a:lnRef>
-          <a:fillRef idx="3">
-            <a:schemeClr val="accent1"/>
-          </a:fillRef>
-          <a:effectRef idx="2">
-            <a:schemeClr val="accent1"/>
-          </a:effectRef>
-          <a:fontRef idx="minor">
-            <a:schemeClr val="lt1"/>
-          </a:fontRef>
-        </p:style>
-        <p:txBody>
-          <a:bodyPr rtlCol="0" anchor="ctr"/>
-          <a:lstStyle/>
-          <a:p>
-            <a:pPr algn="ctr"/>
-          </a:p>
-        </p:txBody>
-      </p:sp>
-      <p:sp>
-        <p:nvSpPr>
-          <p:cNvPr id="8" name="TextBox 7"/>
-          <p:cNvSpPr txBox="1"/>
-          <p:nvPr/>
-        </p:nvSpPr>
-        <p:spPr>
-          <a:xfrm>
-            <a:off x="594360" y="1679752"/>
-            <a:ext cx="438912" cy="438912"/>
-          </a:xfrm>
-          <a:prstGeom prst="rect">
-            <a:avLst/>
-          </a:prstGeom>
-          <a:noFill/>
-        </p:spPr>
-        <p:txBody>
-          <a:bodyPr wrap="square" anchor="ctr"/>
-          <a:lstStyle/>
-          <a:p>
-            <a:pPr algn="ctr"/>
-            <a:r>
-              <a:rPr sz="1600" b="1" i="0">
-                <a:solidFill>
-                  <a:srgbClr val="FFFFFF"/>
-                </a:solidFill>
-                <a:latin typeface="Calibri"/>
-              </a:rPr>
-              <a:t>1</a:t>
-            </a:r>
-          </a:p>
-        </p:txBody>
-      </p:sp>
-      <p:sp>
-        <p:nvSpPr>
-          <p:cNvPr id="9" name="TextBox 8"/>
-          <p:cNvSpPr txBox="1"/>
-          <p:nvPr/>
-        </p:nvSpPr>
-        <p:spPr>
-          <a:xfrm>
-            <a:off x="1188720" y="1536192"/>
-            <a:ext cx="10271455" cy="744321"/>
-          </a:xfrm>
-          <a:prstGeom prst="rect">
-            <a:avLst/>
-          </a:prstGeom>
-          <a:noFill/>
-        </p:spPr>
-        <p:txBody>
-          <a:bodyPr wrap="square" anchor="ctr"/>
-          <a:lstStyle/>
-          <a:p>
-            <a:r>
-              <a:rPr sz="1500" b="1" i="0">
-                <a:solidFill>
-                  <a:srgbClr val="095292"/>
-                </a:solidFill>
-                <a:latin typeface="Calibri"/>
-              </a:rPr>
-              <a:t>30 s · Las dos alternativas</a:t>
-            </a:r>
-          </a:p>
-          <a:p>
             <a:pPr>
-              <a:spcBef>
-                <a:spcPts val="200"/>
-              </a:spcBef>
+              <a:spcAft>
+                <a:spcPts val="800"/>
+              </a:spcAft>
             </a:pPr>
             <a:r>
-              <a:rPr sz="1300" b="0" i="0">
-                <a:solidFill>
-                  <a:srgbClr val="333333"/>
-                </a:solidFill>
-                <a:latin typeface="Calibri"/>
-              </a:rPr>
-              <a:t>Una frase cada una. Sin adjetivos.</a:t>
-            </a:r>
-          </a:p>
-        </p:txBody>
-      </p:sp>
-      <p:sp>
-        <p:nvSpPr>
-          <p:cNvPr id="10" name="Rounded Rectangle 9"/>
-          <p:cNvSpPr/>
-          <p:nvPr/>
-        </p:nvSpPr>
-        <p:spPr>
-          <a:xfrm>
-            <a:off x="457200" y="2445105"/>
-            <a:ext cx="11277295" cy="908913"/>
-          </a:xfrm>
-          <a:prstGeom prst="roundRect">
-            <a:avLst>
-              <a:gd name="adj" fmla="val 12000"/>
-            </a:avLst>
-          </a:prstGeom>
-          <a:solidFill>
-            <a:srgbClr val="E8F4FA"/>
-          </a:solidFill>
-          <a:ln>
-            <a:noFill/>
-          </a:ln>
-        </p:spPr>
-        <p:style>
-          <a:lnRef idx="1">
-            <a:schemeClr val="accent1"/>
-          </a:lnRef>
-          <a:fillRef idx="3">
-            <a:schemeClr val="accent1"/>
-          </a:fillRef>
-          <a:effectRef idx="2">
-            <a:schemeClr val="accent1"/>
-          </a:effectRef>
-          <a:fontRef idx="minor">
-            <a:schemeClr val="lt1"/>
-          </a:fontRef>
-        </p:style>
-        <p:txBody>
-          <a:bodyPr rtlCol="0" anchor="ctr"/>
-          <a:lstStyle/>
-          <a:p>
-            <a:pPr algn="ctr"/>
-          </a:p>
-        </p:txBody>
-      </p:sp>
-      <p:sp>
-        <p:nvSpPr>
-          <p:cNvPr id="11" name="Rounded Rectangle 10"/>
-          <p:cNvSpPr/>
-          <p:nvPr/>
-        </p:nvSpPr>
-        <p:spPr>
-          <a:xfrm>
-            <a:off x="594360" y="2680106"/>
-            <a:ext cx="438912" cy="438912"/>
-          </a:xfrm>
-          <a:prstGeom prst="roundRect">
-            <a:avLst>
-              <a:gd name="adj" fmla="val 12000"/>
-            </a:avLst>
-          </a:prstGeom>
-          <a:solidFill>
-            <a:srgbClr val="095292"/>
-          </a:solidFill>
-          <a:ln>
-            <a:noFill/>
-          </a:ln>
-        </p:spPr>
-        <p:style>
-          <a:lnRef idx="1">
-            <a:schemeClr val="accent1"/>
-          </a:lnRef>
-          <a:fillRef idx="3">
-            <a:schemeClr val="accent1"/>
-          </a:fillRef>
-          <a:effectRef idx="2">
-            <a:schemeClr val="accent1"/>
-          </a:effectRef>
-          <a:fontRef idx="minor">
-            <a:schemeClr val="lt1"/>
-          </a:fontRef>
-        </p:style>
-        <p:txBody>
-          <a:bodyPr rtlCol="0" anchor="ctr"/>
-          <a:lstStyle/>
-          <a:p>
-            <a:pPr algn="ctr"/>
-          </a:p>
-        </p:txBody>
-      </p:sp>
-      <p:sp>
-        <p:nvSpPr>
-          <p:cNvPr id="12" name="TextBox 11"/>
-          <p:cNvSpPr txBox="1"/>
-          <p:nvPr/>
-        </p:nvSpPr>
-        <p:spPr>
-          <a:xfrm>
-            <a:off x="594360" y="2680106"/>
-            <a:ext cx="438912" cy="438912"/>
-          </a:xfrm>
-          <a:prstGeom prst="rect">
-            <a:avLst/>
-          </a:prstGeom>
-          <a:noFill/>
-        </p:spPr>
-        <p:txBody>
-          <a:bodyPr wrap="square" anchor="ctr"/>
-          <a:lstStyle/>
-          <a:p>
-            <a:pPr algn="ctr"/>
-            <a:r>
-              <a:rPr sz="1600" b="1" i="0">
-                <a:solidFill>
-                  <a:srgbClr val="FFFFFF"/>
-                </a:solidFill>
-                <a:latin typeface="Calibri"/>
-              </a:rPr>
-              <a:t>2</a:t>
-            </a:r>
-          </a:p>
-        </p:txBody>
-      </p:sp>
-      <p:sp>
-        <p:nvSpPr>
-          <p:cNvPr id="13" name="TextBox 12"/>
-          <p:cNvSpPr txBox="1"/>
-          <p:nvPr/>
-        </p:nvSpPr>
-        <p:spPr>
-          <a:xfrm>
-            <a:off x="1188720" y="2536545"/>
-            <a:ext cx="10271455" cy="744321"/>
-          </a:xfrm>
-          <a:prstGeom prst="rect">
-            <a:avLst/>
-          </a:prstGeom>
-          <a:noFill/>
-        </p:spPr>
-        <p:txBody>
-          <a:bodyPr wrap="square" anchor="ctr"/>
-          <a:lstStyle/>
-          <a:p>
-            <a:r>
-              <a:rPr sz="1500" b="1" i="0">
-                <a:solidFill>
-                  <a:srgbClr val="095292"/>
-                </a:solidFill>
-                <a:latin typeface="Calibri"/>
-              </a:rPr>
-              <a:t>40 s · Los criterios y los pesos</a:t>
+              <a:rPr sz="2000" b="0" i="0">
+                <a:solidFill>
+                  <a:srgbClr val="333333"/>
+                </a:solidFill>
+                <a:latin typeface="Calibri"/>
+              </a:rPr>
+              <a:t>–   </a:t>
+            </a:r>
+            <a:r>
+              <a:rPr sz="2000" b="1" i="0">
+                <a:solidFill>
+                  <a:srgbClr val="333333"/>
+                </a:solidFill>
+                <a:latin typeface="Calibri"/>
+              </a:rPr>
+              <a:t>Trabajo dirigido:</a:t>
+            </a:r>
+            <a:r>
+              <a:rPr sz="2000" b="0" i="0">
+                <a:solidFill>
+                  <a:srgbClr val="333333"/>
+                </a:solidFill>
+                <a:latin typeface="Calibri"/>
+              </a:rPr>
+              <a:t> Discusión de ejemplos reales — buscar </a:t>
+            </a:r>
+            <a:r>
+              <a:rPr sz="2000" b="1" i="0">
+                <a:solidFill>
+                  <a:srgbClr val="333333"/>
+                </a:solidFill>
+                <a:latin typeface="Calibri"/>
+              </a:rPr>
+              <a:t>un caso propio</a:t>
+            </a:r>
+            <a:r>
+              <a:rPr sz="2000" b="0" i="0">
+                <a:solidFill>
+                  <a:srgbClr val="333333"/>
+                </a:solidFill>
+                <a:latin typeface="Calibri"/>
+              </a:rPr>
+              <a:t> de proyecto que falló por saltarse una fase, con fuente verificable, y decir qué fase fue.</a:t>
             </a:r>
           </a:p>
           <a:p>
             <a:pPr>
-              <a:spcBef>
-                <a:spcPts val="200"/>
-              </a:spcBef>
+              <a:spcAft>
+                <a:spcPts val="800"/>
+              </a:spcAft>
             </a:pPr>
             <a:r>
-              <a:rPr sz="1300" b="0" i="0">
-                <a:solidFill>
-                  <a:srgbClr val="333333"/>
-                </a:solidFill>
-                <a:latin typeface="Calibri"/>
-              </a:rPr>
-              <a:t>De dónde salieron: qué restricción o requisito.</a:t>
-            </a:r>
-          </a:p>
-        </p:txBody>
-      </p:sp>
-      <p:sp>
-        <p:nvSpPr>
-          <p:cNvPr id="14" name="Rounded Rectangle 13"/>
-          <p:cNvSpPr/>
-          <p:nvPr/>
-        </p:nvSpPr>
-        <p:spPr>
-          <a:xfrm>
-            <a:off x="457200" y="3445459"/>
-            <a:ext cx="11277295" cy="908913"/>
-          </a:xfrm>
-          <a:prstGeom prst="roundRect">
-            <a:avLst>
-              <a:gd name="adj" fmla="val 12000"/>
-            </a:avLst>
-          </a:prstGeom>
-          <a:solidFill>
-            <a:srgbClr val="F2F2F2"/>
-          </a:solidFill>
-          <a:ln>
-            <a:noFill/>
-          </a:ln>
-        </p:spPr>
-        <p:style>
-          <a:lnRef idx="1">
-            <a:schemeClr val="accent1"/>
-          </a:lnRef>
-          <a:fillRef idx="3">
-            <a:schemeClr val="accent1"/>
-          </a:fillRef>
-          <a:effectRef idx="2">
-            <a:schemeClr val="accent1"/>
-          </a:effectRef>
-          <a:fontRef idx="minor">
-            <a:schemeClr val="lt1"/>
-          </a:fontRef>
-        </p:style>
-        <p:txBody>
-          <a:bodyPr rtlCol="0" anchor="ctr"/>
-          <a:lstStyle/>
-          <a:p>
-            <a:pPr algn="ctr"/>
-          </a:p>
-        </p:txBody>
-      </p:sp>
-      <p:sp>
-        <p:nvSpPr>
-          <p:cNvPr id="15" name="Rounded Rectangle 14"/>
-          <p:cNvSpPr/>
-          <p:nvPr/>
-        </p:nvSpPr>
-        <p:spPr>
-          <a:xfrm>
-            <a:off x="594360" y="3680460"/>
-            <a:ext cx="438912" cy="438912"/>
-          </a:xfrm>
-          <a:prstGeom prst="roundRect">
-            <a:avLst>
-              <a:gd name="adj" fmla="val 12000"/>
-            </a:avLst>
-          </a:prstGeom>
-          <a:solidFill>
-            <a:srgbClr val="095292"/>
-          </a:solidFill>
-          <a:ln>
-            <a:noFill/>
-          </a:ln>
-        </p:spPr>
-        <p:style>
-          <a:lnRef idx="1">
-            <a:schemeClr val="accent1"/>
-          </a:lnRef>
-          <a:fillRef idx="3">
-            <a:schemeClr val="accent1"/>
-          </a:fillRef>
-          <a:effectRef idx="2">
-            <a:schemeClr val="accent1"/>
-          </a:effectRef>
-          <a:fontRef idx="minor">
-            <a:schemeClr val="lt1"/>
-          </a:fontRef>
-        </p:style>
-        <p:txBody>
-          <a:bodyPr rtlCol="0" anchor="ctr"/>
-          <a:lstStyle/>
-          <a:p>
-            <a:pPr algn="ctr"/>
-          </a:p>
-        </p:txBody>
-      </p:sp>
-      <p:sp>
-        <p:nvSpPr>
-          <p:cNvPr id="16" name="TextBox 15"/>
-          <p:cNvSpPr txBox="1"/>
-          <p:nvPr/>
-        </p:nvSpPr>
-        <p:spPr>
-          <a:xfrm>
-            <a:off x="594360" y="3680460"/>
-            <a:ext cx="438912" cy="438912"/>
-          </a:xfrm>
-          <a:prstGeom prst="rect">
-            <a:avLst/>
-          </a:prstGeom>
-          <a:noFill/>
-        </p:spPr>
-        <p:txBody>
-          <a:bodyPr wrap="square" anchor="ctr"/>
-          <a:lstStyle/>
-          <a:p>
-            <a:pPr algn="ctr"/>
-            <a:r>
-              <a:rPr sz="1600" b="1" i="0">
-                <a:solidFill>
-                  <a:srgbClr val="FFFFFF"/>
-                </a:solidFill>
-                <a:latin typeface="Calibri"/>
-              </a:rPr>
-              <a:t>3</a:t>
-            </a:r>
-          </a:p>
-        </p:txBody>
-      </p:sp>
-      <p:sp>
-        <p:nvSpPr>
-          <p:cNvPr id="17" name="TextBox 16"/>
-          <p:cNvSpPr txBox="1"/>
-          <p:nvPr/>
-        </p:nvSpPr>
-        <p:spPr>
-          <a:xfrm>
-            <a:off x="1188720" y="3536899"/>
-            <a:ext cx="10271455" cy="744321"/>
-          </a:xfrm>
-          <a:prstGeom prst="rect">
-            <a:avLst/>
-          </a:prstGeom>
-          <a:noFill/>
-        </p:spPr>
-        <p:txBody>
-          <a:bodyPr wrap="square" anchor="ctr"/>
-          <a:lstStyle/>
-          <a:p>
-            <a:r>
-              <a:rPr sz="1500" b="1" i="0">
-                <a:solidFill>
-                  <a:srgbClr val="095292"/>
-                </a:solidFill>
-                <a:latin typeface="Calibri"/>
-              </a:rPr>
-              <a:t>40 s · La decisión</a:t>
+              <a:rPr sz="2000" b="0" i="0">
+                <a:solidFill>
+                  <a:srgbClr val="333333"/>
+                </a:solidFill>
+                <a:latin typeface="Calibri"/>
+              </a:rPr>
+              <a:t>–   </a:t>
+            </a:r>
+            <a:r>
+              <a:rPr sz="2000" b="1" i="0">
+                <a:solidFill>
+                  <a:srgbClr val="333333"/>
+                </a:solidFill>
+                <a:latin typeface="Calibri"/>
+              </a:rPr>
+              <a:t>Trabajo independiente:</a:t>
+            </a:r>
+            <a:r>
+              <a:rPr sz="2000" b="0" i="0">
+                <a:solidFill>
+                  <a:srgbClr val="333333"/>
+                </a:solidFill>
+                <a:latin typeface="Calibri"/>
+              </a:rPr>
+              <a:t> Ajuste de propuestas de solución: dejar en el documento del equipo la alternativa elegida con su alcance mínimo y el flujo dibujado, ya corregido con lo que salió en las exposiciones.</a:t>
             </a:r>
           </a:p>
           <a:p>
             <a:pPr>
-              <a:spcBef>
-                <a:spcPts val="200"/>
-              </a:spcBef>
+              <a:spcAft>
+                <a:spcPts val="800"/>
+              </a:spcAft>
             </a:pPr>
             <a:r>
-              <a:rPr sz="1300" b="0" i="0">
-                <a:solidFill>
-                  <a:srgbClr val="333333"/>
-                </a:solidFill>
-                <a:latin typeface="Calibri"/>
-              </a:rPr>
-              <a:t>Cuál ganó y por qué, con una justificación concreta.</a:t>
-            </a:r>
-          </a:p>
-        </p:txBody>
-      </p:sp>
-      <p:sp>
-        <p:nvSpPr>
-          <p:cNvPr id="18" name="Rounded Rectangle 17"/>
-          <p:cNvSpPr/>
-          <p:nvPr/>
-        </p:nvSpPr>
-        <p:spPr>
-          <a:xfrm>
-            <a:off x="457200" y="4445812"/>
-            <a:ext cx="11277295" cy="908913"/>
-          </a:xfrm>
-          <a:prstGeom prst="roundRect">
-            <a:avLst>
-              <a:gd name="adj" fmla="val 12000"/>
-            </a:avLst>
-          </a:prstGeom>
-          <a:solidFill>
-            <a:srgbClr val="E8F4FA"/>
-          </a:solidFill>
-          <a:ln>
-            <a:noFill/>
-          </a:ln>
-        </p:spPr>
-        <p:style>
-          <a:lnRef idx="1">
-            <a:schemeClr val="accent1"/>
-          </a:lnRef>
-          <a:fillRef idx="3">
-            <a:schemeClr val="accent1"/>
-          </a:fillRef>
-          <a:effectRef idx="2">
-            <a:schemeClr val="accent1"/>
-          </a:effectRef>
-          <a:fontRef idx="minor">
-            <a:schemeClr val="lt1"/>
-          </a:fontRef>
-        </p:style>
-        <p:txBody>
-          <a:bodyPr rtlCol="0" anchor="ctr"/>
-          <a:lstStyle/>
-          <a:p>
-            <a:pPr algn="ctr"/>
-          </a:p>
-        </p:txBody>
-      </p:sp>
-      <p:sp>
-        <p:nvSpPr>
-          <p:cNvPr id="19" name="Rounded Rectangle 18"/>
-          <p:cNvSpPr/>
-          <p:nvPr/>
-        </p:nvSpPr>
-        <p:spPr>
-          <a:xfrm>
-            <a:off x="594360" y="4680813"/>
-            <a:ext cx="438912" cy="438912"/>
-          </a:xfrm>
-          <a:prstGeom prst="roundRect">
-            <a:avLst>
-              <a:gd name="adj" fmla="val 12000"/>
-            </a:avLst>
-          </a:prstGeom>
-          <a:solidFill>
-            <a:srgbClr val="095292"/>
-          </a:solidFill>
-          <a:ln>
-            <a:noFill/>
-          </a:ln>
-        </p:spPr>
-        <p:style>
-          <a:lnRef idx="1">
-            <a:schemeClr val="accent1"/>
-          </a:lnRef>
-          <a:fillRef idx="3">
-            <a:schemeClr val="accent1"/>
-          </a:fillRef>
-          <a:effectRef idx="2">
-            <a:schemeClr val="accent1"/>
-          </a:effectRef>
-          <a:fontRef idx="minor">
-            <a:schemeClr val="lt1"/>
-          </a:fontRef>
-        </p:style>
-        <p:txBody>
-          <a:bodyPr rtlCol="0" anchor="ctr"/>
-          <a:lstStyle/>
-          <a:p>
-            <a:pPr algn="ctr"/>
-          </a:p>
-        </p:txBody>
-      </p:sp>
-      <p:sp>
-        <p:nvSpPr>
-          <p:cNvPr id="20" name="TextBox 19"/>
-          <p:cNvSpPr txBox="1"/>
-          <p:nvPr/>
-        </p:nvSpPr>
-        <p:spPr>
-          <a:xfrm>
-            <a:off x="594360" y="4680813"/>
-            <a:ext cx="438912" cy="438912"/>
-          </a:xfrm>
-          <a:prstGeom prst="rect">
-            <a:avLst/>
-          </a:prstGeom>
-          <a:noFill/>
-        </p:spPr>
-        <p:txBody>
-          <a:bodyPr wrap="square" anchor="ctr"/>
-          <a:lstStyle/>
-          <a:p>
-            <a:pPr algn="ctr"/>
-            <a:r>
-              <a:rPr sz="1600" b="1" i="0">
-                <a:solidFill>
-                  <a:srgbClr val="FFFFFF"/>
-                </a:solidFill>
-                <a:latin typeface="Calibri"/>
-              </a:rPr>
-              <a:t>4</a:t>
-            </a:r>
-          </a:p>
-        </p:txBody>
-      </p:sp>
-      <p:sp>
-        <p:nvSpPr>
-          <p:cNvPr id="21" name="TextBox 20"/>
-          <p:cNvSpPr txBox="1"/>
-          <p:nvPr/>
-        </p:nvSpPr>
-        <p:spPr>
-          <a:xfrm>
-            <a:off x="1188720" y="4537252"/>
-            <a:ext cx="10271455" cy="744321"/>
-          </a:xfrm>
-          <a:prstGeom prst="rect">
-            <a:avLst/>
-          </a:prstGeom>
-          <a:noFill/>
-        </p:spPr>
-        <p:txBody>
-          <a:bodyPr wrap="square" anchor="ctr"/>
-          <a:lstStyle/>
-          <a:p>
-            <a:r>
-              <a:rPr sz="1500" b="1" i="0">
-                <a:solidFill>
-                  <a:srgbClr val="095292"/>
-                </a:solidFill>
-                <a:latin typeface="Calibri"/>
-              </a:rPr>
-              <a:t>40 s · Qué se pierde</a:t>
+              <a:rPr sz="2000" b="0" i="0">
+                <a:solidFill>
+                  <a:srgbClr val="333333"/>
+                </a:solidFill>
+                <a:latin typeface="Calibri"/>
+              </a:rPr>
+              <a:t>–   </a:t>
+            </a:r>
+            <a:r>
+              <a:rPr sz="2000" b="1" i="0">
+                <a:solidFill>
+                  <a:srgbClr val="333333"/>
+                </a:solidFill>
+                <a:latin typeface="Calibri"/>
+              </a:rPr>
+              <a:t>Clase 9 · Estrategias de innovación en Ingeniería</a:t>
+            </a:r>
+            <a:r>
+              <a:rPr sz="2000" b="0" i="0">
+                <a:solidFill>
+                  <a:srgbClr val="333333"/>
+                </a:solidFill>
+                <a:latin typeface="Calibri"/>
+              </a:rPr>
+              <a:t> — los </a:t>
+            </a:r>
+            <a:r>
+              <a:rPr sz="2000" b="1" i="0">
+                <a:solidFill>
+                  <a:srgbClr val="333333"/>
+                </a:solidFill>
+                <a:latin typeface="Calibri"/>
+              </a:rPr>
+              <a:t>antecedentes</a:t>
+            </a:r>
+            <a:r>
+              <a:rPr sz="2000" b="0" i="0">
+                <a:solidFill>
+                  <a:srgbClr val="333333"/>
+                </a:solidFill>
+                <a:latin typeface="Calibri"/>
+              </a:rPr>
+              <a:t>: qué ya existe, quién lo intentó y cómo se busca eso con fuentes que se puedan verificar. Una respuesta de asistente de IA no es una fuente.</a:t>
             </a:r>
           </a:p>
           <a:p>
             <a:pPr>
-              <a:spcBef>
-                <a:spcPts val="200"/>
-              </a:spcBef>
+              <a:spcAft>
+                <a:spcPts val="800"/>
+              </a:spcAft>
             </a:pPr>
             <a:r>
-              <a:rPr sz="1300" b="0" i="0">
-                <a:solidFill>
-                  <a:srgbClr val="333333"/>
-                </a:solidFill>
-                <a:latin typeface="Calibri"/>
-              </a:rPr>
-              <a:t>Lo que sacrificaron. Es el minuto obligatorio.</a:t>
-            </a:r>
-          </a:p>
-        </p:txBody>
-      </p:sp>
-      <p:sp>
-        <p:nvSpPr>
-          <p:cNvPr id="22" name="Rounded Rectangle 21"/>
-          <p:cNvSpPr/>
-          <p:nvPr/>
-        </p:nvSpPr>
-        <p:spPr>
-          <a:xfrm>
-            <a:off x="457200" y="5446166"/>
-            <a:ext cx="11277295" cy="908913"/>
-          </a:xfrm>
-          <a:prstGeom prst="roundRect">
-            <a:avLst>
-              <a:gd name="adj" fmla="val 12000"/>
-            </a:avLst>
-          </a:prstGeom>
-          <a:solidFill>
-            <a:srgbClr val="F2F2F2"/>
-          </a:solidFill>
-          <a:ln>
-            <a:noFill/>
-          </a:ln>
-        </p:spPr>
-        <p:style>
-          <a:lnRef idx="1">
-            <a:schemeClr val="accent1"/>
-          </a:lnRef>
-          <a:fillRef idx="3">
-            <a:schemeClr val="accent1"/>
-          </a:fillRef>
-          <a:effectRef idx="2">
-            <a:schemeClr val="accent1"/>
-          </a:effectRef>
-          <a:fontRef idx="minor">
-            <a:schemeClr val="lt1"/>
-          </a:fontRef>
-        </p:style>
-        <p:txBody>
-          <a:bodyPr rtlCol="0" anchor="ctr"/>
-          <a:lstStyle/>
-          <a:p>
-            <a:pPr algn="ctr"/>
-          </a:p>
-        </p:txBody>
-      </p:sp>
-      <p:sp>
-        <p:nvSpPr>
-          <p:cNvPr id="23" name="Rounded Rectangle 22"/>
-          <p:cNvSpPr/>
-          <p:nvPr/>
-        </p:nvSpPr>
-        <p:spPr>
-          <a:xfrm>
-            <a:off x="594360" y="5681167"/>
-            <a:ext cx="438912" cy="438912"/>
-          </a:xfrm>
-          <a:prstGeom prst="roundRect">
-            <a:avLst>
-              <a:gd name="adj" fmla="val 12000"/>
-            </a:avLst>
-          </a:prstGeom>
-          <a:solidFill>
-            <a:srgbClr val="095292"/>
-          </a:solidFill>
-          <a:ln>
-            <a:noFill/>
-          </a:ln>
-        </p:spPr>
-        <p:style>
-          <a:lnRef idx="1">
-            <a:schemeClr val="accent1"/>
-          </a:lnRef>
-          <a:fillRef idx="3">
-            <a:schemeClr val="accent1"/>
-          </a:fillRef>
-          <a:effectRef idx="2">
-            <a:schemeClr val="accent1"/>
-          </a:effectRef>
-          <a:fontRef idx="minor">
-            <a:schemeClr val="lt1"/>
-          </a:fontRef>
-        </p:style>
-        <p:txBody>
-          <a:bodyPr rtlCol="0" anchor="ctr"/>
-          <a:lstStyle/>
-          <a:p>
-            <a:pPr algn="ctr"/>
-          </a:p>
-        </p:txBody>
-      </p:sp>
-      <p:sp>
-        <p:nvSpPr>
-          <p:cNvPr id="24" name="TextBox 23"/>
-          <p:cNvSpPr txBox="1"/>
-          <p:nvPr/>
-        </p:nvSpPr>
-        <p:spPr>
-          <a:xfrm>
-            <a:off x="594360" y="5681167"/>
-            <a:ext cx="438912" cy="438912"/>
-          </a:xfrm>
-          <a:prstGeom prst="rect">
-            <a:avLst/>
-          </a:prstGeom>
-          <a:noFill/>
-        </p:spPr>
-        <p:txBody>
-          <a:bodyPr wrap="square" anchor="ctr"/>
-          <a:lstStyle/>
-          <a:p>
-            <a:pPr algn="ctr"/>
-            <a:r>
-              <a:rPr sz="1600" b="1" i="0">
-                <a:solidFill>
-                  <a:srgbClr val="FFFFFF"/>
-                </a:solidFill>
-                <a:latin typeface="Calibri"/>
-              </a:rPr>
-              <a:t>5</a:t>
-            </a:r>
-          </a:p>
-        </p:txBody>
-      </p:sp>
-      <p:sp>
-        <p:nvSpPr>
-          <p:cNvPr id="25" name="TextBox 24"/>
-          <p:cNvSpPr txBox="1"/>
-          <p:nvPr/>
-        </p:nvSpPr>
-        <p:spPr>
-          <a:xfrm>
-            <a:off x="1188720" y="5537606"/>
-            <a:ext cx="10271455" cy="744321"/>
-          </a:xfrm>
-          <a:prstGeom prst="rect">
-            <a:avLst/>
-          </a:prstGeom>
-          <a:noFill/>
-        </p:spPr>
-        <p:txBody>
-          <a:bodyPr wrap="square" anchor="ctr"/>
-          <a:lstStyle/>
-          <a:p>
-            <a:r>
-              <a:rPr sz="1500" b="1" i="0">
-                <a:solidFill>
-                  <a:srgbClr val="095292"/>
-                </a:solidFill>
-                <a:latin typeface="Calibri"/>
-              </a:rPr>
-              <a:t>30 s · Alcance y validación</a:t>
+              <a:rPr sz="2000" b="0" i="0">
+                <a:solidFill>
+                  <a:srgbClr val="333333"/>
+                </a:solidFill>
+                <a:latin typeface="Calibri"/>
+              </a:rPr>
+              <a:t>–   </a:t>
+            </a:r>
+            <a:r>
+              <a:rPr sz="2000" b="1" i="0">
+                <a:solidFill>
+                  <a:srgbClr val="333333"/>
+                </a:solidFill>
+                <a:latin typeface="Calibri"/>
+              </a:rPr>
+              <a:t>Aviso:</a:t>
+            </a:r>
+            <a:r>
+              <a:rPr sz="2000" b="0" i="0">
+                <a:solidFill>
+                  <a:srgbClr val="333333"/>
+                </a:solidFill>
+                <a:latin typeface="Calibri"/>
+              </a:rPr>
+              <a:t> Para la sesión 9 traigan la alternativa elegida escrita y el flujo dibujado. Se va a buscar qué soluciones parecidas ya existen, y sin la propia decisión clara no hay con qué comparar.</a:t>
             </a:r>
           </a:p>
           <a:p>
             <a:pPr>
-              <a:spcBef>
-                <a:spcPts val="200"/>
-              </a:spcBef>
+              <a:spcAft>
+                <a:spcPts val="800"/>
+              </a:spcAft>
             </a:pPr>
             <a:r>
-              <a:rPr sz="1300" b="0" i="0">
-                <a:solidFill>
-                  <a:srgbClr val="333333"/>
-                </a:solidFill>
-                <a:latin typeface="Calibri"/>
-              </a:rPr>
-              <a:t>Qué se construye y con quién se va a probar.</a:t>
-            </a:r>
-          </a:p>
-        </p:txBody>
-      </p:sp>
-      <p:sp>
-        <p:nvSpPr>
-          <p:cNvPr id="26" name="TextBox 25"/>
+              <a:rPr sz="2000" b="0" i="0">
+                <a:solidFill>
+                  <a:srgbClr val="333333"/>
+                </a:solidFill>
+                <a:latin typeface="Calibri"/>
+              </a:rPr>
+              <a:t>–   </a:t>
+            </a:r>
+            <a:r>
+              <a:rPr sz="2000" b="1" i="0">
+                <a:solidFill>
+                  <a:srgbClr val="333333"/>
+                </a:solidFill>
+                <a:latin typeface="Calibri"/>
+              </a:rPr>
+              <a:t>Antes de salir:</a:t>
+            </a:r>
+            <a:r>
+              <a:rPr sz="2000" b="0" i="0">
+                <a:solidFill>
+                  <a:srgbClr val="333333"/>
+                </a:solidFill>
+                <a:latin typeface="Calibri"/>
+              </a:rPr>
+              <a:t> el enlace del documento del equipo en el chat, con permiso de lectura para el docente, y el nombre del vocero de hoy.</a:t>
+            </a:r>
+          </a:p>
+        </p:txBody>
+      </p:sp>
+      <p:sp>
+        <p:nvSpPr>
+          <p:cNvPr id="6" name="TextBox 5"/>
           <p:cNvSpPr txBox="1"/>
           <p:nvPr/>
         </p:nvSpPr>
@@ -8233,13 +8178,13 @@
         <p:spPr>
           <a:xfrm>
             <a:off x="0" y="0"/>
-            <a:ext cx="12191695" cy="960120"/>
+            <a:ext cx="12191695" cy="164592"/>
           </a:xfrm>
           <a:prstGeom prst="rect">
             <a:avLst/>
           </a:prstGeom>
           <a:solidFill>
-            <a:srgbClr val="095292"/>
+            <a:srgbClr val="269CCB"/>
           </a:solidFill>
           <a:ln>
             <a:noFill/>
@@ -8267,49 +8212,30 @@
           </a:p>
         </p:txBody>
       </p:sp>
-      <p:sp>
-        <p:nvSpPr>
-          <p:cNvPr id="3" name="Rectangle 2"/>
-          <p:cNvSpPr/>
-          <p:nvPr/>
-        </p:nvSpPr>
-        <p:spPr>
-          <a:xfrm>
-            <a:off x="0" y="960120"/>
-            <a:ext cx="12191695" cy="41148"/>
-          </a:xfrm>
-          <a:prstGeom prst="rect">
-            <a:avLst/>
-          </a:prstGeom>
-          <a:solidFill>
-            <a:srgbClr val="FFD000"/>
-          </a:solidFill>
-          <a:ln>
-            <a:noFill/>
-          </a:ln>
-        </p:spPr>
-        <p:style>
-          <a:lnRef idx="1">
-            <a:schemeClr val="accent1"/>
-          </a:lnRef>
-          <a:fillRef idx="3">
-            <a:schemeClr val="accent1"/>
-          </a:fillRef>
-          <a:effectRef idx="2">
-            <a:schemeClr val="accent1"/>
-          </a:effectRef>
-          <a:fontRef idx="minor">
-            <a:schemeClr val="lt1"/>
-          </a:fontRef>
-        </p:style>
-        <p:txBody>
-          <a:bodyPr rtlCol="0" anchor="ctr"/>
-          <a:lstStyle/>
-          <a:p>
-            <a:pPr algn="ctr"/>
-          </a:p>
-        </p:txBody>
-      </p:sp>
+      <p:pic>
+        <p:nvPicPr>
+          <p:cNvPr id="3" name="Picture 2" descr="logo_uniajc_color.png"/>
+          <p:cNvPicPr>
+            <a:picLocks noChangeAspect="1"/>
+          </p:cNvPicPr>
+          <p:nvPr/>
+        </p:nvPicPr>
+        <p:blipFill>
+          <a:blip r:embed="rId2"/>
+          <a:stretch>
+            <a:fillRect/>
+          </a:stretch>
+        </p:blipFill>
+        <p:spPr>
+          <a:xfrm>
+            <a:off x="10271455" y="5998464"/>
+            <a:ext cx="1463040" cy="643233"/>
+          </a:xfrm>
+          <a:prstGeom prst="rect">
+            <a:avLst/>
+          </a:prstGeom>
+        </p:spPr>
+      </p:pic>
       <p:sp>
         <p:nvSpPr>
           <p:cNvPr id="4" name="TextBox 3"/>
@@ -8318,8 +8244,41 @@
         </p:nvSpPr>
         <p:spPr>
           <a:xfrm>
-            <a:off x="457200" y="164592"/>
-            <a:ext cx="11277295" cy="502920"/>
+            <a:off x="457200" y="1737360"/>
+            <a:ext cx="11277295" cy="1097280"/>
+          </a:xfrm>
+          <a:prstGeom prst="rect">
+            <a:avLst/>
+          </a:prstGeom>
+          <a:noFill/>
+        </p:spPr>
+        <p:txBody>
+          <a:bodyPr wrap="square" anchor="ctr"/>
+          <a:lstStyle/>
+          <a:p>
+            <a:pPr algn="ctr"/>
+            <a:r>
+              <a:rPr sz="3400" b="1" i="0">
+                <a:solidFill>
+                  <a:srgbClr val="095292"/>
+                </a:solidFill>
+                <a:latin typeface="Calibri"/>
+              </a:rPr>
+              <a:t>Nos vemos en la sesión 9</a:t>
+            </a:r>
+          </a:p>
+        </p:txBody>
+      </p:sp>
+      <p:sp>
+        <p:nvSpPr>
+          <p:cNvPr id="5" name="TextBox 4"/>
+          <p:cNvSpPr txBox="1"/>
+          <p:nvPr/>
+        </p:nvSpPr>
+        <p:spPr>
+          <a:xfrm>
+            <a:off x="457200" y="3017520"/>
+            <a:ext cx="11277295" cy="1645920"/>
           </a:xfrm>
           <a:prstGeom prst="rect">
             <a:avLst/>
@@ -8332,28 +8291,49 @@
           </a:bodyPr>
           <a:lstStyle/>
           <a:p>
-            <a:r>
-              <a:rPr sz="2600" b="1" i="0">
-                <a:solidFill>
-                  <a:srgbClr val="FFFFFF"/>
-                </a:solidFill>
-                <a:latin typeface="Calibri"/>
-              </a:rPr>
-              <a:t>Para la Clase 9</a:t>
-            </a:r>
-          </a:p>
-        </p:txBody>
-      </p:sp>
-      <p:sp>
-        <p:nvSpPr>
-          <p:cNvPr id="5" name="TextBox 4"/>
+            <a:pPr algn="ctr">
+              <a:spcAft>
+                <a:spcPts val="600"/>
+              </a:spcAft>
+            </a:pPr>
+            <a:r>
+              <a:rPr sz="1600" b="0" i="0">
+                <a:solidFill>
+                  <a:srgbClr val="333333"/>
+                </a:solidFill>
+                <a:latin typeface="Calibri"/>
+              </a:rPr>
+              <a:t>Taller de aplicación del ciclo de vida · Clase 8</a:t>
+            </a:r>
+          </a:p>
+          <a:p>
+            <a:pPr algn="ctr">
+              <a:spcAft>
+                <a:spcPts val="600"/>
+              </a:spcAft>
+            </a:pPr>
+            <a:r>
+              <a:rPr sz="1600" b="0" i="0">
+                <a:solidFill>
+                  <a:srgbClr val="333333"/>
+                </a:solidFill>
+                <a:latin typeface="Calibri"/>
+              </a:rPr>
+              <a:t>FI300101 · UNIAJC · Ingeniería de Sistemas</a:t>
+            </a:r>
+          </a:p>
+        </p:txBody>
+      </p:sp>
+      <p:sp>
+        <p:nvSpPr>
+          <p:cNvPr id="6" name="TextBox 5"/>
           <p:cNvSpPr txBox="1"/>
           <p:nvPr/>
         </p:nvSpPr>
         <p:spPr>
           <a:xfrm>
-            <a:off x="457200" y="1170432"/>
-            <a:ext cx="11277295" cy="5230368"/>
+            <a:off x="457200" y="4754880"/>
+            <a:ext cx="11277295" cy="640080"/>
           </a:xfrm>
           <a:prstGeom prst="rect">
             <a:avLst/>
@@ -8366,244 +8346,15 @@
           </a:bodyPr>
           <a:lstStyle/>
           <a:p>
-            <a:pPr>
-              <a:spcAft>
-                <a:spcPts val="800"/>
-              </a:spcAft>
-            </a:pPr>
-            <a:r>
-              <a:rPr sz="2000" b="0" i="0">
-                <a:solidFill>
-                  <a:srgbClr val="333333"/>
-                </a:solidFill>
-                <a:latin typeface="Calibri"/>
-              </a:rPr>
-              <a:t>–   </a:t>
-            </a:r>
+            <a:pPr algn="ctr"/>
             <a:r>
               <a:rPr sz="2000" b="1" i="0">
                 <a:solidFill>
-                  <a:srgbClr val="333333"/>
-                </a:solidFill>
-                <a:latin typeface="Calibri"/>
-              </a:rPr>
-              <a:t>Trabajo dirigido:</a:t>
-            </a:r>
-            <a:r>
-              <a:rPr sz="2000" b="0" i="0">
-                <a:solidFill>
-                  <a:srgbClr val="333333"/>
-                </a:solidFill>
-                <a:latin typeface="Calibri"/>
-              </a:rPr>
-              <a:t> Discusión de ejemplos reales — buscar </a:t>
-            </a:r>
-            <a:r>
-              <a:rPr sz="2000" b="1" i="0">
-                <a:solidFill>
-                  <a:srgbClr val="333333"/>
-                </a:solidFill>
-                <a:latin typeface="Calibri"/>
-              </a:rPr>
-              <a:t>un caso propio</a:t>
-            </a:r>
-            <a:r>
-              <a:rPr sz="2000" b="0" i="0">
-                <a:solidFill>
-                  <a:srgbClr val="333333"/>
-                </a:solidFill>
-                <a:latin typeface="Calibri"/>
-              </a:rPr>
-              <a:t> de proyecto que falló por saltarse una fase, con fuente verificable, y decir qué fase fue.</a:t>
-            </a:r>
-          </a:p>
-          <a:p>
-            <a:pPr>
-              <a:spcAft>
-                <a:spcPts val="800"/>
-              </a:spcAft>
-            </a:pPr>
-            <a:r>
-              <a:rPr sz="2000" b="0" i="0">
-                <a:solidFill>
-                  <a:srgbClr val="333333"/>
-                </a:solidFill>
-                <a:latin typeface="Calibri"/>
-              </a:rPr>
-              <a:t>–   </a:t>
-            </a:r>
-            <a:r>
-              <a:rPr sz="2000" b="1" i="0">
-                <a:solidFill>
-                  <a:srgbClr val="333333"/>
-                </a:solidFill>
-                <a:latin typeface="Calibri"/>
-              </a:rPr>
-              <a:t>Trabajo independiente:</a:t>
-            </a:r>
-            <a:r>
-              <a:rPr sz="2000" b="0" i="0">
-                <a:solidFill>
-                  <a:srgbClr val="333333"/>
-                </a:solidFill>
-                <a:latin typeface="Calibri"/>
-              </a:rPr>
-              <a:t> Ajuste de propuestas de solución: dejar en el documento del equipo la alternativa elegida con su alcance mínimo y el flujo dibujado, ya corregido con lo que salió en las exposiciones.</a:t>
-            </a:r>
-          </a:p>
-          <a:p>
-            <a:pPr>
-              <a:spcAft>
-                <a:spcPts val="800"/>
-              </a:spcAft>
-            </a:pPr>
-            <a:r>
-              <a:rPr sz="2000" b="0" i="0">
-                <a:solidFill>
-                  <a:srgbClr val="333333"/>
-                </a:solidFill>
-                <a:latin typeface="Calibri"/>
-              </a:rPr>
-              <a:t>–   </a:t>
-            </a:r>
-            <a:r>
-              <a:rPr sz="2000" b="1" i="0">
-                <a:solidFill>
-                  <a:srgbClr val="333333"/>
-                </a:solidFill>
-                <a:latin typeface="Calibri"/>
-              </a:rPr>
-              <a:t>Clase 9 · Estrategias de innovación en Ingeniería</a:t>
-            </a:r>
-            <a:r>
-              <a:rPr sz="2000" b="0" i="0">
-                <a:solidFill>
-                  <a:srgbClr val="333333"/>
-                </a:solidFill>
-                <a:latin typeface="Calibri"/>
-              </a:rPr>
-              <a:t> — los </a:t>
-            </a:r>
-            <a:r>
-              <a:rPr sz="2000" b="1" i="0">
-                <a:solidFill>
-                  <a:srgbClr val="333333"/>
-                </a:solidFill>
-                <a:latin typeface="Calibri"/>
-              </a:rPr>
-              <a:t>antecedentes</a:t>
-            </a:r>
-            <a:r>
-              <a:rPr sz="2000" b="0" i="0">
-                <a:solidFill>
-                  <a:srgbClr val="333333"/>
-                </a:solidFill>
-                <a:latin typeface="Calibri"/>
-              </a:rPr>
-              <a:t>: qué ya existe, quién lo intentó y cómo se busca eso con fuentes que se puedan verificar. Una respuesta de asistente de IA no es una fuente.</a:t>
-            </a:r>
-          </a:p>
-          <a:p>
-            <a:pPr>
-              <a:spcAft>
-                <a:spcPts val="800"/>
-              </a:spcAft>
-            </a:pPr>
-            <a:r>
-              <a:rPr sz="2000" b="0" i="0">
-                <a:solidFill>
-                  <a:srgbClr val="333333"/>
-                </a:solidFill>
-                <a:latin typeface="Calibri"/>
-              </a:rPr>
-              <a:t>–   </a:t>
-            </a:r>
-            <a:r>
-              <a:rPr sz="2000" b="1" i="0">
-                <a:solidFill>
-                  <a:srgbClr val="333333"/>
-                </a:solidFill>
-                <a:latin typeface="Calibri"/>
-              </a:rPr>
-              <a:t>Aviso:</a:t>
-            </a:r>
-            <a:r>
-              <a:rPr sz="2000" b="0" i="0">
-                <a:solidFill>
-                  <a:srgbClr val="333333"/>
-                </a:solidFill>
-                <a:latin typeface="Calibri"/>
-              </a:rPr>
-              <a:t> Para la sesión 9 traigan la alternativa elegida escrita y el flujo dibujado. Se va a buscar qué soluciones parecidas ya existen, y sin la propia decisión clara no hay con qué comparar.</a:t>
-            </a:r>
-          </a:p>
-          <a:p>
-            <a:pPr>
-              <a:spcAft>
-                <a:spcPts val="800"/>
-              </a:spcAft>
-            </a:pPr>
-            <a:r>
-              <a:rPr sz="2000" b="0" i="0">
-                <a:solidFill>
-                  <a:srgbClr val="333333"/>
-                </a:solidFill>
-                <a:latin typeface="Calibri"/>
-              </a:rPr>
-              <a:t>–   </a:t>
-            </a:r>
-            <a:r>
-              <a:rPr sz="2000" b="1" i="0">
-                <a:solidFill>
-                  <a:srgbClr val="333333"/>
-                </a:solidFill>
-                <a:latin typeface="Calibri"/>
-              </a:rPr>
-              <a:t>Antes de salir:</a:t>
-            </a:r>
-            <a:r>
-              <a:rPr sz="2000" b="0" i="0">
-                <a:solidFill>
-                  <a:srgbClr val="333333"/>
-                </a:solidFill>
-                <a:latin typeface="Calibri"/>
-              </a:rPr>
-              <a:t> el enlace del documento del equipo en el chat, con permiso de lectura para el docente, y el nombre del vocero de hoy.</a:t>
-            </a:r>
-          </a:p>
-        </p:txBody>
-      </p:sp>
-      <p:sp>
-        <p:nvSpPr>
-          <p:cNvPr id="6" name="TextBox 5"/>
-          <p:cNvSpPr txBox="1"/>
-          <p:nvPr/>
-        </p:nvSpPr>
-        <p:spPr>
-          <a:xfrm>
-            <a:off x="11185855" y="6473952"/>
-            <a:ext cx="640080" cy="274320"/>
-          </a:xfrm>
-          <a:prstGeom prst="rect">
-            <a:avLst/>
-          </a:prstGeom>
-          <a:noFill/>
-        </p:spPr>
-        <p:txBody>
-          <a:bodyPr wrap="square">
-            <a:spAutoFit/>
-          </a:bodyPr>
-          <a:lstStyle/>
-          <a:p>
-            <a:pPr algn="r"/>
-            <a:r>
-              <a:rPr sz="1100" b="0" i="0">
-                <a:solidFill>
-                  <a:srgbClr val="666666"/>
-                </a:solidFill>
-                <a:latin typeface="Calibri"/>
-              </a:rPr>
-              <a:t>19</a:t>
+                  <a:srgbClr val="269CCB"/>
+                </a:solidFill>
+                <a:latin typeface="Calibri"/>
+              </a:rPr>
+              <a:t>Decidir no es acertar: es poder defender lo que se eligió y lo que se perdió</a:t>
             </a:r>
           </a:p>
         </p:txBody>
@@ -9499,222 +9250,6 @@
                 <a:latin typeface="Calibri"/>
               </a:rPr>
               <a:t>2</a:t>
-            </a:r>
-          </a:p>
-        </p:txBody>
-      </p:sp>
-    </p:spTree>
-  </p:cSld>
-  <p:clrMapOvr>
-    <a:masterClrMapping/>
-  </p:clrMapOvr>
-</p:sld>
-</file>
-
-<file path=ppt/slides/slide20.xml><?xml version="1.0" encoding="utf-8"?>
-<p:sld xmlns:a="http://schemas.openxmlformats.org/drawingml/2006/main" xmlns:p="http://schemas.openxmlformats.org/presentationml/2006/main" xmlns:r="http://schemas.openxmlformats.org/officeDocument/2006/relationships">
-  <p:cSld>
-    <p:bg>
-      <p:bgPr>
-        <a:solidFill>
-          <a:srgbClr val="FFFFFF"/>
-        </a:solidFill>
-        <a:effectLst/>
-      </p:bgPr>
-    </p:bg>
-    <p:spTree>
-      <p:nvGrpSpPr>
-        <p:cNvPr id="1" name=""/>
-        <p:cNvGrpSpPr/>
-        <p:nvPr/>
-      </p:nvGrpSpPr>
-      <p:grpSpPr/>
-      <p:sp>
-        <p:nvSpPr>
-          <p:cNvPr id="2" name="Rectangle 1"/>
-          <p:cNvSpPr/>
-          <p:nvPr/>
-        </p:nvSpPr>
-        <p:spPr>
-          <a:xfrm>
-            <a:off x="0" y="0"/>
-            <a:ext cx="12191695" cy="164592"/>
-          </a:xfrm>
-          <a:prstGeom prst="rect">
-            <a:avLst/>
-          </a:prstGeom>
-          <a:solidFill>
-            <a:srgbClr val="269CCB"/>
-          </a:solidFill>
-          <a:ln>
-            <a:noFill/>
-          </a:ln>
-        </p:spPr>
-        <p:style>
-          <a:lnRef idx="1">
-            <a:schemeClr val="accent1"/>
-          </a:lnRef>
-          <a:fillRef idx="3">
-            <a:schemeClr val="accent1"/>
-          </a:fillRef>
-          <a:effectRef idx="2">
-            <a:schemeClr val="accent1"/>
-          </a:effectRef>
-          <a:fontRef idx="minor">
-            <a:schemeClr val="lt1"/>
-          </a:fontRef>
-        </p:style>
-        <p:txBody>
-          <a:bodyPr rtlCol="0" anchor="ctr"/>
-          <a:lstStyle/>
-          <a:p>
-            <a:pPr algn="ctr"/>
-          </a:p>
-        </p:txBody>
-      </p:sp>
-      <p:pic>
-        <p:nvPicPr>
-          <p:cNvPr id="3" name="Picture 2" descr="logo_uniajc_color.png"/>
-          <p:cNvPicPr>
-            <a:picLocks noChangeAspect="1"/>
-          </p:cNvPicPr>
-          <p:nvPr/>
-        </p:nvPicPr>
-        <p:blipFill>
-          <a:blip r:embed="rId2"/>
-          <a:stretch>
-            <a:fillRect/>
-          </a:stretch>
-        </p:blipFill>
-        <p:spPr>
-          <a:xfrm>
-            <a:off x="10271455" y="5998464"/>
-            <a:ext cx="1463040" cy="643233"/>
-          </a:xfrm>
-          <a:prstGeom prst="rect">
-            <a:avLst/>
-          </a:prstGeom>
-        </p:spPr>
-      </p:pic>
-      <p:sp>
-        <p:nvSpPr>
-          <p:cNvPr id="4" name="TextBox 3"/>
-          <p:cNvSpPr txBox="1"/>
-          <p:nvPr/>
-        </p:nvSpPr>
-        <p:spPr>
-          <a:xfrm>
-            <a:off x="457200" y="1737360"/>
-            <a:ext cx="11277295" cy="1097280"/>
-          </a:xfrm>
-          <a:prstGeom prst="rect">
-            <a:avLst/>
-          </a:prstGeom>
-          <a:noFill/>
-        </p:spPr>
-        <p:txBody>
-          <a:bodyPr wrap="square" anchor="ctr"/>
-          <a:lstStyle/>
-          <a:p>
-            <a:pPr algn="ctr"/>
-            <a:r>
-              <a:rPr sz="3400" b="1" i="0">
-                <a:solidFill>
-                  <a:srgbClr val="095292"/>
-                </a:solidFill>
-                <a:latin typeface="Calibri"/>
-              </a:rPr>
-              <a:t>Nos vemos en la sesión 9</a:t>
-            </a:r>
-          </a:p>
-        </p:txBody>
-      </p:sp>
-      <p:sp>
-        <p:nvSpPr>
-          <p:cNvPr id="5" name="TextBox 4"/>
-          <p:cNvSpPr txBox="1"/>
-          <p:nvPr/>
-        </p:nvSpPr>
-        <p:spPr>
-          <a:xfrm>
-            <a:off x="457200" y="3017520"/>
-            <a:ext cx="11277295" cy="1645920"/>
-          </a:xfrm>
-          <a:prstGeom prst="rect">
-            <a:avLst/>
-          </a:prstGeom>
-          <a:noFill/>
-        </p:spPr>
-        <p:txBody>
-          <a:bodyPr wrap="square">
-            <a:spAutoFit/>
-          </a:bodyPr>
-          <a:lstStyle/>
-          <a:p>
-            <a:pPr algn="ctr">
-              <a:spcAft>
-                <a:spcPts val="600"/>
-              </a:spcAft>
-            </a:pPr>
-            <a:r>
-              <a:rPr sz="1600" b="0" i="0">
-                <a:solidFill>
-                  <a:srgbClr val="333333"/>
-                </a:solidFill>
-                <a:latin typeface="Calibri"/>
-              </a:rPr>
-              <a:t>Taller de aplicación del ciclo de vida · Clase 8</a:t>
-            </a:r>
-          </a:p>
-          <a:p>
-            <a:pPr algn="ctr">
-              <a:spcAft>
-                <a:spcPts val="600"/>
-              </a:spcAft>
-            </a:pPr>
-            <a:r>
-              <a:rPr sz="1600" b="0" i="0">
-                <a:solidFill>
-                  <a:srgbClr val="333333"/>
-                </a:solidFill>
-                <a:latin typeface="Calibri"/>
-              </a:rPr>
-              <a:t>FI300101 · UNIAJC · Ingeniería de Sistemas</a:t>
-            </a:r>
-          </a:p>
-        </p:txBody>
-      </p:sp>
-      <p:sp>
-        <p:nvSpPr>
-          <p:cNvPr id="6" name="TextBox 5"/>
-          <p:cNvSpPr txBox="1"/>
-          <p:nvPr/>
-        </p:nvSpPr>
-        <p:spPr>
-          <a:xfrm>
-            <a:off x="457200" y="4754880"/>
-            <a:ext cx="11277295" cy="640080"/>
-          </a:xfrm>
-          <a:prstGeom prst="rect">
-            <a:avLst/>
-          </a:prstGeom>
-          <a:noFill/>
-        </p:spPr>
-        <p:txBody>
-          <a:bodyPr wrap="square">
-            <a:spAutoFit/>
-          </a:bodyPr>
-          <a:lstStyle/>
-          <a:p>
-            <a:pPr algn="ctr"/>
-            <a:r>
-              <a:rPr sz="2000" b="1" i="0">
-                <a:solidFill>
-                  <a:srgbClr val="269CCB"/>
-                </a:solidFill>
-                <a:latin typeface="Calibri"/>
-              </a:rPr>
-              <a:t>Decidir no es acertar: es poder defender lo que se eligió y lo que se perdió</a:t>
             </a:r>
           </a:p>
         </p:txBody>
@@ -13730,7 +13265,7 @@
                 </a:solidFill>
                 <a:latin typeface="Calibri"/>
               </a:rPr>
-              <a:t>La pregunta de entrada: 45 minutos y una fase saltada (1/2)</a:t>
+              <a:t>La pregunta de entrada: 45 minutos y una fase saltada</a:t>
             </a:r>
           </a:p>
         </p:txBody>
@@ -13785,7 +13320,25 @@
                 </a:solidFill>
                 <a:latin typeface="Calibri"/>
               </a:rPr>
-              <a:t>–   El código llevaba años funcionando.</a:t>
+              <a:t>–   La pregunta del muro —«¿en qué fase estaba el error?»— va a producir respuestas que dicen «en la programación», y ahí está la lección: </a:t>
+            </a:r>
+            <a:r>
+              <a:rPr sz="2000" b="1" i="0">
+                <a:solidFill>
+                  <a:srgbClr val="333333"/>
+                </a:solidFill>
+                <a:latin typeface="Calibri"/>
+              </a:rPr>
+              <a:t>el error no estaba en el código, estaba en la operación</a:t>
+            </a:r>
+            <a:r>
+              <a:rPr sz="2000" b="0" i="0">
+                <a:solidFill>
+                  <a:srgbClr val="333333"/>
+                </a:solidFill>
+                <a:latin typeface="Calibri"/>
+              </a:rPr>
+              <a:t>.</a:t>
             </a:r>
           </a:p>
           <a:p>
@@ -13801,25 +13354,7 @@
                 </a:solidFill>
                 <a:latin typeface="Calibri"/>
               </a:rPr>
-              <a:t>–   Lo que falló fue el </a:t>
-            </a:r>
-            <a:r>
-              <a:rPr sz="2000" b="1" i="0">
-                <a:solidFill>
-                  <a:srgbClr val="333333"/>
-                </a:solidFill>
-                <a:latin typeface="Calibri"/>
-              </a:rPr>
-              <a:t>paso controlado de una fase a la siguiente</a:t>
-            </a:r>
-            <a:r>
-              <a:rPr sz="2000" b="0" i="0">
-                <a:solidFill>
-                  <a:srgbClr val="333333"/>
-                </a:solidFill>
-                <a:latin typeface="Calibri"/>
-              </a:rPr>
-              <a:t>: un despliegue que dejó una versión antigua activa en uno de los servidores, un sistema automático operando a velocidad de máquina, y ninguna manera de frenar rápido cuando empezó a hacer daño.</a:t>
+              <a:t>–   Es la fase que en la sesión 7 se nombró de pasada y que nadie enseña en primer semestre.</a:t>
             </a:r>
           </a:p>
           <a:p>
@@ -13835,7 +13370,7 @@
                 </a:solidFill>
                 <a:latin typeface="Calibri"/>
               </a:rPr>
-              <a:t>–   En cuestión de minutos las pérdidas fueron enormes y la firma no sobrevivió como empresa independiente.</a:t>
+              <a:t>–   Sirve además para introducir una idea que vale para todo el semestre: cada transición entre fases es un lugar donde se rompen los proyectos, y por eso las fases tienen entregables.</a:t>
             </a:r>
           </a:p>
           <a:p>
@@ -13851,25 +13386,7 @@
                 </a:solidFill>
                 <a:latin typeface="Calibri"/>
               </a:rPr>
-              <a:t>–   La pregunta del muro —«¿en qué fase estaba el error?»— va a producir respuestas que dicen «en la programación», y ahí está la lección: </a:t>
-            </a:r>
-            <a:r>
-              <a:rPr sz="2000" b="1" i="0">
-                <a:solidFill>
-                  <a:srgbClr val="333333"/>
-                </a:solidFill>
-                <a:latin typeface="Calibri"/>
-              </a:rPr>
-              <a:t>el error no estaba en el código, estaba en la operación</a:t>
-            </a:r>
-            <a:r>
-              <a:rPr sz="2000" b="0" i="0">
-                <a:solidFill>
-                  <a:srgbClr val="333333"/>
-                </a:solidFill>
-                <a:latin typeface="Calibri"/>
-              </a:rPr>
-              <a:t>.</a:t>
+              <a:t>–   Recomendación de manejo: no dé el nombre de la empresa en la apertura.</a:t>
             </a:r>
           </a:p>
         </p:txBody>

--- a/Introduccion a la Ingenieria/Clases/Clase 8 - Taller de aplicacion del ciclo de vida/Presentacion.pptx
+++ b/Introduccion a la Ingenieria/Clases/Clase 8 - Taller de aplicacion del ciclo de vida/Presentacion.pptx
@@ -24,6 +24,8 @@
     <p:sldId id="272" r:id="rId23"/>
     <p:sldId id="273" r:id="rId24"/>
     <p:sldId id="274" r:id="rId25"/>
+    <p:sldId id="275" r:id="rId26"/>
+    <p:sldId id="276" r:id="rId27"/>
   </p:sldIdLst>
   <p:sldSz cx="12191695" cy="6858000" type="screen4x3"/>
   <p:notesSz cx="6858000" cy="9144000"/>
@@ -5487,7 +5489,7 @@
         <p:spPr>
           <a:xfrm>
             <a:off x="0" y="0"/>
-            <a:ext cx="12191695" cy="1170432"/>
+            <a:ext cx="12191695" cy="960120"/>
           </a:xfrm>
           <a:prstGeom prst="rect">
             <a:avLst/>
@@ -5529,7 +5531,7 @@
         </p:nvSpPr>
         <p:spPr>
           <a:xfrm>
-            <a:off x="0" y="1170432"/>
+            <a:off x="0" y="960120"/>
             <a:ext cx="12191695" cy="41148"/>
           </a:xfrm>
           <a:prstGeom prst="rect">
@@ -5573,7 +5575,7 @@
         <p:spPr>
           <a:xfrm>
             <a:off x="457200" y="164592"/>
-            <a:ext cx="11277295" cy="384048"/>
+            <a:ext cx="11277295" cy="502920"/>
           </a:xfrm>
           <a:prstGeom prst="rect">
             <a:avLst/>
@@ -5593,55 +5595,21 @@
                 </a:solidFill>
                 <a:latin typeface="Calibri"/>
               </a:rPr>
-              <a:t>Taller de hoy: Decisión de la solución y alcance mínimo</a:t>
-            </a:r>
-          </a:p>
-        </p:txBody>
-      </p:sp>
-      <p:sp>
-        <p:nvSpPr>
-          <p:cNvPr id="5" name="TextBox 4"/>
-          <p:cNvSpPr txBox="1"/>
-          <p:nvPr/>
-        </p:nvSpPr>
-        <p:spPr>
-          <a:xfrm>
-            <a:off x="457200" y="566928"/>
-            <a:ext cx="11277295" cy="411480"/>
-          </a:xfrm>
-          <a:prstGeom prst="rect">
-            <a:avLst/>
-          </a:prstGeom>
-          <a:noFill/>
-        </p:spPr>
-        <p:txBody>
-          <a:bodyPr wrap="square">
-            <a:spAutoFit/>
-          </a:bodyPr>
-          <a:lstStyle/>
-          <a:p>
-            <a:r>
-              <a:rPr sz="1400" b="0" i="0">
-                <a:solidFill>
-                  <a:srgbClr val="B8D8EE"/>
-                </a:solidFill>
-                <a:latin typeface="Calibri"/>
-              </a:rPr>
-              <a:t>40 min en equipos · 40 min con ritmo interno: alternativas, matriz, alcance, validación · matriz de decisión + alcance mínimo + plan de validación</a:t>
-            </a:r>
-          </a:p>
-        </p:txBody>
-      </p:sp>
-      <p:sp>
-        <p:nvSpPr>
-          <p:cNvPr id="6" name="Rounded Rectangle 5"/>
+              <a:t>Plantilla del entregable: los 5 bloques</a:t>
+            </a:r>
+          </a:p>
+        </p:txBody>
+      </p:sp>
+      <p:sp>
+        <p:nvSpPr>
+          <p:cNvPr id="5" name="Rounded Rectangle 4"/>
           <p:cNvSpPr/>
           <p:nvPr/>
         </p:nvSpPr>
         <p:spPr>
           <a:xfrm>
-            <a:off x="457200" y="1472184"/>
-            <a:ext cx="11277295" cy="566928"/>
+            <a:off x="457200" y="1261872"/>
+            <a:ext cx="11277295" cy="5093208"/>
           </a:xfrm>
           <a:prstGeom prst="roundRect">
             <a:avLst>
@@ -5649,7 +5617,7 @@
             </a:avLst>
           </a:prstGeom>
           <a:solidFill>
-            <a:srgbClr val="F2F2F2"/>
+            <a:srgbClr val="1E2A38"/>
           </a:solidFill>
           <a:ln>
             <a:noFill/>
@@ -5679,25 +5647,23 @@
       </p:sp>
       <p:sp>
         <p:nvSpPr>
-          <p:cNvPr id="7" name="Rectangle 6"/>
+          <p:cNvPr id="6" name="Rectangle 5"/>
           <p:cNvSpPr/>
           <p:nvPr/>
         </p:nvSpPr>
         <p:spPr>
           <a:xfrm>
-            <a:off x="640080" y="1618487"/>
-            <a:ext cx="274320" cy="274320"/>
+            <a:off x="457200" y="1261872"/>
+            <a:ext cx="11277295" cy="320040"/>
           </a:xfrm>
           <a:prstGeom prst="rect">
             <a:avLst/>
           </a:prstGeom>
           <a:solidFill>
-            <a:srgbClr val="FFFFFF"/>
+            <a:srgbClr val="095292"/>
           </a:solidFill>
           <a:ln>
-            <a:solidFill>
-              <a:srgbClr val="333333"/>
-            </a:solidFill>
+            <a:noFill/>
           </a:ln>
         </p:spPr>
         <p:style>
@@ -5724,913 +5690,222 @@
       </p:sp>
       <p:sp>
         <p:nvSpPr>
-          <p:cNvPr id="8" name="Rectangle 7"/>
-          <p:cNvSpPr/>
-          <p:nvPr/>
-        </p:nvSpPr>
-        <p:spPr>
-          <a:xfrm>
-            <a:off x="640080" y="1618487"/>
-            <a:ext cx="73152" cy="274320"/>
-          </a:xfrm>
-          <a:prstGeom prst="rect">
-            <a:avLst/>
-          </a:prstGeom>
-          <a:solidFill>
-            <a:srgbClr val="269CCB"/>
-          </a:solidFill>
-          <a:ln>
-            <a:noFill/>
-          </a:ln>
-        </p:spPr>
-        <p:style>
-          <a:lnRef idx="1">
-            <a:schemeClr val="accent1"/>
-          </a:lnRef>
-          <a:fillRef idx="3">
-            <a:schemeClr val="accent1"/>
-          </a:fillRef>
-          <a:effectRef idx="2">
-            <a:schemeClr val="accent1"/>
-          </a:effectRef>
-          <a:fontRef idx="minor">
-            <a:schemeClr val="lt1"/>
-          </a:fontRef>
-        </p:style>
-        <p:txBody>
-          <a:bodyPr rtlCol="0" anchor="ctr"/>
-          <a:lstStyle/>
-          <a:p>
-            <a:pPr algn="ctr"/>
+          <p:cNvPr id="7" name="TextBox 6"/>
+          <p:cNvSpPr txBox="1"/>
+          <p:nvPr/>
+        </p:nvSpPr>
+        <p:spPr>
+          <a:xfrm>
+            <a:off x="685800" y="1307592"/>
+            <a:ext cx="10820095" cy="256032"/>
+          </a:xfrm>
+          <a:prstGeom prst="rect">
+            <a:avLst/>
+          </a:prstGeom>
+          <a:noFill/>
+        </p:spPr>
+        <p:txBody>
+          <a:bodyPr wrap="square" anchor="ctr"/>
+          <a:lstStyle/>
+          <a:p>
+            <a:r>
+              <a:rPr sz="1000" b="1" i="0">
+                <a:solidFill>
+                  <a:srgbClr val="269CCB"/>
+                </a:solidFill>
+                <a:latin typeface="Calibri"/>
+              </a:rPr>
+              <a:t>● ● ●</a:t>
+            </a:r>
+          </a:p>
+        </p:txBody>
+      </p:sp>
+      <p:sp>
+        <p:nvSpPr>
+          <p:cNvPr id="8" name="TextBox 7"/>
+          <p:cNvSpPr txBox="1"/>
+          <p:nvPr/>
+        </p:nvSpPr>
+        <p:spPr>
+          <a:xfrm>
+            <a:off x="777240" y="1719072"/>
+            <a:ext cx="10637215" cy="4453128"/>
+          </a:xfrm>
+          <a:prstGeom prst="rect">
+            <a:avLst/>
+          </a:prstGeom>
+          <a:noFill/>
+        </p:spPr>
+        <p:txBody>
+          <a:bodyPr wrap="square">
+            <a:spAutoFit/>
+          </a:bodyPr>
+          <a:lstStyle/>
+          <a:p>
+            <a:pPr>
+              <a:spcAft>
+                <a:spcPts val="400"/>
+              </a:spcAft>
+            </a:pPr>
+            <a:r>
+              <a:rPr sz="1400" b="0" i="0">
+                <a:solidFill>
+                  <a:srgbClr val="FFFFFF"/>
+                </a:solidFill>
+                <a:latin typeface="Calibri"/>
+              </a:rPr>
+              <a:t># Decisión de la solución y alcance mínimo</a:t>
+            </a:r>
+          </a:p>
+          <a:p>
+            <a:pPr>
+              <a:spcAft>
+                <a:spcPts val="400"/>
+              </a:spcAft>
+            </a:pPr>
+            <a:r>
+              <a:rPr sz="1400" b="0" i="0">
+                <a:solidFill>
+                  <a:srgbClr val="FFFFFF"/>
+                </a:solidFill>
+                <a:latin typeface="Calibri"/>
+              </a:rPr>
+              <a:t># Documento del equipo · un bloque por titulo, sin cambiar los nombres</a:t>
+            </a:r>
+          </a:p>
+          <a:p>
+            <a:pPr>
+              <a:spcAft>
+                <a:spcPts val="400"/>
+              </a:spcAft>
+            </a:pPr>
+            <a:r>
+              <a:rPr sz="1400" b="0" i="0">
+                <a:solidFill>
+                  <a:srgbClr val="FFFFFF"/>
+                </a:solidFill>
+                <a:latin typeface="Calibri"/>
+              </a:rPr>
+              <a:t/>
+            </a:r>
+          </a:p>
+          <a:p>
+            <a:pPr>
+              <a:spcAft>
+                <a:spcPts val="400"/>
+              </a:spcAft>
+            </a:pPr>
+            <a:r>
+              <a:rPr sz="1400" b="0" i="0">
+                <a:solidFill>
+                  <a:srgbClr val="FFFFFF"/>
+                </a:solidFill>
+                <a:latin typeface="Calibri"/>
+              </a:rPr>
+              <a:t>## 1. LAS DOS ALTERNATIVAS</a:t>
+            </a:r>
+          </a:p>
+          <a:p>
+            <a:pPr>
+              <a:spcAft>
+                <a:spcPts val="400"/>
+              </a:spcAft>
+            </a:pPr>
+            <a:r>
+              <a:rPr sz="1400" b="0" i="0">
+                <a:solidFill>
+                  <a:srgbClr val="FFFFFF"/>
+                </a:solidFill>
+                <a:latin typeface="Calibri"/>
+              </a:rPr>
+              <a:t>## 2. LOS CRITERIOS Y SUS PESOS</a:t>
+            </a:r>
+          </a:p>
+          <a:p>
+            <a:pPr>
+              <a:spcAft>
+                <a:spcPts val="400"/>
+              </a:spcAft>
+            </a:pPr>
+            <a:r>
+              <a:rPr sz="1400" b="0" i="0">
+                <a:solidFill>
+                  <a:srgbClr val="FFFFFF"/>
+                </a:solidFill>
+                <a:latin typeface="Calibri"/>
+              </a:rPr>
+              <a:t>## 3. LA MATRIZ Y LA DECISIÓN</a:t>
+            </a:r>
+          </a:p>
+          <a:p>
+            <a:pPr>
+              <a:spcAft>
+                <a:spcPts val="400"/>
+              </a:spcAft>
+            </a:pPr>
+            <a:r>
+              <a:rPr sz="1400" b="0" i="0">
+                <a:solidFill>
+                  <a:srgbClr val="FFFFFF"/>
+                </a:solidFill>
+                <a:latin typeface="Calibri"/>
+              </a:rPr>
+              <a:t>## 4. QUÉ SE PIERDE</a:t>
+            </a:r>
+          </a:p>
+          <a:p>
+            <a:pPr>
+              <a:spcAft>
+                <a:spcPts val="400"/>
+              </a:spcAft>
+            </a:pPr>
+            <a:r>
+              <a:rPr sz="1400" b="0" i="0">
+                <a:solidFill>
+                  <a:srgbClr val="FFFFFF"/>
+                </a:solidFill>
+                <a:latin typeface="Calibri"/>
+              </a:rPr>
+              <a:t>## 5. ALCANCE MÍNIMO Y PLAN DE VALIDACIÓN</a:t>
+            </a:r>
+          </a:p>
+          <a:p>
+            <a:pPr>
+              <a:spcAft>
+                <a:spcPts val="400"/>
+              </a:spcAft>
+            </a:pPr>
+            <a:r>
+              <a:rPr sz="1400" b="0" i="0">
+                <a:solidFill>
+                  <a:srgbClr val="FFFFFF"/>
+                </a:solidFill>
+                <a:latin typeface="Calibri"/>
+              </a:rPr>
+              <a:t/>
+            </a:r>
+          </a:p>
+          <a:p>
+            <a:pPr>
+              <a:spcAft>
+                <a:spcPts val="400"/>
+              </a:spcAft>
+            </a:pPr>
+            <a:r>
+              <a:rPr sz="1400" b="0" i="0">
+                <a:solidFill>
+                  <a:srgbClr val="FFFFFF"/>
+                </a:solidFill>
+                <a:latin typeface="Calibri"/>
+              </a:rPr>
+              <a:t># Los titulos van TAL CUAL: son con los que se califica.</a:t>
+            </a:r>
           </a:p>
         </p:txBody>
       </p:sp>
       <p:sp>
         <p:nvSpPr>
           <p:cNvPr id="9" name="TextBox 8"/>
-          <p:cNvSpPr txBox="1"/>
-          <p:nvPr/>
-        </p:nvSpPr>
-        <p:spPr>
-          <a:xfrm>
-            <a:off x="1097280" y="1563624"/>
-            <a:ext cx="10362895" cy="402336"/>
-          </a:xfrm>
-          <a:prstGeom prst="rect">
-            <a:avLst/>
-          </a:prstGeom>
-          <a:noFill/>
-        </p:spPr>
-        <p:txBody>
-          <a:bodyPr wrap="square" anchor="ctr"/>
-          <a:lstStyle/>
-          <a:p>
-            <a:r>
-              <a:rPr sz="1500" b="1" i="0">
-                <a:solidFill>
-                  <a:srgbClr val="333333"/>
-                </a:solidFill>
-                <a:latin typeface="Calibri"/>
-              </a:rPr>
-              <a:t>LAS DOS ALTERNATIVAS</a:t>
-            </a:r>
-            <a:r>
-              <a:rPr sz="1500" b="0" i="0">
-                <a:solidFill>
-                  <a:srgbClr val="333333"/>
-                </a:solidFill>
-                <a:latin typeface="Calibri"/>
-              </a:rPr>
-              <a:t> — Cada alternativa en </a:t>
-            </a:r>
-            <a:r>
-              <a:rPr sz="1500" b="1" i="0">
-                <a:solidFill>
-                  <a:srgbClr val="333333"/>
-                </a:solidFill>
-                <a:latin typeface="Calibri"/>
-              </a:rPr>
-              <a:t>una frase</a:t>
-            </a:r>
-            <a:r>
-              <a:rPr sz="1500" b="0" i="0">
-                <a:solidFill>
-                  <a:srgbClr val="333333"/>
-                </a:solidFill>
-                <a:latin typeface="Calibri"/>
-              </a:rPr>
-              <a:t>, sin adjetivos, diciendo qué hace y cómo resuelve la causa elegida en el árbol de la sesión 6.</a:t>
-            </a:r>
-          </a:p>
-        </p:txBody>
-      </p:sp>
-      <p:sp>
-        <p:nvSpPr>
-          <p:cNvPr id="10" name="Rounded Rectangle 9"/>
-          <p:cNvSpPr/>
-          <p:nvPr/>
-        </p:nvSpPr>
-        <p:spPr>
-          <a:xfrm>
-            <a:off x="457200" y="2148839"/>
-            <a:ext cx="11277295" cy="566928"/>
-          </a:xfrm>
-          <a:prstGeom prst="roundRect">
-            <a:avLst>
-              <a:gd name="adj" fmla="val 12000"/>
-            </a:avLst>
-          </a:prstGeom>
-          <a:solidFill>
-            <a:srgbClr val="F2F2F2"/>
-          </a:solidFill>
-          <a:ln>
-            <a:noFill/>
-          </a:ln>
-        </p:spPr>
-        <p:style>
-          <a:lnRef idx="1">
-            <a:schemeClr val="accent1"/>
-          </a:lnRef>
-          <a:fillRef idx="3">
-            <a:schemeClr val="accent1"/>
-          </a:fillRef>
-          <a:effectRef idx="2">
-            <a:schemeClr val="accent1"/>
-          </a:effectRef>
-          <a:fontRef idx="minor">
-            <a:schemeClr val="lt1"/>
-          </a:fontRef>
-        </p:style>
-        <p:txBody>
-          <a:bodyPr rtlCol="0" anchor="ctr"/>
-          <a:lstStyle/>
-          <a:p>
-            <a:pPr algn="ctr"/>
-          </a:p>
-        </p:txBody>
-      </p:sp>
-      <p:sp>
-        <p:nvSpPr>
-          <p:cNvPr id="11" name="Rectangle 10"/>
-          <p:cNvSpPr/>
-          <p:nvPr/>
-        </p:nvSpPr>
-        <p:spPr>
-          <a:xfrm>
-            <a:off x="640080" y="2295144"/>
-            <a:ext cx="274320" cy="274320"/>
-          </a:xfrm>
-          <a:prstGeom prst="rect">
-            <a:avLst/>
-          </a:prstGeom>
-          <a:solidFill>
-            <a:srgbClr val="FFFFFF"/>
-          </a:solidFill>
-          <a:ln>
-            <a:solidFill>
-              <a:srgbClr val="333333"/>
-            </a:solidFill>
-          </a:ln>
-        </p:spPr>
-        <p:style>
-          <a:lnRef idx="1">
-            <a:schemeClr val="accent1"/>
-          </a:lnRef>
-          <a:fillRef idx="3">
-            <a:schemeClr val="accent1"/>
-          </a:fillRef>
-          <a:effectRef idx="2">
-            <a:schemeClr val="accent1"/>
-          </a:effectRef>
-          <a:fontRef idx="minor">
-            <a:schemeClr val="lt1"/>
-          </a:fontRef>
-        </p:style>
-        <p:txBody>
-          <a:bodyPr rtlCol="0" anchor="ctr"/>
-          <a:lstStyle/>
-          <a:p>
-            <a:pPr algn="ctr"/>
-          </a:p>
-        </p:txBody>
-      </p:sp>
-      <p:sp>
-        <p:nvSpPr>
-          <p:cNvPr id="12" name="Rectangle 11"/>
-          <p:cNvSpPr/>
-          <p:nvPr/>
-        </p:nvSpPr>
-        <p:spPr>
-          <a:xfrm>
-            <a:off x="640080" y="2295144"/>
-            <a:ext cx="73152" cy="274320"/>
-          </a:xfrm>
-          <a:prstGeom prst="rect">
-            <a:avLst/>
-          </a:prstGeom>
-          <a:solidFill>
-            <a:srgbClr val="269CCB"/>
-          </a:solidFill>
-          <a:ln>
-            <a:noFill/>
-          </a:ln>
-        </p:spPr>
-        <p:style>
-          <a:lnRef idx="1">
-            <a:schemeClr val="accent1"/>
-          </a:lnRef>
-          <a:fillRef idx="3">
-            <a:schemeClr val="accent1"/>
-          </a:fillRef>
-          <a:effectRef idx="2">
-            <a:schemeClr val="accent1"/>
-          </a:effectRef>
-          <a:fontRef idx="minor">
-            <a:schemeClr val="lt1"/>
-          </a:fontRef>
-        </p:style>
-        <p:txBody>
-          <a:bodyPr rtlCol="0" anchor="ctr"/>
-          <a:lstStyle/>
-          <a:p>
-            <a:pPr algn="ctr"/>
-          </a:p>
-        </p:txBody>
-      </p:sp>
-      <p:sp>
-        <p:nvSpPr>
-          <p:cNvPr id="13" name="TextBox 12"/>
-          <p:cNvSpPr txBox="1"/>
-          <p:nvPr/>
-        </p:nvSpPr>
-        <p:spPr>
-          <a:xfrm>
-            <a:off x="1097280" y="2240279"/>
-            <a:ext cx="10362895" cy="402336"/>
-          </a:xfrm>
-          <a:prstGeom prst="rect">
-            <a:avLst/>
-          </a:prstGeom>
-          <a:noFill/>
-        </p:spPr>
-        <p:txBody>
-          <a:bodyPr wrap="square" anchor="ctr"/>
-          <a:lstStyle/>
-          <a:p>
-            <a:r>
-              <a:rPr sz="1500" b="1" i="0">
-                <a:solidFill>
-                  <a:srgbClr val="333333"/>
-                </a:solidFill>
-                <a:latin typeface="Calibri"/>
-              </a:rPr>
-              <a:t>LOS CRITERIOS Y SUS PESOS</a:t>
-            </a:r>
-            <a:r>
-              <a:rPr sz="1500" b="0" i="0">
-                <a:solidFill>
-                  <a:srgbClr val="333333"/>
-                </a:solidFill>
-                <a:latin typeface="Calibri"/>
-              </a:rPr>
-              <a:t> — De 3 a 5 criterios sacados de sus </a:t>
-            </a:r>
-            <a:r>
-              <a:rPr sz="1500" b="1" i="0">
-                <a:solidFill>
-                  <a:srgbClr val="333333"/>
-                </a:solidFill>
-                <a:latin typeface="Calibri"/>
-              </a:rPr>
-              <a:t>requisitos no funcionales y restricciones</a:t>
-            </a:r>
-            <a:r>
-              <a:rPr sz="1500" b="0" i="0">
-                <a:solidFill>
-                  <a:srgbClr val="333333"/>
-                </a:solidFill>
-                <a:latin typeface="Calibri"/>
-              </a:rPr>
-              <a:t>, cada uno con un peso, </a:t>
-            </a:r>
-            <a:r>
-              <a:rPr sz="1500" b="1" i="0">
-                <a:solidFill>
-                  <a:srgbClr val="333333"/>
-                </a:solidFill>
-                <a:latin typeface="Calibri"/>
-              </a:rPr>
-              <a:t>escritos antes de calificar</a:t>
-            </a:r>
-            <a:r>
-              <a:rPr sz="1500" b="0" i="0">
-                <a:solidFill>
-                  <a:srgbClr val="333333"/>
-                </a:solidFill>
-                <a:latin typeface="Calibri"/>
-              </a:rPr>
-              <a:t>.</a:t>
-            </a:r>
-          </a:p>
-        </p:txBody>
-      </p:sp>
-      <p:sp>
-        <p:nvSpPr>
-          <p:cNvPr id="14" name="Rounded Rectangle 13"/>
-          <p:cNvSpPr/>
-          <p:nvPr/>
-        </p:nvSpPr>
-        <p:spPr>
-          <a:xfrm>
-            <a:off x="457200" y="2825496"/>
-            <a:ext cx="11277295" cy="566928"/>
-          </a:xfrm>
-          <a:prstGeom prst="roundRect">
-            <a:avLst>
-              <a:gd name="adj" fmla="val 12000"/>
-            </a:avLst>
-          </a:prstGeom>
-          <a:solidFill>
-            <a:srgbClr val="F2F2F2"/>
-          </a:solidFill>
-          <a:ln>
-            <a:noFill/>
-          </a:ln>
-        </p:spPr>
-        <p:style>
-          <a:lnRef idx="1">
-            <a:schemeClr val="accent1"/>
-          </a:lnRef>
-          <a:fillRef idx="3">
-            <a:schemeClr val="accent1"/>
-          </a:fillRef>
-          <a:effectRef idx="2">
-            <a:schemeClr val="accent1"/>
-          </a:effectRef>
-          <a:fontRef idx="minor">
-            <a:schemeClr val="lt1"/>
-          </a:fontRef>
-        </p:style>
-        <p:txBody>
-          <a:bodyPr rtlCol="0" anchor="ctr"/>
-          <a:lstStyle/>
-          <a:p>
-            <a:pPr algn="ctr"/>
-          </a:p>
-        </p:txBody>
-      </p:sp>
-      <p:sp>
-        <p:nvSpPr>
-          <p:cNvPr id="15" name="Rectangle 14"/>
-          <p:cNvSpPr/>
-          <p:nvPr/>
-        </p:nvSpPr>
-        <p:spPr>
-          <a:xfrm>
-            <a:off x="640080" y="2971800"/>
-            <a:ext cx="274320" cy="274320"/>
-          </a:xfrm>
-          <a:prstGeom prst="rect">
-            <a:avLst/>
-          </a:prstGeom>
-          <a:solidFill>
-            <a:srgbClr val="FFFFFF"/>
-          </a:solidFill>
-          <a:ln>
-            <a:solidFill>
-              <a:srgbClr val="333333"/>
-            </a:solidFill>
-          </a:ln>
-        </p:spPr>
-        <p:style>
-          <a:lnRef idx="1">
-            <a:schemeClr val="accent1"/>
-          </a:lnRef>
-          <a:fillRef idx="3">
-            <a:schemeClr val="accent1"/>
-          </a:fillRef>
-          <a:effectRef idx="2">
-            <a:schemeClr val="accent1"/>
-          </a:effectRef>
-          <a:fontRef idx="minor">
-            <a:schemeClr val="lt1"/>
-          </a:fontRef>
-        </p:style>
-        <p:txBody>
-          <a:bodyPr rtlCol="0" anchor="ctr"/>
-          <a:lstStyle/>
-          <a:p>
-            <a:pPr algn="ctr"/>
-          </a:p>
-        </p:txBody>
-      </p:sp>
-      <p:sp>
-        <p:nvSpPr>
-          <p:cNvPr id="16" name="Rectangle 15"/>
-          <p:cNvSpPr/>
-          <p:nvPr/>
-        </p:nvSpPr>
-        <p:spPr>
-          <a:xfrm>
-            <a:off x="640080" y="2971800"/>
-            <a:ext cx="73152" cy="274320"/>
-          </a:xfrm>
-          <a:prstGeom prst="rect">
-            <a:avLst/>
-          </a:prstGeom>
-          <a:solidFill>
-            <a:srgbClr val="269CCB"/>
-          </a:solidFill>
-          <a:ln>
-            <a:noFill/>
-          </a:ln>
-        </p:spPr>
-        <p:style>
-          <a:lnRef idx="1">
-            <a:schemeClr val="accent1"/>
-          </a:lnRef>
-          <a:fillRef idx="3">
-            <a:schemeClr val="accent1"/>
-          </a:fillRef>
-          <a:effectRef idx="2">
-            <a:schemeClr val="accent1"/>
-          </a:effectRef>
-          <a:fontRef idx="minor">
-            <a:schemeClr val="lt1"/>
-          </a:fontRef>
-        </p:style>
-        <p:txBody>
-          <a:bodyPr rtlCol="0" anchor="ctr"/>
-          <a:lstStyle/>
-          <a:p>
-            <a:pPr algn="ctr"/>
-          </a:p>
-        </p:txBody>
-      </p:sp>
-      <p:sp>
-        <p:nvSpPr>
-          <p:cNvPr id="17" name="TextBox 16"/>
-          <p:cNvSpPr txBox="1"/>
-          <p:nvPr/>
-        </p:nvSpPr>
-        <p:spPr>
-          <a:xfrm>
-            <a:off x="1097280" y="2916936"/>
-            <a:ext cx="10362895" cy="402336"/>
-          </a:xfrm>
-          <a:prstGeom prst="rect">
-            <a:avLst/>
-          </a:prstGeom>
-          <a:noFill/>
-        </p:spPr>
-        <p:txBody>
-          <a:bodyPr wrap="square" anchor="ctr"/>
-          <a:lstStyle/>
-          <a:p>
-            <a:r>
-              <a:rPr sz="1500" b="1" i="0">
-                <a:solidFill>
-                  <a:srgbClr val="333333"/>
-                </a:solidFill>
-                <a:latin typeface="Calibri"/>
-              </a:rPr>
-              <a:t>LA MATRIZ Y LA DECISIÓN</a:t>
-            </a:r>
-            <a:r>
-              <a:rPr sz="1500" b="0" i="0">
-                <a:solidFill>
-                  <a:srgbClr val="333333"/>
-                </a:solidFill>
-                <a:latin typeface="Calibri"/>
-              </a:rPr>
-              <a:t> — Cada alternativa calificada criterio por criterio (escala 1-3) con </a:t>
-            </a:r>
-            <a:r>
-              <a:rPr sz="1500" b="1" i="0">
-                <a:solidFill>
-                  <a:srgbClr val="333333"/>
-                </a:solidFill>
-                <a:latin typeface="Calibri"/>
-              </a:rPr>
-              <a:t>media línea de justificación por casilla</a:t>
-            </a:r>
-            <a:r>
-              <a:rPr sz="1500" b="0" i="0">
-                <a:solidFill>
-                  <a:srgbClr val="333333"/>
-                </a:solidFill>
-                <a:latin typeface="Calibri"/>
-              </a:rPr>
-              <a:t>, el resultado, y la decisión.</a:t>
-            </a:r>
-          </a:p>
-        </p:txBody>
-      </p:sp>
-      <p:sp>
-        <p:nvSpPr>
-          <p:cNvPr id="18" name="Rounded Rectangle 17"/>
-          <p:cNvSpPr/>
-          <p:nvPr/>
-        </p:nvSpPr>
-        <p:spPr>
-          <a:xfrm>
-            <a:off x="457200" y="3502152"/>
-            <a:ext cx="11277295" cy="566928"/>
-          </a:xfrm>
-          <a:prstGeom prst="roundRect">
-            <a:avLst>
-              <a:gd name="adj" fmla="val 12000"/>
-            </a:avLst>
-          </a:prstGeom>
-          <a:solidFill>
-            <a:srgbClr val="F2F2F2"/>
-          </a:solidFill>
-          <a:ln>
-            <a:noFill/>
-          </a:ln>
-        </p:spPr>
-        <p:style>
-          <a:lnRef idx="1">
-            <a:schemeClr val="accent1"/>
-          </a:lnRef>
-          <a:fillRef idx="3">
-            <a:schemeClr val="accent1"/>
-          </a:fillRef>
-          <a:effectRef idx="2">
-            <a:schemeClr val="accent1"/>
-          </a:effectRef>
-          <a:fontRef idx="minor">
-            <a:schemeClr val="lt1"/>
-          </a:fontRef>
-        </p:style>
-        <p:txBody>
-          <a:bodyPr rtlCol="0" anchor="ctr"/>
-          <a:lstStyle/>
-          <a:p>
-            <a:pPr algn="ctr"/>
-          </a:p>
-        </p:txBody>
-      </p:sp>
-      <p:sp>
-        <p:nvSpPr>
-          <p:cNvPr id="19" name="Rectangle 18"/>
-          <p:cNvSpPr/>
-          <p:nvPr/>
-        </p:nvSpPr>
-        <p:spPr>
-          <a:xfrm>
-            <a:off x="640080" y="3648456"/>
-            <a:ext cx="274320" cy="274320"/>
-          </a:xfrm>
-          <a:prstGeom prst="rect">
-            <a:avLst/>
-          </a:prstGeom>
-          <a:solidFill>
-            <a:srgbClr val="FFFFFF"/>
-          </a:solidFill>
-          <a:ln>
-            <a:solidFill>
-              <a:srgbClr val="333333"/>
-            </a:solidFill>
-          </a:ln>
-        </p:spPr>
-        <p:style>
-          <a:lnRef idx="1">
-            <a:schemeClr val="accent1"/>
-          </a:lnRef>
-          <a:fillRef idx="3">
-            <a:schemeClr val="accent1"/>
-          </a:fillRef>
-          <a:effectRef idx="2">
-            <a:schemeClr val="accent1"/>
-          </a:effectRef>
-          <a:fontRef idx="minor">
-            <a:schemeClr val="lt1"/>
-          </a:fontRef>
-        </p:style>
-        <p:txBody>
-          <a:bodyPr rtlCol="0" anchor="ctr"/>
-          <a:lstStyle/>
-          <a:p>
-            <a:pPr algn="ctr"/>
-          </a:p>
-        </p:txBody>
-      </p:sp>
-      <p:sp>
-        <p:nvSpPr>
-          <p:cNvPr id="20" name="Rectangle 19"/>
-          <p:cNvSpPr/>
-          <p:nvPr/>
-        </p:nvSpPr>
-        <p:spPr>
-          <a:xfrm>
-            <a:off x="640080" y="3648456"/>
-            <a:ext cx="73152" cy="274320"/>
-          </a:xfrm>
-          <a:prstGeom prst="rect">
-            <a:avLst/>
-          </a:prstGeom>
-          <a:solidFill>
-            <a:srgbClr val="269CCB"/>
-          </a:solidFill>
-          <a:ln>
-            <a:noFill/>
-          </a:ln>
-        </p:spPr>
-        <p:style>
-          <a:lnRef idx="1">
-            <a:schemeClr val="accent1"/>
-          </a:lnRef>
-          <a:fillRef idx="3">
-            <a:schemeClr val="accent1"/>
-          </a:fillRef>
-          <a:effectRef idx="2">
-            <a:schemeClr val="accent1"/>
-          </a:effectRef>
-          <a:fontRef idx="minor">
-            <a:schemeClr val="lt1"/>
-          </a:fontRef>
-        </p:style>
-        <p:txBody>
-          <a:bodyPr rtlCol="0" anchor="ctr"/>
-          <a:lstStyle/>
-          <a:p>
-            <a:pPr algn="ctr"/>
-          </a:p>
-        </p:txBody>
-      </p:sp>
-      <p:sp>
-        <p:nvSpPr>
-          <p:cNvPr id="21" name="TextBox 20"/>
-          <p:cNvSpPr txBox="1"/>
-          <p:nvPr/>
-        </p:nvSpPr>
-        <p:spPr>
-          <a:xfrm>
-            <a:off x="1097280" y="3593592"/>
-            <a:ext cx="10362895" cy="402336"/>
-          </a:xfrm>
-          <a:prstGeom prst="rect">
-            <a:avLst/>
-          </a:prstGeom>
-          <a:noFill/>
-        </p:spPr>
-        <p:txBody>
-          <a:bodyPr wrap="square" anchor="ctr"/>
-          <a:lstStyle/>
-          <a:p>
-            <a:r>
-              <a:rPr sz="1500" b="1" i="0">
-                <a:solidFill>
-                  <a:srgbClr val="333333"/>
-                </a:solidFill>
-                <a:latin typeface="Calibri"/>
-              </a:rPr>
-              <a:t>QUÉ SE PIERDE</a:t>
-            </a:r>
-            <a:r>
-              <a:rPr sz="1500" b="0" i="0">
-                <a:solidFill>
-                  <a:srgbClr val="333333"/>
-                </a:solidFill>
-                <a:latin typeface="Calibri"/>
-              </a:rPr>
-              <a:t> — Lo que la decisión sacrifica, en dos o tres líneas. Toda decisión sacrifica algo.</a:t>
-            </a:r>
-          </a:p>
-        </p:txBody>
-      </p:sp>
-      <p:sp>
-        <p:nvSpPr>
-          <p:cNvPr id="22" name="Rounded Rectangle 21"/>
-          <p:cNvSpPr/>
-          <p:nvPr/>
-        </p:nvSpPr>
-        <p:spPr>
-          <a:xfrm>
-            <a:off x="457200" y="4178808"/>
-            <a:ext cx="11277295" cy="566928"/>
-          </a:xfrm>
-          <a:prstGeom prst="roundRect">
-            <a:avLst>
-              <a:gd name="adj" fmla="val 12000"/>
-            </a:avLst>
-          </a:prstGeom>
-          <a:solidFill>
-            <a:srgbClr val="F2F2F2"/>
-          </a:solidFill>
-          <a:ln>
-            <a:noFill/>
-          </a:ln>
-        </p:spPr>
-        <p:style>
-          <a:lnRef idx="1">
-            <a:schemeClr val="accent1"/>
-          </a:lnRef>
-          <a:fillRef idx="3">
-            <a:schemeClr val="accent1"/>
-          </a:fillRef>
-          <a:effectRef idx="2">
-            <a:schemeClr val="accent1"/>
-          </a:effectRef>
-          <a:fontRef idx="minor">
-            <a:schemeClr val="lt1"/>
-          </a:fontRef>
-        </p:style>
-        <p:txBody>
-          <a:bodyPr rtlCol="0" anchor="ctr"/>
-          <a:lstStyle/>
-          <a:p>
-            <a:pPr algn="ctr"/>
-          </a:p>
-        </p:txBody>
-      </p:sp>
-      <p:sp>
-        <p:nvSpPr>
-          <p:cNvPr id="23" name="Rectangle 22"/>
-          <p:cNvSpPr/>
-          <p:nvPr/>
-        </p:nvSpPr>
-        <p:spPr>
-          <a:xfrm>
-            <a:off x="640080" y="4325112"/>
-            <a:ext cx="274320" cy="274320"/>
-          </a:xfrm>
-          <a:prstGeom prst="rect">
-            <a:avLst/>
-          </a:prstGeom>
-          <a:solidFill>
-            <a:srgbClr val="FFFFFF"/>
-          </a:solidFill>
-          <a:ln>
-            <a:solidFill>
-              <a:srgbClr val="333333"/>
-            </a:solidFill>
-          </a:ln>
-        </p:spPr>
-        <p:style>
-          <a:lnRef idx="1">
-            <a:schemeClr val="accent1"/>
-          </a:lnRef>
-          <a:fillRef idx="3">
-            <a:schemeClr val="accent1"/>
-          </a:fillRef>
-          <a:effectRef idx="2">
-            <a:schemeClr val="accent1"/>
-          </a:effectRef>
-          <a:fontRef idx="minor">
-            <a:schemeClr val="lt1"/>
-          </a:fontRef>
-        </p:style>
-        <p:txBody>
-          <a:bodyPr rtlCol="0" anchor="ctr"/>
-          <a:lstStyle/>
-          <a:p>
-            <a:pPr algn="ctr"/>
-          </a:p>
-        </p:txBody>
-      </p:sp>
-      <p:sp>
-        <p:nvSpPr>
-          <p:cNvPr id="24" name="Rectangle 23"/>
-          <p:cNvSpPr/>
-          <p:nvPr/>
-        </p:nvSpPr>
-        <p:spPr>
-          <a:xfrm>
-            <a:off x="640080" y="4325112"/>
-            <a:ext cx="73152" cy="274320"/>
-          </a:xfrm>
-          <a:prstGeom prst="rect">
-            <a:avLst/>
-          </a:prstGeom>
-          <a:solidFill>
-            <a:srgbClr val="269CCB"/>
-          </a:solidFill>
-          <a:ln>
-            <a:noFill/>
-          </a:ln>
-        </p:spPr>
-        <p:style>
-          <a:lnRef idx="1">
-            <a:schemeClr val="accent1"/>
-          </a:lnRef>
-          <a:fillRef idx="3">
-            <a:schemeClr val="accent1"/>
-          </a:fillRef>
-          <a:effectRef idx="2">
-            <a:schemeClr val="accent1"/>
-          </a:effectRef>
-          <a:fontRef idx="minor">
-            <a:schemeClr val="lt1"/>
-          </a:fontRef>
-        </p:style>
-        <p:txBody>
-          <a:bodyPr rtlCol="0" anchor="ctr"/>
-          <a:lstStyle/>
-          <a:p>
-            <a:pPr algn="ctr"/>
-          </a:p>
-        </p:txBody>
-      </p:sp>
-      <p:sp>
-        <p:nvSpPr>
-          <p:cNvPr id="25" name="TextBox 24"/>
-          <p:cNvSpPr txBox="1"/>
-          <p:nvPr/>
-        </p:nvSpPr>
-        <p:spPr>
-          <a:xfrm>
-            <a:off x="1097280" y="4270248"/>
-            <a:ext cx="10362895" cy="402336"/>
-          </a:xfrm>
-          <a:prstGeom prst="rect">
-            <a:avLst/>
-          </a:prstGeom>
-          <a:noFill/>
-        </p:spPr>
-        <p:txBody>
-          <a:bodyPr wrap="square" anchor="ctr"/>
-          <a:lstStyle/>
-          <a:p>
-            <a:r>
-              <a:rPr sz="1500" b="1" i="0">
-                <a:solidFill>
-                  <a:srgbClr val="333333"/>
-                </a:solidFill>
-                <a:latin typeface="Calibri"/>
-              </a:rPr>
-              <a:t>ALCANCE MÍNIMO Y PLAN DE VALIDACIÓN</a:t>
-            </a:r>
-            <a:r>
-              <a:rPr sz="1500" b="0" i="0">
-                <a:solidFill>
-                  <a:srgbClr val="333333"/>
-                </a:solidFill>
-                <a:latin typeface="Calibri"/>
-              </a:rPr>
-              <a:t> — Qué se construye este semestre (un requisito funcional completo, cumpliendo los no funcionales), la lista de lo que queda para «versión siguiente», y el plan de validación: </a:t>
-            </a:r>
-            <a:r>
-              <a:rPr sz="1500" b="1" i="0">
-                <a:solidFill>
-                  <a:srgbClr val="333333"/>
-                </a:solidFill>
-                <a:latin typeface="Calibri"/>
-              </a:rPr>
-              <a:t>con quién</a:t>
-            </a:r>
-            <a:r>
-              <a:rPr sz="1500" b="0" i="0">
-                <a:solidFill>
-                  <a:srgbClr val="333333"/>
-                </a:solidFill>
-                <a:latin typeface="Calibri"/>
-              </a:rPr>
-              <a:t> se prueba, </a:t>
-            </a:r>
-            <a:r>
-              <a:rPr sz="1500" b="1" i="0">
-                <a:solidFill>
-                  <a:srgbClr val="333333"/>
-                </a:solidFill>
-                <a:latin typeface="Calibri"/>
-              </a:rPr>
-              <a:t>qué tareas</a:t>
-            </a:r>
-            <a:r>
-              <a:rPr sz="1500" b="0" i="0">
-                <a:solidFill>
-                  <a:srgbClr val="333333"/>
-                </a:solidFill>
-                <a:latin typeface="Calibri"/>
-              </a:rPr>
-              <a:t> se le piden y </a:t>
-            </a:r>
-            <a:r>
-              <a:rPr sz="1500" b="1" i="0">
-                <a:solidFill>
-                  <a:srgbClr val="333333"/>
-                </a:solidFill>
-                <a:latin typeface="Calibri"/>
-              </a:rPr>
-              <a:t>qué se observa</a:t>
-            </a:r>
-            <a:r>
-              <a:rPr sz="1500" b="0" i="0">
-                <a:solidFill>
-                  <a:srgbClr val="333333"/>
-                </a:solidFill>
-                <a:latin typeface="Calibri"/>
-              </a:rPr>
-              <a:t>.</a:t>
-            </a:r>
-          </a:p>
-        </p:txBody>
-      </p:sp>
-      <p:sp>
-        <p:nvSpPr>
-          <p:cNvPr id="26" name="TextBox 25"/>
           <p:cNvSpPr txBox="1"/>
           <p:nvPr/>
         </p:nvSpPr>
@@ -6698,7 +5973,7 @@
         <p:spPr>
           <a:xfrm>
             <a:off x="0" y="0"/>
-            <a:ext cx="12191695" cy="1170432"/>
+            <a:ext cx="12191695" cy="960120"/>
           </a:xfrm>
           <a:prstGeom prst="rect">
             <a:avLst/>
@@ -6740,7 +6015,7 @@
         </p:nvSpPr>
         <p:spPr>
           <a:xfrm>
-            <a:off x="0" y="1170432"/>
+            <a:off x="0" y="960120"/>
             <a:ext cx="12191695" cy="41148"/>
           </a:xfrm>
           <a:prstGeom prst="rect">
@@ -6784,7 +6059,7 @@
         <p:spPr>
           <a:xfrm>
             <a:off x="457200" y="164592"/>
-            <a:ext cx="11277295" cy="384048"/>
+            <a:ext cx="11277295" cy="502920"/>
           </a:xfrm>
           <a:prstGeom prst="rect">
             <a:avLst/>
@@ -6804,55 +6079,21 @@
                 </a:solidFill>
                 <a:latin typeface="Calibri"/>
               </a:rPr>
-              <a:t>Cómo se expone en 3 minutos</a:t>
-            </a:r>
-          </a:p>
-        </p:txBody>
-      </p:sp>
-      <p:sp>
-        <p:nvSpPr>
-          <p:cNvPr id="5" name="TextBox 4"/>
-          <p:cNvSpPr txBox="1"/>
-          <p:nvPr/>
-        </p:nvSpPr>
-        <p:spPr>
-          <a:xfrm>
-            <a:off x="457200" y="566928"/>
-            <a:ext cx="11277295" cy="411480"/>
-          </a:xfrm>
-          <a:prstGeom prst="rect">
-            <a:avLst/>
-          </a:prstGeom>
-          <a:noFill/>
-        </p:spPr>
-        <p:txBody>
-          <a:bodyPr wrap="square">
-            <a:spAutoFit/>
-          </a:bodyPr>
-          <a:lstStyle/>
-          <a:p>
-            <a:r>
-              <a:rPr sz="1400" b="0" i="0">
-                <a:solidFill>
-                  <a:srgbClr val="B8D8EE"/>
-                </a:solidFill>
-                <a:latin typeface="Calibri"/>
-              </a:rPr>
-              <a:t>Habla el vocero con la pantalla ya compartida · cronómetro en pantalla · se corta al llegar a cero</a:t>
-            </a:r>
-          </a:p>
-        </p:txBody>
-      </p:sp>
-      <p:sp>
-        <p:nvSpPr>
-          <p:cNvPr id="6" name="Rounded Rectangle 5"/>
+              <a:t>Guion de la exposicion, con tiempos</a:t>
+            </a:r>
+          </a:p>
+        </p:txBody>
+      </p:sp>
+      <p:sp>
+        <p:nvSpPr>
+          <p:cNvPr id="5" name="Rounded Rectangle 4"/>
           <p:cNvSpPr/>
           <p:nvPr/>
         </p:nvSpPr>
         <p:spPr>
           <a:xfrm>
-            <a:off x="457200" y="1444752"/>
-            <a:ext cx="11277295" cy="908913"/>
+            <a:off x="457200" y="1261872"/>
+            <a:ext cx="11277295" cy="5093208"/>
           </a:xfrm>
           <a:prstGeom prst="roundRect">
             <a:avLst>
@@ -6860,7 +6101,7 @@
             </a:avLst>
           </a:prstGeom>
           <a:solidFill>
-            <a:srgbClr val="F2F2F2"/>
+            <a:srgbClr val="1E2A38"/>
           </a:solidFill>
           <a:ln>
             <a:noFill/>
@@ -6890,19 +6131,17 @@
       </p:sp>
       <p:sp>
         <p:nvSpPr>
-          <p:cNvPr id="7" name="Rounded Rectangle 6"/>
+          <p:cNvPr id="6" name="Rectangle 5"/>
           <p:cNvSpPr/>
           <p:nvPr/>
         </p:nvSpPr>
         <p:spPr>
           <a:xfrm>
-            <a:off x="594360" y="1679752"/>
-            <a:ext cx="438912" cy="438912"/>
-          </a:xfrm>
-          <a:prstGeom prst="roundRect">
-            <a:avLst>
-              <a:gd name="adj" fmla="val 12000"/>
-            </a:avLst>
+            <a:off x="457200" y="1261872"/>
+            <a:ext cx="11277295" cy="320040"/>
+          </a:xfrm>
+          <a:prstGeom prst="rect">
+            <a:avLst/>
           </a:prstGeom>
           <a:solidFill>
             <a:srgbClr val="095292"/>
@@ -6935,14 +6174,46 @@
       </p:sp>
       <p:sp>
         <p:nvSpPr>
+          <p:cNvPr id="7" name="TextBox 6"/>
+          <p:cNvSpPr txBox="1"/>
+          <p:nvPr/>
+        </p:nvSpPr>
+        <p:spPr>
+          <a:xfrm>
+            <a:off x="685800" y="1307592"/>
+            <a:ext cx="10820095" cy="256032"/>
+          </a:xfrm>
+          <a:prstGeom prst="rect">
+            <a:avLst/>
+          </a:prstGeom>
+          <a:noFill/>
+        </p:spPr>
+        <p:txBody>
+          <a:bodyPr wrap="square" anchor="ctr"/>
+          <a:lstStyle/>
+          <a:p>
+            <a:r>
+              <a:rPr sz="1000" b="1" i="0">
+                <a:solidFill>
+                  <a:srgbClr val="269CCB"/>
+                </a:solidFill>
+                <a:latin typeface="Calibri"/>
+              </a:rPr>
+              <a:t>● ● ●</a:t>
+            </a:r>
+          </a:p>
+        </p:txBody>
+      </p:sp>
+      <p:sp>
+        <p:nvSpPr>
           <p:cNvPr id="8" name="TextBox 7"/>
           <p:cNvSpPr txBox="1"/>
           <p:nvPr/>
         </p:nvSpPr>
         <p:spPr>
           <a:xfrm>
-            <a:off x="594360" y="1679752"/>
-            <a:ext cx="438912" cy="438912"/>
+            <a:off x="777240" y="1719072"/>
+            <a:ext cx="10637215" cy="4453128"/>
           </a:xfrm>
           <a:prstGeom prst="rect">
             <a:avLst/>
@@ -6950,18 +6221,168 @@
           <a:noFill/>
         </p:spPr>
         <p:txBody>
-          <a:bodyPr wrap="square" anchor="ctr"/>
-          <a:lstStyle/>
-          <a:p>
-            <a:pPr algn="ctr"/>
-            <a:r>
-              <a:rPr sz="1600" b="1" i="0">
+          <a:bodyPr wrap="square">
+            <a:spAutoFit/>
+          </a:bodyPr>
+          <a:lstStyle/>
+          <a:p>
+            <a:pPr>
+              <a:spcAft>
+                <a:spcPts val="400"/>
+              </a:spcAft>
+            </a:pPr>
+            <a:r>
+              <a:rPr sz="1400" b="0" i="0">
                 <a:solidFill>
                   <a:srgbClr val="FFFFFF"/>
                 </a:solidFill>
                 <a:latin typeface="Calibri"/>
               </a:rPr>
-              <a:t>1</a:t>
+              <a:t># Exposicion de hoy · lo que se califica es el reparto, no el total</a:t>
+            </a:r>
+          </a:p>
+          <a:p>
+            <a:pPr>
+              <a:spcAft>
+                <a:spcPts val="400"/>
+              </a:spcAft>
+            </a:pPr>
+            <a:r>
+              <a:rPr sz="1400" b="0" i="0">
+                <a:solidFill>
+                  <a:srgbClr val="FFFFFF"/>
+                </a:solidFill>
+                <a:latin typeface="Calibri"/>
+              </a:rPr>
+              <a:t/>
+            </a:r>
+          </a:p>
+          <a:p>
+            <a:pPr>
+              <a:spcAft>
+                <a:spcPts val="400"/>
+              </a:spcAft>
+            </a:pPr>
+            <a:r>
+              <a:rPr sz="1400" b="0" i="0">
+                <a:solidFill>
+                  <a:srgbClr val="FFFFFF"/>
+                </a:solidFill>
+                <a:latin typeface="Calibri"/>
+              </a:rPr>
+              <a:t>30 s · Las dos alternativas        Una frase cada una. Sin adjetivos.</a:t>
+            </a:r>
+          </a:p>
+          <a:p>
+            <a:pPr>
+              <a:spcAft>
+                <a:spcPts val="400"/>
+              </a:spcAft>
+            </a:pPr>
+            <a:r>
+              <a:rPr sz="1400" b="0" i="0">
+                <a:solidFill>
+                  <a:srgbClr val="FFFFFF"/>
+                </a:solidFill>
+                <a:latin typeface="Calibri"/>
+              </a:rPr>
+              <a:t>40 s · Los criterios y los pesos   De dónde salieron: qué restricción o requisi</a:t>
+            </a:r>
+          </a:p>
+          <a:p>
+            <a:pPr>
+              <a:spcAft>
+                <a:spcPts val="400"/>
+              </a:spcAft>
+            </a:pPr>
+            <a:r>
+              <a:rPr sz="1400" b="0" i="0">
+                <a:solidFill>
+                  <a:srgbClr val="FFFFFF"/>
+                </a:solidFill>
+                <a:latin typeface="Calibri"/>
+              </a:rPr>
+              <a:t>40 s · La decisión                 Cuál ganó y por qué, con una justificación c</a:t>
+            </a:r>
+          </a:p>
+          <a:p>
+            <a:pPr>
+              <a:spcAft>
+                <a:spcPts val="400"/>
+              </a:spcAft>
+            </a:pPr>
+            <a:r>
+              <a:rPr sz="1400" b="0" i="0">
+                <a:solidFill>
+                  <a:srgbClr val="FFFFFF"/>
+                </a:solidFill>
+                <a:latin typeface="Calibri"/>
+              </a:rPr>
+              <a:t>40 s · Qué se pierde               Lo que sacrificaron. Es el minuto obligatori</a:t>
+            </a:r>
+          </a:p>
+          <a:p>
+            <a:pPr>
+              <a:spcAft>
+                <a:spcPts val="400"/>
+              </a:spcAft>
+            </a:pPr>
+            <a:r>
+              <a:rPr sz="1400" b="0" i="0">
+                <a:solidFill>
+                  <a:srgbClr val="FFFFFF"/>
+                </a:solidFill>
+                <a:latin typeface="Calibri"/>
+              </a:rPr>
+              <a:t>30 s · Alcance y validación        Qué se construye y con quién se va a probar.</a:t>
+            </a:r>
+          </a:p>
+          <a:p>
+            <a:pPr>
+              <a:spcAft>
+                <a:spcPts val="400"/>
+              </a:spcAft>
+            </a:pPr>
+            <a:r>
+              <a:rPr sz="1400" b="0" i="0">
+                <a:solidFill>
+                  <a:srgbClr val="FFFFFF"/>
+                </a:solidFill>
+                <a:latin typeface="Calibri"/>
+              </a:rPr>
+              <a:t/>
+            </a:r>
+          </a:p>
+          <a:p>
+            <a:pPr>
+              <a:spcAft>
+                <a:spcPts val="400"/>
+              </a:spcAft>
+            </a:pPr>
+            <a:r>
+              <a:rPr sz="1400" b="0" i="0">
+                <a:solidFill>
+                  <a:srgbClr val="FFFFFF"/>
+                </a:solidFill>
+                <a:latin typeface="Calibri"/>
+              </a:rPr>
+              <a:t># El tramo marcado como obligatorio es el que el jurado califica:</a:t>
+            </a:r>
+          </a:p>
+          <a:p>
+            <a:pPr>
+              <a:spcAft>
+                <a:spcPts val="400"/>
+              </a:spcAft>
+            </a:pPr>
+            <a:r>
+              <a:rPr sz="1400" b="0" i="0">
+                <a:solidFill>
+                  <a:srgbClr val="FFFFFF"/>
+                </a:solidFill>
+                <a:latin typeface="Calibri"/>
+              </a:rPr>
+              <a:t># si el guion no esta cronometrado, es el que se queda sin tiempo.</a:t>
             </a:r>
           </a:p>
         </p:txBody>
@@ -6969,738 +6390,6 @@
       <p:sp>
         <p:nvSpPr>
           <p:cNvPr id="9" name="TextBox 8"/>
-          <p:cNvSpPr txBox="1"/>
-          <p:nvPr/>
-        </p:nvSpPr>
-        <p:spPr>
-          <a:xfrm>
-            <a:off x="1188720" y="1536192"/>
-            <a:ext cx="10271455" cy="744321"/>
-          </a:xfrm>
-          <a:prstGeom prst="rect">
-            <a:avLst/>
-          </a:prstGeom>
-          <a:noFill/>
-        </p:spPr>
-        <p:txBody>
-          <a:bodyPr wrap="square" anchor="ctr"/>
-          <a:lstStyle/>
-          <a:p>
-            <a:r>
-              <a:rPr sz="1500" b="1" i="0">
-                <a:solidFill>
-                  <a:srgbClr val="095292"/>
-                </a:solidFill>
-                <a:latin typeface="Calibri"/>
-              </a:rPr>
-              <a:t>30 s · Las dos alternativas</a:t>
-            </a:r>
-          </a:p>
-          <a:p>
-            <a:pPr>
-              <a:spcBef>
-                <a:spcPts val="200"/>
-              </a:spcBef>
-            </a:pPr>
-            <a:r>
-              <a:rPr sz="1300" b="0" i="0">
-                <a:solidFill>
-                  <a:srgbClr val="333333"/>
-                </a:solidFill>
-                <a:latin typeface="Calibri"/>
-              </a:rPr>
-              <a:t>Una frase cada una. Sin adjetivos.</a:t>
-            </a:r>
-          </a:p>
-        </p:txBody>
-      </p:sp>
-      <p:sp>
-        <p:nvSpPr>
-          <p:cNvPr id="10" name="Rounded Rectangle 9"/>
-          <p:cNvSpPr/>
-          <p:nvPr/>
-        </p:nvSpPr>
-        <p:spPr>
-          <a:xfrm>
-            <a:off x="457200" y="2445105"/>
-            <a:ext cx="11277295" cy="908913"/>
-          </a:xfrm>
-          <a:prstGeom prst="roundRect">
-            <a:avLst>
-              <a:gd name="adj" fmla="val 12000"/>
-            </a:avLst>
-          </a:prstGeom>
-          <a:solidFill>
-            <a:srgbClr val="E8F4FA"/>
-          </a:solidFill>
-          <a:ln>
-            <a:noFill/>
-          </a:ln>
-        </p:spPr>
-        <p:style>
-          <a:lnRef idx="1">
-            <a:schemeClr val="accent1"/>
-          </a:lnRef>
-          <a:fillRef idx="3">
-            <a:schemeClr val="accent1"/>
-          </a:fillRef>
-          <a:effectRef idx="2">
-            <a:schemeClr val="accent1"/>
-          </a:effectRef>
-          <a:fontRef idx="minor">
-            <a:schemeClr val="lt1"/>
-          </a:fontRef>
-        </p:style>
-        <p:txBody>
-          <a:bodyPr rtlCol="0" anchor="ctr"/>
-          <a:lstStyle/>
-          <a:p>
-            <a:pPr algn="ctr"/>
-          </a:p>
-        </p:txBody>
-      </p:sp>
-      <p:sp>
-        <p:nvSpPr>
-          <p:cNvPr id="11" name="Rounded Rectangle 10"/>
-          <p:cNvSpPr/>
-          <p:nvPr/>
-        </p:nvSpPr>
-        <p:spPr>
-          <a:xfrm>
-            <a:off x="594360" y="2680106"/>
-            <a:ext cx="438912" cy="438912"/>
-          </a:xfrm>
-          <a:prstGeom prst="roundRect">
-            <a:avLst>
-              <a:gd name="adj" fmla="val 12000"/>
-            </a:avLst>
-          </a:prstGeom>
-          <a:solidFill>
-            <a:srgbClr val="095292"/>
-          </a:solidFill>
-          <a:ln>
-            <a:noFill/>
-          </a:ln>
-        </p:spPr>
-        <p:style>
-          <a:lnRef idx="1">
-            <a:schemeClr val="accent1"/>
-          </a:lnRef>
-          <a:fillRef idx="3">
-            <a:schemeClr val="accent1"/>
-          </a:fillRef>
-          <a:effectRef idx="2">
-            <a:schemeClr val="accent1"/>
-          </a:effectRef>
-          <a:fontRef idx="minor">
-            <a:schemeClr val="lt1"/>
-          </a:fontRef>
-        </p:style>
-        <p:txBody>
-          <a:bodyPr rtlCol="0" anchor="ctr"/>
-          <a:lstStyle/>
-          <a:p>
-            <a:pPr algn="ctr"/>
-          </a:p>
-        </p:txBody>
-      </p:sp>
-      <p:sp>
-        <p:nvSpPr>
-          <p:cNvPr id="12" name="TextBox 11"/>
-          <p:cNvSpPr txBox="1"/>
-          <p:nvPr/>
-        </p:nvSpPr>
-        <p:spPr>
-          <a:xfrm>
-            <a:off x="594360" y="2680106"/>
-            <a:ext cx="438912" cy="438912"/>
-          </a:xfrm>
-          <a:prstGeom prst="rect">
-            <a:avLst/>
-          </a:prstGeom>
-          <a:noFill/>
-        </p:spPr>
-        <p:txBody>
-          <a:bodyPr wrap="square" anchor="ctr"/>
-          <a:lstStyle/>
-          <a:p>
-            <a:pPr algn="ctr"/>
-            <a:r>
-              <a:rPr sz="1600" b="1" i="0">
-                <a:solidFill>
-                  <a:srgbClr val="FFFFFF"/>
-                </a:solidFill>
-                <a:latin typeface="Calibri"/>
-              </a:rPr>
-              <a:t>2</a:t>
-            </a:r>
-          </a:p>
-        </p:txBody>
-      </p:sp>
-      <p:sp>
-        <p:nvSpPr>
-          <p:cNvPr id="13" name="TextBox 12"/>
-          <p:cNvSpPr txBox="1"/>
-          <p:nvPr/>
-        </p:nvSpPr>
-        <p:spPr>
-          <a:xfrm>
-            <a:off x="1188720" y="2536545"/>
-            <a:ext cx="10271455" cy="744321"/>
-          </a:xfrm>
-          <a:prstGeom prst="rect">
-            <a:avLst/>
-          </a:prstGeom>
-          <a:noFill/>
-        </p:spPr>
-        <p:txBody>
-          <a:bodyPr wrap="square" anchor="ctr"/>
-          <a:lstStyle/>
-          <a:p>
-            <a:r>
-              <a:rPr sz="1500" b="1" i="0">
-                <a:solidFill>
-                  <a:srgbClr val="095292"/>
-                </a:solidFill>
-                <a:latin typeface="Calibri"/>
-              </a:rPr>
-              <a:t>40 s · Los criterios y los pesos</a:t>
-            </a:r>
-          </a:p>
-          <a:p>
-            <a:pPr>
-              <a:spcBef>
-                <a:spcPts val="200"/>
-              </a:spcBef>
-            </a:pPr>
-            <a:r>
-              <a:rPr sz="1300" b="0" i="0">
-                <a:solidFill>
-                  <a:srgbClr val="333333"/>
-                </a:solidFill>
-                <a:latin typeface="Calibri"/>
-              </a:rPr>
-              <a:t>De dónde salieron: qué restricción o requisito.</a:t>
-            </a:r>
-          </a:p>
-        </p:txBody>
-      </p:sp>
-      <p:sp>
-        <p:nvSpPr>
-          <p:cNvPr id="14" name="Rounded Rectangle 13"/>
-          <p:cNvSpPr/>
-          <p:nvPr/>
-        </p:nvSpPr>
-        <p:spPr>
-          <a:xfrm>
-            <a:off x="457200" y="3445459"/>
-            <a:ext cx="11277295" cy="908913"/>
-          </a:xfrm>
-          <a:prstGeom prst="roundRect">
-            <a:avLst>
-              <a:gd name="adj" fmla="val 12000"/>
-            </a:avLst>
-          </a:prstGeom>
-          <a:solidFill>
-            <a:srgbClr val="F2F2F2"/>
-          </a:solidFill>
-          <a:ln>
-            <a:noFill/>
-          </a:ln>
-        </p:spPr>
-        <p:style>
-          <a:lnRef idx="1">
-            <a:schemeClr val="accent1"/>
-          </a:lnRef>
-          <a:fillRef idx="3">
-            <a:schemeClr val="accent1"/>
-          </a:fillRef>
-          <a:effectRef idx="2">
-            <a:schemeClr val="accent1"/>
-          </a:effectRef>
-          <a:fontRef idx="minor">
-            <a:schemeClr val="lt1"/>
-          </a:fontRef>
-        </p:style>
-        <p:txBody>
-          <a:bodyPr rtlCol="0" anchor="ctr"/>
-          <a:lstStyle/>
-          <a:p>
-            <a:pPr algn="ctr"/>
-          </a:p>
-        </p:txBody>
-      </p:sp>
-      <p:sp>
-        <p:nvSpPr>
-          <p:cNvPr id="15" name="Rounded Rectangle 14"/>
-          <p:cNvSpPr/>
-          <p:nvPr/>
-        </p:nvSpPr>
-        <p:spPr>
-          <a:xfrm>
-            <a:off x="594360" y="3680460"/>
-            <a:ext cx="438912" cy="438912"/>
-          </a:xfrm>
-          <a:prstGeom prst="roundRect">
-            <a:avLst>
-              <a:gd name="adj" fmla="val 12000"/>
-            </a:avLst>
-          </a:prstGeom>
-          <a:solidFill>
-            <a:srgbClr val="095292"/>
-          </a:solidFill>
-          <a:ln>
-            <a:noFill/>
-          </a:ln>
-        </p:spPr>
-        <p:style>
-          <a:lnRef idx="1">
-            <a:schemeClr val="accent1"/>
-          </a:lnRef>
-          <a:fillRef idx="3">
-            <a:schemeClr val="accent1"/>
-          </a:fillRef>
-          <a:effectRef idx="2">
-            <a:schemeClr val="accent1"/>
-          </a:effectRef>
-          <a:fontRef idx="minor">
-            <a:schemeClr val="lt1"/>
-          </a:fontRef>
-        </p:style>
-        <p:txBody>
-          <a:bodyPr rtlCol="0" anchor="ctr"/>
-          <a:lstStyle/>
-          <a:p>
-            <a:pPr algn="ctr"/>
-          </a:p>
-        </p:txBody>
-      </p:sp>
-      <p:sp>
-        <p:nvSpPr>
-          <p:cNvPr id="16" name="TextBox 15"/>
-          <p:cNvSpPr txBox="1"/>
-          <p:nvPr/>
-        </p:nvSpPr>
-        <p:spPr>
-          <a:xfrm>
-            <a:off x="594360" y="3680460"/>
-            <a:ext cx="438912" cy="438912"/>
-          </a:xfrm>
-          <a:prstGeom prst="rect">
-            <a:avLst/>
-          </a:prstGeom>
-          <a:noFill/>
-        </p:spPr>
-        <p:txBody>
-          <a:bodyPr wrap="square" anchor="ctr"/>
-          <a:lstStyle/>
-          <a:p>
-            <a:pPr algn="ctr"/>
-            <a:r>
-              <a:rPr sz="1600" b="1" i="0">
-                <a:solidFill>
-                  <a:srgbClr val="FFFFFF"/>
-                </a:solidFill>
-                <a:latin typeface="Calibri"/>
-              </a:rPr>
-              <a:t>3</a:t>
-            </a:r>
-          </a:p>
-        </p:txBody>
-      </p:sp>
-      <p:sp>
-        <p:nvSpPr>
-          <p:cNvPr id="17" name="TextBox 16"/>
-          <p:cNvSpPr txBox="1"/>
-          <p:nvPr/>
-        </p:nvSpPr>
-        <p:spPr>
-          <a:xfrm>
-            <a:off x="1188720" y="3536899"/>
-            <a:ext cx="10271455" cy="744321"/>
-          </a:xfrm>
-          <a:prstGeom prst="rect">
-            <a:avLst/>
-          </a:prstGeom>
-          <a:noFill/>
-        </p:spPr>
-        <p:txBody>
-          <a:bodyPr wrap="square" anchor="ctr"/>
-          <a:lstStyle/>
-          <a:p>
-            <a:r>
-              <a:rPr sz="1500" b="1" i="0">
-                <a:solidFill>
-                  <a:srgbClr val="095292"/>
-                </a:solidFill>
-                <a:latin typeface="Calibri"/>
-              </a:rPr>
-              <a:t>40 s · La decisión</a:t>
-            </a:r>
-          </a:p>
-          <a:p>
-            <a:pPr>
-              <a:spcBef>
-                <a:spcPts val="200"/>
-              </a:spcBef>
-            </a:pPr>
-            <a:r>
-              <a:rPr sz="1300" b="0" i="0">
-                <a:solidFill>
-                  <a:srgbClr val="333333"/>
-                </a:solidFill>
-                <a:latin typeface="Calibri"/>
-              </a:rPr>
-              <a:t>Cuál ganó y por qué, con una justificación concreta.</a:t>
-            </a:r>
-          </a:p>
-        </p:txBody>
-      </p:sp>
-      <p:sp>
-        <p:nvSpPr>
-          <p:cNvPr id="18" name="Rounded Rectangle 17"/>
-          <p:cNvSpPr/>
-          <p:nvPr/>
-        </p:nvSpPr>
-        <p:spPr>
-          <a:xfrm>
-            <a:off x="457200" y="4445812"/>
-            <a:ext cx="11277295" cy="908913"/>
-          </a:xfrm>
-          <a:prstGeom prst="roundRect">
-            <a:avLst>
-              <a:gd name="adj" fmla="val 12000"/>
-            </a:avLst>
-          </a:prstGeom>
-          <a:solidFill>
-            <a:srgbClr val="E8F4FA"/>
-          </a:solidFill>
-          <a:ln>
-            <a:noFill/>
-          </a:ln>
-        </p:spPr>
-        <p:style>
-          <a:lnRef idx="1">
-            <a:schemeClr val="accent1"/>
-          </a:lnRef>
-          <a:fillRef idx="3">
-            <a:schemeClr val="accent1"/>
-          </a:fillRef>
-          <a:effectRef idx="2">
-            <a:schemeClr val="accent1"/>
-          </a:effectRef>
-          <a:fontRef idx="minor">
-            <a:schemeClr val="lt1"/>
-          </a:fontRef>
-        </p:style>
-        <p:txBody>
-          <a:bodyPr rtlCol="0" anchor="ctr"/>
-          <a:lstStyle/>
-          <a:p>
-            <a:pPr algn="ctr"/>
-          </a:p>
-        </p:txBody>
-      </p:sp>
-      <p:sp>
-        <p:nvSpPr>
-          <p:cNvPr id="19" name="Rounded Rectangle 18"/>
-          <p:cNvSpPr/>
-          <p:nvPr/>
-        </p:nvSpPr>
-        <p:spPr>
-          <a:xfrm>
-            <a:off x="594360" y="4680813"/>
-            <a:ext cx="438912" cy="438912"/>
-          </a:xfrm>
-          <a:prstGeom prst="roundRect">
-            <a:avLst>
-              <a:gd name="adj" fmla="val 12000"/>
-            </a:avLst>
-          </a:prstGeom>
-          <a:solidFill>
-            <a:srgbClr val="095292"/>
-          </a:solidFill>
-          <a:ln>
-            <a:noFill/>
-          </a:ln>
-        </p:spPr>
-        <p:style>
-          <a:lnRef idx="1">
-            <a:schemeClr val="accent1"/>
-          </a:lnRef>
-          <a:fillRef idx="3">
-            <a:schemeClr val="accent1"/>
-          </a:fillRef>
-          <a:effectRef idx="2">
-            <a:schemeClr val="accent1"/>
-          </a:effectRef>
-          <a:fontRef idx="minor">
-            <a:schemeClr val="lt1"/>
-          </a:fontRef>
-        </p:style>
-        <p:txBody>
-          <a:bodyPr rtlCol="0" anchor="ctr"/>
-          <a:lstStyle/>
-          <a:p>
-            <a:pPr algn="ctr"/>
-          </a:p>
-        </p:txBody>
-      </p:sp>
-      <p:sp>
-        <p:nvSpPr>
-          <p:cNvPr id="20" name="TextBox 19"/>
-          <p:cNvSpPr txBox="1"/>
-          <p:nvPr/>
-        </p:nvSpPr>
-        <p:spPr>
-          <a:xfrm>
-            <a:off x="594360" y="4680813"/>
-            <a:ext cx="438912" cy="438912"/>
-          </a:xfrm>
-          <a:prstGeom prst="rect">
-            <a:avLst/>
-          </a:prstGeom>
-          <a:noFill/>
-        </p:spPr>
-        <p:txBody>
-          <a:bodyPr wrap="square" anchor="ctr"/>
-          <a:lstStyle/>
-          <a:p>
-            <a:pPr algn="ctr"/>
-            <a:r>
-              <a:rPr sz="1600" b="1" i="0">
-                <a:solidFill>
-                  <a:srgbClr val="FFFFFF"/>
-                </a:solidFill>
-                <a:latin typeface="Calibri"/>
-              </a:rPr>
-              <a:t>4</a:t>
-            </a:r>
-          </a:p>
-        </p:txBody>
-      </p:sp>
-      <p:sp>
-        <p:nvSpPr>
-          <p:cNvPr id="21" name="TextBox 20"/>
-          <p:cNvSpPr txBox="1"/>
-          <p:nvPr/>
-        </p:nvSpPr>
-        <p:spPr>
-          <a:xfrm>
-            <a:off x="1188720" y="4537252"/>
-            <a:ext cx="10271455" cy="744321"/>
-          </a:xfrm>
-          <a:prstGeom prst="rect">
-            <a:avLst/>
-          </a:prstGeom>
-          <a:noFill/>
-        </p:spPr>
-        <p:txBody>
-          <a:bodyPr wrap="square" anchor="ctr"/>
-          <a:lstStyle/>
-          <a:p>
-            <a:r>
-              <a:rPr sz="1500" b="1" i="0">
-                <a:solidFill>
-                  <a:srgbClr val="095292"/>
-                </a:solidFill>
-                <a:latin typeface="Calibri"/>
-              </a:rPr>
-              <a:t>40 s · Qué se pierde</a:t>
-            </a:r>
-          </a:p>
-          <a:p>
-            <a:pPr>
-              <a:spcBef>
-                <a:spcPts val="200"/>
-              </a:spcBef>
-            </a:pPr>
-            <a:r>
-              <a:rPr sz="1300" b="0" i="0">
-                <a:solidFill>
-                  <a:srgbClr val="333333"/>
-                </a:solidFill>
-                <a:latin typeface="Calibri"/>
-              </a:rPr>
-              <a:t>Lo que sacrificaron. Es el minuto obligatorio.</a:t>
-            </a:r>
-          </a:p>
-        </p:txBody>
-      </p:sp>
-      <p:sp>
-        <p:nvSpPr>
-          <p:cNvPr id="22" name="Rounded Rectangle 21"/>
-          <p:cNvSpPr/>
-          <p:nvPr/>
-        </p:nvSpPr>
-        <p:spPr>
-          <a:xfrm>
-            <a:off x="457200" y="5446166"/>
-            <a:ext cx="11277295" cy="908913"/>
-          </a:xfrm>
-          <a:prstGeom prst="roundRect">
-            <a:avLst>
-              <a:gd name="adj" fmla="val 12000"/>
-            </a:avLst>
-          </a:prstGeom>
-          <a:solidFill>
-            <a:srgbClr val="F2F2F2"/>
-          </a:solidFill>
-          <a:ln>
-            <a:noFill/>
-          </a:ln>
-        </p:spPr>
-        <p:style>
-          <a:lnRef idx="1">
-            <a:schemeClr val="accent1"/>
-          </a:lnRef>
-          <a:fillRef idx="3">
-            <a:schemeClr val="accent1"/>
-          </a:fillRef>
-          <a:effectRef idx="2">
-            <a:schemeClr val="accent1"/>
-          </a:effectRef>
-          <a:fontRef idx="minor">
-            <a:schemeClr val="lt1"/>
-          </a:fontRef>
-        </p:style>
-        <p:txBody>
-          <a:bodyPr rtlCol="0" anchor="ctr"/>
-          <a:lstStyle/>
-          <a:p>
-            <a:pPr algn="ctr"/>
-          </a:p>
-        </p:txBody>
-      </p:sp>
-      <p:sp>
-        <p:nvSpPr>
-          <p:cNvPr id="23" name="Rounded Rectangle 22"/>
-          <p:cNvSpPr/>
-          <p:nvPr/>
-        </p:nvSpPr>
-        <p:spPr>
-          <a:xfrm>
-            <a:off x="594360" y="5681167"/>
-            <a:ext cx="438912" cy="438912"/>
-          </a:xfrm>
-          <a:prstGeom prst="roundRect">
-            <a:avLst>
-              <a:gd name="adj" fmla="val 12000"/>
-            </a:avLst>
-          </a:prstGeom>
-          <a:solidFill>
-            <a:srgbClr val="095292"/>
-          </a:solidFill>
-          <a:ln>
-            <a:noFill/>
-          </a:ln>
-        </p:spPr>
-        <p:style>
-          <a:lnRef idx="1">
-            <a:schemeClr val="accent1"/>
-          </a:lnRef>
-          <a:fillRef idx="3">
-            <a:schemeClr val="accent1"/>
-          </a:fillRef>
-          <a:effectRef idx="2">
-            <a:schemeClr val="accent1"/>
-          </a:effectRef>
-          <a:fontRef idx="minor">
-            <a:schemeClr val="lt1"/>
-          </a:fontRef>
-        </p:style>
-        <p:txBody>
-          <a:bodyPr rtlCol="0" anchor="ctr"/>
-          <a:lstStyle/>
-          <a:p>
-            <a:pPr algn="ctr"/>
-          </a:p>
-        </p:txBody>
-      </p:sp>
-      <p:sp>
-        <p:nvSpPr>
-          <p:cNvPr id="24" name="TextBox 23"/>
-          <p:cNvSpPr txBox="1"/>
-          <p:nvPr/>
-        </p:nvSpPr>
-        <p:spPr>
-          <a:xfrm>
-            <a:off x="594360" y="5681167"/>
-            <a:ext cx="438912" cy="438912"/>
-          </a:xfrm>
-          <a:prstGeom prst="rect">
-            <a:avLst/>
-          </a:prstGeom>
-          <a:noFill/>
-        </p:spPr>
-        <p:txBody>
-          <a:bodyPr wrap="square" anchor="ctr"/>
-          <a:lstStyle/>
-          <a:p>
-            <a:pPr algn="ctr"/>
-            <a:r>
-              <a:rPr sz="1600" b="1" i="0">
-                <a:solidFill>
-                  <a:srgbClr val="FFFFFF"/>
-                </a:solidFill>
-                <a:latin typeface="Calibri"/>
-              </a:rPr>
-              <a:t>5</a:t>
-            </a:r>
-          </a:p>
-        </p:txBody>
-      </p:sp>
-      <p:sp>
-        <p:nvSpPr>
-          <p:cNvPr id="25" name="TextBox 24"/>
-          <p:cNvSpPr txBox="1"/>
-          <p:nvPr/>
-        </p:nvSpPr>
-        <p:spPr>
-          <a:xfrm>
-            <a:off x="1188720" y="5537606"/>
-            <a:ext cx="10271455" cy="744321"/>
-          </a:xfrm>
-          <a:prstGeom prst="rect">
-            <a:avLst/>
-          </a:prstGeom>
-          <a:noFill/>
-        </p:spPr>
-        <p:txBody>
-          <a:bodyPr wrap="square" anchor="ctr"/>
-          <a:lstStyle/>
-          <a:p>
-            <a:r>
-              <a:rPr sz="1500" b="1" i="0">
-                <a:solidFill>
-                  <a:srgbClr val="095292"/>
-                </a:solidFill>
-                <a:latin typeface="Calibri"/>
-              </a:rPr>
-              <a:t>30 s · Alcance y validación</a:t>
-            </a:r>
-          </a:p>
-          <a:p>
-            <a:pPr>
-              <a:spcBef>
-                <a:spcPts val="200"/>
-              </a:spcBef>
-            </a:pPr>
-            <a:r>
-              <a:rPr sz="1300" b="0" i="0">
-                <a:solidFill>
-                  <a:srgbClr val="333333"/>
-                </a:solidFill>
-                <a:latin typeface="Calibri"/>
-              </a:rPr>
-              <a:t>Qué se construye y con quién se va a probar.</a:t>
-            </a:r>
-          </a:p>
-        </p:txBody>
-      </p:sp>
-      <p:sp>
-        <p:nvSpPr>
-          <p:cNvPr id="26" name="TextBox 25"/>
           <p:cNvSpPr txBox="1"/>
           <p:nvPr/>
         </p:nvSpPr>
@@ -7768,7 +6457,7 @@
         <p:spPr>
           <a:xfrm>
             <a:off x="0" y="0"/>
-            <a:ext cx="12191695" cy="960120"/>
+            <a:ext cx="12191695" cy="1170432"/>
           </a:xfrm>
           <a:prstGeom prst="rect">
             <a:avLst/>
@@ -7810,7 +6499,7 @@
         </p:nvSpPr>
         <p:spPr>
           <a:xfrm>
-            <a:off x="0" y="960120"/>
+            <a:off x="0" y="1170432"/>
             <a:ext cx="12191695" cy="41148"/>
           </a:xfrm>
           <a:prstGeom prst="rect">
@@ -7854,7 +6543,7 @@
         <p:spPr>
           <a:xfrm>
             <a:off x="457200" y="164592"/>
-            <a:ext cx="11277295" cy="502920"/>
+            <a:ext cx="11277295" cy="384048"/>
           </a:xfrm>
           <a:prstGeom prst="rect">
             <a:avLst/>
@@ -7874,7 +6563,7 @@
                 </a:solidFill>
                 <a:latin typeface="Calibri"/>
               </a:rPr>
-              <a:t>Para la Clase 9</a:t>
+              <a:t>Taller de hoy: Decisión de la solución y alcance mínimo</a:t>
             </a:r>
           </a:p>
         </p:txBody>
@@ -7887,8 +6576,8 @@
         </p:nvSpPr>
         <p:spPr>
           <a:xfrm>
-            <a:off x="457200" y="1170432"/>
-            <a:ext cx="11277295" cy="5230368"/>
+            <a:off x="457200" y="566928"/>
+            <a:ext cx="11277295" cy="411480"/>
           </a:xfrm>
           <a:prstGeom prst="rect">
             <a:avLst/>
@@ -7901,216 +6590,1017 @@
           </a:bodyPr>
           <a:lstStyle/>
           <a:p>
-            <a:pPr>
-              <a:spcAft>
-                <a:spcPts val="800"/>
-              </a:spcAft>
-            </a:pPr>
-            <a:r>
-              <a:rPr sz="2000" b="0" i="0">
-                <a:solidFill>
-                  <a:srgbClr val="333333"/>
-                </a:solidFill>
-                <a:latin typeface="Calibri"/>
-              </a:rPr>
-              <a:t>–   </a:t>
-            </a:r>
-            <a:r>
-              <a:rPr sz="2000" b="1" i="0">
-                <a:solidFill>
-                  <a:srgbClr val="333333"/>
-                </a:solidFill>
-                <a:latin typeface="Calibri"/>
-              </a:rPr>
-              <a:t>Trabajo dirigido:</a:t>
-            </a:r>
-            <a:r>
-              <a:rPr sz="2000" b="0" i="0">
-                <a:solidFill>
-                  <a:srgbClr val="333333"/>
-                </a:solidFill>
-                <a:latin typeface="Calibri"/>
-              </a:rPr>
-              <a:t> Discusión de ejemplos reales — buscar </a:t>
-            </a:r>
-            <a:r>
-              <a:rPr sz="2000" b="1" i="0">
-                <a:solidFill>
-                  <a:srgbClr val="333333"/>
-                </a:solidFill>
-                <a:latin typeface="Calibri"/>
-              </a:rPr>
-              <a:t>un caso propio</a:t>
-            </a:r>
-            <a:r>
-              <a:rPr sz="2000" b="0" i="0">
-                <a:solidFill>
-                  <a:srgbClr val="333333"/>
-                </a:solidFill>
-                <a:latin typeface="Calibri"/>
-              </a:rPr>
-              <a:t> de proyecto que falló por saltarse una fase, con fuente verificable, y decir qué fase fue.</a:t>
-            </a:r>
-          </a:p>
-          <a:p>
-            <a:pPr>
-              <a:spcAft>
-                <a:spcPts val="800"/>
-              </a:spcAft>
-            </a:pPr>
-            <a:r>
-              <a:rPr sz="2000" b="0" i="0">
-                <a:solidFill>
-                  <a:srgbClr val="333333"/>
-                </a:solidFill>
-                <a:latin typeface="Calibri"/>
-              </a:rPr>
-              <a:t>–   </a:t>
-            </a:r>
-            <a:r>
-              <a:rPr sz="2000" b="1" i="0">
-                <a:solidFill>
-                  <a:srgbClr val="333333"/>
-                </a:solidFill>
-                <a:latin typeface="Calibri"/>
-              </a:rPr>
-              <a:t>Trabajo independiente:</a:t>
-            </a:r>
-            <a:r>
-              <a:rPr sz="2000" b="0" i="0">
-                <a:solidFill>
-                  <a:srgbClr val="333333"/>
-                </a:solidFill>
-                <a:latin typeface="Calibri"/>
-              </a:rPr>
-              <a:t> Ajuste de propuestas de solución: dejar en el documento del equipo la alternativa elegida con su alcance mínimo y el flujo dibujado, ya corregido con lo que salió en las exposiciones.</a:t>
-            </a:r>
-          </a:p>
-          <a:p>
-            <a:pPr>
-              <a:spcAft>
-                <a:spcPts val="800"/>
-              </a:spcAft>
-            </a:pPr>
-            <a:r>
-              <a:rPr sz="2000" b="0" i="0">
-                <a:solidFill>
-                  <a:srgbClr val="333333"/>
-                </a:solidFill>
-                <a:latin typeface="Calibri"/>
-              </a:rPr>
-              <a:t>–   </a:t>
-            </a:r>
-            <a:r>
-              <a:rPr sz="2000" b="1" i="0">
-                <a:solidFill>
-                  <a:srgbClr val="333333"/>
-                </a:solidFill>
-                <a:latin typeface="Calibri"/>
-              </a:rPr>
-              <a:t>Clase 9 · Estrategias de innovación en Ingeniería</a:t>
-            </a:r>
-            <a:r>
-              <a:rPr sz="2000" b="0" i="0">
-                <a:solidFill>
-                  <a:srgbClr val="333333"/>
-                </a:solidFill>
-                <a:latin typeface="Calibri"/>
-              </a:rPr>
-              <a:t> — los </a:t>
-            </a:r>
-            <a:r>
-              <a:rPr sz="2000" b="1" i="0">
-                <a:solidFill>
-                  <a:srgbClr val="333333"/>
-                </a:solidFill>
-                <a:latin typeface="Calibri"/>
-              </a:rPr>
-              <a:t>antecedentes</a:t>
-            </a:r>
-            <a:r>
-              <a:rPr sz="2000" b="0" i="0">
-                <a:solidFill>
-                  <a:srgbClr val="333333"/>
-                </a:solidFill>
-                <a:latin typeface="Calibri"/>
-              </a:rPr>
-              <a:t>: qué ya existe, quién lo intentó y cómo se busca eso con fuentes que se puedan verificar. Una respuesta de asistente de IA no es una fuente.</a:t>
-            </a:r>
-          </a:p>
-          <a:p>
-            <a:pPr>
-              <a:spcAft>
-                <a:spcPts val="800"/>
-              </a:spcAft>
-            </a:pPr>
-            <a:r>
-              <a:rPr sz="2000" b="0" i="0">
-                <a:solidFill>
-                  <a:srgbClr val="333333"/>
-                </a:solidFill>
-                <a:latin typeface="Calibri"/>
-              </a:rPr>
-              <a:t>–   </a:t>
-            </a:r>
-            <a:r>
-              <a:rPr sz="2000" b="1" i="0">
-                <a:solidFill>
-                  <a:srgbClr val="333333"/>
-                </a:solidFill>
-                <a:latin typeface="Calibri"/>
-              </a:rPr>
-              <a:t>Aviso:</a:t>
-            </a:r>
-            <a:r>
-              <a:rPr sz="2000" b="0" i="0">
-                <a:solidFill>
-                  <a:srgbClr val="333333"/>
-                </a:solidFill>
-                <a:latin typeface="Calibri"/>
-              </a:rPr>
-              <a:t> Para la sesión 9 traigan la alternativa elegida escrita y el flujo dibujado. Se va a buscar qué soluciones parecidas ya existen, y sin la propia decisión clara no hay con qué comparar.</a:t>
-            </a:r>
-          </a:p>
-          <a:p>
-            <a:pPr>
-              <a:spcAft>
-                <a:spcPts val="800"/>
-              </a:spcAft>
-            </a:pPr>
-            <a:r>
-              <a:rPr sz="2000" b="0" i="0">
-                <a:solidFill>
-                  <a:srgbClr val="333333"/>
-                </a:solidFill>
-                <a:latin typeface="Calibri"/>
-              </a:rPr>
-              <a:t>–   </a:t>
-            </a:r>
-            <a:r>
-              <a:rPr sz="2000" b="1" i="0">
-                <a:solidFill>
-                  <a:srgbClr val="333333"/>
-                </a:solidFill>
-                <a:latin typeface="Calibri"/>
-              </a:rPr>
-              <a:t>Antes de salir:</a:t>
-            </a:r>
-            <a:r>
-              <a:rPr sz="2000" b="0" i="0">
-                <a:solidFill>
-                  <a:srgbClr val="333333"/>
-                </a:solidFill>
-                <a:latin typeface="Calibri"/>
-              </a:rPr>
-              <a:t> el enlace del documento del equipo en el chat, con permiso de lectura para el docente, y el nombre del vocero de hoy.</a:t>
-            </a:r>
-          </a:p>
-        </p:txBody>
-      </p:sp>
-      <p:sp>
-        <p:nvSpPr>
-          <p:cNvPr id="6" name="TextBox 5"/>
+            <a:r>
+              <a:rPr sz="1400" b="0" i="0">
+                <a:solidFill>
+                  <a:srgbClr val="B8D8EE"/>
+                </a:solidFill>
+                <a:latin typeface="Calibri"/>
+              </a:rPr>
+              <a:t>40 min en equipos · 40 min con ritmo interno: alternativas, matriz, alcance, validación · matriz de decisión + alcance mínimo + plan de validación</a:t>
+            </a:r>
+          </a:p>
+        </p:txBody>
+      </p:sp>
+      <p:sp>
+        <p:nvSpPr>
+          <p:cNvPr id="6" name="Rounded Rectangle 5"/>
+          <p:cNvSpPr/>
+          <p:nvPr/>
+        </p:nvSpPr>
+        <p:spPr>
+          <a:xfrm>
+            <a:off x="457200" y="1472184"/>
+            <a:ext cx="11277295" cy="566928"/>
+          </a:xfrm>
+          <a:prstGeom prst="roundRect">
+            <a:avLst>
+              <a:gd name="adj" fmla="val 12000"/>
+            </a:avLst>
+          </a:prstGeom>
+          <a:solidFill>
+            <a:srgbClr val="F2F2F2"/>
+          </a:solidFill>
+          <a:ln>
+            <a:noFill/>
+          </a:ln>
+        </p:spPr>
+        <p:style>
+          <a:lnRef idx="1">
+            <a:schemeClr val="accent1"/>
+          </a:lnRef>
+          <a:fillRef idx="3">
+            <a:schemeClr val="accent1"/>
+          </a:fillRef>
+          <a:effectRef idx="2">
+            <a:schemeClr val="accent1"/>
+          </a:effectRef>
+          <a:fontRef idx="minor">
+            <a:schemeClr val="lt1"/>
+          </a:fontRef>
+        </p:style>
+        <p:txBody>
+          <a:bodyPr rtlCol="0" anchor="ctr"/>
+          <a:lstStyle/>
+          <a:p>
+            <a:pPr algn="ctr"/>
+          </a:p>
+        </p:txBody>
+      </p:sp>
+      <p:sp>
+        <p:nvSpPr>
+          <p:cNvPr id="7" name="Rectangle 6"/>
+          <p:cNvSpPr/>
+          <p:nvPr/>
+        </p:nvSpPr>
+        <p:spPr>
+          <a:xfrm>
+            <a:off x="640080" y="1618487"/>
+            <a:ext cx="274320" cy="274320"/>
+          </a:xfrm>
+          <a:prstGeom prst="rect">
+            <a:avLst/>
+          </a:prstGeom>
+          <a:solidFill>
+            <a:srgbClr val="FFFFFF"/>
+          </a:solidFill>
+          <a:ln>
+            <a:solidFill>
+              <a:srgbClr val="333333"/>
+            </a:solidFill>
+          </a:ln>
+        </p:spPr>
+        <p:style>
+          <a:lnRef idx="1">
+            <a:schemeClr val="accent1"/>
+          </a:lnRef>
+          <a:fillRef idx="3">
+            <a:schemeClr val="accent1"/>
+          </a:fillRef>
+          <a:effectRef idx="2">
+            <a:schemeClr val="accent1"/>
+          </a:effectRef>
+          <a:fontRef idx="minor">
+            <a:schemeClr val="lt1"/>
+          </a:fontRef>
+        </p:style>
+        <p:txBody>
+          <a:bodyPr rtlCol="0" anchor="ctr"/>
+          <a:lstStyle/>
+          <a:p>
+            <a:pPr algn="ctr"/>
+          </a:p>
+        </p:txBody>
+      </p:sp>
+      <p:sp>
+        <p:nvSpPr>
+          <p:cNvPr id="8" name="Rectangle 7"/>
+          <p:cNvSpPr/>
+          <p:nvPr/>
+        </p:nvSpPr>
+        <p:spPr>
+          <a:xfrm>
+            <a:off x="640080" y="1618487"/>
+            <a:ext cx="73152" cy="274320"/>
+          </a:xfrm>
+          <a:prstGeom prst="rect">
+            <a:avLst/>
+          </a:prstGeom>
+          <a:solidFill>
+            <a:srgbClr val="269CCB"/>
+          </a:solidFill>
+          <a:ln>
+            <a:noFill/>
+          </a:ln>
+        </p:spPr>
+        <p:style>
+          <a:lnRef idx="1">
+            <a:schemeClr val="accent1"/>
+          </a:lnRef>
+          <a:fillRef idx="3">
+            <a:schemeClr val="accent1"/>
+          </a:fillRef>
+          <a:effectRef idx="2">
+            <a:schemeClr val="accent1"/>
+          </a:effectRef>
+          <a:fontRef idx="minor">
+            <a:schemeClr val="lt1"/>
+          </a:fontRef>
+        </p:style>
+        <p:txBody>
+          <a:bodyPr rtlCol="0" anchor="ctr"/>
+          <a:lstStyle/>
+          <a:p>
+            <a:pPr algn="ctr"/>
+          </a:p>
+        </p:txBody>
+      </p:sp>
+      <p:sp>
+        <p:nvSpPr>
+          <p:cNvPr id="9" name="TextBox 8"/>
+          <p:cNvSpPr txBox="1"/>
+          <p:nvPr/>
+        </p:nvSpPr>
+        <p:spPr>
+          <a:xfrm>
+            <a:off x="1097280" y="1563624"/>
+            <a:ext cx="10362895" cy="402336"/>
+          </a:xfrm>
+          <a:prstGeom prst="rect">
+            <a:avLst/>
+          </a:prstGeom>
+          <a:noFill/>
+        </p:spPr>
+        <p:txBody>
+          <a:bodyPr wrap="square" anchor="ctr"/>
+          <a:lstStyle/>
+          <a:p>
+            <a:r>
+              <a:rPr sz="1500" b="1" i="0">
+                <a:solidFill>
+                  <a:srgbClr val="333333"/>
+                </a:solidFill>
+                <a:latin typeface="Calibri"/>
+              </a:rPr>
+              <a:t>LAS DOS ALTERNATIVAS</a:t>
+            </a:r>
+            <a:r>
+              <a:rPr sz="1500" b="0" i="0">
+                <a:solidFill>
+                  <a:srgbClr val="333333"/>
+                </a:solidFill>
+                <a:latin typeface="Calibri"/>
+              </a:rPr>
+              <a:t> — Cada alternativa en </a:t>
+            </a:r>
+            <a:r>
+              <a:rPr sz="1500" b="1" i="0">
+                <a:solidFill>
+                  <a:srgbClr val="333333"/>
+                </a:solidFill>
+                <a:latin typeface="Calibri"/>
+              </a:rPr>
+              <a:t>una frase</a:t>
+            </a:r>
+            <a:r>
+              <a:rPr sz="1500" b="0" i="0">
+                <a:solidFill>
+                  <a:srgbClr val="333333"/>
+                </a:solidFill>
+                <a:latin typeface="Calibri"/>
+              </a:rPr>
+              <a:t>, sin adjetivos, diciendo qué hace y cómo resuelve la causa elegida en el árbol de la sesión 6.</a:t>
+            </a:r>
+          </a:p>
+        </p:txBody>
+      </p:sp>
+      <p:sp>
+        <p:nvSpPr>
+          <p:cNvPr id="10" name="Rounded Rectangle 9"/>
+          <p:cNvSpPr/>
+          <p:nvPr/>
+        </p:nvSpPr>
+        <p:spPr>
+          <a:xfrm>
+            <a:off x="457200" y="2148839"/>
+            <a:ext cx="11277295" cy="566928"/>
+          </a:xfrm>
+          <a:prstGeom prst="roundRect">
+            <a:avLst>
+              <a:gd name="adj" fmla="val 12000"/>
+            </a:avLst>
+          </a:prstGeom>
+          <a:solidFill>
+            <a:srgbClr val="F2F2F2"/>
+          </a:solidFill>
+          <a:ln>
+            <a:noFill/>
+          </a:ln>
+        </p:spPr>
+        <p:style>
+          <a:lnRef idx="1">
+            <a:schemeClr val="accent1"/>
+          </a:lnRef>
+          <a:fillRef idx="3">
+            <a:schemeClr val="accent1"/>
+          </a:fillRef>
+          <a:effectRef idx="2">
+            <a:schemeClr val="accent1"/>
+          </a:effectRef>
+          <a:fontRef idx="minor">
+            <a:schemeClr val="lt1"/>
+          </a:fontRef>
+        </p:style>
+        <p:txBody>
+          <a:bodyPr rtlCol="0" anchor="ctr"/>
+          <a:lstStyle/>
+          <a:p>
+            <a:pPr algn="ctr"/>
+          </a:p>
+        </p:txBody>
+      </p:sp>
+      <p:sp>
+        <p:nvSpPr>
+          <p:cNvPr id="11" name="Rectangle 10"/>
+          <p:cNvSpPr/>
+          <p:nvPr/>
+        </p:nvSpPr>
+        <p:spPr>
+          <a:xfrm>
+            <a:off x="640080" y="2295144"/>
+            <a:ext cx="274320" cy="274320"/>
+          </a:xfrm>
+          <a:prstGeom prst="rect">
+            <a:avLst/>
+          </a:prstGeom>
+          <a:solidFill>
+            <a:srgbClr val="FFFFFF"/>
+          </a:solidFill>
+          <a:ln>
+            <a:solidFill>
+              <a:srgbClr val="333333"/>
+            </a:solidFill>
+          </a:ln>
+        </p:spPr>
+        <p:style>
+          <a:lnRef idx="1">
+            <a:schemeClr val="accent1"/>
+          </a:lnRef>
+          <a:fillRef idx="3">
+            <a:schemeClr val="accent1"/>
+          </a:fillRef>
+          <a:effectRef idx="2">
+            <a:schemeClr val="accent1"/>
+          </a:effectRef>
+          <a:fontRef idx="minor">
+            <a:schemeClr val="lt1"/>
+          </a:fontRef>
+        </p:style>
+        <p:txBody>
+          <a:bodyPr rtlCol="0" anchor="ctr"/>
+          <a:lstStyle/>
+          <a:p>
+            <a:pPr algn="ctr"/>
+          </a:p>
+        </p:txBody>
+      </p:sp>
+      <p:sp>
+        <p:nvSpPr>
+          <p:cNvPr id="12" name="Rectangle 11"/>
+          <p:cNvSpPr/>
+          <p:nvPr/>
+        </p:nvSpPr>
+        <p:spPr>
+          <a:xfrm>
+            <a:off x="640080" y="2295144"/>
+            <a:ext cx="73152" cy="274320"/>
+          </a:xfrm>
+          <a:prstGeom prst="rect">
+            <a:avLst/>
+          </a:prstGeom>
+          <a:solidFill>
+            <a:srgbClr val="269CCB"/>
+          </a:solidFill>
+          <a:ln>
+            <a:noFill/>
+          </a:ln>
+        </p:spPr>
+        <p:style>
+          <a:lnRef idx="1">
+            <a:schemeClr val="accent1"/>
+          </a:lnRef>
+          <a:fillRef idx="3">
+            <a:schemeClr val="accent1"/>
+          </a:fillRef>
+          <a:effectRef idx="2">
+            <a:schemeClr val="accent1"/>
+          </a:effectRef>
+          <a:fontRef idx="minor">
+            <a:schemeClr val="lt1"/>
+          </a:fontRef>
+        </p:style>
+        <p:txBody>
+          <a:bodyPr rtlCol="0" anchor="ctr"/>
+          <a:lstStyle/>
+          <a:p>
+            <a:pPr algn="ctr"/>
+          </a:p>
+        </p:txBody>
+      </p:sp>
+      <p:sp>
+        <p:nvSpPr>
+          <p:cNvPr id="13" name="TextBox 12"/>
+          <p:cNvSpPr txBox="1"/>
+          <p:nvPr/>
+        </p:nvSpPr>
+        <p:spPr>
+          <a:xfrm>
+            <a:off x="1097280" y="2240279"/>
+            <a:ext cx="10362895" cy="402336"/>
+          </a:xfrm>
+          <a:prstGeom prst="rect">
+            <a:avLst/>
+          </a:prstGeom>
+          <a:noFill/>
+        </p:spPr>
+        <p:txBody>
+          <a:bodyPr wrap="square" anchor="ctr"/>
+          <a:lstStyle/>
+          <a:p>
+            <a:r>
+              <a:rPr sz="1500" b="1" i="0">
+                <a:solidFill>
+                  <a:srgbClr val="333333"/>
+                </a:solidFill>
+                <a:latin typeface="Calibri"/>
+              </a:rPr>
+              <a:t>LOS CRITERIOS Y SUS PESOS</a:t>
+            </a:r>
+            <a:r>
+              <a:rPr sz="1500" b="0" i="0">
+                <a:solidFill>
+                  <a:srgbClr val="333333"/>
+                </a:solidFill>
+                <a:latin typeface="Calibri"/>
+              </a:rPr>
+              <a:t> — De 3 a 5 criterios sacados de sus </a:t>
+            </a:r>
+            <a:r>
+              <a:rPr sz="1500" b="1" i="0">
+                <a:solidFill>
+                  <a:srgbClr val="333333"/>
+                </a:solidFill>
+                <a:latin typeface="Calibri"/>
+              </a:rPr>
+              <a:t>requisitos no funcionales y restricciones</a:t>
+            </a:r>
+            <a:r>
+              <a:rPr sz="1500" b="0" i="0">
+                <a:solidFill>
+                  <a:srgbClr val="333333"/>
+                </a:solidFill>
+                <a:latin typeface="Calibri"/>
+              </a:rPr>
+              <a:t>, cada uno con un peso, </a:t>
+            </a:r>
+            <a:r>
+              <a:rPr sz="1500" b="1" i="0">
+                <a:solidFill>
+                  <a:srgbClr val="333333"/>
+                </a:solidFill>
+                <a:latin typeface="Calibri"/>
+              </a:rPr>
+              <a:t>escritos antes de calificar</a:t>
+            </a:r>
+            <a:r>
+              <a:rPr sz="1500" b="0" i="0">
+                <a:solidFill>
+                  <a:srgbClr val="333333"/>
+                </a:solidFill>
+                <a:latin typeface="Calibri"/>
+              </a:rPr>
+              <a:t>.</a:t>
+            </a:r>
+          </a:p>
+        </p:txBody>
+      </p:sp>
+      <p:sp>
+        <p:nvSpPr>
+          <p:cNvPr id="14" name="Rounded Rectangle 13"/>
+          <p:cNvSpPr/>
+          <p:nvPr/>
+        </p:nvSpPr>
+        <p:spPr>
+          <a:xfrm>
+            <a:off x="457200" y="2825496"/>
+            <a:ext cx="11277295" cy="566928"/>
+          </a:xfrm>
+          <a:prstGeom prst="roundRect">
+            <a:avLst>
+              <a:gd name="adj" fmla="val 12000"/>
+            </a:avLst>
+          </a:prstGeom>
+          <a:solidFill>
+            <a:srgbClr val="F2F2F2"/>
+          </a:solidFill>
+          <a:ln>
+            <a:noFill/>
+          </a:ln>
+        </p:spPr>
+        <p:style>
+          <a:lnRef idx="1">
+            <a:schemeClr val="accent1"/>
+          </a:lnRef>
+          <a:fillRef idx="3">
+            <a:schemeClr val="accent1"/>
+          </a:fillRef>
+          <a:effectRef idx="2">
+            <a:schemeClr val="accent1"/>
+          </a:effectRef>
+          <a:fontRef idx="minor">
+            <a:schemeClr val="lt1"/>
+          </a:fontRef>
+        </p:style>
+        <p:txBody>
+          <a:bodyPr rtlCol="0" anchor="ctr"/>
+          <a:lstStyle/>
+          <a:p>
+            <a:pPr algn="ctr"/>
+          </a:p>
+        </p:txBody>
+      </p:sp>
+      <p:sp>
+        <p:nvSpPr>
+          <p:cNvPr id="15" name="Rectangle 14"/>
+          <p:cNvSpPr/>
+          <p:nvPr/>
+        </p:nvSpPr>
+        <p:spPr>
+          <a:xfrm>
+            <a:off x="640080" y="2971800"/>
+            <a:ext cx="274320" cy="274320"/>
+          </a:xfrm>
+          <a:prstGeom prst="rect">
+            <a:avLst/>
+          </a:prstGeom>
+          <a:solidFill>
+            <a:srgbClr val="FFFFFF"/>
+          </a:solidFill>
+          <a:ln>
+            <a:solidFill>
+              <a:srgbClr val="333333"/>
+            </a:solidFill>
+          </a:ln>
+        </p:spPr>
+        <p:style>
+          <a:lnRef idx="1">
+            <a:schemeClr val="accent1"/>
+          </a:lnRef>
+          <a:fillRef idx="3">
+            <a:schemeClr val="accent1"/>
+          </a:fillRef>
+          <a:effectRef idx="2">
+            <a:schemeClr val="accent1"/>
+          </a:effectRef>
+          <a:fontRef idx="minor">
+            <a:schemeClr val="lt1"/>
+          </a:fontRef>
+        </p:style>
+        <p:txBody>
+          <a:bodyPr rtlCol="0" anchor="ctr"/>
+          <a:lstStyle/>
+          <a:p>
+            <a:pPr algn="ctr"/>
+          </a:p>
+        </p:txBody>
+      </p:sp>
+      <p:sp>
+        <p:nvSpPr>
+          <p:cNvPr id="16" name="Rectangle 15"/>
+          <p:cNvSpPr/>
+          <p:nvPr/>
+        </p:nvSpPr>
+        <p:spPr>
+          <a:xfrm>
+            <a:off x="640080" y="2971800"/>
+            <a:ext cx="73152" cy="274320"/>
+          </a:xfrm>
+          <a:prstGeom prst="rect">
+            <a:avLst/>
+          </a:prstGeom>
+          <a:solidFill>
+            <a:srgbClr val="269CCB"/>
+          </a:solidFill>
+          <a:ln>
+            <a:noFill/>
+          </a:ln>
+        </p:spPr>
+        <p:style>
+          <a:lnRef idx="1">
+            <a:schemeClr val="accent1"/>
+          </a:lnRef>
+          <a:fillRef idx="3">
+            <a:schemeClr val="accent1"/>
+          </a:fillRef>
+          <a:effectRef idx="2">
+            <a:schemeClr val="accent1"/>
+          </a:effectRef>
+          <a:fontRef idx="minor">
+            <a:schemeClr val="lt1"/>
+          </a:fontRef>
+        </p:style>
+        <p:txBody>
+          <a:bodyPr rtlCol="0" anchor="ctr"/>
+          <a:lstStyle/>
+          <a:p>
+            <a:pPr algn="ctr"/>
+          </a:p>
+        </p:txBody>
+      </p:sp>
+      <p:sp>
+        <p:nvSpPr>
+          <p:cNvPr id="17" name="TextBox 16"/>
+          <p:cNvSpPr txBox="1"/>
+          <p:nvPr/>
+        </p:nvSpPr>
+        <p:spPr>
+          <a:xfrm>
+            <a:off x="1097280" y="2916936"/>
+            <a:ext cx="10362895" cy="402336"/>
+          </a:xfrm>
+          <a:prstGeom prst="rect">
+            <a:avLst/>
+          </a:prstGeom>
+          <a:noFill/>
+        </p:spPr>
+        <p:txBody>
+          <a:bodyPr wrap="square" anchor="ctr"/>
+          <a:lstStyle/>
+          <a:p>
+            <a:r>
+              <a:rPr sz="1500" b="1" i="0">
+                <a:solidFill>
+                  <a:srgbClr val="333333"/>
+                </a:solidFill>
+                <a:latin typeface="Calibri"/>
+              </a:rPr>
+              <a:t>LA MATRIZ Y LA DECISIÓN</a:t>
+            </a:r>
+            <a:r>
+              <a:rPr sz="1500" b="0" i="0">
+                <a:solidFill>
+                  <a:srgbClr val="333333"/>
+                </a:solidFill>
+                <a:latin typeface="Calibri"/>
+              </a:rPr>
+              <a:t> — Cada alternativa calificada criterio por criterio (escala 1-3) con </a:t>
+            </a:r>
+            <a:r>
+              <a:rPr sz="1500" b="1" i="0">
+                <a:solidFill>
+                  <a:srgbClr val="333333"/>
+                </a:solidFill>
+                <a:latin typeface="Calibri"/>
+              </a:rPr>
+              <a:t>media línea de justificación por casilla</a:t>
+            </a:r>
+            <a:r>
+              <a:rPr sz="1500" b="0" i="0">
+                <a:solidFill>
+                  <a:srgbClr val="333333"/>
+                </a:solidFill>
+                <a:latin typeface="Calibri"/>
+              </a:rPr>
+              <a:t>, el resultado, y la decisión.</a:t>
+            </a:r>
+          </a:p>
+        </p:txBody>
+      </p:sp>
+      <p:sp>
+        <p:nvSpPr>
+          <p:cNvPr id="18" name="Rounded Rectangle 17"/>
+          <p:cNvSpPr/>
+          <p:nvPr/>
+        </p:nvSpPr>
+        <p:spPr>
+          <a:xfrm>
+            <a:off x="457200" y="3502152"/>
+            <a:ext cx="11277295" cy="566928"/>
+          </a:xfrm>
+          <a:prstGeom prst="roundRect">
+            <a:avLst>
+              <a:gd name="adj" fmla="val 12000"/>
+            </a:avLst>
+          </a:prstGeom>
+          <a:solidFill>
+            <a:srgbClr val="F2F2F2"/>
+          </a:solidFill>
+          <a:ln>
+            <a:noFill/>
+          </a:ln>
+        </p:spPr>
+        <p:style>
+          <a:lnRef idx="1">
+            <a:schemeClr val="accent1"/>
+          </a:lnRef>
+          <a:fillRef idx="3">
+            <a:schemeClr val="accent1"/>
+          </a:fillRef>
+          <a:effectRef idx="2">
+            <a:schemeClr val="accent1"/>
+          </a:effectRef>
+          <a:fontRef idx="minor">
+            <a:schemeClr val="lt1"/>
+          </a:fontRef>
+        </p:style>
+        <p:txBody>
+          <a:bodyPr rtlCol="0" anchor="ctr"/>
+          <a:lstStyle/>
+          <a:p>
+            <a:pPr algn="ctr"/>
+          </a:p>
+        </p:txBody>
+      </p:sp>
+      <p:sp>
+        <p:nvSpPr>
+          <p:cNvPr id="19" name="Rectangle 18"/>
+          <p:cNvSpPr/>
+          <p:nvPr/>
+        </p:nvSpPr>
+        <p:spPr>
+          <a:xfrm>
+            <a:off x="640080" y="3648456"/>
+            <a:ext cx="274320" cy="274320"/>
+          </a:xfrm>
+          <a:prstGeom prst="rect">
+            <a:avLst/>
+          </a:prstGeom>
+          <a:solidFill>
+            <a:srgbClr val="FFFFFF"/>
+          </a:solidFill>
+          <a:ln>
+            <a:solidFill>
+              <a:srgbClr val="333333"/>
+            </a:solidFill>
+          </a:ln>
+        </p:spPr>
+        <p:style>
+          <a:lnRef idx="1">
+            <a:schemeClr val="accent1"/>
+          </a:lnRef>
+          <a:fillRef idx="3">
+            <a:schemeClr val="accent1"/>
+          </a:fillRef>
+          <a:effectRef idx="2">
+            <a:schemeClr val="accent1"/>
+          </a:effectRef>
+          <a:fontRef idx="minor">
+            <a:schemeClr val="lt1"/>
+          </a:fontRef>
+        </p:style>
+        <p:txBody>
+          <a:bodyPr rtlCol="0" anchor="ctr"/>
+          <a:lstStyle/>
+          <a:p>
+            <a:pPr algn="ctr"/>
+          </a:p>
+        </p:txBody>
+      </p:sp>
+      <p:sp>
+        <p:nvSpPr>
+          <p:cNvPr id="20" name="Rectangle 19"/>
+          <p:cNvSpPr/>
+          <p:nvPr/>
+        </p:nvSpPr>
+        <p:spPr>
+          <a:xfrm>
+            <a:off x="640080" y="3648456"/>
+            <a:ext cx="73152" cy="274320"/>
+          </a:xfrm>
+          <a:prstGeom prst="rect">
+            <a:avLst/>
+          </a:prstGeom>
+          <a:solidFill>
+            <a:srgbClr val="269CCB"/>
+          </a:solidFill>
+          <a:ln>
+            <a:noFill/>
+          </a:ln>
+        </p:spPr>
+        <p:style>
+          <a:lnRef idx="1">
+            <a:schemeClr val="accent1"/>
+          </a:lnRef>
+          <a:fillRef idx="3">
+            <a:schemeClr val="accent1"/>
+          </a:fillRef>
+          <a:effectRef idx="2">
+            <a:schemeClr val="accent1"/>
+          </a:effectRef>
+          <a:fontRef idx="minor">
+            <a:schemeClr val="lt1"/>
+          </a:fontRef>
+        </p:style>
+        <p:txBody>
+          <a:bodyPr rtlCol="0" anchor="ctr"/>
+          <a:lstStyle/>
+          <a:p>
+            <a:pPr algn="ctr"/>
+          </a:p>
+        </p:txBody>
+      </p:sp>
+      <p:sp>
+        <p:nvSpPr>
+          <p:cNvPr id="21" name="TextBox 20"/>
+          <p:cNvSpPr txBox="1"/>
+          <p:nvPr/>
+        </p:nvSpPr>
+        <p:spPr>
+          <a:xfrm>
+            <a:off x="1097280" y="3593592"/>
+            <a:ext cx="10362895" cy="402336"/>
+          </a:xfrm>
+          <a:prstGeom prst="rect">
+            <a:avLst/>
+          </a:prstGeom>
+          <a:noFill/>
+        </p:spPr>
+        <p:txBody>
+          <a:bodyPr wrap="square" anchor="ctr"/>
+          <a:lstStyle/>
+          <a:p>
+            <a:r>
+              <a:rPr sz="1500" b="1" i="0">
+                <a:solidFill>
+                  <a:srgbClr val="333333"/>
+                </a:solidFill>
+                <a:latin typeface="Calibri"/>
+              </a:rPr>
+              <a:t>QUÉ SE PIERDE</a:t>
+            </a:r>
+            <a:r>
+              <a:rPr sz="1500" b="0" i="0">
+                <a:solidFill>
+                  <a:srgbClr val="333333"/>
+                </a:solidFill>
+                <a:latin typeface="Calibri"/>
+              </a:rPr>
+              <a:t> — Lo que la decisión sacrifica, en dos o tres líneas. Toda decisión sacrifica algo.</a:t>
+            </a:r>
+          </a:p>
+        </p:txBody>
+      </p:sp>
+      <p:sp>
+        <p:nvSpPr>
+          <p:cNvPr id="22" name="Rounded Rectangle 21"/>
+          <p:cNvSpPr/>
+          <p:nvPr/>
+        </p:nvSpPr>
+        <p:spPr>
+          <a:xfrm>
+            <a:off x="457200" y="4178808"/>
+            <a:ext cx="11277295" cy="566928"/>
+          </a:xfrm>
+          <a:prstGeom prst="roundRect">
+            <a:avLst>
+              <a:gd name="adj" fmla="val 12000"/>
+            </a:avLst>
+          </a:prstGeom>
+          <a:solidFill>
+            <a:srgbClr val="F2F2F2"/>
+          </a:solidFill>
+          <a:ln>
+            <a:noFill/>
+          </a:ln>
+        </p:spPr>
+        <p:style>
+          <a:lnRef idx="1">
+            <a:schemeClr val="accent1"/>
+          </a:lnRef>
+          <a:fillRef idx="3">
+            <a:schemeClr val="accent1"/>
+          </a:fillRef>
+          <a:effectRef idx="2">
+            <a:schemeClr val="accent1"/>
+          </a:effectRef>
+          <a:fontRef idx="minor">
+            <a:schemeClr val="lt1"/>
+          </a:fontRef>
+        </p:style>
+        <p:txBody>
+          <a:bodyPr rtlCol="0" anchor="ctr"/>
+          <a:lstStyle/>
+          <a:p>
+            <a:pPr algn="ctr"/>
+          </a:p>
+        </p:txBody>
+      </p:sp>
+      <p:sp>
+        <p:nvSpPr>
+          <p:cNvPr id="23" name="Rectangle 22"/>
+          <p:cNvSpPr/>
+          <p:nvPr/>
+        </p:nvSpPr>
+        <p:spPr>
+          <a:xfrm>
+            <a:off x="640080" y="4325112"/>
+            <a:ext cx="274320" cy="274320"/>
+          </a:xfrm>
+          <a:prstGeom prst="rect">
+            <a:avLst/>
+          </a:prstGeom>
+          <a:solidFill>
+            <a:srgbClr val="FFFFFF"/>
+          </a:solidFill>
+          <a:ln>
+            <a:solidFill>
+              <a:srgbClr val="333333"/>
+            </a:solidFill>
+          </a:ln>
+        </p:spPr>
+        <p:style>
+          <a:lnRef idx="1">
+            <a:schemeClr val="accent1"/>
+          </a:lnRef>
+          <a:fillRef idx="3">
+            <a:schemeClr val="accent1"/>
+          </a:fillRef>
+          <a:effectRef idx="2">
+            <a:schemeClr val="accent1"/>
+          </a:effectRef>
+          <a:fontRef idx="minor">
+            <a:schemeClr val="lt1"/>
+          </a:fontRef>
+        </p:style>
+        <p:txBody>
+          <a:bodyPr rtlCol="0" anchor="ctr"/>
+          <a:lstStyle/>
+          <a:p>
+            <a:pPr algn="ctr"/>
+          </a:p>
+        </p:txBody>
+      </p:sp>
+      <p:sp>
+        <p:nvSpPr>
+          <p:cNvPr id="24" name="Rectangle 23"/>
+          <p:cNvSpPr/>
+          <p:nvPr/>
+        </p:nvSpPr>
+        <p:spPr>
+          <a:xfrm>
+            <a:off x="640080" y="4325112"/>
+            <a:ext cx="73152" cy="274320"/>
+          </a:xfrm>
+          <a:prstGeom prst="rect">
+            <a:avLst/>
+          </a:prstGeom>
+          <a:solidFill>
+            <a:srgbClr val="269CCB"/>
+          </a:solidFill>
+          <a:ln>
+            <a:noFill/>
+          </a:ln>
+        </p:spPr>
+        <p:style>
+          <a:lnRef idx="1">
+            <a:schemeClr val="accent1"/>
+          </a:lnRef>
+          <a:fillRef idx="3">
+            <a:schemeClr val="accent1"/>
+          </a:fillRef>
+          <a:effectRef idx="2">
+            <a:schemeClr val="accent1"/>
+          </a:effectRef>
+          <a:fontRef idx="minor">
+            <a:schemeClr val="lt1"/>
+          </a:fontRef>
+        </p:style>
+        <p:txBody>
+          <a:bodyPr rtlCol="0" anchor="ctr"/>
+          <a:lstStyle/>
+          <a:p>
+            <a:pPr algn="ctr"/>
+          </a:p>
+        </p:txBody>
+      </p:sp>
+      <p:sp>
+        <p:nvSpPr>
+          <p:cNvPr id="25" name="TextBox 24"/>
+          <p:cNvSpPr txBox="1"/>
+          <p:nvPr/>
+        </p:nvSpPr>
+        <p:spPr>
+          <a:xfrm>
+            <a:off x="1097280" y="4270248"/>
+            <a:ext cx="10362895" cy="402336"/>
+          </a:xfrm>
+          <a:prstGeom prst="rect">
+            <a:avLst/>
+          </a:prstGeom>
+          <a:noFill/>
+        </p:spPr>
+        <p:txBody>
+          <a:bodyPr wrap="square" anchor="ctr"/>
+          <a:lstStyle/>
+          <a:p>
+            <a:r>
+              <a:rPr sz="1500" b="1" i="0">
+                <a:solidFill>
+                  <a:srgbClr val="333333"/>
+                </a:solidFill>
+                <a:latin typeface="Calibri"/>
+              </a:rPr>
+              <a:t>ALCANCE MÍNIMO Y PLAN DE VALIDACIÓN</a:t>
+            </a:r>
+            <a:r>
+              <a:rPr sz="1500" b="0" i="0">
+                <a:solidFill>
+                  <a:srgbClr val="333333"/>
+                </a:solidFill>
+                <a:latin typeface="Calibri"/>
+              </a:rPr>
+              <a:t> — Qué se construye este semestre (un requisito funcional completo, cumpliendo los no funcionales), la lista de lo que queda para «versión siguiente», y el plan de validación: </a:t>
+            </a:r>
+            <a:r>
+              <a:rPr sz="1500" b="1" i="0">
+                <a:solidFill>
+                  <a:srgbClr val="333333"/>
+                </a:solidFill>
+                <a:latin typeface="Calibri"/>
+              </a:rPr>
+              <a:t>con quién</a:t>
+            </a:r>
+            <a:r>
+              <a:rPr sz="1500" b="0" i="0">
+                <a:solidFill>
+                  <a:srgbClr val="333333"/>
+                </a:solidFill>
+                <a:latin typeface="Calibri"/>
+              </a:rPr>
+              <a:t> se prueba, </a:t>
+            </a:r>
+            <a:r>
+              <a:rPr sz="1500" b="1" i="0">
+                <a:solidFill>
+                  <a:srgbClr val="333333"/>
+                </a:solidFill>
+                <a:latin typeface="Calibri"/>
+              </a:rPr>
+              <a:t>qué tareas</a:t>
+            </a:r>
+            <a:r>
+              <a:rPr sz="1500" b="0" i="0">
+                <a:solidFill>
+                  <a:srgbClr val="333333"/>
+                </a:solidFill>
+                <a:latin typeface="Calibri"/>
+              </a:rPr>
+              <a:t> se le piden y </a:t>
+            </a:r>
+            <a:r>
+              <a:rPr sz="1500" b="1" i="0">
+                <a:solidFill>
+                  <a:srgbClr val="333333"/>
+                </a:solidFill>
+                <a:latin typeface="Calibri"/>
+              </a:rPr>
+              <a:t>qué se observa</a:t>
+            </a:r>
+            <a:r>
+              <a:rPr sz="1500" b="0" i="0">
+                <a:solidFill>
+                  <a:srgbClr val="333333"/>
+                </a:solidFill>
+                <a:latin typeface="Calibri"/>
+              </a:rPr>
+              <a:t>.</a:t>
+            </a:r>
+          </a:p>
+        </p:txBody>
+      </p:sp>
+      <p:sp>
+        <p:nvSpPr>
+          <p:cNvPr id="26" name="TextBox 25"/>
           <p:cNvSpPr txBox="1"/>
           <p:nvPr/>
         </p:nvSpPr>
@@ -8178,13 +7668,13 @@
         <p:spPr>
           <a:xfrm>
             <a:off x="0" y="0"/>
-            <a:ext cx="12191695" cy="164592"/>
+            <a:ext cx="12191695" cy="1170432"/>
           </a:xfrm>
           <a:prstGeom prst="rect">
             <a:avLst/>
           </a:prstGeom>
           <a:solidFill>
-            <a:srgbClr val="269CCB"/>
+            <a:srgbClr val="095292"/>
           </a:solidFill>
           <a:ln>
             <a:noFill/>
@@ -8212,30 +7702,49 @@
           </a:p>
         </p:txBody>
       </p:sp>
-      <p:pic>
-        <p:nvPicPr>
-          <p:cNvPr id="3" name="Picture 2" descr="logo_uniajc_color.png"/>
-          <p:cNvPicPr>
-            <a:picLocks noChangeAspect="1"/>
-          </p:cNvPicPr>
-          <p:nvPr/>
-        </p:nvPicPr>
-        <p:blipFill>
-          <a:blip r:embed="rId2"/>
-          <a:stretch>
-            <a:fillRect/>
-          </a:stretch>
-        </p:blipFill>
-        <p:spPr>
-          <a:xfrm>
-            <a:off x="10271455" y="5998464"/>
-            <a:ext cx="1463040" cy="643233"/>
-          </a:xfrm>
-          <a:prstGeom prst="rect">
-            <a:avLst/>
-          </a:prstGeom>
-        </p:spPr>
-      </p:pic>
+      <p:sp>
+        <p:nvSpPr>
+          <p:cNvPr id="3" name="Rectangle 2"/>
+          <p:cNvSpPr/>
+          <p:nvPr/>
+        </p:nvSpPr>
+        <p:spPr>
+          <a:xfrm>
+            <a:off x="0" y="1170432"/>
+            <a:ext cx="12191695" cy="41148"/>
+          </a:xfrm>
+          <a:prstGeom prst="rect">
+            <a:avLst/>
+          </a:prstGeom>
+          <a:solidFill>
+            <a:srgbClr val="FFD000"/>
+          </a:solidFill>
+          <a:ln>
+            <a:noFill/>
+          </a:ln>
+        </p:spPr>
+        <p:style>
+          <a:lnRef idx="1">
+            <a:schemeClr val="accent1"/>
+          </a:lnRef>
+          <a:fillRef idx="3">
+            <a:schemeClr val="accent1"/>
+          </a:fillRef>
+          <a:effectRef idx="2">
+            <a:schemeClr val="accent1"/>
+          </a:effectRef>
+          <a:fontRef idx="minor">
+            <a:schemeClr val="lt1"/>
+          </a:fontRef>
+        </p:style>
+        <p:txBody>
+          <a:bodyPr rtlCol="0" anchor="ctr"/>
+          <a:lstStyle/>
+          <a:p>
+            <a:pPr algn="ctr"/>
+          </a:p>
+        </p:txBody>
+      </p:sp>
       <p:sp>
         <p:nvSpPr>
           <p:cNvPr id="4" name="TextBox 3"/>
@@ -8244,41 +7753,8 @@
         </p:nvSpPr>
         <p:spPr>
           <a:xfrm>
-            <a:off x="457200" y="1737360"/>
-            <a:ext cx="11277295" cy="1097280"/>
-          </a:xfrm>
-          <a:prstGeom prst="rect">
-            <a:avLst/>
-          </a:prstGeom>
-          <a:noFill/>
-        </p:spPr>
-        <p:txBody>
-          <a:bodyPr wrap="square" anchor="ctr"/>
-          <a:lstStyle/>
-          <a:p>
-            <a:pPr algn="ctr"/>
-            <a:r>
-              <a:rPr sz="3400" b="1" i="0">
-                <a:solidFill>
-                  <a:srgbClr val="095292"/>
-                </a:solidFill>
-                <a:latin typeface="Calibri"/>
-              </a:rPr>
-              <a:t>Nos vemos en la sesión 9</a:t>
-            </a:r>
-          </a:p>
-        </p:txBody>
-      </p:sp>
-      <p:sp>
-        <p:nvSpPr>
-          <p:cNvPr id="5" name="TextBox 4"/>
-          <p:cNvSpPr txBox="1"/>
-          <p:nvPr/>
-        </p:nvSpPr>
-        <p:spPr>
-          <a:xfrm>
-            <a:off x="457200" y="3017520"/>
-            <a:ext cx="11277295" cy="1645920"/>
+            <a:off x="457200" y="164592"/>
+            <a:ext cx="11277295" cy="384048"/>
           </a:xfrm>
           <a:prstGeom prst="rect">
             <a:avLst/>
@@ -8291,49 +7767,28 @@
           </a:bodyPr>
           <a:lstStyle/>
           <a:p>
-            <a:pPr algn="ctr">
-              <a:spcAft>
-                <a:spcPts val="600"/>
-              </a:spcAft>
-            </a:pPr>
-            <a:r>
-              <a:rPr sz="1600" b="0" i="0">
-                <a:solidFill>
-                  <a:srgbClr val="333333"/>
-                </a:solidFill>
-                <a:latin typeface="Calibri"/>
-              </a:rPr>
-              <a:t>Taller de aplicación del ciclo de vida · Clase 8</a:t>
-            </a:r>
-          </a:p>
-          <a:p>
-            <a:pPr algn="ctr">
-              <a:spcAft>
-                <a:spcPts val="600"/>
-              </a:spcAft>
-            </a:pPr>
-            <a:r>
-              <a:rPr sz="1600" b="0" i="0">
-                <a:solidFill>
-                  <a:srgbClr val="333333"/>
-                </a:solidFill>
-                <a:latin typeface="Calibri"/>
-              </a:rPr>
-              <a:t>FI300101 · UNIAJC · Ingeniería de Sistemas</a:t>
-            </a:r>
-          </a:p>
-        </p:txBody>
-      </p:sp>
-      <p:sp>
-        <p:nvSpPr>
-          <p:cNvPr id="6" name="TextBox 5"/>
+            <a:r>
+              <a:rPr sz="2600" b="1" i="0">
+                <a:solidFill>
+                  <a:srgbClr val="FFFFFF"/>
+                </a:solidFill>
+                <a:latin typeface="Calibri"/>
+              </a:rPr>
+              <a:t>Cómo se expone en 3 minutos</a:t>
+            </a:r>
+          </a:p>
+        </p:txBody>
+      </p:sp>
+      <p:sp>
+        <p:nvSpPr>
+          <p:cNvPr id="5" name="TextBox 4"/>
           <p:cNvSpPr txBox="1"/>
           <p:nvPr/>
         </p:nvSpPr>
         <p:spPr>
           <a:xfrm>
-            <a:off x="457200" y="4754880"/>
-            <a:ext cx="11277295" cy="640080"/>
+            <a:off x="457200" y="566928"/>
+            <a:ext cx="11277295" cy="411480"/>
           </a:xfrm>
           <a:prstGeom prst="rect">
             <a:avLst/>
@@ -8346,15 +7801,904 @@
           </a:bodyPr>
           <a:lstStyle/>
           <a:p>
+            <a:r>
+              <a:rPr sz="1400" b="0" i="0">
+                <a:solidFill>
+                  <a:srgbClr val="B8D8EE"/>
+                </a:solidFill>
+                <a:latin typeface="Calibri"/>
+              </a:rPr>
+              <a:t>Habla el vocero con la pantalla ya compartida · cronómetro en pantalla · se corta al llegar a cero</a:t>
+            </a:r>
+          </a:p>
+        </p:txBody>
+      </p:sp>
+      <p:sp>
+        <p:nvSpPr>
+          <p:cNvPr id="6" name="Rounded Rectangle 5"/>
+          <p:cNvSpPr/>
+          <p:nvPr/>
+        </p:nvSpPr>
+        <p:spPr>
+          <a:xfrm>
+            <a:off x="457200" y="1444752"/>
+            <a:ext cx="11277295" cy="908913"/>
+          </a:xfrm>
+          <a:prstGeom prst="roundRect">
+            <a:avLst>
+              <a:gd name="adj" fmla="val 12000"/>
+            </a:avLst>
+          </a:prstGeom>
+          <a:solidFill>
+            <a:srgbClr val="F2F2F2"/>
+          </a:solidFill>
+          <a:ln>
+            <a:noFill/>
+          </a:ln>
+        </p:spPr>
+        <p:style>
+          <a:lnRef idx="1">
+            <a:schemeClr val="accent1"/>
+          </a:lnRef>
+          <a:fillRef idx="3">
+            <a:schemeClr val="accent1"/>
+          </a:fillRef>
+          <a:effectRef idx="2">
+            <a:schemeClr val="accent1"/>
+          </a:effectRef>
+          <a:fontRef idx="minor">
+            <a:schemeClr val="lt1"/>
+          </a:fontRef>
+        </p:style>
+        <p:txBody>
+          <a:bodyPr rtlCol="0" anchor="ctr"/>
+          <a:lstStyle/>
+          <a:p>
             <a:pPr algn="ctr"/>
-            <a:r>
-              <a:rPr sz="2000" b="1" i="0">
-                <a:solidFill>
-                  <a:srgbClr val="269CCB"/>
-                </a:solidFill>
-                <a:latin typeface="Calibri"/>
-              </a:rPr>
-              <a:t>Decidir no es acertar: es poder defender lo que se eligió y lo que se perdió</a:t>
+          </a:p>
+        </p:txBody>
+      </p:sp>
+      <p:sp>
+        <p:nvSpPr>
+          <p:cNvPr id="7" name="Rounded Rectangle 6"/>
+          <p:cNvSpPr/>
+          <p:nvPr/>
+        </p:nvSpPr>
+        <p:spPr>
+          <a:xfrm>
+            <a:off x="594360" y="1679752"/>
+            <a:ext cx="438912" cy="438912"/>
+          </a:xfrm>
+          <a:prstGeom prst="roundRect">
+            <a:avLst>
+              <a:gd name="adj" fmla="val 12000"/>
+            </a:avLst>
+          </a:prstGeom>
+          <a:solidFill>
+            <a:srgbClr val="095292"/>
+          </a:solidFill>
+          <a:ln>
+            <a:noFill/>
+          </a:ln>
+        </p:spPr>
+        <p:style>
+          <a:lnRef idx="1">
+            <a:schemeClr val="accent1"/>
+          </a:lnRef>
+          <a:fillRef idx="3">
+            <a:schemeClr val="accent1"/>
+          </a:fillRef>
+          <a:effectRef idx="2">
+            <a:schemeClr val="accent1"/>
+          </a:effectRef>
+          <a:fontRef idx="minor">
+            <a:schemeClr val="lt1"/>
+          </a:fontRef>
+        </p:style>
+        <p:txBody>
+          <a:bodyPr rtlCol="0" anchor="ctr"/>
+          <a:lstStyle/>
+          <a:p>
+            <a:pPr algn="ctr"/>
+          </a:p>
+        </p:txBody>
+      </p:sp>
+      <p:sp>
+        <p:nvSpPr>
+          <p:cNvPr id="8" name="TextBox 7"/>
+          <p:cNvSpPr txBox="1"/>
+          <p:nvPr/>
+        </p:nvSpPr>
+        <p:spPr>
+          <a:xfrm>
+            <a:off x="594360" y="1679752"/>
+            <a:ext cx="438912" cy="438912"/>
+          </a:xfrm>
+          <a:prstGeom prst="rect">
+            <a:avLst/>
+          </a:prstGeom>
+          <a:noFill/>
+        </p:spPr>
+        <p:txBody>
+          <a:bodyPr wrap="square" anchor="ctr"/>
+          <a:lstStyle/>
+          <a:p>
+            <a:pPr algn="ctr"/>
+            <a:r>
+              <a:rPr sz="1600" b="1" i="0">
+                <a:solidFill>
+                  <a:srgbClr val="FFFFFF"/>
+                </a:solidFill>
+                <a:latin typeface="Calibri"/>
+              </a:rPr>
+              <a:t>1</a:t>
+            </a:r>
+          </a:p>
+        </p:txBody>
+      </p:sp>
+      <p:sp>
+        <p:nvSpPr>
+          <p:cNvPr id="9" name="TextBox 8"/>
+          <p:cNvSpPr txBox="1"/>
+          <p:nvPr/>
+        </p:nvSpPr>
+        <p:spPr>
+          <a:xfrm>
+            <a:off x="1188720" y="1536192"/>
+            <a:ext cx="10271455" cy="744321"/>
+          </a:xfrm>
+          <a:prstGeom prst="rect">
+            <a:avLst/>
+          </a:prstGeom>
+          <a:noFill/>
+        </p:spPr>
+        <p:txBody>
+          <a:bodyPr wrap="square" anchor="ctr"/>
+          <a:lstStyle/>
+          <a:p>
+            <a:r>
+              <a:rPr sz="1500" b="1" i="0">
+                <a:solidFill>
+                  <a:srgbClr val="095292"/>
+                </a:solidFill>
+                <a:latin typeface="Calibri"/>
+              </a:rPr>
+              <a:t>30 s · Las dos alternativas</a:t>
+            </a:r>
+          </a:p>
+          <a:p>
+            <a:pPr>
+              <a:spcBef>
+                <a:spcPts val="200"/>
+              </a:spcBef>
+            </a:pPr>
+            <a:r>
+              <a:rPr sz="1300" b="0" i="0">
+                <a:solidFill>
+                  <a:srgbClr val="333333"/>
+                </a:solidFill>
+                <a:latin typeface="Calibri"/>
+              </a:rPr>
+              <a:t>Una frase cada una. Sin adjetivos.</a:t>
+            </a:r>
+          </a:p>
+        </p:txBody>
+      </p:sp>
+      <p:sp>
+        <p:nvSpPr>
+          <p:cNvPr id="10" name="Rounded Rectangle 9"/>
+          <p:cNvSpPr/>
+          <p:nvPr/>
+        </p:nvSpPr>
+        <p:spPr>
+          <a:xfrm>
+            <a:off x="457200" y="2445105"/>
+            <a:ext cx="11277295" cy="908913"/>
+          </a:xfrm>
+          <a:prstGeom prst="roundRect">
+            <a:avLst>
+              <a:gd name="adj" fmla="val 12000"/>
+            </a:avLst>
+          </a:prstGeom>
+          <a:solidFill>
+            <a:srgbClr val="E8F4FA"/>
+          </a:solidFill>
+          <a:ln>
+            <a:noFill/>
+          </a:ln>
+        </p:spPr>
+        <p:style>
+          <a:lnRef idx="1">
+            <a:schemeClr val="accent1"/>
+          </a:lnRef>
+          <a:fillRef idx="3">
+            <a:schemeClr val="accent1"/>
+          </a:fillRef>
+          <a:effectRef idx="2">
+            <a:schemeClr val="accent1"/>
+          </a:effectRef>
+          <a:fontRef idx="minor">
+            <a:schemeClr val="lt1"/>
+          </a:fontRef>
+        </p:style>
+        <p:txBody>
+          <a:bodyPr rtlCol="0" anchor="ctr"/>
+          <a:lstStyle/>
+          <a:p>
+            <a:pPr algn="ctr"/>
+          </a:p>
+        </p:txBody>
+      </p:sp>
+      <p:sp>
+        <p:nvSpPr>
+          <p:cNvPr id="11" name="Rounded Rectangle 10"/>
+          <p:cNvSpPr/>
+          <p:nvPr/>
+        </p:nvSpPr>
+        <p:spPr>
+          <a:xfrm>
+            <a:off x="594360" y="2680106"/>
+            <a:ext cx="438912" cy="438912"/>
+          </a:xfrm>
+          <a:prstGeom prst="roundRect">
+            <a:avLst>
+              <a:gd name="adj" fmla="val 12000"/>
+            </a:avLst>
+          </a:prstGeom>
+          <a:solidFill>
+            <a:srgbClr val="095292"/>
+          </a:solidFill>
+          <a:ln>
+            <a:noFill/>
+          </a:ln>
+        </p:spPr>
+        <p:style>
+          <a:lnRef idx="1">
+            <a:schemeClr val="accent1"/>
+          </a:lnRef>
+          <a:fillRef idx="3">
+            <a:schemeClr val="accent1"/>
+          </a:fillRef>
+          <a:effectRef idx="2">
+            <a:schemeClr val="accent1"/>
+          </a:effectRef>
+          <a:fontRef idx="minor">
+            <a:schemeClr val="lt1"/>
+          </a:fontRef>
+        </p:style>
+        <p:txBody>
+          <a:bodyPr rtlCol="0" anchor="ctr"/>
+          <a:lstStyle/>
+          <a:p>
+            <a:pPr algn="ctr"/>
+          </a:p>
+        </p:txBody>
+      </p:sp>
+      <p:sp>
+        <p:nvSpPr>
+          <p:cNvPr id="12" name="TextBox 11"/>
+          <p:cNvSpPr txBox="1"/>
+          <p:nvPr/>
+        </p:nvSpPr>
+        <p:spPr>
+          <a:xfrm>
+            <a:off x="594360" y="2680106"/>
+            <a:ext cx="438912" cy="438912"/>
+          </a:xfrm>
+          <a:prstGeom prst="rect">
+            <a:avLst/>
+          </a:prstGeom>
+          <a:noFill/>
+        </p:spPr>
+        <p:txBody>
+          <a:bodyPr wrap="square" anchor="ctr"/>
+          <a:lstStyle/>
+          <a:p>
+            <a:pPr algn="ctr"/>
+            <a:r>
+              <a:rPr sz="1600" b="1" i="0">
+                <a:solidFill>
+                  <a:srgbClr val="FFFFFF"/>
+                </a:solidFill>
+                <a:latin typeface="Calibri"/>
+              </a:rPr>
+              <a:t>2</a:t>
+            </a:r>
+          </a:p>
+        </p:txBody>
+      </p:sp>
+      <p:sp>
+        <p:nvSpPr>
+          <p:cNvPr id="13" name="TextBox 12"/>
+          <p:cNvSpPr txBox="1"/>
+          <p:nvPr/>
+        </p:nvSpPr>
+        <p:spPr>
+          <a:xfrm>
+            <a:off x="1188720" y="2536545"/>
+            <a:ext cx="10271455" cy="744321"/>
+          </a:xfrm>
+          <a:prstGeom prst="rect">
+            <a:avLst/>
+          </a:prstGeom>
+          <a:noFill/>
+        </p:spPr>
+        <p:txBody>
+          <a:bodyPr wrap="square" anchor="ctr"/>
+          <a:lstStyle/>
+          <a:p>
+            <a:r>
+              <a:rPr sz="1500" b="1" i="0">
+                <a:solidFill>
+                  <a:srgbClr val="095292"/>
+                </a:solidFill>
+                <a:latin typeface="Calibri"/>
+              </a:rPr>
+              <a:t>40 s · Los criterios y los pesos</a:t>
+            </a:r>
+          </a:p>
+          <a:p>
+            <a:pPr>
+              <a:spcBef>
+                <a:spcPts val="200"/>
+              </a:spcBef>
+            </a:pPr>
+            <a:r>
+              <a:rPr sz="1300" b="0" i="0">
+                <a:solidFill>
+                  <a:srgbClr val="333333"/>
+                </a:solidFill>
+                <a:latin typeface="Calibri"/>
+              </a:rPr>
+              <a:t>De dónde salieron: qué restricción o requisito.</a:t>
+            </a:r>
+          </a:p>
+        </p:txBody>
+      </p:sp>
+      <p:sp>
+        <p:nvSpPr>
+          <p:cNvPr id="14" name="Rounded Rectangle 13"/>
+          <p:cNvSpPr/>
+          <p:nvPr/>
+        </p:nvSpPr>
+        <p:spPr>
+          <a:xfrm>
+            <a:off x="457200" y="3445459"/>
+            <a:ext cx="11277295" cy="908913"/>
+          </a:xfrm>
+          <a:prstGeom prst="roundRect">
+            <a:avLst>
+              <a:gd name="adj" fmla="val 12000"/>
+            </a:avLst>
+          </a:prstGeom>
+          <a:solidFill>
+            <a:srgbClr val="F2F2F2"/>
+          </a:solidFill>
+          <a:ln>
+            <a:noFill/>
+          </a:ln>
+        </p:spPr>
+        <p:style>
+          <a:lnRef idx="1">
+            <a:schemeClr val="accent1"/>
+          </a:lnRef>
+          <a:fillRef idx="3">
+            <a:schemeClr val="accent1"/>
+          </a:fillRef>
+          <a:effectRef idx="2">
+            <a:schemeClr val="accent1"/>
+          </a:effectRef>
+          <a:fontRef idx="minor">
+            <a:schemeClr val="lt1"/>
+          </a:fontRef>
+        </p:style>
+        <p:txBody>
+          <a:bodyPr rtlCol="0" anchor="ctr"/>
+          <a:lstStyle/>
+          <a:p>
+            <a:pPr algn="ctr"/>
+          </a:p>
+        </p:txBody>
+      </p:sp>
+      <p:sp>
+        <p:nvSpPr>
+          <p:cNvPr id="15" name="Rounded Rectangle 14"/>
+          <p:cNvSpPr/>
+          <p:nvPr/>
+        </p:nvSpPr>
+        <p:spPr>
+          <a:xfrm>
+            <a:off x="594360" y="3680460"/>
+            <a:ext cx="438912" cy="438912"/>
+          </a:xfrm>
+          <a:prstGeom prst="roundRect">
+            <a:avLst>
+              <a:gd name="adj" fmla="val 12000"/>
+            </a:avLst>
+          </a:prstGeom>
+          <a:solidFill>
+            <a:srgbClr val="095292"/>
+          </a:solidFill>
+          <a:ln>
+            <a:noFill/>
+          </a:ln>
+        </p:spPr>
+        <p:style>
+          <a:lnRef idx="1">
+            <a:schemeClr val="accent1"/>
+          </a:lnRef>
+          <a:fillRef idx="3">
+            <a:schemeClr val="accent1"/>
+          </a:fillRef>
+          <a:effectRef idx="2">
+            <a:schemeClr val="accent1"/>
+          </a:effectRef>
+          <a:fontRef idx="minor">
+            <a:schemeClr val="lt1"/>
+          </a:fontRef>
+        </p:style>
+        <p:txBody>
+          <a:bodyPr rtlCol="0" anchor="ctr"/>
+          <a:lstStyle/>
+          <a:p>
+            <a:pPr algn="ctr"/>
+          </a:p>
+        </p:txBody>
+      </p:sp>
+      <p:sp>
+        <p:nvSpPr>
+          <p:cNvPr id="16" name="TextBox 15"/>
+          <p:cNvSpPr txBox="1"/>
+          <p:nvPr/>
+        </p:nvSpPr>
+        <p:spPr>
+          <a:xfrm>
+            <a:off x="594360" y="3680460"/>
+            <a:ext cx="438912" cy="438912"/>
+          </a:xfrm>
+          <a:prstGeom prst="rect">
+            <a:avLst/>
+          </a:prstGeom>
+          <a:noFill/>
+        </p:spPr>
+        <p:txBody>
+          <a:bodyPr wrap="square" anchor="ctr"/>
+          <a:lstStyle/>
+          <a:p>
+            <a:pPr algn="ctr"/>
+            <a:r>
+              <a:rPr sz="1600" b="1" i="0">
+                <a:solidFill>
+                  <a:srgbClr val="FFFFFF"/>
+                </a:solidFill>
+                <a:latin typeface="Calibri"/>
+              </a:rPr>
+              <a:t>3</a:t>
+            </a:r>
+          </a:p>
+        </p:txBody>
+      </p:sp>
+      <p:sp>
+        <p:nvSpPr>
+          <p:cNvPr id="17" name="TextBox 16"/>
+          <p:cNvSpPr txBox="1"/>
+          <p:nvPr/>
+        </p:nvSpPr>
+        <p:spPr>
+          <a:xfrm>
+            <a:off x="1188720" y="3536899"/>
+            <a:ext cx="10271455" cy="744321"/>
+          </a:xfrm>
+          <a:prstGeom prst="rect">
+            <a:avLst/>
+          </a:prstGeom>
+          <a:noFill/>
+        </p:spPr>
+        <p:txBody>
+          <a:bodyPr wrap="square" anchor="ctr"/>
+          <a:lstStyle/>
+          <a:p>
+            <a:r>
+              <a:rPr sz="1500" b="1" i="0">
+                <a:solidFill>
+                  <a:srgbClr val="095292"/>
+                </a:solidFill>
+                <a:latin typeface="Calibri"/>
+              </a:rPr>
+              <a:t>40 s · La decisión</a:t>
+            </a:r>
+          </a:p>
+          <a:p>
+            <a:pPr>
+              <a:spcBef>
+                <a:spcPts val="200"/>
+              </a:spcBef>
+            </a:pPr>
+            <a:r>
+              <a:rPr sz="1300" b="0" i="0">
+                <a:solidFill>
+                  <a:srgbClr val="333333"/>
+                </a:solidFill>
+                <a:latin typeface="Calibri"/>
+              </a:rPr>
+              <a:t>Cuál ganó y por qué, con una justificación concreta.</a:t>
+            </a:r>
+          </a:p>
+        </p:txBody>
+      </p:sp>
+      <p:sp>
+        <p:nvSpPr>
+          <p:cNvPr id="18" name="Rounded Rectangle 17"/>
+          <p:cNvSpPr/>
+          <p:nvPr/>
+        </p:nvSpPr>
+        <p:spPr>
+          <a:xfrm>
+            <a:off x="457200" y="4445812"/>
+            <a:ext cx="11277295" cy="908913"/>
+          </a:xfrm>
+          <a:prstGeom prst="roundRect">
+            <a:avLst>
+              <a:gd name="adj" fmla="val 12000"/>
+            </a:avLst>
+          </a:prstGeom>
+          <a:solidFill>
+            <a:srgbClr val="E8F4FA"/>
+          </a:solidFill>
+          <a:ln>
+            <a:noFill/>
+          </a:ln>
+        </p:spPr>
+        <p:style>
+          <a:lnRef idx="1">
+            <a:schemeClr val="accent1"/>
+          </a:lnRef>
+          <a:fillRef idx="3">
+            <a:schemeClr val="accent1"/>
+          </a:fillRef>
+          <a:effectRef idx="2">
+            <a:schemeClr val="accent1"/>
+          </a:effectRef>
+          <a:fontRef idx="minor">
+            <a:schemeClr val="lt1"/>
+          </a:fontRef>
+        </p:style>
+        <p:txBody>
+          <a:bodyPr rtlCol="0" anchor="ctr"/>
+          <a:lstStyle/>
+          <a:p>
+            <a:pPr algn="ctr"/>
+          </a:p>
+        </p:txBody>
+      </p:sp>
+      <p:sp>
+        <p:nvSpPr>
+          <p:cNvPr id="19" name="Rounded Rectangle 18"/>
+          <p:cNvSpPr/>
+          <p:nvPr/>
+        </p:nvSpPr>
+        <p:spPr>
+          <a:xfrm>
+            <a:off x="594360" y="4680813"/>
+            <a:ext cx="438912" cy="438912"/>
+          </a:xfrm>
+          <a:prstGeom prst="roundRect">
+            <a:avLst>
+              <a:gd name="adj" fmla="val 12000"/>
+            </a:avLst>
+          </a:prstGeom>
+          <a:solidFill>
+            <a:srgbClr val="095292"/>
+          </a:solidFill>
+          <a:ln>
+            <a:noFill/>
+          </a:ln>
+        </p:spPr>
+        <p:style>
+          <a:lnRef idx="1">
+            <a:schemeClr val="accent1"/>
+          </a:lnRef>
+          <a:fillRef idx="3">
+            <a:schemeClr val="accent1"/>
+          </a:fillRef>
+          <a:effectRef idx="2">
+            <a:schemeClr val="accent1"/>
+          </a:effectRef>
+          <a:fontRef idx="minor">
+            <a:schemeClr val="lt1"/>
+          </a:fontRef>
+        </p:style>
+        <p:txBody>
+          <a:bodyPr rtlCol="0" anchor="ctr"/>
+          <a:lstStyle/>
+          <a:p>
+            <a:pPr algn="ctr"/>
+          </a:p>
+        </p:txBody>
+      </p:sp>
+      <p:sp>
+        <p:nvSpPr>
+          <p:cNvPr id="20" name="TextBox 19"/>
+          <p:cNvSpPr txBox="1"/>
+          <p:nvPr/>
+        </p:nvSpPr>
+        <p:spPr>
+          <a:xfrm>
+            <a:off x="594360" y="4680813"/>
+            <a:ext cx="438912" cy="438912"/>
+          </a:xfrm>
+          <a:prstGeom prst="rect">
+            <a:avLst/>
+          </a:prstGeom>
+          <a:noFill/>
+        </p:spPr>
+        <p:txBody>
+          <a:bodyPr wrap="square" anchor="ctr"/>
+          <a:lstStyle/>
+          <a:p>
+            <a:pPr algn="ctr"/>
+            <a:r>
+              <a:rPr sz="1600" b="1" i="0">
+                <a:solidFill>
+                  <a:srgbClr val="FFFFFF"/>
+                </a:solidFill>
+                <a:latin typeface="Calibri"/>
+              </a:rPr>
+              <a:t>4</a:t>
+            </a:r>
+          </a:p>
+        </p:txBody>
+      </p:sp>
+      <p:sp>
+        <p:nvSpPr>
+          <p:cNvPr id="21" name="TextBox 20"/>
+          <p:cNvSpPr txBox="1"/>
+          <p:nvPr/>
+        </p:nvSpPr>
+        <p:spPr>
+          <a:xfrm>
+            <a:off x="1188720" y="4537252"/>
+            <a:ext cx="10271455" cy="744321"/>
+          </a:xfrm>
+          <a:prstGeom prst="rect">
+            <a:avLst/>
+          </a:prstGeom>
+          <a:noFill/>
+        </p:spPr>
+        <p:txBody>
+          <a:bodyPr wrap="square" anchor="ctr"/>
+          <a:lstStyle/>
+          <a:p>
+            <a:r>
+              <a:rPr sz="1500" b="1" i="0">
+                <a:solidFill>
+                  <a:srgbClr val="095292"/>
+                </a:solidFill>
+                <a:latin typeface="Calibri"/>
+              </a:rPr>
+              <a:t>40 s · Qué se pierde</a:t>
+            </a:r>
+          </a:p>
+          <a:p>
+            <a:pPr>
+              <a:spcBef>
+                <a:spcPts val="200"/>
+              </a:spcBef>
+            </a:pPr>
+            <a:r>
+              <a:rPr sz="1300" b="0" i="0">
+                <a:solidFill>
+                  <a:srgbClr val="333333"/>
+                </a:solidFill>
+                <a:latin typeface="Calibri"/>
+              </a:rPr>
+              <a:t>Lo que sacrificaron. Es el minuto obligatorio.</a:t>
+            </a:r>
+          </a:p>
+        </p:txBody>
+      </p:sp>
+      <p:sp>
+        <p:nvSpPr>
+          <p:cNvPr id="22" name="Rounded Rectangle 21"/>
+          <p:cNvSpPr/>
+          <p:nvPr/>
+        </p:nvSpPr>
+        <p:spPr>
+          <a:xfrm>
+            <a:off x="457200" y="5446166"/>
+            <a:ext cx="11277295" cy="908913"/>
+          </a:xfrm>
+          <a:prstGeom prst="roundRect">
+            <a:avLst>
+              <a:gd name="adj" fmla="val 12000"/>
+            </a:avLst>
+          </a:prstGeom>
+          <a:solidFill>
+            <a:srgbClr val="F2F2F2"/>
+          </a:solidFill>
+          <a:ln>
+            <a:noFill/>
+          </a:ln>
+        </p:spPr>
+        <p:style>
+          <a:lnRef idx="1">
+            <a:schemeClr val="accent1"/>
+          </a:lnRef>
+          <a:fillRef idx="3">
+            <a:schemeClr val="accent1"/>
+          </a:fillRef>
+          <a:effectRef idx="2">
+            <a:schemeClr val="accent1"/>
+          </a:effectRef>
+          <a:fontRef idx="minor">
+            <a:schemeClr val="lt1"/>
+          </a:fontRef>
+        </p:style>
+        <p:txBody>
+          <a:bodyPr rtlCol="0" anchor="ctr"/>
+          <a:lstStyle/>
+          <a:p>
+            <a:pPr algn="ctr"/>
+          </a:p>
+        </p:txBody>
+      </p:sp>
+      <p:sp>
+        <p:nvSpPr>
+          <p:cNvPr id="23" name="Rounded Rectangle 22"/>
+          <p:cNvSpPr/>
+          <p:nvPr/>
+        </p:nvSpPr>
+        <p:spPr>
+          <a:xfrm>
+            <a:off x="594360" y="5681167"/>
+            <a:ext cx="438912" cy="438912"/>
+          </a:xfrm>
+          <a:prstGeom prst="roundRect">
+            <a:avLst>
+              <a:gd name="adj" fmla="val 12000"/>
+            </a:avLst>
+          </a:prstGeom>
+          <a:solidFill>
+            <a:srgbClr val="095292"/>
+          </a:solidFill>
+          <a:ln>
+            <a:noFill/>
+          </a:ln>
+        </p:spPr>
+        <p:style>
+          <a:lnRef idx="1">
+            <a:schemeClr val="accent1"/>
+          </a:lnRef>
+          <a:fillRef idx="3">
+            <a:schemeClr val="accent1"/>
+          </a:fillRef>
+          <a:effectRef idx="2">
+            <a:schemeClr val="accent1"/>
+          </a:effectRef>
+          <a:fontRef idx="minor">
+            <a:schemeClr val="lt1"/>
+          </a:fontRef>
+        </p:style>
+        <p:txBody>
+          <a:bodyPr rtlCol="0" anchor="ctr"/>
+          <a:lstStyle/>
+          <a:p>
+            <a:pPr algn="ctr"/>
+          </a:p>
+        </p:txBody>
+      </p:sp>
+      <p:sp>
+        <p:nvSpPr>
+          <p:cNvPr id="24" name="TextBox 23"/>
+          <p:cNvSpPr txBox="1"/>
+          <p:nvPr/>
+        </p:nvSpPr>
+        <p:spPr>
+          <a:xfrm>
+            <a:off x="594360" y="5681167"/>
+            <a:ext cx="438912" cy="438912"/>
+          </a:xfrm>
+          <a:prstGeom prst="rect">
+            <a:avLst/>
+          </a:prstGeom>
+          <a:noFill/>
+        </p:spPr>
+        <p:txBody>
+          <a:bodyPr wrap="square" anchor="ctr"/>
+          <a:lstStyle/>
+          <a:p>
+            <a:pPr algn="ctr"/>
+            <a:r>
+              <a:rPr sz="1600" b="1" i="0">
+                <a:solidFill>
+                  <a:srgbClr val="FFFFFF"/>
+                </a:solidFill>
+                <a:latin typeface="Calibri"/>
+              </a:rPr>
+              <a:t>5</a:t>
+            </a:r>
+          </a:p>
+        </p:txBody>
+      </p:sp>
+      <p:sp>
+        <p:nvSpPr>
+          <p:cNvPr id="25" name="TextBox 24"/>
+          <p:cNvSpPr txBox="1"/>
+          <p:nvPr/>
+        </p:nvSpPr>
+        <p:spPr>
+          <a:xfrm>
+            <a:off x="1188720" y="5537606"/>
+            <a:ext cx="10271455" cy="744321"/>
+          </a:xfrm>
+          <a:prstGeom prst="rect">
+            <a:avLst/>
+          </a:prstGeom>
+          <a:noFill/>
+        </p:spPr>
+        <p:txBody>
+          <a:bodyPr wrap="square" anchor="ctr"/>
+          <a:lstStyle/>
+          <a:p>
+            <a:r>
+              <a:rPr sz="1500" b="1" i="0">
+                <a:solidFill>
+                  <a:srgbClr val="095292"/>
+                </a:solidFill>
+                <a:latin typeface="Calibri"/>
+              </a:rPr>
+              <a:t>30 s · Alcance y validación</a:t>
+            </a:r>
+          </a:p>
+          <a:p>
+            <a:pPr>
+              <a:spcBef>
+                <a:spcPts val="200"/>
+              </a:spcBef>
+            </a:pPr>
+            <a:r>
+              <a:rPr sz="1300" b="0" i="0">
+                <a:solidFill>
+                  <a:srgbClr val="333333"/>
+                </a:solidFill>
+                <a:latin typeface="Calibri"/>
+              </a:rPr>
+              <a:t>Qué se construye y con quién se va a probar.</a:t>
+            </a:r>
+          </a:p>
+        </p:txBody>
+      </p:sp>
+      <p:sp>
+        <p:nvSpPr>
+          <p:cNvPr id="26" name="TextBox 25"/>
+          <p:cNvSpPr txBox="1"/>
+          <p:nvPr/>
+        </p:nvSpPr>
+        <p:spPr>
+          <a:xfrm>
+            <a:off x="11185855" y="6473952"/>
+            <a:ext cx="640080" cy="274320"/>
+          </a:xfrm>
+          <a:prstGeom prst="rect">
+            <a:avLst/>
+          </a:prstGeom>
+          <a:noFill/>
+        </p:spPr>
+        <p:txBody>
+          <a:bodyPr wrap="square">
+            <a:spAutoFit/>
+          </a:bodyPr>
+          <a:lstStyle/>
+          <a:p>
+            <a:pPr algn="r"/>
+            <a:r>
+              <a:rPr sz="1100" b="0" i="0">
+                <a:solidFill>
+                  <a:srgbClr val="666666"/>
+                </a:solidFill>
+                <a:latin typeface="Calibri"/>
+              </a:rPr>
+              <a:t>19</a:t>
             </a:r>
           </a:p>
         </p:txBody>
@@ -9250,6 +9594,632 @@
                 <a:latin typeface="Calibri"/>
               </a:rPr>
               <a:t>2</a:t>
+            </a:r>
+          </a:p>
+        </p:txBody>
+      </p:sp>
+    </p:spTree>
+  </p:cSld>
+  <p:clrMapOvr>
+    <a:masterClrMapping/>
+  </p:clrMapOvr>
+</p:sld>
+</file>
+
+<file path=ppt/slides/slide20.xml><?xml version="1.0" encoding="utf-8"?>
+<p:sld xmlns:a="http://schemas.openxmlformats.org/drawingml/2006/main" xmlns:p="http://schemas.openxmlformats.org/presentationml/2006/main" xmlns:r="http://schemas.openxmlformats.org/officeDocument/2006/relationships">
+  <p:cSld>
+    <p:bg>
+      <p:bgPr>
+        <a:solidFill>
+          <a:srgbClr val="FFFFFF"/>
+        </a:solidFill>
+        <a:effectLst/>
+      </p:bgPr>
+    </p:bg>
+    <p:spTree>
+      <p:nvGrpSpPr>
+        <p:cNvPr id="1" name=""/>
+        <p:cNvGrpSpPr/>
+        <p:nvPr/>
+      </p:nvGrpSpPr>
+      <p:grpSpPr/>
+      <p:sp>
+        <p:nvSpPr>
+          <p:cNvPr id="2" name="Rectangle 1"/>
+          <p:cNvSpPr/>
+          <p:nvPr/>
+        </p:nvSpPr>
+        <p:spPr>
+          <a:xfrm>
+            <a:off x="0" y="0"/>
+            <a:ext cx="12191695" cy="960120"/>
+          </a:xfrm>
+          <a:prstGeom prst="rect">
+            <a:avLst/>
+          </a:prstGeom>
+          <a:solidFill>
+            <a:srgbClr val="095292"/>
+          </a:solidFill>
+          <a:ln>
+            <a:noFill/>
+          </a:ln>
+        </p:spPr>
+        <p:style>
+          <a:lnRef idx="1">
+            <a:schemeClr val="accent1"/>
+          </a:lnRef>
+          <a:fillRef idx="3">
+            <a:schemeClr val="accent1"/>
+          </a:fillRef>
+          <a:effectRef idx="2">
+            <a:schemeClr val="accent1"/>
+          </a:effectRef>
+          <a:fontRef idx="minor">
+            <a:schemeClr val="lt1"/>
+          </a:fontRef>
+        </p:style>
+        <p:txBody>
+          <a:bodyPr rtlCol="0" anchor="ctr"/>
+          <a:lstStyle/>
+          <a:p>
+            <a:pPr algn="ctr"/>
+          </a:p>
+        </p:txBody>
+      </p:sp>
+      <p:sp>
+        <p:nvSpPr>
+          <p:cNvPr id="3" name="Rectangle 2"/>
+          <p:cNvSpPr/>
+          <p:nvPr/>
+        </p:nvSpPr>
+        <p:spPr>
+          <a:xfrm>
+            <a:off x="0" y="960120"/>
+            <a:ext cx="12191695" cy="41148"/>
+          </a:xfrm>
+          <a:prstGeom prst="rect">
+            <a:avLst/>
+          </a:prstGeom>
+          <a:solidFill>
+            <a:srgbClr val="FFD000"/>
+          </a:solidFill>
+          <a:ln>
+            <a:noFill/>
+          </a:ln>
+        </p:spPr>
+        <p:style>
+          <a:lnRef idx="1">
+            <a:schemeClr val="accent1"/>
+          </a:lnRef>
+          <a:fillRef idx="3">
+            <a:schemeClr val="accent1"/>
+          </a:fillRef>
+          <a:effectRef idx="2">
+            <a:schemeClr val="accent1"/>
+          </a:effectRef>
+          <a:fontRef idx="minor">
+            <a:schemeClr val="lt1"/>
+          </a:fontRef>
+        </p:style>
+        <p:txBody>
+          <a:bodyPr rtlCol="0" anchor="ctr"/>
+          <a:lstStyle/>
+          <a:p>
+            <a:pPr algn="ctr"/>
+          </a:p>
+        </p:txBody>
+      </p:sp>
+      <p:sp>
+        <p:nvSpPr>
+          <p:cNvPr id="4" name="TextBox 3"/>
+          <p:cNvSpPr txBox="1"/>
+          <p:nvPr/>
+        </p:nvSpPr>
+        <p:spPr>
+          <a:xfrm>
+            <a:off x="457200" y="164592"/>
+            <a:ext cx="11277295" cy="502920"/>
+          </a:xfrm>
+          <a:prstGeom prst="rect">
+            <a:avLst/>
+          </a:prstGeom>
+          <a:noFill/>
+        </p:spPr>
+        <p:txBody>
+          <a:bodyPr wrap="square">
+            <a:spAutoFit/>
+          </a:bodyPr>
+          <a:lstStyle/>
+          <a:p>
+            <a:r>
+              <a:rPr sz="2600" b="1" i="0">
+                <a:solidFill>
+                  <a:srgbClr val="FFFFFF"/>
+                </a:solidFill>
+                <a:latin typeface="Calibri"/>
+              </a:rPr>
+              <a:t>Para la Clase 9</a:t>
+            </a:r>
+          </a:p>
+        </p:txBody>
+      </p:sp>
+      <p:sp>
+        <p:nvSpPr>
+          <p:cNvPr id="5" name="TextBox 4"/>
+          <p:cNvSpPr txBox="1"/>
+          <p:nvPr/>
+        </p:nvSpPr>
+        <p:spPr>
+          <a:xfrm>
+            <a:off x="457200" y="1170432"/>
+            <a:ext cx="11277295" cy="5230368"/>
+          </a:xfrm>
+          <a:prstGeom prst="rect">
+            <a:avLst/>
+          </a:prstGeom>
+          <a:noFill/>
+        </p:spPr>
+        <p:txBody>
+          <a:bodyPr wrap="square">
+            <a:spAutoFit/>
+          </a:bodyPr>
+          <a:lstStyle/>
+          <a:p>
+            <a:pPr>
+              <a:spcAft>
+                <a:spcPts val="800"/>
+              </a:spcAft>
+            </a:pPr>
+            <a:r>
+              <a:rPr sz="2000" b="0" i="0">
+                <a:solidFill>
+                  <a:srgbClr val="333333"/>
+                </a:solidFill>
+                <a:latin typeface="Calibri"/>
+              </a:rPr>
+              <a:t>–   </a:t>
+            </a:r>
+            <a:r>
+              <a:rPr sz="2000" b="1" i="0">
+                <a:solidFill>
+                  <a:srgbClr val="333333"/>
+                </a:solidFill>
+                <a:latin typeface="Calibri"/>
+              </a:rPr>
+              <a:t>Trabajo dirigido:</a:t>
+            </a:r>
+            <a:r>
+              <a:rPr sz="2000" b="0" i="0">
+                <a:solidFill>
+                  <a:srgbClr val="333333"/>
+                </a:solidFill>
+                <a:latin typeface="Calibri"/>
+              </a:rPr>
+              <a:t> Discusión de ejemplos reales — buscar </a:t>
+            </a:r>
+            <a:r>
+              <a:rPr sz="2000" b="1" i="0">
+                <a:solidFill>
+                  <a:srgbClr val="333333"/>
+                </a:solidFill>
+                <a:latin typeface="Calibri"/>
+              </a:rPr>
+              <a:t>un caso propio</a:t>
+            </a:r>
+            <a:r>
+              <a:rPr sz="2000" b="0" i="0">
+                <a:solidFill>
+                  <a:srgbClr val="333333"/>
+                </a:solidFill>
+                <a:latin typeface="Calibri"/>
+              </a:rPr>
+              <a:t> de proyecto que falló por saltarse una fase, con fuente verificable, y decir qué fase fue.</a:t>
+            </a:r>
+          </a:p>
+          <a:p>
+            <a:pPr>
+              <a:spcAft>
+                <a:spcPts val="800"/>
+              </a:spcAft>
+            </a:pPr>
+            <a:r>
+              <a:rPr sz="2000" b="0" i="0">
+                <a:solidFill>
+                  <a:srgbClr val="333333"/>
+                </a:solidFill>
+                <a:latin typeface="Calibri"/>
+              </a:rPr>
+              <a:t>–   </a:t>
+            </a:r>
+            <a:r>
+              <a:rPr sz="2000" b="1" i="0">
+                <a:solidFill>
+                  <a:srgbClr val="333333"/>
+                </a:solidFill>
+                <a:latin typeface="Calibri"/>
+              </a:rPr>
+              <a:t>Trabajo independiente:</a:t>
+            </a:r>
+            <a:r>
+              <a:rPr sz="2000" b="0" i="0">
+                <a:solidFill>
+                  <a:srgbClr val="333333"/>
+                </a:solidFill>
+                <a:latin typeface="Calibri"/>
+              </a:rPr>
+              <a:t> Ajuste de propuestas de solución: dejar en el documento del equipo la alternativa elegida con su alcance mínimo y el flujo dibujado, ya corregido con lo que salió en las exposiciones.</a:t>
+            </a:r>
+          </a:p>
+          <a:p>
+            <a:pPr>
+              <a:spcAft>
+                <a:spcPts val="800"/>
+              </a:spcAft>
+            </a:pPr>
+            <a:r>
+              <a:rPr sz="2000" b="0" i="0">
+                <a:solidFill>
+                  <a:srgbClr val="333333"/>
+                </a:solidFill>
+                <a:latin typeface="Calibri"/>
+              </a:rPr>
+              <a:t>–   </a:t>
+            </a:r>
+            <a:r>
+              <a:rPr sz="2000" b="1" i="0">
+                <a:solidFill>
+                  <a:srgbClr val="333333"/>
+                </a:solidFill>
+                <a:latin typeface="Calibri"/>
+              </a:rPr>
+              <a:t>Clase 9 · Estrategias de innovación en Ingeniería</a:t>
+            </a:r>
+            <a:r>
+              <a:rPr sz="2000" b="0" i="0">
+                <a:solidFill>
+                  <a:srgbClr val="333333"/>
+                </a:solidFill>
+                <a:latin typeface="Calibri"/>
+              </a:rPr>
+              <a:t> — los </a:t>
+            </a:r>
+            <a:r>
+              <a:rPr sz="2000" b="1" i="0">
+                <a:solidFill>
+                  <a:srgbClr val="333333"/>
+                </a:solidFill>
+                <a:latin typeface="Calibri"/>
+              </a:rPr>
+              <a:t>antecedentes</a:t>
+            </a:r>
+            <a:r>
+              <a:rPr sz="2000" b="0" i="0">
+                <a:solidFill>
+                  <a:srgbClr val="333333"/>
+                </a:solidFill>
+                <a:latin typeface="Calibri"/>
+              </a:rPr>
+              <a:t>: qué ya existe, quién lo intentó y cómo se busca eso con fuentes que se puedan verificar. Una respuesta de asistente de IA no es una fuente.</a:t>
+            </a:r>
+          </a:p>
+          <a:p>
+            <a:pPr>
+              <a:spcAft>
+                <a:spcPts val="800"/>
+              </a:spcAft>
+            </a:pPr>
+            <a:r>
+              <a:rPr sz="2000" b="0" i="0">
+                <a:solidFill>
+                  <a:srgbClr val="333333"/>
+                </a:solidFill>
+                <a:latin typeface="Calibri"/>
+              </a:rPr>
+              <a:t>–   </a:t>
+            </a:r>
+            <a:r>
+              <a:rPr sz="2000" b="1" i="0">
+                <a:solidFill>
+                  <a:srgbClr val="333333"/>
+                </a:solidFill>
+                <a:latin typeface="Calibri"/>
+              </a:rPr>
+              <a:t>Aviso:</a:t>
+            </a:r>
+            <a:r>
+              <a:rPr sz="2000" b="0" i="0">
+                <a:solidFill>
+                  <a:srgbClr val="333333"/>
+                </a:solidFill>
+                <a:latin typeface="Calibri"/>
+              </a:rPr>
+              <a:t> Para la sesión 9 traigan la alternativa elegida escrita y el flujo dibujado. Se va a buscar qué soluciones parecidas ya existen, y sin la propia decisión clara no hay con qué comparar.</a:t>
+            </a:r>
+          </a:p>
+          <a:p>
+            <a:pPr>
+              <a:spcAft>
+                <a:spcPts val="800"/>
+              </a:spcAft>
+            </a:pPr>
+            <a:r>
+              <a:rPr sz="2000" b="0" i="0">
+                <a:solidFill>
+                  <a:srgbClr val="333333"/>
+                </a:solidFill>
+                <a:latin typeface="Calibri"/>
+              </a:rPr>
+              <a:t>–   </a:t>
+            </a:r>
+            <a:r>
+              <a:rPr sz="2000" b="1" i="0">
+                <a:solidFill>
+                  <a:srgbClr val="333333"/>
+                </a:solidFill>
+                <a:latin typeface="Calibri"/>
+              </a:rPr>
+              <a:t>Antes de salir:</a:t>
+            </a:r>
+            <a:r>
+              <a:rPr sz="2000" b="0" i="0">
+                <a:solidFill>
+                  <a:srgbClr val="333333"/>
+                </a:solidFill>
+                <a:latin typeface="Calibri"/>
+              </a:rPr>
+              <a:t> el enlace del documento del equipo en el chat, con permiso de lectura para el docente, y el nombre del vocero de hoy.</a:t>
+            </a:r>
+          </a:p>
+        </p:txBody>
+      </p:sp>
+      <p:sp>
+        <p:nvSpPr>
+          <p:cNvPr id="6" name="TextBox 5"/>
+          <p:cNvSpPr txBox="1"/>
+          <p:nvPr/>
+        </p:nvSpPr>
+        <p:spPr>
+          <a:xfrm>
+            <a:off x="11185855" y="6473952"/>
+            <a:ext cx="640080" cy="274320"/>
+          </a:xfrm>
+          <a:prstGeom prst="rect">
+            <a:avLst/>
+          </a:prstGeom>
+          <a:noFill/>
+        </p:spPr>
+        <p:txBody>
+          <a:bodyPr wrap="square">
+            <a:spAutoFit/>
+          </a:bodyPr>
+          <a:lstStyle/>
+          <a:p>
+            <a:pPr algn="r"/>
+            <a:r>
+              <a:rPr sz="1100" b="0" i="0">
+                <a:solidFill>
+                  <a:srgbClr val="666666"/>
+                </a:solidFill>
+                <a:latin typeface="Calibri"/>
+              </a:rPr>
+              <a:t>20</a:t>
+            </a:r>
+          </a:p>
+        </p:txBody>
+      </p:sp>
+    </p:spTree>
+  </p:cSld>
+  <p:clrMapOvr>
+    <a:masterClrMapping/>
+  </p:clrMapOvr>
+</p:sld>
+</file>
+
+<file path=ppt/slides/slide21.xml><?xml version="1.0" encoding="utf-8"?>
+<p:sld xmlns:a="http://schemas.openxmlformats.org/drawingml/2006/main" xmlns:p="http://schemas.openxmlformats.org/presentationml/2006/main" xmlns:r="http://schemas.openxmlformats.org/officeDocument/2006/relationships">
+  <p:cSld>
+    <p:bg>
+      <p:bgPr>
+        <a:solidFill>
+          <a:srgbClr val="FFFFFF"/>
+        </a:solidFill>
+        <a:effectLst/>
+      </p:bgPr>
+    </p:bg>
+    <p:spTree>
+      <p:nvGrpSpPr>
+        <p:cNvPr id="1" name=""/>
+        <p:cNvGrpSpPr/>
+        <p:nvPr/>
+      </p:nvGrpSpPr>
+      <p:grpSpPr/>
+      <p:sp>
+        <p:nvSpPr>
+          <p:cNvPr id="2" name="Rectangle 1"/>
+          <p:cNvSpPr/>
+          <p:nvPr/>
+        </p:nvSpPr>
+        <p:spPr>
+          <a:xfrm>
+            <a:off x="0" y="0"/>
+            <a:ext cx="12191695" cy="164592"/>
+          </a:xfrm>
+          <a:prstGeom prst="rect">
+            <a:avLst/>
+          </a:prstGeom>
+          <a:solidFill>
+            <a:srgbClr val="269CCB"/>
+          </a:solidFill>
+          <a:ln>
+            <a:noFill/>
+          </a:ln>
+        </p:spPr>
+        <p:style>
+          <a:lnRef idx="1">
+            <a:schemeClr val="accent1"/>
+          </a:lnRef>
+          <a:fillRef idx="3">
+            <a:schemeClr val="accent1"/>
+          </a:fillRef>
+          <a:effectRef idx="2">
+            <a:schemeClr val="accent1"/>
+          </a:effectRef>
+          <a:fontRef idx="minor">
+            <a:schemeClr val="lt1"/>
+          </a:fontRef>
+        </p:style>
+        <p:txBody>
+          <a:bodyPr rtlCol="0" anchor="ctr"/>
+          <a:lstStyle/>
+          <a:p>
+            <a:pPr algn="ctr"/>
+          </a:p>
+        </p:txBody>
+      </p:sp>
+      <p:pic>
+        <p:nvPicPr>
+          <p:cNvPr id="3" name="Picture 2" descr="logo_uniajc_color.png"/>
+          <p:cNvPicPr>
+            <a:picLocks noChangeAspect="1"/>
+          </p:cNvPicPr>
+          <p:nvPr/>
+        </p:nvPicPr>
+        <p:blipFill>
+          <a:blip r:embed="rId2"/>
+          <a:stretch>
+            <a:fillRect/>
+          </a:stretch>
+        </p:blipFill>
+        <p:spPr>
+          <a:xfrm>
+            <a:off x="10271455" y="5998464"/>
+            <a:ext cx="1463040" cy="643233"/>
+          </a:xfrm>
+          <a:prstGeom prst="rect">
+            <a:avLst/>
+          </a:prstGeom>
+        </p:spPr>
+      </p:pic>
+      <p:sp>
+        <p:nvSpPr>
+          <p:cNvPr id="4" name="TextBox 3"/>
+          <p:cNvSpPr txBox="1"/>
+          <p:nvPr/>
+        </p:nvSpPr>
+        <p:spPr>
+          <a:xfrm>
+            <a:off x="457200" y="1737360"/>
+            <a:ext cx="11277295" cy="1097280"/>
+          </a:xfrm>
+          <a:prstGeom prst="rect">
+            <a:avLst/>
+          </a:prstGeom>
+          <a:noFill/>
+        </p:spPr>
+        <p:txBody>
+          <a:bodyPr wrap="square" anchor="ctr"/>
+          <a:lstStyle/>
+          <a:p>
+            <a:pPr algn="ctr"/>
+            <a:r>
+              <a:rPr sz="3400" b="1" i="0">
+                <a:solidFill>
+                  <a:srgbClr val="095292"/>
+                </a:solidFill>
+                <a:latin typeface="Calibri"/>
+              </a:rPr>
+              <a:t>Nos vemos en la sesión 9</a:t>
+            </a:r>
+          </a:p>
+        </p:txBody>
+      </p:sp>
+      <p:sp>
+        <p:nvSpPr>
+          <p:cNvPr id="5" name="TextBox 4"/>
+          <p:cNvSpPr txBox="1"/>
+          <p:nvPr/>
+        </p:nvSpPr>
+        <p:spPr>
+          <a:xfrm>
+            <a:off x="457200" y="3017520"/>
+            <a:ext cx="11277295" cy="1645920"/>
+          </a:xfrm>
+          <a:prstGeom prst="rect">
+            <a:avLst/>
+          </a:prstGeom>
+          <a:noFill/>
+        </p:spPr>
+        <p:txBody>
+          <a:bodyPr wrap="square">
+            <a:spAutoFit/>
+          </a:bodyPr>
+          <a:lstStyle/>
+          <a:p>
+            <a:pPr algn="ctr">
+              <a:spcAft>
+                <a:spcPts val="600"/>
+              </a:spcAft>
+            </a:pPr>
+            <a:r>
+              <a:rPr sz="1600" b="0" i="0">
+                <a:solidFill>
+                  <a:srgbClr val="333333"/>
+                </a:solidFill>
+                <a:latin typeface="Calibri"/>
+              </a:rPr>
+              <a:t>Taller de aplicación del ciclo de vida · Clase 8</a:t>
+            </a:r>
+          </a:p>
+          <a:p>
+            <a:pPr algn="ctr">
+              <a:spcAft>
+                <a:spcPts val="600"/>
+              </a:spcAft>
+            </a:pPr>
+            <a:r>
+              <a:rPr sz="1600" b="0" i="0">
+                <a:solidFill>
+                  <a:srgbClr val="333333"/>
+                </a:solidFill>
+                <a:latin typeface="Calibri"/>
+              </a:rPr>
+              <a:t>FI300101 · UNIAJC · Ingeniería de Sistemas</a:t>
+            </a:r>
+          </a:p>
+        </p:txBody>
+      </p:sp>
+      <p:sp>
+        <p:nvSpPr>
+          <p:cNvPr id="6" name="TextBox 5"/>
+          <p:cNvSpPr txBox="1"/>
+          <p:nvPr/>
+        </p:nvSpPr>
+        <p:spPr>
+          <a:xfrm>
+            <a:off x="457200" y="4754880"/>
+            <a:ext cx="11277295" cy="640080"/>
+          </a:xfrm>
+          <a:prstGeom prst="rect">
+            <a:avLst/>
+          </a:prstGeom>
+          <a:noFill/>
+        </p:spPr>
+        <p:txBody>
+          <a:bodyPr wrap="square">
+            <a:spAutoFit/>
+          </a:bodyPr>
+          <a:lstStyle/>
+          <a:p>
+            <a:pPr algn="ctr"/>
+            <a:r>
+              <a:rPr sz="2000" b="1" i="0">
+                <a:solidFill>
+                  <a:srgbClr val="269CCB"/>
+                </a:solidFill>
+                <a:latin typeface="Calibri"/>
+              </a:rPr>
+              <a:t>Decidir no es acertar: es poder defender lo que se eligió y lo que se perdió</a:t>
             </a:r>
           </a:p>
         </p:txBody>

--- a/Introduccion a la Ingenieria/Clases/Clase 8 - Taller de aplicacion del ciclo de vida/Presentacion.pptx
+++ b/Introduccion a la Ingenieria/Clases/Clase 8 - Taller de aplicacion del ciclo de vida/Presentacion.pptx
@@ -17,9 +17,6 @@
     <p:sldId id="265" r:id="rId17"/>
     <p:sldId id="266" r:id="rId18"/>
     <p:sldId id="267" r:id="rId19"/>
-    <p:sldId id="268" r:id="rId20"/>
-    <p:sldId id="269" r:id="rId21"/>
-    <p:sldId id="270" r:id="rId22"/>
   </p:sldIdLst>
   <p:sldSz cx="12191695" cy="6858000" type="screen4x3"/>
   <p:notesSz cx="6858000" cy="9144000"/>
@@ -6011,2697 +6008,6 @@
 </file>
 
 <file path=ppt/slides/slide12.xml><?xml version="1.0" encoding="utf-8"?>
-<p:sld xmlns:a="http://schemas.openxmlformats.org/drawingml/2006/main" xmlns:p="http://schemas.openxmlformats.org/presentationml/2006/main" xmlns:r="http://schemas.openxmlformats.org/officeDocument/2006/relationships">
-  <p:cSld>
-    <p:bg>
-      <p:bgPr>
-        <a:solidFill>
-          <a:srgbClr val="FFFFFF"/>
-        </a:solidFill>
-        <a:effectLst/>
-      </p:bgPr>
-    </p:bg>
-    <p:spTree>
-      <p:nvGrpSpPr>
-        <p:cNvPr id="1" name=""/>
-        <p:cNvGrpSpPr/>
-        <p:nvPr/>
-      </p:nvGrpSpPr>
-      <p:grpSpPr/>
-      <p:sp>
-        <p:nvSpPr>
-          <p:cNvPr id="2" name="Rectangle 1"/>
-          <p:cNvSpPr/>
-          <p:nvPr/>
-        </p:nvSpPr>
-        <p:spPr>
-          <a:xfrm>
-            <a:off x="0" y="0"/>
-            <a:ext cx="12191695" cy="1170432"/>
-          </a:xfrm>
-          <a:prstGeom prst="rect">
-            <a:avLst/>
-          </a:prstGeom>
-          <a:solidFill>
-            <a:srgbClr val="095292"/>
-          </a:solidFill>
-          <a:ln>
-            <a:noFill/>
-          </a:ln>
-        </p:spPr>
-        <p:style>
-          <a:lnRef idx="1">
-            <a:schemeClr val="accent1"/>
-          </a:lnRef>
-          <a:fillRef idx="3">
-            <a:schemeClr val="accent1"/>
-          </a:fillRef>
-          <a:effectRef idx="2">
-            <a:schemeClr val="accent1"/>
-          </a:effectRef>
-          <a:fontRef idx="minor">
-            <a:schemeClr val="lt1"/>
-          </a:fontRef>
-        </p:style>
-        <p:txBody>
-          <a:bodyPr rtlCol="0" anchor="ctr"/>
-          <a:lstStyle/>
-          <a:p>
-            <a:pPr algn="ctr"/>
-          </a:p>
-        </p:txBody>
-      </p:sp>
-      <p:sp>
-        <p:nvSpPr>
-          <p:cNvPr id="3" name="Rectangle 2"/>
-          <p:cNvSpPr/>
-          <p:nvPr/>
-        </p:nvSpPr>
-        <p:spPr>
-          <a:xfrm>
-            <a:off x="0" y="1170432"/>
-            <a:ext cx="12191695" cy="41148"/>
-          </a:xfrm>
-          <a:prstGeom prst="rect">
-            <a:avLst/>
-          </a:prstGeom>
-          <a:solidFill>
-            <a:srgbClr val="FFD000"/>
-          </a:solidFill>
-          <a:ln>
-            <a:noFill/>
-          </a:ln>
-        </p:spPr>
-        <p:style>
-          <a:lnRef idx="1">
-            <a:schemeClr val="accent1"/>
-          </a:lnRef>
-          <a:fillRef idx="3">
-            <a:schemeClr val="accent1"/>
-          </a:fillRef>
-          <a:effectRef idx="2">
-            <a:schemeClr val="accent1"/>
-          </a:effectRef>
-          <a:fontRef idx="minor">
-            <a:schemeClr val="lt1"/>
-          </a:fontRef>
-        </p:style>
-        <p:txBody>
-          <a:bodyPr rtlCol="0" anchor="ctr"/>
-          <a:lstStyle/>
-          <a:p>
-            <a:pPr algn="ctr"/>
-          </a:p>
-        </p:txBody>
-      </p:sp>
-      <p:sp>
-        <p:nvSpPr>
-          <p:cNvPr id="4" name="TextBox 3"/>
-          <p:cNvSpPr txBox="1"/>
-          <p:nvPr/>
-        </p:nvSpPr>
-        <p:spPr>
-          <a:xfrm>
-            <a:off x="457200" y="164592"/>
-            <a:ext cx="11277295" cy="384048"/>
-          </a:xfrm>
-          <a:prstGeom prst="rect">
-            <a:avLst/>
-          </a:prstGeom>
-          <a:noFill/>
-        </p:spPr>
-        <p:txBody>
-          <a:bodyPr wrap="square">
-            <a:spAutoFit/>
-          </a:bodyPr>
-          <a:lstStyle/>
-          <a:p>
-            <a:r>
-              <a:rPr sz="2600" b="1" i="0">
-                <a:solidFill>
-                  <a:srgbClr val="FFFFFF"/>
-                </a:solidFill>
-                <a:latin typeface="Calibri"/>
-              </a:rPr>
-              <a:t>Taller de hoy: Decisión de la solución y alcance mínimo</a:t>
-            </a:r>
-          </a:p>
-        </p:txBody>
-      </p:sp>
-      <p:sp>
-        <p:nvSpPr>
-          <p:cNvPr id="5" name="TextBox 4"/>
-          <p:cNvSpPr txBox="1"/>
-          <p:nvPr/>
-        </p:nvSpPr>
-        <p:spPr>
-          <a:xfrm>
-            <a:off x="457200" y="566928"/>
-            <a:ext cx="11277295" cy="411480"/>
-          </a:xfrm>
-          <a:prstGeom prst="rect">
-            <a:avLst/>
-          </a:prstGeom>
-          <a:noFill/>
-        </p:spPr>
-        <p:txBody>
-          <a:bodyPr wrap="square">
-            <a:spAutoFit/>
-          </a:bodyPr>
-          <a:lstStyle/>
-          <a:p>
-            <a:r>
-              <a:rPr sz="1400" b="0" i="0">
-                <a:solidFill>
-                  <a:srgbClr val="B8D8EE"/>
-                </a:solidFill>
-                <a:latin typeface="Calibri"/>
-              </a:rPr>
-              <a:t>40 min en equipos · 40 min con ritmo interno: alternativas, matriz, alcance, validación · matriz de decisión + alcance mínimo + plan de validación</a:t>
-            </a:r>
-          </a:p>
-        </p:txBody>
-      </p:sp>
-      <p:sp>
-        <p:nvSpPr>
-          <p:cNvPr id="6" name="Rounded Rectangle 5"/>
-          <p:cNvSpPr/>
-          <p:nvPr/>
-        </p:nvSpPr>
-        <p:spPr>
-          <a:xfrm>
-            <a:off x="457200" y="1472184"/>
-            <a:ext cx="11277295" cy="566928"/>
-          </a:xfrm>
-          <a:prstGeom prst="roundRect">
-            <a:avLst>
-              <a:gd name="adj" fmla="val 12000"/>
-            </a:avLst>
-          </a:prstGeom>
-          <a:solidFill>
-            <a:srgbClr val="F2F2F2"/>
-          </a:solidFill>
-          <a:ln>
-            <a:noFill/>
-          </a:ln>
-        </p:spPr>
-        <p:style>
-          <a:lnRef idx="1">
-            <a:schemeClr val="accent1"/>
-          </a:lnRef>
-          <a:fillRef idx="3">
-            <a:schemeClr val="accent1"/>
-          </a:fillRef>
-          <a:effectRef idx="2">
-            <a:schemeClr val="accent1"/>
-          </a:effectRef>
-          <a:fontRef idx="minor">
-            <a:schemeClr val="lt1"/>
-          </a:fontRef>
-        </p:style>
-        <p:txBody>
-          <a:bodyPr rtlCol="0" anchor="ctr"/>
-          <a:lstStyle/>
-          <a:p>
-            <a:pPr algn="ctr"/>
-          </a:p>
-        </p:txBody>
-      </p:sp>
-      <p:sp>
-        <p:nvSpPr>
-          <p:cNvPr id="7" name="Rectangle 6"/>
-          <p:cNvSpPr/>
-          <p:nvPr/>
-        </p:nvSpPr>
-        <p:spPr>
-          <a:xfrm>
-            <a:off x="640080" y="1618487"/>
-            <a:ext cx="274320" cy="274320"/>
-          </a:xfrm>
-          <a:prstGeom prst="rect">
-            <a:avLst/>
-          </a:prstGeom>
-          <a:solidFill>
-            <a:srgbClr val="FFFFFF"/>
-          </a:solidFill>
-          <a:ln>
-            <a:solidFill>
-              <a:srgbClr val="333333"/>
-            </a:solidFill>
-          </a:ln>
-        </p:spPr>
-        <p:style>
-          <a:lnRef idx="1">
-            <a:schemeClr val="accent1"/>
-          </a:lnRef>
-          <a:fillRef idx="3">
-            <a:schemeClr val="accent1"/>
-          </a:fillRef>
-          <a:effectRef idx="2">
-            <a:schemeClr val="accent1"/>
-          </a:effectRef>
-          <a:fontRef idx="minor">
-            <a:schemeClr val="lt1"/>
-          </a:fontRef>
-        </p:style>
-        <p:txBody>
-          <a:bodyPr rtlCol="0" anchor="ctr"/>
-          <a:lstStyle/>
-          <a:p>
-            <a:pPr algn="ctr"/>
-          </a:p>
-        </p:txBody>
-      </p:sp>
-      <p:sp>
-        <p:nvSpPr>
-          <p:cNvPr id="8" name="Rectangle 7"/>
-          <p:cNvSpPr/>
-          <p:nvPr/>
-        </p:nvSpPr>
-        <p:spPr>
-          <a:xfrm>
-            <a:off x="640080" y="1618487"/>
-            <a:ext cx="73152" cy="274320"/>
-          </a:xfrm>
-          <a:prstGeom prst="rect">
-            <a:avLst/>
-          </a:prstGeom>
-          <a:solidFill>
-            <a:srgbClr val="269CCB"/>
-          </a:solidFill>
-          <a:ln>
-            <a:noFill/>
-          </a:ln>
-        </p:spPr>
-        <p:style>
-          <a:lnRef idx="1">
-            <a:schemeClr val="accent1"/>
-          </a:lnRef>
-          <a:fillRef idx="3">
-            <a:schemeClr val="accent1"/>
-          </a:fillRef>
-          <a:effectRef idx="2">
-            <a:schemeClr val="accent1"/>
-          </a:effectRef>
-          <a:fontRef idx="minor">
-            <a:schemeClr val="lt1"/>
-          </a:fontRef>
-        </p:style>
-        <p:txBody>
-          <a:bodyPr rtlCol="0" anchor="ctr"/>
-          <a:lstStyle/>
-          <a:p>
-            <a:pPr algn="ctr"/>
-          </a:p>
-        </p:txBody>
-      </p:sp>
-      <p:sp>
-        <p:nvSpPr>
-          <p:cNvPr id="9" name="TextBox 8"/>
-          <p:cNvSpPr txBox="1"/>
-          <p:nvPr/>
-        </p:nvSpPr>
-        <p:spPr>
-          <a:xfrm>
-            <a:off x="1097280" y="1563624"/>
-            <a:ext cx="10362895" cy="402336"/>
-          </a:xfrm>
-          <a:prstGeom prst="rect">
-            <a:avLst/>
-          </a:prstGeom>
-          <a:noFill/>
-        </p:spPr>
-        <p:txBody>
-          <a:bodyPr wrap="square" anchor="ctr"/>
-          <a:lstStyle/>
-          <a:p>
-            <a:r>
-              <a:rPr sz="1500" b="1" i="0">
-                <a:solidFill>
-                  <a:srgbClr val="333333"/>
-                </a:solidFill>
-                <a:latin typeface="Calibri"/>
-              </a:rPr>
-              <a:t>LAS DOS ALTERNATIVAS</a:t>
-            </a:r>
-            <a:r>
-              <a:rPr sz="1500" b="0" i="0">
-                <a:solidFill>
-                  <a:srgbClr val="333333"/>
-                </a:solidFill>
-                <a:latin typeface="Calibri"/>
-              </a:rPr>
-              <a:t> — Cada alternativa en </a:t>
-            </a:r>
-            <a:r>
-              <a:rPr sz="1500" b="1" i="0">
-                <a:solidFill>
-                  <a:srgbClr val="333333"/>
-                </a:solidFill>
-                <a:latin typeface="Calibri"/>
-              </a:rPr>
-              <a:t>una frase</a:t>
-            </a:r>
-            <a:r>
-              <a:rPr sz="1500" b="0" i="0">
-                <a:solidFill>
-                  <a:srgbClr val="333333"/>
-                </a:solidFill>
-                <a:latin typeface="Calibri"/>
-              </a:rPr>
-              <a:t>, sin adjetivos, diciendo qué hace y cómo resuelve la causa elegida en el árbol de la sesión 6.</a:t>
-            </a:r>
-          </a:p>
-        </p:txBody>
-      </p:sp>
-      <p:sp>
-        <p:nvSpPr>
-          <p:cNvPr id="10" name="Rounded Rectangle 9"/>
-          <p:cNvSpPr/>
-          <p:nvPr/>
-        </p:nvSpPr>
-        <p:spPr>
-          <a:xfrm>
-            <a:off x="457200" y="2148839"/>
-            <a:ext cx="11277295" cy="566928"/>
-          </a:xfrm>
-          <a:prstGeom prst="roundRect">
-            <a:avLst>
-              <a:gd name="adj" fmla="val 12000"/>
-            </a:avLst>
-          </a:prstGeom>
-          <a:solidFill>
-            <a:srgbClr val="F2F2F2"/>
-          </a:solidFill>
-          <a:ln>
-            <a:noFill/>
-          </a:ln>
-        </p:spPr>
-        <p:style>
-          <a:lnRef idx="1">
-            <a:schemeClr val="accent1"/>
-          </a:lnRef>
-          <a:fillRef idx="3">
-            <a:schemeClr val="accent1"/>
-          </a:fillRef>
-          <a:effectRef idx="2">
-            <a:schemeClr val="accent1"/>
-          </a:effectRef>
-          <a:fontRef idx="minor">
-            <a:schemeClr val="lt1"/>
-          </a:fontRef>
-        </p:style>
-        <p:txBody>
-          <a:bodyPr rtlCol="0" anchor="ctr"/>
-          <a:lstStyle/>
-          <a:p>
-            <a:pPr algn="ctr"/>
-          </a:p>
-        </p:txBody>
-      </p:sp>
-      <p:sp>
-        <p:nvSpPr>
-          <p:cNvPr id="11" name="Rectangle 10"/>
-          <p:cNvSpPr/>
-          <p:nvPr/>
-        </p:nvSpPr>
-        <p:spPr>
-          <a:xfrm>
-            <a:off x="640080" y="2295144"/>
-            <a:ext cx="274320" cy="274320"/>
-          </a:xfrm>
-          <a:prstGeom prst="rect">
-            <a:avLst/>
-          </a:prstGeom>
-          <a:solidFill>
-            <a:srgbClr val="FFFFFF"/>
-          </a:solidFill>
-          <a:ln>
-            <a:solidFill>
-              <a:srgbClr val="333333"/>
-            </a:solidFill>
-          </a:ln>
-        </p:spPr>
-        <p:style>
-          <a:lnRef idx="1">
-            <a:schemeClr val="accent1"/>
-          </a:lnRef>
-          <a:fillRef idx="3">
-            <a:schemeClr val="accent1"/>
-          </a:fillRef>
-          <a:effectRef idx="2">
-            <a:schemeClr val="accent1"/>
-          </a:effectRef>
-          <a:fontRef idx="minor">
-            <a:schemeClr val="lt1"/>
-          </a:fontRef>
-        </p:style>
-        <p:txBody>
-          <a:bodyPr rtlCol="0" anchor="ctr"/>
-          <a:lstStyle/>
-          <a:p>
-            <a:pPr algn="ctr"/>
-          </a:p>
-        </p:txBody>
-      </p:sp>
-      <p:sp>
-        <p:nvSpPr>
-          <p:cNvPr id="12" name="Rectangle 11"/>
-          <p:cNvSpPr/>
-          <p:nvPr/>
-        </p:nvSpPr>
-        <p:spPr>
-          <a:xfrm>
-            <a:off x="640080" y="2295144"/>
-            <a:ext cx="73152" cy="274320"/>
-          </a:xfrm>
-          <a:prstGeom prst="rect">
-            <a:avLst/>
-          </a:prstGeom>
-          <a:solidFill>
-            <a:srgbClr val="269CCB"/>
-          </a:solidFill>
-          <a:ln>
-            <a:noFill/>
-          </a:ln>
-        </p:spPr>
-        <p:style>
-          <a:lnRef idx="1">
-            <a:schemeClr val="accent1"/>
-          </a:lnRef>
-          <a:fillRef idx="3">
-            <a:schemeClr val="accent1"/>
-          </a:fillRef>
-          <a:effectRef idx="2">
-            <a:schemeClr val="accent1"/>
-          </a:effectRef>
-          <a:fontRef idx="minor">
-            <a:schemeClr val="lt1"/>
-          </a:fontRef>
-        </p:style>
-        <p:txBody>
-          <a:bodyPr rtlCol="0" anchor="ctr"/>
-          <a:lstStyle/>
-          <a:p>
-            <a:pPr algn="ctr"/>
-          </a:p>
-        </p:txBody>
-      </p:sp>
-      <p:sp>
-        <p:nvSpPr>
-          <p:cNvPr id="13" name="TextBox 12"/>
-          <p:cNvSpPr txBox="1"/>
-          <p:nvPr/>
-        </p:nvSpPr>
-        <p:spPr>
-          <a:xfrm>
-            <a:off x="1097280" y="2240279"/>
-            <a:ext cx="10362895" cy="402336"/>
-          </a:xfrm>
-          <a:prstGeom prst="rect">
-            <a:avLst/>
-          </a:prstGeom>
-          <a:noFill/>
-        </p:spPr>
-        <p:txBody>
-          <a:bodyPr wrap="square" anchor="ctr"/>
-          <a:lstStyle/>
-          <a:p>
-            <a:r>
-              <a:rPr sz="1500" b="1" i="0">
-                <a:solidFill>
-                  <a:srgbClr val="333333"/>
-                </a:solidFill>
-                <a:latin typeface="Calibri"/>
-              </a:rPr>
-              <a:t>LOS CRITERIOS Y SUS PESOS</a:t>
-            </a:r>
-            <a:r>
-              <a:rPr sz="1500" b="0" i="0">
-                <a:solidFill>
-                  <a:srgbClr val="333333"/>
-                </a:solidFill>
-                <a:latin typeface="Calibri"/>
-              </a:rPr>
-              <a:t> — De 3 a 5 criterios sacados de sus </a:t>
-            </a:r>
-            <a:r>
-              <a:rPr sz="1500" b="1" i="0">
-                <a:solidFill>
-                  <a:srgbClr val="333333"/>
-                </a:solidFill>
-                <a:latin typeface="Calibri"/>
-              </a:rPr>
-              <a:t>requisitos no funcionales y restricciones</a:t>
-            </a:r>
-            <a:r>
-              <a:rPr sz="1500" b="0" i="0">
-                <a:solidFill>
-                  <a:srgbClr val="333333"/>
-                </a:solidFill>
-                <a:latin typeface="Calibri"/>
-              </a:rPr>
-              <a:t>, cada uno con un peso, </a:t>
-            </a:r>
-            <a:r>
-              <a:rPr sz="1500" b="1" i="0">
-                <a:solidFill>
-                  <a:srgbClr val="333333"/>
-                </a:solidFill>
-                <a:latin typeface="Calibri"/>
-              </a:rPr>
-              <a:t>escritos antes de calificar</a:t>
-            </a:r>
-            <a:r>
-              <a:rPr sz="1500" b="0" i="0">
-                <a:solidFill>
-                  <a:srgbClr val="333333"/>
-                </a:solidFill>
-                <a:latin typeface="Calibri"/>
-              </a:rPr>
-              <a:t>.</a:t>
-            </a:r>
-          </a:p>
-        </p:txBody>
-      </p:sp>
-      <p:sp>
-        <p:nvSpPr>
-          <p:cNvPr id="14" name="Rounded Rectangle 13"/>
-          <p:cNvSpPr/>
-          <p:nvPr/>
-        </p:nvSpPr>
-        <p:spPr>
-          <a:xfrm>
-            <a:off x="457200" y="2825496"/>
-            <a:ext cx="11277295" cy="566928"/>
-          </a:xfrm>
-          <a:prstGeom prst="roundRect">
-            <a:avLst>
-              <a:gd name="adj" fmla="val 12000"/>
-            </a:avLst>
-          </a:prstGeom>
-          <a:solidFill>
-            <a:srgbClr val="F2F2F2"/>
-          </a:solidFill>
-          <a:ln>
-            <a:noFill/>
-          </a:ln>
-        </p:spPr>
-        <p:style>
-          <a:lnRef idx="1">
-            <a:schemeClr val="accent1"/>
-          </a:lnRef>
-          <a:fillRef idx="3">
-            <a:schemeClr val="accent1"/>
-          </a:fillRef>
-          <a:effectRef idx="2">
-            <a:schemeClr val="accent1"/>
-          </a:effectRef>
-          <a:fontRef idx="minor">
-            <a:schemeClr val="lt1"/>
-          </a:fontRef>
-        </p:style>
-        <p:txBody>
-          <a:bodyPr rtlCol="0" anchor="ctr"/>
-          <a:lstStyle/>
-          <a:p>
-            <a:pPr algn="ctr"/>
-          </a:p>
-        </p:txBody>
-      </p:sp>
-      <p:sp>
-        <p:nvSpPr>
-          <p:cNvPr id="15" name="Rectangle 14"/>
-          <p:cNvSpPr/>
-          <p:nvPr/>
-        </p:nvSpPr>
-        <p:spPr>
-          <a:xfrm>
-            <a:off x="640080" y="2971800"/>
-            <a:ext cx="274320" cy="274320"/>
-          </a:xfrm>
-          <a:prstGeom prst="rect">
-            <a:avLst/>
-          </a:prstGeom>
-          <a:solidFill>
-            <a:srgbClr val="FFFFFF"/>
-          </a:solidFill>
-          <a:ln>
-            <a:solidFill>
-              <a:srgbClr val="333333"/>
-            </a:solidFill>
-          </a:ln>
-        </p:spPr>
-        <p:style>
-          <a:lnRef idx="1">
-            <a:schemeClr val="accent1"/>
-          </a:lnRef>
-          <a:fillRef idx="3">
-            <a:schemeClr val="accent1"/>
-          </a:fillRef>
-          <a:effectRef idx="2">
-            <a:schemeClr val="accent1"/>
-          </a:effectRef>
-          <a:fontRef idx="minor">
-            <a:schemeClr val="lt1"/>
-          </a:fontRef>
-        </p:style>
-        <p:txBody>
-          <a:bodyPr rtlCol="0" anchor="ctr"/>
-          <a:lstStyle/>
-          <a:p>
-            <a:pPr algn="ctr"/>
-          </a:p>
-        </p:txBody>
-      </p:sp>
-      <p:sp>
-        <p:nvSpPr>
-          <p:cNvPr id="16" name="Rectangle 15"/>
-          <p:cNvSpPr/>
-          <p:nvPr/>
-        </p:nvSpPr>
-        <p:spPr>
-          <a:xfrm>
-            <a:off x="640080" y="2971800"/>
-            <a:ext cx="73152" cy="274320"/>
-          </a:xfrm>
-          <a:prstGeom prst="rect">
-            <a:avLst/>
-          </a:prstGeom>
-          <a:solidFill>
-            <a:srgbClr val="269CCB"/>
-          </a:solidFill>
-          <a:ln>
-            <a:noFill/>
-          </a:ln>
-        </p:spPr>
-        <p:style>
-          <a:lnRef idx="1">
-            <a:schemeClr val="accent1"/>
-          </a:lnRef>
-          <a:fillRef idx="3">
-            <a:schemeClr val="accent1"/>
-          </a:fillRef>
-          <a:effectRef idx="2">
-            <a:schemeClr val="accent1"/>
-          </a:effectRef>
-          <a:fontRef idx="minor">
-            <a:schemeClr val="lt1"/>
-          </a:fontRef>
-        </p:style>
-        <p:txBody>
-          <a:bodyPr rtlCol="0" anchor="ctr"/>
-          <a:lstStyle/>
-          <a:p>
-            <a:pPr algn="ctr"/>
-          </a:p>
-        </p:txBody>
-      </p:sp>
-      <p:sp>
-        <p:nvSpPr>
-          <p:cNvPr id="17" name="TextBox 16"/>
-          <p:cNvSpPr txBox="1"/>
-          <p:nvPr/>
-        </p:nvSpPr>
-        <p:spPr>
-          <a:xfrm>
-            <a:off x="1097280" y="2916936"/>
-            <a:ext cx="10362895" cy="402336"/>
-          </a:xfrm>
-          <a:prstGeom prst="rect">
-            <a:avLst/>
-          </a:prstGeom>
-          <a:noFill/>
-        </p:spPr>
-        <p:txBody>
-          <a:bodyPr wrap="square" anchor="ctr"/>
-          <a:lstStyle/>
-          <a:p>
-            <a:r>
-              <a:rPr sz="1500" b="1" i="0">
-                <a:solidFill>
-                  <a:srgbClr val="333333"/>
-                </a:solidFill>
-                <a:latin typeface="Calibri"/>
-              </a:rPr>
-              <a:t>LA MATRIZ Y LA DECISIÓN</a:t>
-            </a:r>
-            <a:r>
-              <a:rPr sz="1500" b="0" i="0">
-                <a:solidFill>
-                  <a:srgbClr val="333333"/>
-                </a:solidFill>
-                <a:latin typeface="Calibri"/>
-              </a:rPr>
-              <a:t> — Cada alternativa calificada criterio por criterio (escala 1-3) con </a:t>
-            </a:r>
-            <a:r>
-              <a:rPr sz="1500" b="1" i="0">
-                <a:solidFill>
-                  <a:srgbClr val="333333"/>
-                </a:solidFill>
-                <a:latin typeface="Calibri"/>
-              </a:rPr>
-              <a:t>media línea de justificación por casilla</a:t>
-            </a:r>
-            <a:r>
-              <a:rPr sz="1500" b="0" i="0">
-                <a:solidFill>
-                  <a:srgbClr val="333333"/>
-                </a:solidFill>
-                <a:latin typeface="Calibri"/>
-              </a:rPr>
-              <a:t>, el resultado, y la decisión.</a:t>
-            </a:r>
-          </a:p>
-        </p:txBody>
-      </p:sp>
-      <p:sp>
-        <p:nvSpPr>
-          <p:cNvPr id="18" name="Rounded Rectangle 17"/>
-          <p:cNvSpPr/>
-          <p:nvPr/>
-        </p:nvSpPr>
-        <p:spPr>
-          <a:xfrm>
-            <a:off x="457200" y="3502152"/>
-            <a:ext cx="11277295" cy="566928"/>
-          </a:xfrm>
-          <a:prstGeom prst="roundRect">
-            <a:avLst>
-              <a:gd name="adj" fmla="val 12000"/>
-            </a:avLst>
-          </a:prstGeom>
-          <a:solidFill>
-            <a:srgbClr val="F2F2F2"/>
-          </a:solidFill>
-          <a:ln>
-            <a:noFill/>
-          </a:ln>
-        </p:spPr>
-        <p:style>
-          <a:lnRef idx="1">
-            <a:schemeClr val="accent1"/>
-          </a:lnRef>
-          <a:fillRef idx="3">
-            <a:schemeClr val="accent1"/>
-          </a:fillRef>
-          <a:effectRef idx="2">
-            <a:schemeClr val="accent1"/>
-          </a:effectRef>
-          <a:fontRef idx="minor">
-            <a:schemeClr val="lt1"/>
-          </a:fontRef>
-        </p:style>
-        <p:txBody>
-          <a:bodyPr rtlCol="0" anchor="ctr"/>
-          <a:lstStyle/>
-          <a:p>
-            <a:pPr algn="ctr"/>
-          </a:p>
-        </p:txBody>
-      </p:sp>
-      <p:sp>
-        <p:nvSpPr>
-          <p:cNvPr id="19" name="Rectangle 18"/>
-          <p:cNvSpPr/>
-          <p:nvPr/>
-        </p:nvSpPr>
-        <p:spPr>
-          <a:xfrm>
-            <a:off x="640080" y="3648456"/>
-            <a:ext cx="274320" cy="274320"/>
-          </a:xfrm>
-          <a:prstGeom prst="rect">
-            <a:avLst/>
-          </a:prstGeom>
-          <a:solidFill>
-            <a:srgbClr val="FFFFFF"/>
-          </a:solidFill>
-          <a:ln>
-            <a:solidFill>
-              <a:srgbClr val="333333"/>
-            </a:solidFill>
-          </a:ln>
-        </p:spPr>
-        <p:style>
-          <a:lnRef idx="1">
-            <a:schemeClr val="accent1"/>
-          </a:lnRef>
-          <a:fillRef idx="3">
-            <a:schemeClr val="accent1"/>
-          </a:fillRef>
-          <a:effectRef idx="2">
-            <a:schemeClr val="accent1"/>
-          </a:effectRef>
-          <a:fontRef idx="minor">
-            <a:schemeClr val="lt1"/>
-          </a:fontRef>
-        </p:style>
-        <p:txBody>
-          <a:bodyPr rtlCol="0" anchor="ctr"/>
-          <a:lstStyle/>
-          <a:p>
-            <a:pPr algn="ctr"/>
-          </a:p>
-        </p:txBody>
-      </p:sp>
-      <p:sp>
-        <p:nvSpPr>
-          <p:cNvPr id="20" name="Rectangle 19"/>
-          <p:cNvSpPr/>
-          <p:nvPr/>
-        </p:nvSpPr>
-        <p:spPr>
-          <a:xfrm>
-            <a:off x="640080" y="3648456"/>
-            <a:ext cx="73152" cy="274320"/>
-          </a:xfrm>
-          <a:prstGeom prst="rect">
-            <a:avLst/>
-          </a:prstGeom>
-          <a:solidFill>
-            <a:srgbClr val="269CCB"/>
-          </a:solidFill>
-          <a:ln>
-            <a:noFill/>
-          </a:ln>
-        </p:spPr>
-        <p:style>
-          <a:lnRef idx="1">
-            <a:schemeClr val="accent1"/>
-          </a:lnRef>
-          <a:fillRef idx="3">
-            <a:schemeClr val="accent1"/>
-          </a:fillRef>
-          <a:effectRef idx="2">
-            <a:schemeClr val="accent1"/>
-          </a:effectRef>
-          <a:fontRef idx="minor">
-            <a:schemeClr val="lt1"/>
-          </a:fontRef>
-        </p:style>
-        <p:txBody>
-          <a:bodyPr rtlCol="0" anchor="ctr"/>
-          <a:lstStyle/>
-          <a:p>
-            <a:pPr algn="ctr"/>
-          </a:p>
-        </p:txBody>
-      </p:sp>
-      <p:sp>
-        <p:nvSpPr>
-          <p:cNvPr id="21" name="TextBox 20"/>
-          <p:cNvSpPr txBox="1"/>
-          <p:nvPr/>
-        </p:nvSpPr>
-        <p:spPr>
-          <a:xfrm>
-            <a:off x="1097280" y="3593592"/>
-            <a:ext cx="10362895" cy="402336"/>
-          </a:xfrm>
-          <a:prstGeom prst="rect">
-            <a:avLst/>
-          </a:prstGeom>
-          <a:noFill/>
-        </p:spPr>
-        <p:txBody>
-          <a:bodyPr wrap="square" anchor="ctr"/>
-          <a:lstStyle/>
-          <a:p>
-            <a:r>
-              <a:rPr sz="1500" b="1" i="0">
-                <a:solidFill>
-                  <a:srgbClr val="333333"/>
-                </a:solidFill>
-                <a:latin typeface="Calibri"/>
-              </a:rPr>
-              <a:t>QUÉ SE PIERDE</a:t>
-            </a:r>
-            <a:r>
-              <a:rPr sz="1500" b="0" i="0">
-                <a:solidFill>
-                  <a:srgbClr val="333333"/>
-                </a:solidFill>
-                <a:latin typeface="Calibri"/>
-              </a:rPr>
-              <a:t> — Lo que la decisión sacrifica, en dos o tres líneas. Toda decisión sacrifica algo.</a:t>
-            </a:r>
-          </a:p>
-        </p:txBody>
-      </p:sp>
-      <p:sp>
-        <p:nvSpPr>
-          <p:cNvPr id="22" name="Rounded Rectangle 21"/>
-          <p:cNvSpPr/>
-          <p:nvPr/>
-        </p:nvSpPr>
-        <p:spPr>
-          <a:xfrm>
-            <a:off x="457200" y="4178808"/>
-            <a:ext cx="11277295" cy="566928"/>
-          </a:xfrm>
-          <a:prstGeom prst="roundRect">
-            <a:avLst>
-              <a:gd name="adj" fmla="val 12000"/>
-            </a:avLst>
-          </a:prstGeom>
-          <a:solidFill>
-            <a:srgbClr val="F2F2F2"/>
-          </a:solidFill>
-          <a:ln>
-            <a:noFill/>
-          </a:ln>
-        </p:spPr>
-        <p:style>
-          <a:lnRef idx="1">
-            <a:schemeClr val="accent1"/>
-          </a:lnRef>
-          <a:fillRef idx="3">
-            <a:schemeClr val="accent1"/>
-          </a:fillRef>
-          <a:effectRef idx="2">
-            <a:schemeClr val="accent1"/>
-          </a:effectRef>
-          <a:fontRef idx="minor">
-            <a:schemeClr val="lt1"/>
-          </a:fontRef>
-        </p:style>
-        <p:txBody>
-          <a:bodyPr rtlCol="0" anchor="ctr"/>
-          <a:lstStyle/>
-          <a:p>
-            <a:pPr algn="ctr"/>
-          </a:p>
-        </p:txBody>
-      </p:sp>
-      <p:sp>
-        <p:nvSpPr>
-          <p:cNvPr id="23" name="Rectangle 22"/>
-          <p:cNvSpPr/>
-          <p:nvPr/>
-        </p:nvSpPr>
-        <p:spPr>
-          <a:xfrm>
-            <a:off x="640080" y="4325112"/>
-            <a:ext cx="274320" cy="274320"/>
-          </a:xfrm>
-          <a:prstGeom prst="rect">
-            <a:avLst/>
-          </a:prstGeom>
-          <a:solidFill>
-            <a:srgbClr val="FFFFFF"/>
-          </a:solidFill>
-          <a:ln>
-            <a:solidFill>
-              <a:srgbClr val="333333"/>
-            </a:solidFill>
-          </a:ln>
-        </p:spPr>
-        <p:style>
-          <a:lnRef idx="1">
-            <a:schemeClr val="accent1"/>
-          </a:lnRef>
-          <a:fillRef idx="3">
-            <a:schemeClr val="accent1"/>
-          </a:fillRef>
-          <a:effectRef idx="2">
-            <a:schemeClr val="accent1"/>
-          </a:effectRef>
-          <a:fontRef idx="minor">
-            <a:schemeClr val="lt1"/>
-          </a:fontRef>
-        </p:style>
-        <p:txBody>
-          <a:bodyPr rtlCol="0" anchor="ctr"/>
-          <a:lstStyle/>
-          <a:p>
-            <a:pPr algn="ctr"/>
-          </a:p>
-        </p:txBody>
-      </p:sp>
-      <p:sp>
-        <p:nvSpPr>
-          <p:cNvPr id="24" name="Rectangle 23"/>
-          <p:cNvSpPr/>
-          <p:nvPr/>
-        </p:nvSpPr>
-        <p:spPr>
-          <a:xfrm>
-            <a:off x="640080" y="4325112"/>
-            <a:ext cx="73152" cy="274320"/>
-          </a:xfrm>
-          <a:prstGeom prst="rect">
-            <a:avLst/>
-          </a:prstGeom>
-          <a:solidFill>
-            <a:srgbClr val="269CCB"/>
-          </a:solidFill>
-          <a:ln>
-            <a:noFill/>
-          </a:ln>
-        </p:spPr>
-        <p:style>
-          <a:lnRef idx="1">
-            <a:schemeClr val="accent1"/>
-          </a:lnRef>
-          <a:fillRef idx="3">
-            <a:schemeClr val="accent1"/>
-          </a:fillRef>
-          <a:effectRef idx="2">
-            <a:schemeClr val="accent1"/>
-          </a:effectRef>
-          <a:fontRef idx="minor">
-            <a:schemeClr val="lt1"/>
-          </a:fontRef>
-        </p:style>
-        <p:txBody>
-          <a:bodyPr rtlCol="0" anchor="ctr"/>
-          <a:lstStyle/>
-          <a:p>
-            <a:pPr algn="ctr"/>
-          </a:p>
-        </p:txBody>
-      </p:sp>
-      <p:sp>
-        <p:nvSpPr>
-          <p:cNvPr id="25" name="TextBox 24"/>
-          <p:cNvSpPr txBox="1"/>
-          <p:nvPr/>
-        </p:nvSpPr>
-        <p:spPr>
-          <a:xfrm>
-            <a:off x="1097280" y="4270248"/>
-            <a:ext cx="10362895" cy="402336"/>
-          </a:xfrm>
-          <a:prstGeom prst="rect">
-            <a:avLst/>
-          </a:prstGeom>
-          <a:noFill/>
-        </p:spPr>
-        <p:txBody>
-          <a:bodyPr wrap="square" anchor="ctr"/>
-          <a:lstStyle/>
-          <a:p>
-            <a:r>
-              <a:rPr sz="1500" b="1" i="0">
-                <a:solidFill>
-                  <a:srgbClr val="333333"/>
-                </a:solidFill>
-                <a:latin typeface="Calibri"/>
-              </a:rPr>
-              <a:t>ALCANCE MÍNIMO Y PLAN DE VALIDACIÓN</a:t>
-            </a:r>
-            <a:r>
-              <a:rPr sz="1500" b="0" i="0">
-                <a:solidFill>
-                  <a:srgbClr val="333333"/>
-                </a:solidFill>
-                <a:latin typeface="Calibri"/>
-              </a:rPr>
-              <a:t> — Qué se construye este semestre (un requisito funcional completo, cumpliendo los no funcionales), la lista de lo que queda para «versión siguiente», y el plan de validación: </a:t>
-            </a:r>
-            <a:r>
-              <a:rPr sz="1500" b="1" i="0">
-                <a:solidFill>
-                  <a:srgbClr val="333333"/>
-                </a:solidFill>
-                <a:latin typeface="Calibri"/>
-              </a:rPr>
-              <a:t>con quién</a:t>
-            </a:r>
-            <a:r>
-              <a:rPr sz="1500" b="0" i="0">
-                <a:solidFill>
-                  <a:srgbClr val="333333"/>
-                </a:solidFill>
-                <a:latin typeface="Calibri"/>
-              </a:rPr>
-              <a:t> se prueba, </a:t>
-            </a:r>
-            <a:r>
-              <a:rPr sz="1500" b="1" i="0">
-                <a:solidFill>
-                  <a:srgbClr val="333333"/>
-                </a:solidFill>
-                <a:latin typeface="Calibri"/>
-              </a:rPr>
-              <a:t>qué tareas</a:t>
-            </a:r>
-            <a:r>
-              <a:rPr sz="1500" b="0" i="0">
-                <a:solidFill>
-                  <a:srgbClr val="333333"/>
-                </a:solidFill>
-                <a:latin typeface="Calibri"/>
-              </a:rPr>
-              <a:t> se le piden y </a:t>
-            </a:r>
-            <a:r>
-              <a:rPr sz="1500" b="1" i="0">
-                <a:solidFill>
-                  <a:srgbClr val="333333"/>
-                </a:solidFill>
-                <a:latin typeface="Calibri"/>
-              </a:rPr>
-              <a:t>qué se observa</a:t>
-            </a:r>
-            <a:r>
-              <a:rPr sz="1500" b="0" i="0">
-                <a:solidFill>
-                  <a:srgbClr val="333333"/>
-                </a:solidFill>
-                <a:latin typeface="Calibri"/>
-              </a:rPr>
-              <a:t>.</a:t>
-            </a:r>
-          </a:p>
-        </p:txBody>
-      </p:sp>
-      <p:sp>
-        <p:nvSpPr>
-          <p:cNvPr id="26" name="TextBox 25"/>
-          <p:cNvSpPr txBox="1"/>
-          <p:nvPr/>
-        </p:nvSpPr>
-        <p:spPr>
-          <a:xfrm>
-            <a:off x="11185855" y="6473952"/>
-            <a:ext cx="640080" cy="274320"/>
-          </a:xfrm>
-          <a:prstGeom prst="rect">
-            <a:avLst/>
-          </a:prstGeom>
-          <a:noFill/>
-        </p:spPr>
-        <p:txBody>
-          <a:bodyPr wrap="square">
-            <a:spAutoFit/>
-          </a:bodyPr>
-          <a:lstStyle/>
-          <a:p>
-            <a:pPr algn="r"/>
-            <a:r>
-              <a:rPr sz="1100" b="0" i="0">
-                <a:solidFill>
-                  <a:srgbClr val="666666"/>
-                </a:solidFill>
-                <a:latin typeface="Calibri"/>
-              </a:rPr>
-              <a:t>12</a:t>
-            </a:r>
-          </a:p>
-        </p:txBody>
-      </p:sp>
-    </p:spTree>
-  </p:cSld>
-  <p:clrMapOvr>
-    <a:masterClrMapping/>
-  </p:clrMapOvr>
-</p:sld>
-</file>
-
-<file path=ppt/slides/slide13.xml><?xml version="1.0" encoding="utf-8"?>
-<p:sld xmlns:a="http://schemas.openxmlformats.org/drawingml/2006/main" xmlns:p="http://schemas.openxmlformats.org/presentationml/2006/main" xmlns:r="http://schemas.openxmlformats.org/officeDocument/2006/relationships">
-  <p:cSld>
-    <p:bg>
-      <p:bgPr>
-        <a:solidFill>
-          <a:srgbClr val="FFFFFF"/>
-        </a:solidFill>
-        <a:effectLst/>
-      </p:bgPr>
-    </p:bg>
-    <p:spTree>
-      <p:nvGrpSpPr>
-        <p:cNvPr id="1" name=""/>
-        <p:cNvGrpSpPr/>
-        <p:nvPr/>
-      </p:nvGrpSpPr>
-      <p:grpSpPr/>
-      <p:sp>
-        <p:nvSpPr>
-          <p:cNvPr id="2" name="Rectangle 1"/>
-          <p:cNvSpPr/>
-          <p:nvPr/>
-        </p:nvSpPr>
-        <p:spPr>
-          <a:xfrm>
-            <a:off x="0" y="0"/>
-            <a:ext cx="12191695" cy="1170432"/>
-          </a:xfrm>
-          <a:prstGeom prst="rect">
-            <a:avLst/>
-          </a:prstGeom>
-          <a:solidFill>
-            <a:srgbClr val="095292"/>
-          </a:solidFill>
-          <a:ln>
-            <a:noFill/>
-          </a:ln>
-        </p:spPr>
-        <p:style>
-          <a:lnRef idx="1">
-            <a:schemeClr val="accent1"/>
-          </a:lnRef>
-          <a:fillRef idx="3">
-            <a:schemeClr val="accent1"/>
-          </a:fillRef>
-          <a:effectRef idx="2">
-            <a:schemeClr val="accent1"/>
-          </a:effectRef>
-          <a:fontRef idx="minor">
-            <a:schemeClr val="lt1"/>
-          </a:fontRef>
-        </p:style>
-        <p:txBody>
-          <a:bodyPr rtlCol="0" anchor="ctr"/>
-          <a:lstStyle/>
-          <a:p>
-            <a:pPr algn="ctr"/>
-          </a:p>
-        </p:txBody>
-      </p:sp>
-      <p:sp>
-        <p:nvSpPr>
-          <p:cNvPr id="3" name="Rectangle 2"/>
-          <p:cNvSpPr/>
-          <p:nvPr/>
-        </p:nvSpPr>
-        <p:spPr>
-          <a:xfrm>
-            <a:off x="0" y="1170432"/>
-            <a:ext cx="12191695" cy="41148"/>
-          </a:xfrm>
-          <a:prstGeom prst="rect">
-            <a:avLst/>
-          </a:prstGeom>
-          <a:solidFill>
-            <a:srgbClr val="FFD000"/>
-          </a:solidFill>
-          <a:ln>
-            <a:noFill/>
-          </a:ln>
-        </p:spPr>
-        <p:style>
-          <a:lnRef idx="1">
-            <a:schemeClr val="accent1"/>
-          </a:lnRef>
-          <a:fillRef idx="3">
-            <a:schemeClr val="accent1"/>
-          </a:fillRef>
-          <a:effectRef idx="2">
-            <a:schemeClr val="accent1"/>
-          </a:effectRef>
-          <a:fontRef idx="minor">
-            <a:schemeClr val="lt1"/>
-          </a:fontRef>
-        </p:style>
-        <p:txBody>
-          <a:bodyPr rtlCol="0" anchor="ctr"/>
-          <a:lstStyle/>
-          <a:p>
-            <a:pPr algn="ctr"/>
-          </a:p>
-        </p:txBody>
-      </p:sp>
-      <p:sp>
-        <p:nvSpPr>
-          <p:cNvPr id="4" name="TextBox 3"/>
-          <p:cNvSpPr txBox="1"/>
-          <p:nvPr/>
-        </p:nvSpPr>
-        <p:spPr>
-          <a:xfrm>
-            <a:off x="457200" y="164592"/>
-            <a:ext cx="11277295" cy="384048"/>
-          </a:xfrm>
-          <a:prstGeom prst="rect">
-            <a:avLst/>
-          </a:prstGeom>
-          <a:noFill/>
-        </p:spPr>
-        <p:txBody>
-          <a:bodyPr wrap="square">
-            <a:spAutoFit/>
-          </a:bodyPr>
-          <a:lstStyle/>
-          <a:p>
-            <a:r>
-              <a:rPr sz="2600" b="1" i="0">
-                <a:solidFill>
-                  <a:srgbClr val="FFFFFF"/>
-                </a:solidFill>
-                <a:latin typeface="Calibri"/>
-              </a:rPr>
-              <a:t>Cómo se expone en 3 minutos</a:t>
-            </a:r>
-          </a:p>
-        </p:txBody>
-      </p:sp>
-      <p:sp>
-        <p:nvSpPr>
-          <p:cNvPr id="5" name="TextBox 4"/>
-          <p:cNvSpPr txBox="1"/>
-          <p:nvPr/>
-        </p:nvSpPr>
-        <p:spPr>
-          <a:xfrm>
-            <a:off x="457200" y="566928"/>
-            <a:ext cx="11277295" cy="411480"/>
-          </a:xfrm>
-          <a:prstGeom prst="rect">
-            <a:avLst/>
-          </a:prstGeom>
-          <a:noFill/>
-        </p:spPr>
-        <p:txBody>
-          <a:bodyPr wrap="square">
-            <a:spAutoFit/>
-          </a:bodyPr>
-          <a:lstStyle/>
-          <a:p>
-            <a:r>
-              <a:rPr sz="1400" b="0" i="0">
-                <a:solidFill>
-                  <a:srgbClr val="B8D8EE"/>
-                </a:solidFill>
-                <a:latin typeface="Calibri"/>
-              </a:rPr>
-              <a:t>Habla el vocero con la pantalla ya compartida · cronómetro en pantalla · se corta al llegar a cero</a:t>
-            </a:r>
-          </a:p>
-        </p:txBody>
-      </p:sp>
-      <p:sp>
-        <p:nvSpPr>
-          <p:cNvPr id="6" name="Rounded Rectangle 5"/>
-          <p:cNvSpPr/>
-          <p:nvPr/>
-        </p:nvSpPr>
-        <p:spPr>
-          <a:xfrm>
-            <a:off x="457200" y="1444752"/>
-            <a:ext cx="11277295" cy="908913"/>
-          </a:xfrm>
-          <a:prstGeom prst="roundRect">
-            <a:avLst>
-              <a:gd name="adj" fmla="val 12000"/>
-            </a:avLst>
-          </a:prstGeom>
-          <a:solidFill>
-            <a:srgbClr val="F2F2F2"/>
-          </a:solidFill>
-          <a:ln>
-            <a:noFill/>
-          </a:ln>
-        </p:spPr>
-        <p:style>
-          <a:lnRef idx="1">
-            <a:schemeClr val="accent1"/>
-          </a:lnRef>
-          <a:fillRef idx="3">
-            <a:schemeClr val="accent1"/>
-          </a:fillRef>
-          <a:effectRef idx="2">
-            <a:schemeClr val="accent1"/>
-          </a:effectRef>
-          <a:fontRef idx="minor">
-            <a:schemeClr val="lt1"/>
-          </a:fontRef>
-        </p:style>
-        <p:txBody>
-          <a:bodyPr rtlCol="0" anchor="ctr"/>
-          <a:lstStyle/>
-          <a:p>
-            <a:pPr algn="ctr"/>
-          </a:p>
-        </p:txBody>
-      </p:sp>
-      <p:sp>
-        <p:nvSpPr>
-          <p:cNvPr id="7" name="Rounded Rectangle 6"/>
-          <p:cNvSpPr/>
-          <p:nvPr/>
-        </p:nvSpPr>
-        <p:spPr>
-          <a:xfrm>
-            <a:off x="594360" y="1679752"/>
-            <a:ext cx="438912" cy="438912"/>
-          </a:xfrm>
-          <a:prstGeom prst="roundRect">
-            <a:avLst>
-              <a:gd name="adj" fmla="val 12000"/>
-            </a:avLst>
-          </a:prstGeom>
-          <a:solidFill>
-            <a:srgbClr val="095292"/>
-          </a:solidFill>
-          <a:ln>
-            <a:noFill/>
-          </a:ln>
-        </p:spPr>
-        <p:style>
-          <a:lnRef idx="1">
-            <a:schemeClr val="accent1"/>
-          </a:lnRef>
-          <a:fillRef idx="3">
-            <a:schemeClr val="accent1"/>
-          </a:fillRef>
-          <a:effectRef idx="2">
-            <a:schemeClr val="accent1"/>
-          </a:effectRef>
-          <a:fontRef idx="minor">
-            <a:schemeClr val="lt1"/>
-          </a:fontRef>
-        </p:style>
-        <p:txBody>
-          <a:bodyPr rtlCol="0" anchor="ctr"/>
-          <a:lstStyle/>
-          <a:p>
-            <a:pPr algn="ctr"/>
-          </a:p>
-        </p:txBody>
-      </p:sp>
-      <p:sp>
-        <p:nvSpPr>
-          <p:cNvPr id="8" name="TextBox 7"/>
-          <p:cNvSpPr txBox="1"/>
-          <p:nvPr/>
-        </p:nvSpPr>
-        <p:spPr>
-          <a:xfrm>
-            <a:off x="594360" y="1679752"/>
-            <a:ext cx="438912" cy="438912"/>
-          </a:xfrm>
-          <a:prstGeom prst="rect">
-            <a:avLst/>
-          </a:prstGeom>
-          <a:noFill/>
-        </p:spPr>
-        <p:txBody>
-          <a:bodyPr wrap="square" anchor="ctr"/>
-          <a:lstStyle/>
-          <a:p>
-            <a:pPr algn="ctr"/>
-            <a:r>
-              <a:rPr sz="1600" b="1" i="0">
-                <a:solidFill>
-                  <a:srgbClr val="FFFFFF"/>
-                </a:solidFill>
-                <a:latin typeface="Calibri"/>
-              </a:rPr>
-              <a:t>1</a:t>
-            </a:r>
-          </a:p>
-        </p:txBody>
-      </p:sp>
-      <p:sp>
-        <p:nvSpPr>
-          <p:cNvPr id="9" name="TextBox 8"/>
-          <p:cNvSpPr txBox="1"/>
-          <p:nvPr/>
-        </p:nvSpPr>
-        <p:spPr>
-          <a:xfrm>
-            <a:off x="1188720" y="1536192"/>
-            <a:ext cx="10271455" cy="744321"/>
-          </a:xfrm>
-          <a:prstGeom prst="rect">
-            <a:avLst/>
-          </a:prstGeom>
-          <a:noFill/>
-        </p:spPr>
-        <p:txBody>
-          <a:bodyPr wrap="square" anchor="ctr"/>
-          <a:lstStyle/>
-          <a:p>
-            <a:r>
-              <a:rPr sz="1500" b="1" i="0">
-                <a:solidFill>
-                  <a:srgbClr val="095292"/>
-                </a:solidFill>
-                <a:latin typeface="Calibri"/>
-              </a:rPr>
-              <a:t>30 s · Las dos alternativas</a:t>
-            </a:r>
-          </a:p>
-          <a:p>
-            <a:pPr>
-              <a:spcBef>
-                <a:spcPts val="200"/>
-              </a:spcBef>
-            </a:pPr>
-            <a:r>
-              <a:rPr sz="1300" b="0" i="0">
-                <a:solidFill>
-                  <a:srgbClr val="333333"/>
-                </a:solidFill>
-                <a:latin typeface="Calibri"/>
-              </a:rPr>
-              <a:t>Una frase cada una. Sin adjetivos.</a:t>
-            </a:r>
-          </a:p>
-        </p:txBody>
-      </p:sp>
-      <p:sp>
-        <p:nvSpPr>
-          <p:cNvPr id="10" name="Rounded Rectangle 9"/>
-          <p:cNvSpPr/>
-          <p:nvPr/>
-        </p:nvSpPr>
-        <p:spPr>
-          <a:xfrm>
-            <a:off x="457200" y="2445105"/>
-            <a:ext cx="11277295" cy="908913"/>
-          </a:xfrm>
-          <a:prstGeom prst="roundRect">
-            <a:avLst>
-              <a:gd name="adj" fmla="val 12000"/>
-            </a:avLst>
-          </a:prstGeom>
-          <a:solidFill>
-            <a:srgbClr val="E8F4FA"/>
-          </a:solidFill>
-          <a:ln>
-            <a:noFill/>
-          </a:ln>
-        </p:spPr>
-        <p:style>
-          <a:lnRef idx="1">
-            <a:schemeClr val="accent1"/>
-          </a:lnRef>
-          <a:fillRef idx="3">
-            <a:schemeClr val="accent1"/>
-          </a:fillRef>
-          <a:effectRef idx="2">
-            <a:schemeClr val="accent1"/>
-          </a:effectRef>
-          <a:fontRef idx="minor">
-            <a:schemeClr val="lt1"/>
-          </a:fontRef>
-        </p:style>
-        <p:txBody>
-          <a:bodyPr rtlCol="0" anchor="ctr"/>
-          <a:lstStyle/>
-          <a:p>
-            <a:pPr algn="ctr"/>
-          </a:p>
-        </p:txBody>
-      </p:sp>
-      <p:sp>
-        <p:nvSpPr>
-          <p:cNvPr id="11" name="Rounded Rectangle 10"/>
-          <p:cNvSpPr/>
-          <p:nvPr/>
-        </p:nvSpPr>
-        <p:spPr>
-          <a:xfrm>
-            <a:off x="594360" y="2680106"/>
-            <a:ext cx="438912" cy="438912"/>
-          </a:xfrm>
-          <a:prstGeom prst="roundRect">
-            <a:avLst>
-              <a:gd name="adj" fmla="val 12000"/>
-            </a:avLst>
-          </a:prstGeom>
-          <a:solidFill>
-            <a:srgbClr val="095292"/>
-          </a:solidFill>
-          <a:ln>
-            <a:noFill/>
-          </a:ln>
-        </p:spPr>
-        <p:style>
-          <a:lnRef idx="1">
-            <a:schemeClr val="accent1"/>
-          </a:lnRef>
-          <a:fillRef idx="3">
-            <a:schemeClr val="accent1"/>
-          </a:fillRef>
-          <a:effectRef idx="2">
-            <a:schemeClr val="accent1"/>
-          </a:effectRef>
-          <a:fontRef idx="minor">
-            <a:schemeClr val="lt1"/>
-          </a:fontRef>
-        </p:style>
-        <p:txBody>
-          <a:bodyPr rtlCol="0" anchor="ctr"/>
-          <a:lstStyle/>
-          <a:p>
-            <a:pPr algn="ctr"/>
-          </a:p>
-        </p:txBody>
-      </p:sp>
-      <p:sp>
-        <p:nvSpPr>
-          <p:cNvPr id="12" name="TextBox 11"/>
-          <p:cNvSpPr txBox="1"/>
-          <p:nvPr/>
-        </p:nvSpPr>
-        <p:spPr>
-          <a:xfrm>
-            <a:off x="594360" y="2680106"/>
-            <a:ext cx="438912" cy="438912"/>
-          </a:xfrm>
-          <a:prstGeom prst="rect">
-            <a:avLst/>
-          </a:prstGeom>
-          <a:noFill/>
-        </p:spPr>
-        <p:txBody>
-          <a:bodyPr wrap="square" anchor="ctr"/>
-          <a:lstStyle/>
-          <a:p>
-            <a:pPr algn="ctr"/>
-            <a:r>
-              <a:rPr sz="1600" b="1" i="0">
-                <a:solidFill>
-                  <a:srgbClr val="FFFFFF"/>
-                </a:solidFill>
-                <a:latin typeface="Calibri"/>
-              </a:rPr>
-              <a:t>2</a:t>
-            </a:r>
-          </a:p>
-        </p:txBody>
-      </p:sp>
-      <p:sp>
-        <p:nvSpPr>
-          <p:cNvPr id="13" name="TextBox 12"/>
-          <p:cNvSpPr txBox="1"/>
-          <p:nvPr/>
-        </p:nvSpPr>
-        <p:spPr>
-          <a:xfrm>
-            <a:off x="1188720" y="2536545"/>
-            <a:ext cx="10271455" cy="744321"/>
-          </a:xfrm>
-          <a:prstGeom prst="rect">
-            <a:avLst/>
-          </a:prstGeom>
-          <a:noFill/>
-        </p:spPr>
-        <p:txBody>
-          <a:bodyPr wrap="square" anchor="ctr"/>
-          <a:lstStyle/>
-          <a:p>
-            <a:r>
-              <a:rPr sz="1500" b="1" i="0">
-                <a:solidFill>
-                  <a:srgbClr val="095292"/>
-                </a:solidFill>
-                <a:latin typeface="Calibri"/>
-              </a:rPr>
-              <a:t>40 s · Los criterios y los pesos</a:t>
-            </a:r>
-          </a:p>
-          <a:p>
-            <a:pPr>
-              <a:spcBef>
-                <a:spcPts val="200"/>
-              </a:spcBef>
-            </a:pPr>
-            <a:r>
-              <a:rPr sz="1300" b="0" i="0">
-                <a:solidFill>
-                  <a:srgbClr val="333333"/>
-                </a:solidFill>
-                <a:latin typeface="Calibri"/>
-              </a:rPr>
-              <a:t>De dónde salieron: qué restricción o requisito.</a:t>
-            </a:r>
-          </a:p>
-        </p:txBody>
-      </p:sp>
-      <p:sp>
-        <p:nvSpPr>
-          <p:cNvPr id="14" name="Rounded Rectangle 13"/>
-          <p:cNvSpPr/>
-          <p:nvPr/>
-        </p:nvSpPr>
-        <p:spPr>
-          <a:xfrm>
-            <a:off x="457200" y="3445459"/>
-            <a:ext cx="11277295" cy="908913"/>
-          </a:xfrm>
-          <a:prstGeom prst="roundRect">
-            <a:avLst>
-              <a:gd name="adj" fmla="val 12000"/>
-            </a:avLst>
-          </a:prstGeom>
-          <a:solidFill>
-            <a:srgbClr val="F2F2F2"/>
-          </a:solidFill>
-          <a:ln>
-            <a:noFill/>
-          </a:ln>
-        </p:spPr>
-        <p:style>
-          <a:lnRef idx="1">
-            <a:schemeClr val="accent1"/>
-          </a:lnRef>
-          <a:fillRef idx="3">
-            <a:schemeClr val="accent1"/>
-          </a:fillRef>
-          <a:effectRef idx="2">
-            <a:schemeClr val="accent1"/>
-          </a:effectRef>
-          <a:fontRef idx="minor">
-            <a:schemeClr val="lt1"/>
-          </a:fontRef>
-        </p:style>
-        <p:txBody>
-          <a:bodyPr rtlCol="0" anchor="ctr"/>
-          <a:lstStyle/>
-          <a:p>
-            <a:pPr algn="ctr"/>
-          </a:p>
-        </p:txBody>
-      </p:sp>
-      <p:sp>
-        <p:nvSpPr>
-          <p:cNvPr id="15" name="Rounded Rectangle 14"/>
-          <p:cNvSpPr/>
-          <p:nvPr/>
-        </p:nvSpPr>
-        <p:spPr>
-          <a:xfrm>
-            <a:off x="594360" y="3680460"/>
-            <a:ext cx="438912" cy="438912"/>
-          </a:xfrm>
-          <a:prstGeom prst="roundRect">
-            <a:avLst>
-              <a:gd name="adj" fmla="val 12000"/>
-            </a:avLst>
-          </a:prstGeom>
-          <a:solidFill>
-            <a:srgbClr val="095292"/>
-          </a:solidFill>
-          <a:ln>
-            <a:noFill/>
-          </a:ln>
-        </p:spPr>
-        <p:style>
-          <a:lnRef idx="1">
-            <a:schemeClr val="accent1"/>
-          </a:lnRef>
-          <a:fillRef idx="3">
-            <a:schemeClr val="accent1"/>
-          </a:fillRef>
-          <a:effectRef idx="2">
-            <a:schemeClr val="accent1"/>
-          </a:effectRef>
-          <a:fontRef idx="minor">
-            <a:schemeClr val="lt1"/>
-          </a:fontRef>
-        </p:style>
-        <p:txBody>
-          <a:bodyPr rtlCol="0" anchor="ctr"/>
-          <a:lstStyle/>
-          <a:p>
-            <a:pPr algn="ctr"/>
-          </a:p>
-        </p:txBody>
-      </p:sp>
-      <p:sp>
-        <p:nvSpPr>
-          <p:cNvPr id="16" name="TextBox 15"/>
-          <p:cNvSpPr txBox="1"/>
-          <p:nvPr/>
-        </p:nvSpPr>
-        <p:spPr>
-          <a:xfrm>
-            <a:off x="594360" y="3680460"/>
-            <a:ext cx="438912" cy="438912"/>
-          </a:xfrm>
-          <a:prstGeom prst="rect">
-            <a:avLst/>
-          </a:prstGeom>
-          <a:noFill/>
-        </p:spPr>
-        <p:txBody>
-          <a:bodyPr wrap="square" anchor="ctr"/>
-          <a:lstStyle/>
-          <a:p>
-            <a:pPr algn="ctr"/>
-            <a:r>
-              <a:rPr sz="1600" b="1" i="0">
-                <a:solidFill>
-                  <a:srgbClr val="FFFFFF"/>
-                </a:solidFill>
-                <a:latin typeface="Calibri"/>
-              </a:rPr>
-              <a:t>3</a:t>
-            </a:r>
-          </a:p>
-        </p:txBody>
-      </p:sp>
-      <p:sp>
-        <p:nvSpPr>
-          <p:cNvPr id="17" name="TextBox 16"/>
-          <p:cNvSpPr txBox="1"/>
-          <p:nvPr/>
-        </p:nvSpPr>
-        <p:spPr>
-          <a:xfrm>
-            <a:off x="1188720" y="3536899"/>
-            <a:ext cx="10271455" cy="744321"/>
-          </a:xfrm>
-          <a:prstGeom prst="rect">
-            <a:avLst/>
-          </a:prstGeom>
-          <a:noFill/>
-        </p:spPr>
-        <p:txBody>
-          <a:bodyPr wrap="square" anchor="ctr"/>
-          <a:lstStyle/>
-          <a:p>
-            <a:r>
-              <a:rPr sz="1500" b="1" i="0">
-                <a:solidFill>
-                  <a:srgbClr val="095292"/>
-                </a:solidFill>
-                <a:latin typeface="Calibri"/>
-              </a:rPr>
-              <a:t>40 s · La decisión</a:t>
-            </a:r>
-          </a:p>
-          <a:p>
-            <a:pPr>
-              <a:spcBef>
-                <a:spcPts val="200"/>
-              </a:spcBef>
-            </a:pPr>
-            <a:r>
-              <a:rPr sz="1300" b="0" i="0">
-                <a:solidFill>
-                  <a:srgbClr val="333333"/>
-                </a:solidFill>
-                <a:latin typeface="Calibri"/>
-              </a:rPr>
-              <a:t>Cuál ganó y por qué, con una justificación concreta.</a:t>
-            </a:r>
-          </a:p>
-        </p:txBody>
-      </p:sp>
-      <p:sp>
-        <p:nvSpPr>
-          <p:cNvPr id="18" name="Rounded Rectangle 17"/>
-          <p:cNvSpPr/>
-          <p:nvPr/>
-        </p:nvSpPr>
-        <p:spPr>
-          <a:xfrm>
-            <a:off x="457200" y="4445812"/>
-            <a:ext cx="11277295" cy="908913"/>
-          </a:xfrm>
-          <a:prstGeom prst="roundRect">
-            <a:avLst>
-              <a:gd name="adj" fmla="val 12000"/>
-            </a:avLst>
-          </a:prstGeom>
-          <a:solidFill>
-            <a:srgbClr val="E8F4FA"/>
-          </a:solidFill>
-          <a:ln>
-            <a:noFill/>
-          </a:ln>
-        </p:spPr>
-        <p:style>
-          <a:lnRef idx="1">
-            <a:schemeClr val="accent1"/>
-          </a:lnRef>
-          <a:fillRef idx="3">
-            <a:schemeClr val="accent1"/>
-          </a:fillRef>
-          <a:effectRef idx="2">
-            <a:schemeClr val="accent1"/>
-          </a:effectRef>
-          <a:fontRef idx="minor">
-            <a:schemeClr val="lt1"/>
-          </a:fontRef>
-        </p:style>
-        <p:txBody>
-          <a:bodyPr rtlCol="0" anchor="ctr"/>
-          <a:lstStyle/>
-          <a:p>
-            <a:pPr algn="ctr"/>
-          </a:p>
-        </p:txBody>
-      </p:sp>
-      <p:sp>
-        <p:nvSpPr>
-          <p:cNvPr id="19" name="Rounded Rectangle 18"/>
-          <p:cNvSpPr/>
-          <p:nvPr/>
-        </p:nvSpPr>
-        <p:spPr>
-          <a:xfrm>
-            <a:off x="594360" y="4680813"/>
-            <a:ext cx="438912" cy="438912"/>
-          </a:xfrm>
-          <a:prstGeom prst="roundRect">
-            <a:avLst>
-              <a:gd name="adj" fmla="val 12000"/>
-            </a:avLst>
-          </a:prstGeom>
-          <a:solidFill>
-            <a:srgbClr val="095292"/>
-          </a:solidFill>
-          <a:ln>
-            <a:noFill/>
-          </a:ln>
-        </p:spPr>
-        <p:style>
-          <a:lnRef idx="1">
-            <a:schemeClr val="accent1"/>
-          </a:lnRef>
-          <a:fillRef idx="3">
-            <a:schemeClr val="accent1"/>
-          </a:fillRef>
-          <a:effectRef idx="2">
-            <a:schemeClr val="accent1"/>
-          </a:effectRef>
-          <a:fontRef idx="minor">
-            <a:schemeClr val="lt1"/>
-          </a:fontRef>
-        </p:style>
-        <p:txBody>
-          <a:bodyPr rtlCol="0" anchor="ctr"/>
-          <a:lstStyle/>
-          <a:p>
-            <a:pPr algn="ctr"/>
-          </a:p>
-        </p:txBody>
-      </p:sp>
-      <p:sp>
-        <p:nvSpPr>
-          <p:cNvPr id="20" name="TextBox 19"/>
-          <p:cNvSpPr txBox="1"/>
-          <p:nvPr/>
-        </p:nvSpPr>
-        <p:spPr>
-          <a:xfrm>
-            <a:off x="594360" y="4680813"/>
-            <a:ext cx="438912" cy="438912"/>
-          </a:xfrm>
-          <a:prstGeom prst="rect">
-            <a:avLst/>
-          </a:prstGeom>
-          <a:noFill/>
-        </p:spPr>
-        <p:txBody>
-          <a:bodyPr wrap="square" anchor="ctr"/>
-          <a:lstStyle/>
-          <a:p>
-            <a:pPr algn="ctr"/>
-            <a:r>
-              <a:rPr sz="1600" b="1" i="0">
-                <a:solidFill>
-                  <a:srgbClr val="FFFFFF"/>
-                </a:solidFill>
-                <a:latin typeface="Calibri"/>
-              </a:rPr>
-              <a:t>4</a:t>
-            </a:r>
-          </a:p>
-        </p:txBody>
-      </p:sp>
-      <p:sp>
-        <p:nvSpPr>
-          <p:cNvPr id="21" name="TextBox 20"/>
-          <p:cNvSpPr txBox="1"/>
-          <p:nvPr/>
-        </p:nvSpPr>
-        <p:spPr>
-          <a:xfrm>
-            <a:off x="1188720" y="4537252"/>
-            <a:ext cx="10271455" cy="744321"/>
-          </a:xfrm>
-          <a:prstGeom prst="rect">
-            <a:avLst/>
-          </a:prstGeom>
-          <a:noFill/>
-        </p:spPr>
-        <p:txBody>
-          <a:bodyPr wrap="square" anchor="ctr"/>
-          <a:lstStyle/>
-          <a:p>
-            <a:r>
-              <a:rPr sz="1500" b="1" i="0">
-                <a:solidFill>
-                  <a:srgbClr val="095292"/>
-                </a:solidFill>
-                <a:latin typeface="Calibri"/>
-              </a:rPr>
-              <a:t>40 s · Qué se pierde</a:t>
-            </a:r>
-          </a:p>
-          <a:p>
-            <a:pPr>
-              <a:spcBef>
-                <a:spcPts val="200"/>
-              </a:spcBef>
-            </a:pPr>
-            <a:r>
-              <a:rPr sz="1300" b="0" i="0">
-                <a:solidFill>
-                  <a:srgbClr val="333333"/>
-                </a:solidFill>
-                <a:latin typeface="Calibri"/>
-              </a:rPr>
-              <a:t>Lo que sacrificaron. Es el minuto obligatorio.</a:t>
-            </a:r>
-          </a:p>
-        </p:txBody>
-      </p:sp>
-      <p:sp>
-        <p:nvSpPr>
-          <p:cNvPr id="22" name="Rounded Rectangle 21"/>
-          <p:cNvSpPr/>
-          <p:nvPr/>
-        </p:nvSpPr>
-        <p:spPr>
-          <a:xfrm>
-            <a:off x="457200" y="5446166"/>
-            <a:ext cx="11277295" cy="908913"/>
-          </a:xfrm>
-          <a:prstGeom prst="roundRect">
-            <a:avLst>
-              <a:gd name="adj" fmla="val 12000"/>
-            </a:avLst>
-          </a:prstGeom>
-          <a:solidFill>
-            <a:srgbClr val="F2F2F2"/>
-          </a:solidFill>
-          <a:ln>
-            <a:noFill/>
-          </a:ln>
-        </p:spPr>
-        <p:style>
-          <a:lnRef idx="1">
-            <a:schemeClr val="accent1"/>
-          </a:lnRef>
-          <a:fillRef idx="3">
-            <a:schemeClr val="accent1"/>
-          </a:fillRef>
-          <a:effectRef idx="2">
-            <a:schemeClr val="accent1"/>
-          </a:effectRef>
-          <a:fontRef idx="minor">
-            <a:schemeClr val="lt1"/>
-          </a:fontRef>
-        </p:style>
-        <p:txBody>
-          <a:bodyPr rtlCol="0" anchor="ctr"/>
-          <a:lstStyle/>
-          <a:p>
-            <a:pPr algn="ctr"/>
-          </a:p>
-        </p:txBody>
-      </p:sp>
-      <p:sp>
-        <p:nvSpPr>
-          <p:cNvPr id="23" name="Rounded Rectangle 22"/>
-          <p:cNvSpPr/>
-          <p:nvPr/>
-        </p:nvSpPr>
-        <p:spPr>
-          <a:xfrm>
-            <a:off x="594360" y="5681167"/>
-            <a:ext cx="438912" cy="438912"/>
-          </a:xfrm>
-          <a:prstGeom prst="roundRect">
-            <a:avLst>
-              <a:gd name="adj" fmla="val 12000"/>
-            </a:avLst>
-          </a:prstGeom>
-          <a:solidFill>
-            <a:srgbClr val="095292"/>
-          </a:solidFill>
-          <a:ln>
-            <a:noFill/>
-          </a:ln>
-        </p:spPr>
-        <p:style>
-          <a:lnRef idx="1">
-            <a:schemeClr val="accent1"/>
-          </a:lnRef>
-          <a:fillRef idx="3">
-            <a:schemeClr val="accent1"/>
-          </a:fillRef>
-          <a:effectRef idx="2">
-            <a:schemeClr val="accent1"/>
-          </a:effectRef>
-          <a:fontRef idx="minor">
-            <a:schemeClr val="lt1"/>
-          </a:fontRef>
-        </p:style>
-        <p:txBody>
-          <a:bodyPr rtlCol="0" anchor="ctr"/>
-          <a:lstStyle/>
-          <a:p>
-            <a:pPr algn="ctr"/>
-          </a:p>
-        </p:txBody>
-      </p:sp>
-      <p:sp>
-        <p:nvSpPr>
-          <p:cNvPr id="24" name="TextBox 23"/>
-          <p:cNvSpPr txBox="1"/>
-          <p:nvPr/>
-        </p:nvSpPr>
-        <p:spPr>
-          <a:xfrm>
-            <a:off x="594360" y="5681167"/>
-            <a:ext cx="438912" cy="438912"/>
-          </a:xfrm>
-          <a:prstGeom prst="rect">
-            <a:avLst/>
-          </a:prstGeom>
-          <a:noFill/>
-        </p:spPr>
-        <p:txBody>
-          <a:bodyPr wrap="square" anchor="ctr"/>
-          <a:lstStyle/>
-          <a:p>
-            <a:pPr algn="ctr"/>
-            <a:r>
-              <a:rPr sz="1600" b="1" i="0">
-                <a:solidFill>
-                  <a:srgbClr val="FFFFFF"/>
-                </a:solidFill>
-                <a:latin typeface="Calibri"/>
-              </a:rPr>
-              <a:t>5</a:t>
-            </a:r>
-          </a:p>
-        </p:txBody>
-      </p:sp>
-      <p:sp>
-        <p:nvSpPr>
-          <p:cNvPr id="25" name="TextBox 24"/>
-          <p:cNvSpPr txBox="1"/>
-          <p:nvPr/>
-        </p:nvSpPr>
-        <p:spPr>
-          <a:xfrm>
-            <a:off x="1188720" y="5537606"/>
-            <a:ext cx="10271455" cy="744321"/>
-          </a:xfrm>
-          <a:prstGeom prst="rect">
-            <a:avLst/>
-          </a:prstGeom>
-          <a:noFill/>
-        </p:spPr>
-        <p:txBody>
-          <a:bodyPr wrap="square" anchor="ctr"/>
-          <a:lstStyle/>
-          <a:p>
-            <a:r>
-              <a:rPr sz="1500" b="1" i="0">
-                <a:solidFill>
-                  <a:srgbClr val="095292"/>
-                </a:solidFill>
-                <a:latin typeface="Calibri"/>
-              </a:rPr>
-              <a:t>30 s · Alcance y validación</a:t>
-            </a:r>
-          </a:p>
-          <a:p>
-            <a:pPr>
-              <a:spcBef>
-                <a:spcPts val="200"/>
-              </a:spcBef>
-            </a:pPr>
-            <a:r>
-              <a:rPr sz="1300" b="0" i="0">
-                <a:solidFill>
-                  <a:srgbClr val="333333"/>
-                </a:solidFill>
-                <a:latin typeface="Calibri"/>
-              </a:rPr>
-              <a:t>Qué se construye y con quién se va a probar.</a:t>
-            </a:r>
-          </a:p>
-        </p:txBody>
-      </p:sp>
-      <p:sp>
-        <p:nvSpPr>
-          <p:cNvPr id="26" name="TextBox 25"/>
-          <p:cNvSpPr txBox="1"/>
-          <p:nvPr/>
-        </p:nvSpPr>
-        <p:spPr>
-          <a:xfrm>
-            <a:off x="11185855" y="6473952"/>
-            <a:ext cx="640080" cy="274320"/>
-          </a:xfrm>
-          <a:prstGeom prst="rect">
-            <a:avLst/>
-          </a:prstGeom>
-          <a:noFill/>
-        </p:spPr>
-        <p:txBody>
-          <a:bodyPr wrap="square">
-            <a:spAutoFit/>
-          </a:bodyPr>
-          <a:lstStyle/>
-          <a:p>
-            <a:pPr algn="r"/>
-            <a:r>
-              <a:rPr sz="1100" b="0" i="0">
-                <a:solidFill>
-                  <a:srgbClr val="666666"/>
-                </a:solidFill>
-                <a:latin typeface="Calibri"/>
-              </a:rPr>
-              <a:t>13</a:t>
-            </a:r>
-          </a:p>
-        </p:txBody>
-      </p:sp>
-    </p:spTree>
-  </p:cSld>
-  <p:clrMapOvr>
-    <a:masterClrMapping/>
-  </p:clrMapOvr>
-</p:sld>
-</file>
-
-<file path=ppt/slides/slide14.xml><?xml version="1.0" encoding="utf-8"?>
-<p:sld xmlns:a="http://schemas.openxmlformats.org/drawingml/2006/main" xmlns:p="http://schemas.openxmlformats.org/presentationml/2006/main" xmlns:r="http://schemas.openxmlformats.org/officeDocument/2006/relationships">
-  <p:cSld>
-    <p:bg>
-      <p:bgPr>
-        <a:solidFill>
-          <a:srgbClr val="FFFFFF"/>
-        </a:solidFill>
-        <a:effectLst/>
-      </p:bgPr>
-    </p:bg>
-    <p:spTree>
-      <p:nvGrpSpPr>
-        <p:cNvPr id="1" name=""/>
-        <p:cNvGrpSpPr/>
-        <p:nvPr/>
-      </p:nvGrpSpPr>
-      <p:grpSpPr/>
-      <p:sp>
-        <p:nvSpPr>
-          <p:cNvPr id="2" name="Rectangle 1"/>
-          <p:cNvSpPr/>
-          <p:nvPr/>
-        </p:nvSpPr>
-        <p:spPr>
-          <a:xfrm>
-            <a:off x="0" y="0"/>
-            <a:ext cx="12191695" cy="960120"/>
-          </a:xfrm>
-          <a:prstGeom prst="rect">
-            <a:avLst/>
-          </a:prstGeom>
-          <a:solidFill>
-            <a:srgbClr val="095292"/>
-          </a:solidFill>
-          <a:ln>
-            <a:noFill/>
-          </a:ln>
-        </p:spPr>
-        <p:style>
-          <a:lnRef idx="1">
-            <a:schemeClr val="accent1"/>
-          </a:lnRef>
-          <a:fillRef idx="3">
-            <a:schemeClr val="accent1"/>
-          </a:fillRef>
-          <a:effectRef idx="2">
-            <a:schemeClr val="accent1"/>
-          </a:effectRef>
-          <a:fontRef idx="minor">
-            <a:schemeClr val="lt1"/>
-          </a:fontRef>
-        </p:style>
-        <p:txBody>
-          <a:bodyPr rtlCol="0" anchor="ctr"/>
-          <a:lstStyle/>
-          <a:p>
-            <a:pPr algn="ctr"/>
-          </a:p>
-        </p:txBody>
-      </p:sp>
-      <p:sp>
-        <p:nvSpPr>
-          <p:cNvPr id="3" name="Rectangle 2"/>
-          <p:cNvSpPr/>
-          <p:nvPr/>
-        </p:nvSpPr>
-        <p:spPr>
-          <a:xfrm>
-            <a:off x="0" y="960120"/>
-            <a:ext cx="12191695" cy="41148"/>
-          </a:xfrm>
-          <a:prstGeom prst="rect">
-            <a:avLst/>
-          </a:prstGeom>
-          <a:solidFill>
-            <a:srgbClr val="FFD000"/>
-          </a:solidFill>
-          <a:ln>
-            <a:noFill/>
-          </a:ln>
-        </p:spPr>
-        <p:style>
-          <a:lnRef idx="1">
-            <a:schemeClr val="accent1"/>
-          </a:lnRef>
-          <a:fillRef idx="3">
-            <a:schemeClr val="accent1"/>
-          </a:fillRef>
-          <a:effectRef idx="2">
-            <a:schemeClr val="accent1"/>
-          </a:effectRef>
-          <a:fontRef idx="minor">
-            <a:schemeClr val="lt1"/>
-          </a:fontRef>
-        </p:style>
-        <p:txBody>
-          <a:bodyPr rtlCol="0" anchor="ctr"/>
-          <a:lstStyle/>
-          <a:p>
-            <a:pPr algn="ctr"/>
-          </a:p>
-        </p:txBody>
-      </p:sp>
-      <p:sp>
-        <p:nvSpPr>
-          <p:cNvPr id="4" name="TextBox 3"/>
-          <p:cNvSpPr txBox="1"/>
-          <p:nvPr/>
-        </p:nvSpPr>
-        <p:spPr>
-          <a:xfrm>
-            <a:off x="457200" y="164592"/>
-            <a:ext cx="11277295" cy="502920"/>
-          </a:xfrm>
-          <a:prstGeom prst="rect">
-            <a:avLst/>
-          </a:prstGeom>
-          <a:noFill/>
-        </p:spPr>
-        <p:txBody>
-          <a:bodyPr wrap="square">
-            <a:spAutoFit/>
-          </a:bodyPr>
-          <a:lstStyle/>
-          <a:p>
-            <a:r>
-              <a:rPr sz="2600" b="1" i="0">
-                <a:solidFill>
-                  <a:srgbClr val="FFFFFF"/>
-                </a:solidFill>
-                <a:latin typeface="Calibri"/>
-              </a:rPr>
-              <a:t>Para la Clase 9</a:t>
-            </a:r>
-          </a:p>
-        </p:txBody>
-      </p:sp>
-      <p:sp>
-        <p:nvSpPr>
-          <p:cNvPr id="5" name="TextBox 4"/>
-          <p:cNvSpPr txBox="1"/>
-          <p:nvPr/>
-        </p:nvSpPr>
-        <p:spPr>
-          <a:xfrm>
-            <a:off x="457200" y="1170432"/>
-            <a:ext cx="11277295" cy="5230368"/>
-          </a:xfrm>
-          <a:prstGeom prst="rect">
-            <a:avLst/>
-          </a:prstGeom>
-          <a:noFill/>
-        </p:spPr>
-        <p:txBody>
-          <a:bodyPr wrap="square">
-            <a:spAutoFit/>
-          </a:bodyPr>
-          <a:lstStyle/>
-          <a:p>
-            <a:pPr>
-              <a:spcAft>
-                <a:spcPts val="800"/>
-              </a:spcAft>
-            </a:pPr>
-            <a:r>
-              <a:rPr sz="2000" b="0" i="0">
-                <a:solidFill>
-                  <a:srgbClr val="333333"/>
-                </a:solidFill>
-                <a:latin typeface="Calibri"/>
-              </a:rPr>
-              <a:t>–   </a:t>
-            </a:r>
-            <a:r>
-              <a:rPr sz="2000" b="1" i="0">
-                <a:solidFill>
-                  <a:srgbClr val="333333"/>
-                </a:solidFill>
-                <a:latin typeface="Calibri"/>
-              </a:rPr>
-              <a:t>Trabajo dirigido:</a:t>
-            </a:r>
-            <a:r>
-              <a:rPr sz="2000" b="0" i="0">
-                <a:solidFill>
-                  <a:srgbClr val="333333"/>
-                </a:solidFill>
-                <a:latin typeface="Calibri"/>
-              </a:rPr>
-              <a:t> Discusión de ejemplos reales — buscar </a:t>
-            </a:r>
-            <a:r>
-              <a:rPr sz="2000" b="1" i="0">
-                <a:solidFill>
-                  <a:srgbClr val="333333"/>
-                </a:solidFill>
-                <a:latin typeface="Calibri"/>
-              </a:rPr>
-              <a:t>un caso propio</a:t>
-            </a:r>
-            <a:r>
-              <a:rPr sz="2000" b="0" i="0">
-                <a:solidFill>
-                  <a:srgbClr val="333333"/>
-                </a:solidFill>
-                <a:latin typeface="Calibri"/>
-              </a:rPr>
-              <a:t> de proyecto que falló por saltarse una fase, con fuente verificable, y decir qué fase fue.</a:t>
-            </a:r>
-          </a:p>
-          <a:p>
-            <a:pPr>
-              <a:spcAft>
-                <a:spcPts val="800"/>
-              </a:spcAft>
-            </a:pPr>
-            <a:r>
-              <a:rPr sz="2000" b="0" i="0">
-                <a:solidFill>
-                  <a:srgbClr val="333333"/>
-                </a:solidFill>
-                <a:latin typeface="Calibri"/>
-              </a:rPr>
-              <a:t>–   </a:t>
-            </a:r>
-            <a:r>
-              <a:rPr sz="2000" b="1" i="0">
-                <a:solidFill>
-                  <a:srgbClr val="333333"/>
-                </a:solidFill>
-                <a:latin typeface="Calibri"/>
-              </a:rPr>
-              <a:t>Trabajo independiente:</a:t>
-            </a:r>
-            <a:r>
-              <a:rPr sz="2000" b="0" i="0">
-                <a:solidFill>
-                  <a:srgbClr val="333333"/>
-                </a:solidFill>
-                <a:latin typeface="Calibri"/>
-              </a:rPr>
-              <a:t> Ajuste de propuestas de solución: dejar en el documento del equipo la alternativa elegida con su alcance mínimo y el flujo dibujado, ya corregido con lo que salió en las exposiciones.</a:t>
-            </a:r>
-          </a:p>
-          <a:p>
-            <a:pPr>
-              <a:spcAft>
-                <a:spcPts val="800"/>
-              </a:spcAft>
-            </a:pPr>
-            <a:r>
-              <a:rPr sz="2000" b="0" i="0">
-                <a:solidFill>
-                  <a:srgbClr val="333333"/>
-                </a:solidFill>
-                <a:latin typeface="Calibri"/>
-              </a:rPr>
-              <a:t>–   </a:t>
-            </a:r>
-            <a:r>
-              <a:rPr sz="2000" b="1" i="0">
-                <a:solidFill>
-                  <a:srgbClr val="333333"/>
-                </a:solidFill>
-                <a:latin typeface="Calibri"/>
-              </a:rPr>
-              <a:t>Clase 9 · Estrategias de innovación en Ingeniería</a:t>
-            </a:r>
-            <a:r>
-              <a:rPr sz="2000" b="0" i="0">
-                <a:solidFill>
-                  <a:srgbClr val="333333"/>
-                </a:solidFill>
-                <a:latin typeface="Calibri"/>
-              </a:rPr>
-              <a:t> — los </a:t>
-            </a:r>
-            <a:r>
-              <a:rPr sz="2000" b="1" i="0">
-                <a:solidFill>
-                  <a:srgbClr val="333333"/>
-                </a:solidFill>
-                <a:latin typeface="Calibri"/>
-              </a:rPr>
-              <a:t>antecedentes</a:t>
-            </a:r>
-            <a:r>
-              <a:rPr sz="2000" b="0" i="0">
-                <a:solidFill>
-                  <a:srgbClr val="333333"/>
-                </a:solidFill>
-                <a:latin typeface="Calibri"/>
-              </a:rPr>
-              <a:t>: qué ya existe, quién lo intentó y cómo se busca eso con fuentes que se puedan verificar. Una respuesta de asistente de IA no es una fuente.</a:t>
-            </a:r>
-          </a:p>
-          <a:p>
-            <a:pPr>
-              <a:spcAft>
-                <a:spcPts val="800"/>
-              </a:spcAft>
-            </a:pPr>
-            <a:r>
-              <a:rPr sz="2000" b="0" i="0">
-                <a:solidFill>
-                  <a:srgbClr val="333333"/>
-                </a:solidFill>
-                <a:latin typeface="Calibri"/>
-              </a:rPr>
-              <a:t>–   </a:t>
-            </a:r>
-            <a:r>
-              <a:rPr sz="2000" b="1" i="0">
-                <a:solidFill>
-                  <a:srgbClr val="333333"/>
-                </a:solidFill>
-                <a:latin typeface="Calibri"/>
-              </a:rPr>
-              <a:t>Aviso:</a:t>
-            </a:r>
-            <a:r>
-              <a:rPr sz="2000" b="0" i="0">
-                <a:solidFill>
-                  <a:srgbClr val="333333"/>
-                </a:solidFill>
-                <a:latin typeface="Calibri"/>
-              </a:rPr>
-              <a:t> Para la sesión 9 traigan la alternativa elegida escrita y el flujo dibujado. Se va a buscar qué soluciones parecidas ya existen, y sin la propia decisión clara no hay con qué comparar.</a:t>
-            </a:r>
-          </a:p>
-          <a:p>
-            <a:pPr>
-              <a:spcAft>
-                <a:spcPts val="800"/>
-              </a:spcAft>
-            </a:pPr>
-            <a:r>
-              <a:rPr sz="2000" b="0" i="0">
-                <a:solidFill>
-                  <a:srgbClr val="333333"/>
-                </a:solidFill>
-                <a:latin typeface="Calibri"/>
-              </a:rPr>
-              <a:t>–   </a:t>
-            </a:r>
-            <a:r>
-              <a:rPr sz="2000" b="1" i="0">
-                <a:solidFill>
-                  <a:srgbClr val="333333"/>
-                </a:solidFill>
-                <a:latin typeface="Calibri"/>
-              </a:rPr>
-              <a:t>Antes de salir:</a:t>
-            </a:r>
-            <a:r>
-              <a:rPr sz="2000" b="0" i="0">
-                <a:solidFill>
-                  <a:srgbClr val="333333"/>
-                </a:solidFill>
-                <a:latin typeface="Calibri"/>
-              </a:rPr>
-              <a:t> el enlace del documento del equipo en el chat, con permiso de lectura para el docente, y el nombre del vocero de hoy.</a:t>
-            </a:r>
-          </a:p>
-        </p:txBody>
-      </p:sp>
-      <p:sp>
-        <p:nvSpPr>
-          <p:cNvPr id="6" name="TextBox 5"/>
-          <p:cNvSpPr txBox="1"/>
-          <p:nvPr/>
-        </p:nvSpPr>
-        <p:spPr>
-          <a:xfrm>
-            <a:off x="11185855" y="6473952"/>
-            <a:ext cx="640080" cy="274320"/>
-          </a:xfrm>
-          <a:prstGeom prst="rect">
-            <a:avLst/>
-          </a:prstGeom>
-          <a:noFill/>
-        </p:spPr>
-        <p:txBody>
-          <a:bodyPr wrap="square">
-            <a:spAutoFit/>
-          </a:bodyPr>
-          <a:lstStyle/>
-          <a:p>
-            <a:pPr algn="r"/>
-            <a:r>
-              <a:rPr sz="1100" b="0" i="0">
-                <a:solidFill>
-                  <a:srgbClr val="666666"/>
-                </a:solidFill>
-                <a:latin typeface="Calibri"/>
-              </a:rPr>
-              <a:t>14</a:t>
-            </a:r>
-          </a:p>
-        </p:txBody>
-      </p:sp>
-    </p:spTree>
-  </p:cSld>
-  <p:clrMapOvr>
-    <a:masterClrMapping/>
-  </p:clrMapOvr>
-</p:sld>
-</file>
-
-<file path=ppt/slides/slide15.xml><?xml version="1.0" encoding="utf-8"?>
 <p:sld xmlns:a="http://schemas.openxmlformats.org/drawingml/2006/main" xmlns:p="http://schemas.openxmlformats.org/presentationml/2006/main" xmlns:r="http://schemas.openxmlformats.org/officeDocument/2006/relationships">
   <p:cSld>
     <p:bg>

--- a/Introduccion a la Ingenieria/Clases/Clase 8 - Taller de aplicacion del ciclo de vida/Presentacion.pptx
+++ b/Introduccion a la Ingenieria/Clases/Clase 8 - Taller de aplicacion del ciclo de vida/Presentacion.pptx
@@ -6778,7 +6778,7 @@
                 </a:solidFill>
                 <a:latin typeface="Calibri"/>
               </a:rPr>
-              <a:t>Actividad en equipos — Taller extendido — decidir la alternativa y fijar el alcance</a:t>
+              <a:t>Actividad en equipos — opcional · la guía está en la carpeta de la clase</a:t>
             </a:r>
           </a:p>
         </p:txBody>
@@ -6893,7 +6893,7 @@
                 </a:solidFill>
                 <a:latin typeface="Calibri"/>
               </a:rPr>
-              <a:t>Exposiciones — 5 equipos × 3 min — la decisión y por qué</a:t>
+              <a:t>Exposiciones — de la práctica, si se hizo</a:t>
             </a:r>
           </a:p>
         </p:txBody>
@@ -7052,7 +7052,7 @@
                 </a:solidFill>
                 <a:latin typeface="Calibri"/>
               </a:rPr>
-              <a:t> La teoría se comprime a 20 minutos —cuatro casos y dos herramientas— y la actividad en equipos se extiende a 40, porque el entregable es una </a:t>
+              <a:t> La teoría se comprime a 20 minutos —cuatro casos y dos herramientas— y la actividad en equipos se extiende a 40, porque lo que sale de hoy es una </a:t>
             </a:r>
             <a:r>
               <a:rPr sz="1200" b="1" i="1">

--- a/Introduccion a la Ingenieria/Clases/Clase 8 - Taller de aplicacion del ciclo de vida/Presentacion.pptx
+++ b/Introduccion a la Ingenieria/Clases/Clase 8 - Taller de aplicacion del ciclo de vida/Presentacion.pptx
@@ -11,7 +11,7 @@
     <p:sldId id="259" r:id="rId10"/>
     <p:sldId id="260" r:id="rId11"/>
     <p:sldId id="261" r:id="rId12"/>
-    <p:sldId id="262" r:id="rId13"/>
+    <p:sldId id="262" r:id="rId14"/>
     <p:sldId id="263" r:id="rId15"/>
     <p:sldId id="264" r:id="rId16"/>
     <p:sldId id="265" r:id="rId17"/>
@@ -513,7 +513,43 @@
           <a:lstStyle/>
           <a:p>
             <a:r>
-              <a:t>El empate es a propósito: la matriz no decide sola. Ahí entra el paso 5: elegir y escribir qué se pierde. Si eligen la web, pierden comodidad del cliente; si eligen WhatsApp, pierden la medición. Ninguna respuesta es incorrecta si se justifica.</a:t>
+              <a:t>El resultado no es el número: es el argumento escrito. Una matriz sin justificaciones es un adorno</a:t>
+            </a:r>
+          </a:p>
+          <a:p/>
+          <a:p>
+            <a:r>
+              <a:t>LA MATRIZ DE DECISIÓN: CÓMO SE DECIDE SIN QUE LA DECISIÓN YA ESTUVIERA TOMADA</a:t>
+            </a:r>
+          </a:p>
+          <a:p/>
+          <a:p>
+            <a:r>
+              <a:t>La matriz de decisión es una herramienta simple con una trampa sutil, y enseñar la trampa es más valioso que enseñar la herramienta.</a:t>
+            </a:r>
+          </a:p>
+          <a:p/>
+          <a:p>
+            <a:r>
+              <a:t>Los cinco pasos son: escribir las dos alternativas en una frase cada una; elegir de tres a cinco criterios; ponerle peso a cada criterio; calificar cada alternativa criterio por criterio con una escala corta y una media línea de justificación; y decidir, escribiendo qué se pierde.</a:t>
+            </a:r>
+          </a:p>
+          <a:p/>
+          <a:p>
+            <a:r>
+              <a:t>La trampa está en el paso 3, y hay que decirla explícitamente: los pesos se deciden antes de mirar las alternativas. Si se deciden después, el equipo —sin mala intención— acomoda los pesos para que gane la alternativa que ya quería. Es el sesgo más común en decisiones de ingeniería y produce documentos que parecen análisis y son justificaciones. La regla práctica en la sala: primero se escriben los criterios y los pesos en el documento, y solo después se califica.</a:t>
+            </a:r>
+          </a:p>
+          <a:p/>
+          <a:p>
+            <a:r>
+              <a:t>Los criterios no son gustos: salen de los requisitos no funcionales y de las restricciones. Para el caso de la biblioteca: funciona sin computador en el mostrador, se aprende sin manual, se puede construir en las sesiones que quedan, cumple el requisito de datos ligeros, no exige que alguien atienda en horario fijo. Si un equipo pone «lo que más nos gusta» o «lo más innovador» como criterio, hay que reemplazarlo: no se puede calificar y no se puede defender.</a:t>
+            </a:r>
+          </a:p>
+          <a:p/>
+          <a:p>
+            <a:r>
+              <a:t>Y el paso 5 es el que separa una decisión profesional de una preferencia: toda decisión sacrifica algo, y nombrarlo es lo que la vuelve defendible. «Elegimos la lista publicada en vez de la aplicación; perdemos la actualización en tiempo real y ganamos que funcione sin conexión y sin capacitar a nadie.» Un equipo que puede decir qué perdió entendió que estaba decidiendo, no acertando.</a:t>
             </a:r>
           </a:p>
         </p:txBody>
@@ -583,7 +619,7 @@
           <a:lstStyle/>
           <a:p>
             <a:r>
-              <a:t>La prueba del alcance mínimo: si se construye solo esto y se pone delante del cliente, ¿le sirve? Aquí sí: deja de esperar de pie. La lista de lo que queda fuera se muestra en la exposición final.</a:t>
+              <a:t>El empate es a propósito: la matriz no decide sola. Ahí entra el paso 5: elegir y escribir qué se pierde. Si eligen la web, pierden comodidad del cliente; si eligen WhatsApp, pierden la medición. Ninguna respuesta es incorrecta si se justifica.</a:t>
             </a:r>
           </a:p>
         </p:txBody>
@@ -653,7 +689,7 @@
           <a:lstStyle/>
           <a:p>
             <a:r>
-              <a:t>Muestre que cada línea responde a una trampa: ajenos al equipo (trampa 1) y una tarea en lugar de una opinión (trampa 2).</a:t>
+              <a:t>La prueba del alcance mínimo: si se construye solo esto y se pone delante del cliente, ¿le sirve? Aquí sí: deja de esperar de pie. La lista de lo que queda fuera se muestra en la exposición final.</a:t>
             </a:r>
           </a:p>
         </p:txBody>
@@ -723,25 +759,7 @@
           <a:lstStyle/>
           <a:p>
             <a:r>
-              <a:t>LA PREGUNTA DE ENTRADA: 45 MINUTOS Y UNA FASE SALTADA</a:t>
-            </a:r>
-          </a:p>
-          <a:p/>
-          <a:p>
-            <a:r>
-              <a:t>El caso de la firma financiera de 2012 es el mejor gancho posible para esta sesión porque desarma la idea de que los desastres los causa código malo. El código llevaba años funcionando. Lo que falló fue el paso controlado de una fase a la siguiente: un despliegue que dejó una versión antigua activa en uno de los servidores, un sistema automático operando a velocidad de máquina, y ninguna manera de frenar rápido cuando empezó a hacer daño. En cuestión de minutos las pérdidas fueron enormes y la firma no sobrevivió como empresa independiente.</a:t>
-            </a:r>
-          </a:p>
-          <a:p/>
-          <a:p>
-            <a:r>
-              <a:t>La pregunta del muro —«¿en qué fase estaba el error?»— va a producir respuestas que dicen «en la programación», y ahí está la lección: el error no estaba en el código, estaba en la operación. Es la fase que en la sesión 7 se nombró de pasada y que nadie enseña en primer semestre. Sirve además para introducir una idea que vale para todo el semestre: cada transición entre fases es un lugar donde se rompen los proyectos, y por eso las fases tienen entregables.</a:t>
-            </a:r>
-          </a:p>
-          <a:p/>
-          <a:p>
-            <a:r>
-              <a:t>Recomendación de manejo: no dé el nombre de la empresa en la apertura. La fuerza está en la pregunta, y el nombre lo pueden buscar ellos cuando se les pida citar la fuente.</a:t>
+              <a:t>Muestre que cada línea responde a una trampa: ajenos al equipo (trampa 1) y una tarea en lugar de una opinión (trampa 2).</a:t>
             </a:r>
           </a:p>
         </p:txBody>
@@ -811,43 +829,25 @@
           <a:lstStyle/>
           <a:p>
             <a:r>
-              <a:t>LOS CUATRO CASOS: QUÉ CONTAR Y CÓMO EXIGIR LA FUENTE</a:t>
+              <a:t>LA PREGUNTA DE ENTRADA: 45 MINUTOS Y UNA FASE SALTADA</a:t>
             </a:r>
           </a:p>
           <a:p/>
           <a:p>
             <a:r>
-              <a:t>Cuatro casos, cinco minutos en total, un minuto y algo por caso. La tabla es densa a propósito: hoy la teoría son 20 minutos y el peso está en el taller.</a:t>
+              <a:t>El caso de la firma financiera de 2012 es el mejor gancho posible para esta sesión porque desarma la idea de que los desastres los causa código malo. El código llevaba años funcionando. Lo que falló fue el paso controlado de una fase a la siguiente: un despliegue que dejó una versión antigua activa en uno de los servidores, un sistema automático operando a velocidad de máquina, y ninguna manera de frenar rápido cuando empezó a hacer daño. En cuestión de minutos las pérdidas fueron enormes y la firma no sobrevivió como empresa independiente.</a:t>
             </a:r>
           </a:p>
           <a:p/>
           <a:p>
             <a:r>
-              <a:t>El sistema de equipajes del aeropuerto es el caso de requisitos y diseño. Un sistema automatizado de manejo de maletas de una escala sin precedentes, contratado con el plazo de apertura ya fijado y sin pruebas a escala real; retrasó la apertura del aeropuerto muchos meses, funcionó parcialmente durante años y terminó abandonado. La lección: el plazo se fijó antes de saber si era posible, y ningún esfuerzo de construcción arregla eso.</a:t>
+              <a:t>La pregunta del muro —«¿en qué fase estaba el error?»— va a producir respuestas que dicen «en la programación», y ahí está la lección: el error no estaba en el código, estaba en la operación. Es la fase que en la sesión 7 se nombró de pasada y que nadie enseña en primer semestre. Sirve además para introducir una idea que vale para todo el semestre: cada transición entre fases es un lugar donde se rompen los proyectos, y por eso las fases tienen entregables.</a:t>
             </a:r>
           </a:p>
           <a:p/>
           <a:p>
             <a:r>
-              <a:t>El sistema de expedientes de la agencia federal es el caso de requisitos puros: años de desarrollo, requisitos que cambiaban permanentemente, ninguna definición estable de qué debía hacer el sistema, y un abandono sin haber entrado en operación. Es el ejemplo perfecto de que sin criterios de aceptación no hay manera de terminar: un proyecto que no puede decir cuándo está listo, no está listo nunca.</a:t>
-            </a:r>
-          </a:p>
-          <a:p/>
-          <a:p>
-            <a:r>
-              <a:t>El portal público de salud en su lanzamiento es el caso de validación. La demanda del primer día era perfectamente previsible —una fecha anunciada, una población conocida— y aun así el sitio no aguantó. La lección para sus proyectos: probar que algo funciona con un usuario no es probar que funciona con muchos, y el volumen es un requisito no funcional que se valida aparte.</a:t>
-            </a:r>
-          </a:p>
-          <a:p/>
-          <a:p>
-            <a:r>
-              <a:t>La firma financiera es el caso de operación, y es el que rompe el prejuicio sobre el código. Súmele el detalle que lo hace inolvidable: el problema no fue escribir el software, fue instalarlo, y no existía una forma rápida de detenerlo.</a:t>
-            </a:r>
-          </a:p>
-          <a:p/>
-          <a:p>
-            <a:r>
-              <a:t>Y una exigencia metodológica que hay que repetir porque es la marca del curso: los cuatro casos son públicos y están documentados en informes oficiales y en prensa especializada, pero las cifras circulan con variaciones. Quien cite un monto o una fecha en la exposición tiene que decir de dónde salió y de qué año es. Es la misma regla de la sesión 5 con las cifras ambientales y de la sesión 4 con los numerales.</a:t>
+              <a:t>Recomendación de manejo: no dé el nombre de la empresa en la apertura. La fuerza está en la pregunta, y el nombre lo pueden buscar ellos cuando se les pida citar la fuente.</a:t>
             </a:r>
           </a:p>
         </p:txBody>
@@ -917,37 +917,43 @@
           <a:lstStyle/>
           <a:p>
             <a:r>
-              <a:t>LA MATRIZ DE DECISIÓN: CÓMO SE DECIDE SIN QUE LA DECISIÓN YA ESTUVIERA TOMADA</a:t>
+              <a:t>LOS CUATRO CASOS: QUÉ CONTAR Y CÓMO EXIGIR LA FUENTE</a:t>
             </a:r>
           </a:p>
           <a:p/>
           <a:p>
             <a:r>
-              <a:t>La matriz de decisión es una herramienta simple con una trampa sutil, y enseñar la trampa es más valioso que enseñar la herramienta.</a:t>
+              <a:t>Cuatro casos, cinco minutos en total, un minuto y algo por caso. La tabla es densa a propósito: hoy la teoría son 20 minutos y el peso está en el taller.</a:t>
             </a:r>
           </a:p>
           <a:p/>
           <a:p>
             <a:r>
-              <a:t>Los cinco pasos son: escribir las dos alternativas en una frase cada una; elegir de tres a cinco criterios; ponerle peso a cada criterio; calificar cada alternativa criterio por criterio con una escala corta y una media línea de justificación; y decidir, escribiendo qué se pierde.</a:t>
+              <a:t>El sistema de equipajes del aeropuerto es el caso de requisitos y diseño. Un sistema automatizado de manejo de maletas de una escala sin precedentes, contratado con el plazo de apertura ya fijado y sin pruebas a escala real; retrasó la apertura del aeropuerto muchos meses, funcionó parcialmente durante años y terminó abandonado. La lección: el plazo se fijó antes de saber si era posible, y ningún esfuerzo de construcción arregla eso.</a:t>
             </a:r>
           </a:p>
           <a:p/>
           <a:p>
             <a:r>
-              <a:t>La trampa está en el paso 3, y hay que decirla explícitamente: los pesos se deciden antes de mirar las alternativas. Si se deciden después, el equipo —sin mala intención— acomoda los pesos para que gane la alternativa que ya quería. Es el sesgo más común en decisiones de ingeniería y produce documentos que parecen análisis y son justificaciones. La regla práctica en la sala: primero se escriben los criterios y los pesos en el documento, y solo después se califica.</a:t>
+              <a:t>El sistema de expedientes de la agencia federal es el caso de requisitos puros: años de desarrollo, requisitos que cambiaban permanentemente, ninguna definición estable de qué debía hacer el sistema, y un abandono sin haber entrado en operación. Es el ejemplo perfecto de que sin criterios de aceptación no hay manera de terminar: un proyecto que no puede decir cuándo está listo, no está listo nunca.</a:t>
             </a:r>
           </a:p>
           <a:p/>
           <a:p>
             <a:r>
-              <a:t>Los criterios no son gustos: salen de los requisitos no funcionales y de las restricciones. Para el caso de la biblioteca: funciona sin computador en el mostrador, se aprende sin manual, se puede construir en las sesiones que quedan, cumple el requisito de datos ligeros, no exige que alguien atienda en horario fijo. Si un equipo pone «lo que más nos gusta» o «lo más innovador» como criterio, hay que reemplazarlo: no se puede calificar y no se puede defender.</a:t>
+              <a:t>El portal público de salud en su lanzamiento es el caso de validación. La demanda del primer día era perfectamente previsible —una fecha anunciada, una población conocida— y aun así el sitio no aguantó. La lección para sus proyectos: probar que algo funciona con un usuario no es probar que funciona con muchos, y el volumen es un requisito no funcional que se valida aparte.</a:t>
             </a:r>
           </a:p>
           <a:p/>
           <a:p>
             <a:r>
-              <a:t>Y el paso 5 es el que separa una decisión profesional de una preferencia: toda decisión sacrifica algo, y nombrarlo es lo que la vuelve defendible. «Elegimos la lista publicada en vez de la aplicación; perdemos la actualización en tiempo real y ganamos que funcione sin conexión y sin capacitar a nadie.» Un equipo que puede decir qué perdió entendió que estaba decidiendo, no acertando.</a:t>
+              <a:t>La firma financiera es el caso de operación, y es el que rompe el prejuicio sobre el código. Súmele el detalle que lo hace inolvidable: el problema no fue escribir el software, fue instalarlo, y no existía una forma rápida de detenerlo.</a:t>
+            </a:r>
+          </a:p>
+          <a:p/>
+          <a:p>
+            <a:r>
+              <a:t>Y una exigencia metodológica que hay que repetir porque es la marca del curso: los cuatro casos son públicos y están documentados en informes oficiales y en prensa especializada, pero las cifras circulan con variaciones. Quien cite un monto o una fecha en la exposición tiene que decir de dónde salió y de qué año es. Es la misma regla de la sesión 5 con las cifras ambientales y de la sesión 4 con los numerales.</a:t>
             </a:r>
           </a:p>
         </p:txBody>
@@ -7258,14 +7264,118 @@
       </p:sp>
       <p:sp>
         <p:nvSpPr>
-          <p:cNvPr id="5" name="TextBox 4"/>
+          <p:cNvPr id="5" name="Rounded Rectangle 4"/>
+          <p:cNvSpPr/>
+          <p:nvPr/>
+        </p:nvSpPr>
+        <p:spPr>
+          <a:xfrm>
+            <a:off x="5797149" y="1573813"/>
+            <a:ext cx="6010497" cy="4057845"/>
+          </a:xfrm>
+          <a:prstGeom prst="roundRect">
+            <a:avLst>
+              <a:gd name="adj" fmla="val 4000"/>
+            </a:avLst>
+          </a:prstGeom>
+          <a:solidFill>
+            <a:srgbClr val="E8EEF4"/>
+          </a:solidFill>
+          <a:ln>
+            <a:noFill/>
+          </a:ln>
+        </p:spPr>
+        <p:style>
+          <a:lnRef idx="1">
+            <a:schemeClr val="accent1"/>
+          </a:lnRef>
+          <a:fillRef idx="3">
+            <a:schemeClr val="accent1"/>
+          </a:fillRef>
+          <a:effectRef idx="2">
+            <a:schemeClr val="accent1"/>
+          </a:effectRef>
+          <a:fontRef idx="minor">
+            <a:schemeClr val="lt1"/>
+          </a:fontRef>
+        </p:style>
+        <p:txBody>
+          <a:bodyPr rtlCol="0" anchor="ctr"/>
+          <a:lstStyle/>
+          <a:p>
+            <a:pPr algn="ctr"/>
+          </a:p>
+        </p:txBody>
+      </p:sp>
+      <p:pic>
+        <p:nvPicPr>
+          <p:cNvPr id="6" name="Picture 5" descr="students-learning-laptops-classroom.jpg"/>
+          <p:cNvPicPr>
+            <a:picLocks noChangeAspect="1"/>
+          </p:cNvPicPr>
+          <p:nvPr/>
+        </p:nvPicPr>
+        <p:blipFill>
+          <a:blip r:embed="rId2"/>
+          <a:stretch>
+            <a:fillRect/>
+          </a:stretch>
+        </p:blipFill>
+        <p:spPr>
+          <a:xfrm>
+            <a:off x="5870301" y="1646965"/>
+            <a:ext cx="5864193" cy="3911541"/>
+          </a:xfrm>
+          <a:prstGeom prst="rect">
+            <a:avLst/>
+          </a:prstGeom>
+        </p:spPr>
+      </p:pic>
+      <p:sp>
+        <p:nvSpPr>
+          <p:cNvPr id="7" name="TextBox 6"/>
           <p:cNvSpPr txBox="1"/>
           <p:nvPr/>
         </p:nvSpPr>
         <p:spPr>
           <a:xfrm>
-            <a:off x="457200" y="1170432"/>
-            <a:ext cx="11277295" cy="5230368"/>
+            <a:off x="5870301" y="5961888"/>
+            <a:ext cx="5864193" cy="320040"/>
+          </a:xfrm>
+          <a:prstGeom prst="rect">
+            <a:avLst/>
+          </a:prstGeom>
+          <a:noFill/>
+        </p:spPr>
+        <p:txBody>
+          <a:bodyPr wrap="square">
+            <a:spAutoFit/>
+          </a:bodyPr>
+          <a:lstStyle/>
+          <a:p>
+            <a:pPr algn="ctr"/>
+            <a:r>
+              <a:rPr sz="1100" b="0" i="1">
+                <a:solidFill>
+                  <a:srgbClr val="666666"/>
+                </a:solidFill>
+                <a:latin typeface="Calibri"/>
+              </a:rPr>
+              <a:t>Foto: Mikhail Nilov · Pexels</a:t>
+            </a:r>
+          </a:p>
+        </p:txBody>
+      </p:sp>
+      <p:sp>
+        <p:nvSpPr>
+          <p:cNvPr id="8" name="TextBox 7"/>
+          <p:cNvSpPr txBox="1"/>
+          <p:nvPr/>
+        </p:nvSpPr>
+        <p:spPr>
+          <a:xfrm>
+            <a:off x="457200" y="1353312"/>
+            <a:ext cx="5093061" cy="5047488"/>
           </a:xfrm>
           <a:prstGeom prst="rect">
             <a:avLst/>
@@ -7417,7 +7527,7 @@
       </p:sp>
       <p:sp>
         <p:nvSpPr>
-          <p:cNvPr id="6" name="TextBox 5"/>
+          <p:cNvPr id="9" name="TextBox 8"/>
           <p:cNvSpPr txBox="1"/>
           <p:nvPr/>
         </p:nvSpPr>
@@ -8419,7 +8529,7 @@
         <p:spPr>
           <a:xfrm>
             <a:off x="0" y="0"/>
-            <a:ext cx="12191695" cy="1170432"/>
+            <a:ext cx="12191695" cy="960120"/>
           </a:xfrm>
           <a:prstGeom prst="rect">
             <a:avLst/>
@@ -8461,7 +8571,7 @@
         </p:nvSpPr>
         <p:spPr>
           <a:xfrm>
-            <a:off x="0" y="1170432"/>
+            <a:off x="0" y="960120"/>
             <a:ext cx="12191695" cy="41148"/>
           </a:xfrm>
           <a:prstGeom prst="rect">
@@ -8505,7 +8615,7 @@
         <p:spPr>
           <a:xfrm>
             <a:off x="457200" y="164592"/>
-            <a:ext cx="11277295" cy="384048"/>
+            <a:ext cx="11277295" cy="502920"/>
           </a:xfrm>
           <a:prstGeom prst="rect">
             <a:avLst/>
@@ -8532,56 +8642,22 @@
       </p:sp>
       <p:sp>
         <p:nvSpPr>
-          <p:cNvPr id="5" name="TextBox 4"/>
-          <p:cNvSpPr txBox="1"/>
-          <p:nvPr/>
-        </p:nvSpPr>
-        <p:spPr>
-          <a:xfrm>
-            <a:off x="457200" y="566928"/>
-            <a:ext cx="11277295" cy="411480"/>
-          </a:xfrm>
-          <a:prstGeom prst="rect">
-            <a:avLst/>
-          </a:prstGeom>
-          <a:noFill/>
-        </p:spPr>
-        <p:txBody>
-          <a:bodyPr wrap="square">
-            <a:spAutoFit/>
-          </a:bodyPr>
-          <a:lstStyle/>
-          <a:p>
-            <a:r>
-              <a:rPr sz="1400" b="0" i="0">
-                <a:solidFill>
-                  <a:srgbClr val="B8D8EE"/>
-                </a:solidFill>
-                <a:latin typeface="Calibri"/>
-              </a:rPr>
-              <a:t>El resultado no es el número: es el argumento escrito. Una matriz sin justificaciones es un adorno</a:t>
-            </a:r>
-          </a:p>
-        </p:txBody>
-      </p:sp>
-      <p:sp>
-        <p:nvSpPr>
-          <p:cNvPr id="6" name="Rounded Rectangle 5"/>
+          <p:cNvPr id="5" name="Rounded Rectangle 4"/>
           <p:cNvSpPr/>
           <p:nvPr/>
         </p:nvSpPr>
         <p:spPr>
           <a:xfrm>
-            <a:off x="457200" y="1444752"/>
-            <a:ext cx="11277295" cy="908913"/>
+            <a:off x="5803166" y="1188719"/>
+            <a:ext cx="5998464" cy="4828032"/>
           </a:xfrm>
           <a:prstGeom prst="roundRect">
             <a:avLst>
-              <a:gd name="adj" fmla="val 12000"/>
+              <a:gd name="adj" fmla="val 4000"/>
             </a:avLst>
           </a:prstGeom>
           <a:solidFill>
-            <a:srgbClr val="F2F2F2"/>
+            <a:srgbClr val="E8EEF4"/>
           </a:solidFill>
           <a:ln>
             <a:noFill/>
@@ -8609,61 +8685,147 @@
           </a:p>
         </p:txBody>
       </p:sp>
-      <p:sp>
-        <p:nvSpPr>
-          <p:cNvPr id="7" name="Rounded Rectangle 6"/>
-          <p:cNvSpPr/>
-          <p:nvPr/>
-        </p:nvSpPr>
-        <p:spPr>
-          <a:xfrm>
-            <a:off x="594360" y="1679752"/>
-            <a:ext cx="438912" cy="438912"/>
-          </a:xfrm>
-          <a:prstGeom prst="roundRect">
-            <a:avLst>
-              <a:gd name="adj" fmla="val 12000"/>
-            </a:avLst>
-          </a:prstGeom>
-          <a:solidFill>
-            <a:srgbClr val="095292"/>
-          </a:solidFill>
-          <a:ln>
-            <a:noFill/>
-          </a:ln>
-        </p:spPr>
-        <p:style>
-          <a:lnRef idx="1">
-            <a:schemeClr val="accent1"/>
-          </a:lnRef>
-          <a:fillRef idx="3">
-            <a:schemeClr val="accent1"/>
-          </a:fillRef>
-          <a:effectRef idx="2">
-            <a:schemeClr val="accent1"/>
-          </a:effectRef>
-          <a:fontRef idx="minor">
-            <a:schemeClr val="lt1"/>
-          </a:fontRef>
-        </p:style>
-        <p:txBody>
-          <a:bodyPr rtlCol="0" anchor="ctr"/>
+      <p:pic>
+        <p:nvPicPr>
+          <p:cNvPr id="6" name="Picture 5" descr="matriz-decision-paso1.png"/>
+          <p:cNvPicPr>
+            <a:picLocks noChangeAspect="1"/>
+          </p:cNvPicPr>
+          <p:nvPr/>
+        </p:nvPicPr>
+        <p:blipFill>
+          <a:blip r:embed="rId2"/>
+          <a:stretch>
+            <a:fillRect/>
+          </a:stretch>
+        </p:blipFill>
+        <p:spPr>
+          <a:xfrm>
+            <a:off x="5876318" y="1261872"/>
+            <a:ext cx="5852160" cy="4681728"/>
+          </a:xfrm>
+          <a:prstGeom prst="rect">
+            <a:avLst/>
+          </a:prstGeom>
+        </p:spPr>
+      </p:pic>
+      <p:pic>
+        <p:nvPicPr>
+          <p:cNvPr id="7" name="Picture 6" descr="matriz-decision-paso2.png"/>
+          <p:cNvPicPr>
+            <a:picLocks noChangeAspect="1"/>
+          </p:cNvPicPr>
+          <p:nvPr/>
+        </p:nvPicPr>
+        <p:blipFill>
+          <a:blip r:embed="rId3"/>
+          <a:stretch>
+            <a:fillRect/>
+          </a:stretch>
+        </p:blipFill>
+        <p:spPr>
+          <a:xfrm>
+            <a:off x="5876318" y="1261872"/>
+            <a:ext cx="5852160" cy="4681728"/>
+          </a:xfrm>
+          <a:prstGeom prst="rect">
+            <a:avLst/>
+          </a:prstGeom>
+        </p:spPr>
+      </p:pic>
+      <p:pic>
+        <p:nvPicPr>
+          <p:cNvPr id="8" name="Picture 7" descr="matriz-decision-paso3.png"/>
+          <p:cNvPicPr>
+            <a:picLocks noChangeAspect="1"/>
+          </p:cNvPicPr>
+          <p:nvPr/>
+        </p:nvPicPr>
+        <p:blipFill>
+          <a:blip r:embed="rId4"/>
+          <a:stretch>
+            <a:fillRect/>
+          </a:stretch>
+        </p:blipFill>
+        <p:spPr>
+          <a:xfrm>
+            <a:off x="5876318" y="1261872"/>
+            <a:ext cx="5852160" cy="4681728"/>
+          </a:xfrm>
+          <a:prstGeom prst="rect">
+            <a:avLst/>
+          </a:prstGeom>
+        </p:spPr>
+      </p:pic>
+      <p:pic>
+        <p:nvPicPr>
+          <p:cNvPr id="9" name="Picture 8" descr="matriz-decision-paso4.png"/>
+          <p:cNvPicPr>
+            <a:picLocks noChangeAspect="1"/>
+          </p:cNvPicPr>
+          <p:nvPr/>
+        </p:nvPicPr>
+        <p:blipFill>
+          <a:blip r:embed="rId5"/>
+          <a:stretch>
+            <a:fillRect/>
+          </a:stretch>
+        </p:blipFill>
+        <p:spPr>
+          <a:xfrm>
+            <a:off x="5876318" y="1261872"/>
+            <a:ext cx="5852160" cy="4681728"/>
+          </a:xfrm>
+          <a:prstGeom prst="rect">
+            <a:avLst/>
+          </a:prstGeom>
+        </p:spPr>
+      </p:pic>
+      <p:sp>
+        <p:nvSpPr>
+          <p:cNvPr id="18" name="TextBox 17"/>
+          <p:cNvSpPr txBox="1"/>
+          <p:nvPr/>
+        </p:nvSpPr>
+        <p:spPr>
+          <a:xfrm>
+            <a:off x="5870301" y="5961888"/>
+            <a:ext cx="5864193" cy="320040"/>
+          </a:xfrm>
+          <a:prstGeom prst="rect">
+            <a:avLst/>
+          </a:prstGeom>
+          <a:noFill/>
+        </p:spPr>
+        <p:txBody>
+          <a:bodyPr wrap="square">
+            <a:spAutoFit/>
+          </a:bodyPr>
           <a:lstStyle/>
           <a:p>
             <a:pPr algn="ctr"/>
-          </a:p>
-        </p:txBody>
-      </p:sp>
-      <p:sp>
-        <p:nvSpPr>
-          <p:cNvPr id="8" name="TextBox 7"/>
+            <a:r>
+              <a:rPr sz="1100" b="0" i="1">
+                <a:solidFill>
+                  <a:srgbClr val="666666"/>
+                </a:solidFill>
+                <a:latin typeface="Calibri"/>
+              </a:rPr>
+              <a:t>Clic para avanzar la animación</a:t>
+            </a:r>
+          </a:p>
+        </p:txBody>
+      </p:sp>
+      <p:sp>
+        <p:nvSpPr>
+          <p:cNvPr id="19" name="TextBox 18"/>
           <p:cNvSpPr txBox="1"/>
           <p:nvPr/>
         </p:nvSpPr>
         <p:spPr>
           <a:xfrm>
-            <a:off x="594360" y="1679752"/>
-            <a:ext cx="438912" cy="438912"/>
+            <a:off x="457200" y="1353312"/>
+            <a:ext cx="5093061" cy="5047488"/>
           </a:xfrm>
           <a:prstGeom prst="rect">
             <a:avLst/>
@@ -8671,793 +8833,117 @@
           <a:noFill/>
         </p:spPr>
         <p:txBody>
-          <a:bodyPr wrap="square" anchor="ctr"/>
-          <a:lstStyle/>
-          <a:p>
-            <a:pPr algn="ctr"/>
-            <a:r>
-              <a:rPr sz="1600" b="1" i="0">
-                <a:solidFill>
-                  <a:srgbClr val="FFFFFF"/>
-                </a:solidFill>
-                <a:latin typeface="Calibri"/>
-              </a:rPr>
-              <a:t>1</a:t>
-            </a:r>
-          </a:p>
-        </p:txBody>
-      </p:sp>
-      <p:sp>
-        <p:nvSpPr>
-          <p:cNvPr id="9" name="TextBox 8"/>
-          <p:cNvSpPr txBox="1"/>
-          <p:nvPr/>
-        </p:nvSpPr>
-        <p:spPr>
-          <a:xfrm>
-            <a:off x="1188720" y="1536192"/>
-            <a:ext cx="10271455" cy="744321"/>
-          </a:xfrm>
-          <a:prstGeom prst="rect">
-            <a:avLst/>
-          </a:prstGeom>
-          <a:noFill/>
-        </p:spPr>
-        <p:txBody>
-          <a:bodyPr wrap="square" anchor="ctr"/>
-          <a:lstStyle/>
-          <a:p>
-            <a:r>
-              <a:rPr sz="1500" b="1" i="0">
-                <a:solidFill>
-                  <a:srgbClr val="095292"/>
-                </a:solidFill>
-                <a:latin typeface="Calibri"/>
-              </a:rPr>
-              <a:t>1 · Escriba las dos, en una frase cada una</a:t>
-            </a:r>
-          </a:p>
+          <a:bodyPr wrap="square">
+            <a:spAutoFit/>
+          </a:bodyPr>
+          <a:lstStyle/>
           <a:p>
             <a:pPr>
-              <a:spcBef>
-                <a:spcPts val="200"/>
-              </a:spcBef>
+              <a:spcAft>
+                <a:spcPts val="800"/>
+              </a:spcAft>
             </a:pPr>
             <a:r>
-              <a:rPr sz="1300" b="0" i="0">
+              <a:rPr sz="2000" b="0" i="0">
                 <a:solidFill>
                   <a:srgbClr val="333333"/>
                 </a:solidFill>
                 <a:latin typeface="Calibri"/>
               </a:rPr>
-              <a:t>Sin adjetivos. Si una de las dos no se puede escribir en una frase, no está pensada.</a:t>
-            </a:r>
-          </a:p>
-        </p:txBody>
-      </p:sp>
-      <p:sp>
-        <p:nvSpPr>
-          <p:cNvPr id="10" name="Rounded Rectangle 9"/>
-          <p:cNvSpPr/>
-          <p:nvPr/>
-        </p:nvSpPr>
-        <p:spPr>
-          <a:xfrm>
-            <a:off x="457200" y="2445105"/>
-            <a:ext cx="11277295" cy="908913"/>
-          </a:xfrm>
-          <a:prstGeom prst="roundRect">
-            <a:avLst>
-              <a:gd name="adj" fmla="val 12000"/>
-            </a:avLst>
-          </a:prstGeom>
-          <a:solidFill>
-            <a:srgbClr val="E8F4FA"/>
-          </a:solidFill>
-          <a:ln>
-            <a:noFill/>
-          </a:ln>
-        </p:spPr>
-        <p:style>
-          <a:lnRef idx="1">
-            <a:schemeClr val="accent1"/>
-          </a:lnRef>
-          <a:fillRef idx="3">
-            <a:schemeClr val="accent1"/>
-          </a:fillRef>
-          <a:effectRef idx="2">
-            <a:schemeClr val="accent1"/>
-          </a:effectRef>
-          <a:fontRef idx="minor">
-            <a:schemeClr val="lt1"/>
-          </a:fontRef>
-        </p:style>
-        <p:txBody>
-          <a:bodyPr rtlCol="0" anchor="ctr"/>
-          <a:lstStyle/>
-          <a:p>
-            <a:pPr algn="ctr"/>
-          </a:p>
-        </p:txBody>
-      </p:sp>
-      <p:sp>
-        <p:nvSpPr>
-          <p:cNvPr id="11" name="Rounded Rectangle 10"/>
-          <p:cNvSpPr/>
-          <p:nvPr/>
-        </p:nvSpPr>
-        <p:spPr>
-          <a:xfrm>
-            <a:off x="594360" y="2680106"/>
-            <a:ext cx="438912" cy="438912"/>
-          </a:xfrm>
-          <a:prstGeom prst="roundRect">
-            <a:avLst>
-              <a:gd name="adj" fmla="val 12000"/>
-            </a:avLst>
-          </a:prstGeom>
-          <a:solidFill>
-            <a:srgbClr val="095292"/>
-          </a:solidFill>
-          <a:ln>
-            <a:noFill/>
-          </a:ln>
-        </p:spPr>
-        <p:style>
-          <a:lnRef idx="1">
-            <a:schemeClr val="accent1"/>
-          </a:lnRef>
-          <a:fillRef idx="3">
-            <a:schemeClr val="accent1"/>
-          </a:fillRef>
-          <a:effectRef idx="2">
-            <a:schemeClr val="accent1"/>
-          </a:effectRef>
-          <a:fontRef idx="minor">
-            <a:schemeClr val="lt1"/>
-          </a:fontRef>
-        </p:style>
-        <p:txBody>
-          <a:bodyPr rtlCol="0" anchor="ctr"/>
-          <a:lstStyle/>
-          <a:p>
-            <a:pPr algn="ctr"/>
-          </a:p>
-        </p:txBody>
-      </p:sp>
-      <p:sp>
-        <p:nvSpPr>
-          <p:cNvPr id="12" name="TextBox 11"/>
-          <p:cNvSpPr txBox="1"/>
-          <p:nvPr/>
-        </p:nvSpPr>
-        <p:spPr>
-          <a:xfrm>
-            <a:off x="594360" y="2680106"/>
-            <a:ext cx="438912" cy="438912"/>
-          </a:xfrm>
-          <a:prstGeom prst="rect">
-            <a:avLst/>
-          </a:prstGeom>
-          <a:noFill/>
-        </p:spPr>
-        <p:txBody>
-          <a:bodyPr wrap="square" anchor="ctr"/>
-          <a:lstStyle/>
-          <a:p>
-            <a:pPr algn="ctr"/>
-            <a:r>
-              <a:rPr sz="1600" b="1" i="0">
-                <a:solidFill>
-                  <a:srgbClr val="FFFFFF"/>
-                </a:solidFill>
-                <a:latin typeface="Calibri"/>
-              </a:rPr>
-              <a:t>2</a:t>
-            </a:r>
-          </a:p>
-        </p:txBody>
-      </p:sp>
-      <p:sp>
-        <p:nvSpPr>
-          <p:cNvPr id="13" name="TextBox 12"/>
-          <p:cNvSpPr txBox="1"/>
-          <p:nvPr/>
-        </p:nvSpPr>
-        <p:spPr>
-          <a:xfrm>
-            <a:off x="1188720" y="2536545"/>
-            <a:ext cx="10271455" cy="744321"/>
-          </a:xfrm>
-          <a:prstGeom prst="rect">
-            <a:avLst/>
-          </a:prstGeom>
-          <a:noFill/>
-        </p:spPr>
-        <p:txBody>
-          <a:bodyPr wrap="square" anchor="ctr"/>
-          <a:lstStyle/>
-          <a:p>
-            <a:r>
-              <a:rPr sz="1500" b="1" i="0">
-                <a:solidFill>
-                  <a:srgbClr val="095292"/>
-                </a:solidFill>
-                <a:latin typeface="Calibri"/>
-              </a:rPr>
-              <a:t>2 · Elija de 3 a 5 criterios</a:t>
+              <a:t>–   </a:t>
+            </a:r>
+            <a:r>
+              <a:rPr sz="2000" b="1" i="0">
+                <a:solidFill>
+                  <a:srgbClr val="333333"/>
+                </a:solidFill>
+                <a:latin typeface="Calibri"/>
+              </a:rPr>
+              <a:t>1 · Escriba las dos, en una frase cada una:</a:t>
+            </a:r>
+            <a:r>
+              <a:rPr sz="2000" b="0" i="0">
+                <a:solidFill>
+                  <a:srgbClr val="333333"/>
+                </a:solidFill>
+                <a:latin typeface="Calibri"/>
+              </a:rPr>
+              <a:t> Sin adjetivos. Si una de las dos no se puede escribir en una frase, no está pensada.</a:t>
             </a:r>
           </a:p>
           <a:p>
             <a:pPr>
-              <a:spcBef>
-                <a:spcPts val="200"/>
-              </a:spcBef>
+              <a:spcAft>
+                <a:spcPts val="800"/>
+              </a:spcAft>
             </a:pPr>
             <a:r>
-              <a:rPr sz="1300" b="0" i="0">
+              <a:rPr sz="2000" b="0" i="0">
                 <a:solidFill>
                   <a:srgbClr val="333333"/>
                 </a:solidFill>
                 <a:latin typeface="Calibri"/>
               </a:rPr>
-              <a:t>Salen de sus requisitos no funcionales y de sus restricciones, no de lo que les gusta.</a:t>
-            </a:r>
-          </a:p>
-        </p:txBody>
-      </p:sp>
-      <p:sp>
-        <p:nvSpPr>
-          <p:cNvPr id="14" name="Rounded Rectangle 13"/>
-          <p:cNvSpPr/>
-          <p:nvPr/>
-        </p:nvSpPr>
-        <p:spPr>
-          <a:xfrm>
-            <a:off x="457200" y="3445459"/>
-            <a:ext cx="11277295" cy="908913"/>
-          </a:xfrm>
-          <a:prstGeom prst="roundRect">
-            <a:avLst>
-              <a:gd name="adj" fmla="val 12000"/>
-            </a:avLst>
-          </a:prstGeom>
-          <a:solidFill>
-            <a:srgbClr val="F2F2F2"/>
-          </a:solidFill>
-          <a:ln>
-            <a:noFill/>
-          </a:ln>
-        </p:spPr>
-        <p:style>
-          <a:lnRef idx="1">
-            <a:schemeClr val="accent1"/>
-          </a:lnRef>
-          <a:fillRef idx="3">
-            <a:schemeClr val="accent1"/>
-          </a:fillRef>
-          <a:effectRef idx="2">
-            <a:schemeClr val="accent1"/>
-          </a:effectRef>
-          <a:fontRef idx="minor">
-            <a:schemeClr val="lt1"/>
-          </a:fontRef>
-        </p:style>
-        <p:txBody>
-          <a:bodyPr rtlCol="0" anchor="ctr"/>
-          <a:lstStyle/>
-          <a:p>
-            <a:pPr algn="ctr"/>
-          </a:p>
-        </p:txBody>
-      </p:sp>
-      <p:sp>
-        <p:nvSpPr>
-          <p:cNvPr id="15" name="Rounded Rectangle 14"/>
-          <p:cNvSpPr/>
-          <p:nvPr/>
-        </p:nvSpPr>
-        <p:spPr>
-          <a:xfrm>
-            <a:off x="594360" y="3680460"/>
-            <a:ext cx="438912" cy="438912"/>
-          </a:xfrm>
-          <a:prstGeom prst="roundRect">
-            <a:avLst>
-              <a:gd name="adj" fmla="val 12000"/>
-            </a:avLst>
-          </a:prstGeom>
-          <a:solidFill>
-            <a:srgbClr val="095292"/>
-          </a:solidFill>
-          <a:ln>
-            <a:noFill/>
-          </a:ln>
-        </p:spPr>
-        <p:style>
-          <a:lnRef idx="1">
-            <a:schemeClr val="accent1"/>
-          </a:lnRef>
-          <a:fillRef idx="3">
-            <a:schemeClr val="accent1"/>
-          </a:fillRef>
-          <a:effectRef idx="2">
-            <a:schemeClr val="accent1"/>
-          </a:effectRef>
-          <a:fontRef idx="minor">
-            <a:schemeClr val="lt1"/>
-          </a:fontRef>
-        </p:style>
-        <p:txBody>
-          <a:bodyPr rtlCol="0" anchor="ctr"/>
-          <a:lstStyle/>
-          <a:p>
-            <a:pPr algn="ctr"/>
-          </a:p>
-        </p:txBody>
-      </p:sp>
-      <p:sp>
-        <p:nvSpPr>
-          <p:cNvPr id="16" name="TextBox 15"/>
-          <p:cNvSpPr txBox="1"/>
-          <p:nvPr/>
-        </p:nvSpPr>
-        <p:spPr>
-          <a:xfrm>
-            <a:off x="594360" y="3680460"/>
-            <a:ext cx="438912" cy="438912"/>
-          </a:xfrm>
-          <a:prstGeom prst="rect">
-            <a:avLst/>
-          </a:prstGeom>
-          <a:noFill/>
-        </p:spPr>
-        <p:txBody>
-          <a:bodyPr wrap="square" anchor="ctr"/>
-          <a:lstStyle/>
-          <a:p>
-            <a:pPr algn="ctr"/>
-            <a:r>
-              <a:rPr sz="1600" b="1" i="0">
-                <a:solidFill>
-                  <a:srgbClr val="FFFFFF"/>
-                </a:solidFill>
-                <a:latin typeface="Calibri"/>
-              </a:rPr>
-              <a:t>3</a:t>
-            </a:r>
-          </a:p>
-        </p:txBody>
-      </p:sp>
-      <p:sp>
-        <p:nvSpPr>
-          <p:cNvPr id="17" name="TextBox 16"/>
-          <p:cNvSpPr txBox="1"/>
-          <p:nvPr/>
-        </p:nvSpPr>
-        <p:spPr>
-          <a:xfrm>
-            <a:off x="1188720" y="3536899"/>
-            <a:ext cx="10271455" cy="744321"/>
-          </a:xfrm>
-          <a:prstGeom prst="rect">
-            <a:avLst/>
-          </a:prstGeom>
-          <a:noFill/>
-        </p:spPr>
-        <p:txBody>
-          <a:bodyPr wrap="square" anchor="ctr"/>
-          <a:lstStyle/>
-          <a:p>
-            <a:r>
-              <a:rPr sz="1500" b="1" i="0">
-                <a:solidFill>
-                  <a:srgbClr val="095292"/>
-                </a:solidFill>
-                <a:latin typeface="Calibri"/>
-              </a:rPr>
-              <a:t>3 · Ponga peso a cada criterio</a:t>
+              <a:t>–   </a:t>
+            </a:r>
+            <a:r>
+              <a:rPr sz="2000" b="1" i="0">
+                <a:solidFill>
+                  <a:srgbClr val="333333"/>
+                </a:solidFill>
+                <a:latin typeface="Calibri"/>
+              </a:rPr>
+              <a:t>2 · Elija de 3 a 5 criterios:</a:t>
+            </a:r>
+            <a:r>
+              <a:rPr sz="2000" b="0" i="0">
+                <a:solidFill>
+                  <a:srgbClr val="333333"/>
+                </a:solidFill>
+                <a:latin typeface="Calibri"/>
+              </a:rPr>
+              <a:t> Salen de sus requisitos no funcionales y de sus restricciones, no de lo que les gusta.</a:t>
             </a:r>
           </a:p>
           <a:p>
             <a:pPr>
-              <a:spcBef>
-                <a:spcPts val="200"/>
-              </a:spcBef>
+              <a:spcAft>
+                <a:spcPts val="800"/>
+              </a:spcAft>
             </a:pPr>
             <a:r>
-              <a:rPr sz="1300" b="0" i="0">
+              <a:rPr sz="2000" b="0" i="0">
                 <a:solidFill>
                   <a:srgbClr val="333333"/>
                 </a:solidFill>
                 <a:latin typeface="Calibri"/>
               </a:rPr>
-              <a:t>No todos valen igual. Los pesos se deciden </a:t>
-            </a:r>
-            <a:r>
-              <a:rPr sz="1300" b="1" i="0">
+              <a:t>–   </a:t>
+            </a:r>
+            <a:r>
+              <a:rPr sz="2000" b="1" i="0">
                 <a:solidFill>
                   <a:srgbClr val="333333"/>
                 </a:solidFill>
                 <a:latin typeface="Calibri"/>
               </a:rPr>
-              <a:t>antes</a:t>
-            </a:r>
-            <a:r>
-              <a:rPr sz="1300" b="0" i="0">
+              <a:t>3 · Ponga peso a cada criterio:</a:t>
+            </a:r>
+            <a:r>
+              <a:rPr sz="2000" b="0" i="0">
                 <a:solidFill>
                   <a:srgbClr val="333333"/>
                 </a:solidFill>
                 <a:latin typeface="Calibri"/>
               </a:rPr>
-              <a:t> de mirar las alternativas: si no, se acomodan al favorito.</a:t>
-            </a:r>
-          </a:p>
-        </p:txBody>
-      </p:sp>
-      <p:sp>
-        <p:nvSpPr>
-          <p:cNvPr id="18" name="Rounded Rectangle 17"/>
-          <p:cNvSpPr/>
-          <p:nvPr/>
-        </p:nvSpPr>
-        <p:spPr>
-          <a:xfrm>
-            <a:off x="457200" y="4445812"/>
-            <a:ext cx="11277295" cy="908913"/>
-          </a:xfrm>
-          <a:prstGeom prst="roundRect">
-            <a:avLst>
-              <a:gd name="adj" fmla="val 12000"/>
-            </a:avLst>
-          </a:prstGeom>
-          <a:solidFill>
-            <a:srgbClr val="E8F4FA"/>
-          </a:solidFill>
-          <a:ln>
-            <a:noFill/>
-          </a:ln>
-        </p:spPr>
-        <p:style>
-          <a:lnRef idx="1">
-            <a:schemeClr val="accent1"/>
-          </a:lnRef>
-          <a:fillRef idx="3">
-            <a:schemeClr val="accent1"/>
-          </a:fillRef>
-          <a:effectRef idx="2">
-            <a:schemeClr val="accent1"/>
-          </a:effectRef>
-          <a:fontRef idx="minor">
-            <a:schemeClr val="lt1"/>
-          </a:fontRef>
-        </p:style>
-        <p:txBody>
-          <a:bodyPr rtlCol="0" anchor="ctr"/>
-          <a:lstStyle/>
-          <a:p>
-            <a:pPr algn="ctr"/>
-          </a:p>
-        </p:txBody>
-      </p:sp>
-      <p:sp>
-        <p:nvSpPr>
-          <p:cNvPr id="19" name="Rounded Rectangle 18"/>
-          <p:cNvSpPr/>
-          <p:nvPr/>
-        </p:nvSpPr>
-        <p:spPr>
-          <a:xfrm>
-            <a:off x="594360" y="4680813"/>
-            <a:ext cx="438912" cy="438912"/>
-          </a:xfrm>
-          <a:prstGeom prst="roundRect">
-            <a:avLst>
-              <a:gd name="adj" fmla="val 12000"/>
-            </a:avLst>
-          </a:prstGeom>
-          <a:solidFill>
-            <a:srgbClr val="095292"/>
-          </a:solidFill>
-          <a:ln>
-            <a:noFill/>
-          </a:ln>
-        </p:spPr>
-        <p:style>
-          <a:lnRef idx="1">
-            <a:schemeClr val="accent1"/>
-          </a:lnRef>
-          <a:fillRef idx="3">
-            <a:schemeClr val="accent1"/>
-          </a:fillRef>
-          <a:effectRef idx="2">
-            <a:schemeClr val="accent1"/>
-          </a:effectRef>
-          <a:fontRef idx="minor">
-            <a:schemeClr val="lt1"/>
-          </a:fontRef>
-        </p:style>
-        <p:txBody>
-          <a:bodyPr rtlCol="0" anchor="ctr"/>
-          <a:lstStyle/>
-          <a:p>
-            <a:pPr algn="ctr"/>
+              <a:t> No todos valen igual.</a:t>
+            </a:r>
           </a:p>
         </p:txBody>
       </p:sp>
       <p:sp>
         <p:nvSpPr>
           <p:cNvPr id="20" name="TextBox 19"/>
-          <p:cNvSpPr txBox="1"/>
-          <p:nvPr/>
-        </p:nvSpPr>
-        <p:spPr>
-          <a:xfrm>
-            <a:off x="594360" y="4680813"/>
-            <a:ext cx="438912" cy="438912"/>
-          </a:xfrm>
-          <a:prstGeom prst="rect">
-            <a:avLst/>
-          </a:prstGeom>
-          <a:noFill/>
-        </p:spPr>
-        <p:txBody>
-          <a:bodyPr wrap="square" anchor="ctr"/>
-          <a:lstStyle/>
-          <a:p>
-            <a:pPr algn="ctr"/>
-            <a:r>
-              <a:rPr sz="1600" b="1" i="0">
-                <a:solidFill>
-                  <a:srgbClr val="FFFFFF"/>
-                </a:solidFill>
-                <a:latin typeface="Calibri"/>
-              </a:rPr>
-              <a:t>4</a:t>
-            </a:r>
-          </a:p>
-        </p:txBody>
-      </p:sp>
-      <p:sp>
-        <p:nvSpPr>
-          <p:cNvPr id="21" name="TextBox 20"/>
-          <p:cNvSpPr txBox="1"/>
-          <p:nvPr/>
-        </p:nvSpPr>
-        <p:spPr>
-          <a:xfrm>
-            <a:off x="1188720" y="4537252"/>
-            <a:ext cx="10271455" cy="744321"/>
-          </a:xfrm>
-          <a:prstGeom prst="rect">
-            <a:avLst/>
-          </a:prstGeom>
-          <a:noFill/>
-        </p:spPr>
-        <p:txBody>
-          <a:bodyPr wrap="square" anchor="ctr"/>
-          <a:lstStyle/>
-          <a:p>
-            <a:r>
-              <a:rPr sz="1500" b="1" i="0">
-                <a:solidFill>
-                  <a:srgbClr val="095292"/>
-                </a:solidFill>
-                <a:latin typeface="Calibri"/>
-              </a:rPr>
-              <a:t>4 · Califique cada alternativa, criterio por criterio</a:t>
-            </a:r>
-          </a:p>
-          <a:p>
-            <a:pPr>
-              <a:spcBef>
-                <a:spcPts val="200"/>
-              </a:spcBef>
-            </a:pPr>
-            <a:r>
-              <a:rPr sz="1300" b="0" i="0">
-                <a:solidFill>
-                  <a:srgbClr val="333333"/>
-                </a:solidFill>
-                <a:latin typeface="Calibri"/>
-              </a:rPr>
-              <a:t>Con una escala corta (1-3). Y escriba </a:t>
-            </a:r>
-            <a:r>
-              <a:rPr sz="1300" b="1" i="0">
-                <a:solidFill>
-                  <a:srgbClr val="333333"/>
-                </a:solidFill>
-                <a:latin typeface="Calibri"/>
-              </a:rPr>
-              <a:t>por qué</a:t>
-            </a:r>
-            <a:r>
-              <a:rPr sz="1300" b="0" i="0">
-                <a:solidFill>
-                  <a:srgbClr val="333333"/>
-                </a:solidFill>
-                <a:latin typeface="Calibri"/>
-              </a:rPr>
-              <a:t> ese número, en media línea.</a:t>
-            </a:r>
-          </a:p>
-        </p:txBody>
-      </p:sp>
-      <p:sp>
-        <p:nvSpPr>
-          <p:cNvPr id="22" name="Rounded Rectangle 21"/>
-          <p:cNvSpPr/>
-          <p:nvPr/>
-        </p:nvSpPr>
-        <p:spPr>
-          <a:xfrm>
-            <a:off x="457200" y="5446166"/>
-            <a:ext cx="11277295" cy="908913"/>
-          </a:xfrm>
-          <a:prstGeom prst="roundRect">
-            <a:avLst>
-              <a:gd name="adj" fmla="val 12000"/>
-            </a:avLst>
-          </a:prstGeom>
-          <a:solidFill>
-            <a:srgbClr val="F2F2F2"/>
-          </a:solidFill>
-          <a:ln>
-            <a:noFill/>
-          </a:ln>
-        </p:spPr>
-        <p:style>
-          <a:lnRef idx="1">
-            <a:schemeClr val="accent1"/>
-          </a:lnRef>
-          <a:fillRef idx="3">
-            <a:schemeClr val="accent1"/>
-          </a:fillRef>
-          <a:effectRef idx="2">
-            <a:schemeClr val="accent1"/>
-          </a:effectRef>
-          <a:fontRef idx="minor">
-            <a:schemeClr val="lt1"/>
-          </a:fontRef>
-        </p:style>
-        <p:txBody>
-          <a:bodyPr rtlCol="0" anchor="ctr"/>
-          <a:lstStyle/>
-          <a:p>
-            <a:pPr algn="ctr"/>
-          </a:p>
-        </p:txBody>
-      </p:sp>
-      <p:sp>
-        <p:nvSpPr>
-          <p:cNvPr id="23" name="Rounded Rectangle 22"/>
-          <p:cNvSpPr/>
-          <p:nvPr/>
-        </p:nvSpPr>
-        <p:spPr>
-          <a:xfrm>
-            <a:off x="594360" y="5681167"/>
-            <a:ext cx="438912" cy="438912"/>
-          </a:xfrm>
-          <a:prstGeom prst="roundRect">
-            <a:avLst>
-              <a:gd name="adj" fmla="val 12000"/>
-            </a:avLst>
-          </a:prstGeom>
-          <a:solidFill>
-            <a:srgbClr val="095292"/>
-          </a:solidFill>
-          <a:ln>
-            <a:noFill/>
-          </a:ln>
-        </p:spPr>
-        <p:style>
-          <a:lnRef idx="1">
-            <a:schemeClr val="accent1"/>
-          </a:lnRef>
-          <a:fillRef idx="3">
-            <a:schemeClr val="accent1"/>
-          </a:fillRef>
-          <a:effectRef idx="2">
-            <a:schemeClr val="accent1"/>
-          </a:effectRef>
-          <a:fontRef idx="minor">
-            <a:schemeClr val="lt1"/>
-          </a:fontRef>
-        </p:style>
-        <p:txBody>
-          <a:bodyPr rtlCol="0" anchor="ctr"/>
-          <a:lstStyle/>
-          <a:p>
-            <a:pPr algn="ctr"/>
-          </a:p>
-        </p:txBody>
-      </p:sp>
-      <p:sp>
-        <p:nvSpPr>
-          <p:cNvPr id="24" name="TextBox 23"/>
-          <p:cNvSpPr txBox="1"/>
-          <p:nvPr/>
-        </p:nvSpPr>
-        <p:spPr>
-          <a:xfrm>
-            <a:off x="594360" y="5681167"/>
-            <a:ext cx="438912" cy="438912"/>
-          </a:xfrm>
-          <a:prstGeom prst="rect">
-            <a:avLst/>
-          </a:prstGeom>
-          <a:noFill/>
-        </p:spPr>
-        <p:txBody>
-          <a:bodyPr wrap="square" anchor="ctr"/>
-          <a:lstStyle/>
-          <a:p>
-            <a:pPr algn="ctr"/>
-            <a:r>
-              <a:rPr sz="1600" b="1" i="0">
-                <a:solidFill>
-                  <a:srgbClr val="FFFFFF"/>
-                </a:solidFill>
-                <a:latin typeface="Calibri"/>
-              </a:rPr>
-              <a:t>5</a:t>
-            </a:r>
-          </a:p>
-        </p:txBody>
-      </p:sp>
-      <p:sp>
-        <p:nvSpPr>
-          <p:cNvPr id="25" name="TextBox 24"/>
-          <p:cNvSpPr txBox="1"/>
-          <p:nvPr/>
-        </p:nvSpPr>
-        <p:spPr>
-          <a:xfrm>
-            <a:off x="1188720" y="5537606"/>
-            <a:ext cx="10271455" cy="744321"/>
-          </a:xfrm>
-          <a:prstGeom prst="rect">
-            <a:avLst/>
-          </a:prstGeom>
-          <a:noFill/>
-        </p:spPr>
-        <p:txBody>
-          <a:bodyPr wrap="square" anchor="ctr"/>
-          <a:lstStyle/>
-          <a:p>
-            <a:r>
-              <a:rPr sz="1500" b="1" i="0">
-                <a:solidFill>
-                  <a:srgbClr val="095292"/>
-                </a:solidFill>
-                <a:latin typeface="Calibri"/>
-              </a:rPr>
-              <a:t>5 · Decida, y escriba qué se pierde</a:t>
-            </a:r>
-          </a:p>
-          <a:p>
-            <a:pPr>
-              <a:spcBef>
-                <a:spcPts val="200"/>
-              </a:spcBef>
-            </a:pPr>
-            <a:r>
-              <a:rPr sz="1300" b="0" i="0">
-                <a:solidFill>
-                  <a:srgbClr val="333333"/>
-                </a:solidFill>
-                <a:latin typeface="Calibri"/>
-              </a:rPr>
-              <a:t>Toda decisión sacrifica algo. Nombrar lo que se pierde es lo que la vuelve profesional.</a:t>
-            </a:r>
-          </a:p>
-        </p:txBody>
-      </p:sp>
-      <p:sp>
-        <p:nvSpPr>
-          <p:cNvPr id="26" name="TextBox 25"/>
           <p:cNvSpPr txBox="1"/>
           <p:nvPr/>
         </p:nvSpPr>
@@ -9495,6 +8981,195 @@
   <p:clrMapOvr>
     <a:masterClrMapping/>
   </p:clrMapOvr>
+  <p:timing>
+    <p:tnLst>
+      <p:par>
+        <p:cTn id="1" dur="indefinite" restart="never" nodeType="tmRoot">
+          <p:childTnLst>
+            <p:seq concurrent="1" nextAc="seek">
+              <p:cTn id="2" dur="indefinite" nodeType="mainSeq">
+                <p:childTnLst>
+                  <p:par>
+                    <p:cTn id="3" fill="hold">
+                      <p:stCondLst>
+                        <p:cond delay="indefinite"/>
+                      </p:stCondLst>
+                      <p:childTnLst>
+                        <p:par>
+                          <p:cTn id="4" fill="hold">
+                            <p:stCondLst>
+                              <p:cond delay="0"/>
+                            </p:stCondLst>
+                            <p:childTnLst>
+                              <p:par>
+                                <p:cTn id="5" presetID="10" presetClass="entr" presetSubtype="0" fill="hold" nodeType="clickEffect">
+                                  <p:stCondLst>
+                                    <p:cond delay="0"/>
+                                  </p:stCondLst>
+                                  <p:childTnLst>
+                                    <p:set>
+                                      <p:cBhvr>
+                                        <p:cTn id="6" dur="1" fill="hold">
+                                          <p:stCondLst>
+                                            <p:cond delay="0"/>
+                                          </p:stCondLst>
+                                        </p:cTn>
+                                        <p:tgtEl>
+                                          <p:spTgt spid="7"/>
+                                        </p:tgtEl>
+                                        <p:attrNameLst>
+                                          <p:attrName>style.visibility</p:attrName>
+                                        </p:attrNameLst>
+                                      </p:cBhvr>
+                                      <p:to>
+                                        <p:strVal val="visible"/>
+                                      </p:to>
+                                    </p:set>
+                                    <p:animEffect transition="in" filter="fade">
+                                      <p:cBhvr>
+                                        <p:cTn id="7" dur="450"/>
+                                        <p:tgtEl>
+                                          <p:spTgt spid="7"/>
+                                        </p:tgtEl>
+                                      </p:cBhvr>
+                                    </p:animEffect>
+                                  </p:childTnLst>
+                                </p:cTn>
+                              </p:par>
+                            </p:childTnLst>
+                          </p:cTn>
+                        </p:par>
+                      </p:childTnLst>
+                    </p:cTn>
+                  </p:par>
+                  <p:par>
+                    <p:cTn id="8" fill="hold">
+                      <p:stCondLst>
+                        <p:cond delay="indefinite"/>
+                      </p:stCondLst>
+                      <p:childTnLst>
+                        <p:par>
+                          <p:cTn id="9" fill="hold">
+                            <p:stCondLst>
+                              <p:cond delay="0"/>
+                            </p:stCondLst>
+                            <p:childTnLst>
+                              <p:par>
+                                <p:cTn id="10" presetID="10" presetClass="entr" presetSubtype="0" fill="hold" nodeType="clickEffect">
+                                  <p:stCondLst>
+                                    <p:cond delay="0"/>
+                                  </p:stCondLst>
+                                  <p:childTnLst>
+                                    <p:set>
+                                      <p:cBhvr>
+                                        <p:cTn id="11" dur="1" fill="hold">
+                                          <p:stCondLst>
+                                            <p:cond delay="0"/>
+                                          </p:stCondLst>
+                                        </p:cTn>
+                                        <p:tgtEl>
+                                          <p:spTgt spid="8"/>
+                                        </p:tgtEl>
+                                        <p:attrNameLst>
+                                          <p:attrName>style.visibility</p:attrName>
+                                        </p:attrNameLst>
+                                      </p:cBhvr>
+                                      <p:to>
+                                        <p:strVal val="visible"/>
+                                      </p:to>
+                                    </p:set>
+                                    <p:animEffect transition="in" filter="fade">
+                                      <p:cBhvr>
+                                        <p:cTn id="12" dur="450"/>
+                                        <p:tgtEl>
+                                          <p:spTgt spid="8"/>
+                                        </p:tgtEl>
+                                      </p:cBhvr>
+                                    </p:animEffect>
+                                  </p:childTnLst>
+                                </p:cTn>
+                              </p:par>
+                            </p:childTnLst>
+                          </p:cTn>
+                        </p:par>
+                      </p:childTnLst>
+                    </p:cTn>
+                  </p:par>
+                  <p:par>
+                    <p:cTn id="13" fill="hold">
+                      <p:stCondLst>
+                        <p:cond delay="indefinite"/>
+                      </p:stCondLst>
+                      <p:childTnLst>
+                        <p:par>
+                          <p:cTn id="14" fill="hold">
+                            <p:stCondLst>
+                              <p:cond delay="0"/>
+                            </p:stCondLst>
+                            <p:childTnLst>
+                              <p:par>
+                                <p:cTn id="15" presetID="10" presetClass="entr" presetSubtype="0" fill="hold" nodeType="clickEffect">
+                                  <p:stCondLst>
+                                    <p:cond delay="0"/>
+                                  </p:stCondLst>
+                                  <p:childTnLst>
+                                    <p:set>
+                                      <p:cBhvr>
+                                        <p:cTn id="16" dur="1" fill="hold">
+                                          <p:stCondLst>
+                                            <p:cond delay="0"/>
+                                          </p:stCondLst>
+                                        </p:cTn>
+                                        <p:tgtEl>
+                                          <p:spTgt spid="9"/>
+                                        </p:tgtEl>
+                                        <p:attrNameLst>
+                                          <p:attrName>style.visibility</p:attrName>
+                                        </p:attrNameLst>
+                                      </p:cBhvr>
+                                      <p:to>
+                                        <p:strVal val="visible"/>
+                                      </p:to>
+                                    </p:set>
+                                    <p:animEffect transition="in" filter="fade">
+                                      <p:cBhvr>
+                                        <p:cTn id="17" dur="450"/>
+                                        <p:tgtEl>
+                                          <p:spTgt spid="9"/>
+                                        </p:tgtEl>
+                                      </p:cBhvr>
+                                    </p:animEffect>
+                                  </p:childTnLst>
+                                </p:cTn>
+                              </p:par>
+                            </p:childTnLst>
+                          </p:cTn>
+                        </p:par>
+                      </p:childTnLst>
+                    </p:cTn>
+                  </p:par>
+                </p:childTnLst>
+              </p:cTn>
+              <p:prevCondLst>
+                <p:cond evt="onPrev" delay="0">
+                  <p:tgtEl>
+                    <p:sldTgt/>
+                  </p:tgtEl>
+                </p:cond>
+              </p:prevCondLst>
+              <p:nextCondLst>
+                <p:cond evt="onNext" delay="0">
+                  <p:tgtEl>
+                    <p:sldTgt/>
+                  </p:tgtEl>
+                </p:cond>
+              </p:nextCondLst>
+            </p:seq>
+          </p:childTnLst>
+        </p:cTn>
+      </p:par>
+    </p:tnLst>
+  </p:timing>
 </p:sld>
 </file>
 
@@ -11504,9 +11179,57 @@
           </a:p>
         </p:txBody>
       </p:sp>
-      <p:sp>
-        <p:nvSpPr>
-          <p:cNvPr id="13" name="TextBox 12"/>
+      <p:pic>
+        <p:nvPicPr>
+          <p:cNvPr id="13" name="Picture 12" descr="sello_mal.png"/>
+          <p:cNvPicPr>
+            <a:picLocks noChangeAspect="1"/>
+          </p:cNvPicPr>
+          <p:nvPr/>
+        </p:nvPicPr>
+        <p:blipFill>
+          <a:blip r:embed="rId2"/>
+          <a:stretch>
+            <a:fillRect/>
+          </a:stretch>
+        </p:blipFill>
+        <p:spPr>
+          <a:xfrm>
+            <a:off x="566928" y="1316736"/>
+            <a:ext cx="393192" cy="393192"/>
+          </a:xfrm>
+          <a:prstGeom prst="rect">
+            <a:avLst/>
+          </a:prstGeom>
+        </p:spPr>
+      </p:pic>
+      <p:pic>
+        <p:nvPicPr>
+          <p:cNvPr id="14" name="Picture 13" descr="sello_bien.png"/>
+          <p:cNvPicPr>
+            <a:picLocks noChangeAspect="1"/>
+          </p:cNvPicPr>
+          <p:nvPr/>
+        </p:nvPicPr>
+        <p:blipFill>
+          <a:blip r:embed="rId3"/>
+          <a:stretch>
+            <a:fillRect/>
+          </a:stretch>
+        </p:blipFill>
+        <p:spPr>
+          <a:xfrm>
+            <a:off x="6365595" y="1316736"/>
+            <a:ext cx="393192" cy="393192"/>
+          </a:xfrm>
+          <a:prstGeom prst="rect">
+            <a:avLst/>
+          </a:prstGeom>
+        </p:spPr>
+      </p:pic>
+      <p:sp>
+        <p:nvSpPr>
+          <p:cNvPr id="15" name="TextBox 14"/>
           <p:cNvSpPr txBox="1"/>
           <p:nvPr/>
         </p:nvSpPr>

--- a/Introduccion a la Ingenieria/Clases/Clase 8 - Taller de aplicacion del ciclo de vida/Presentacion.pptx
+++ b/Introduccion a la Ingenieria/Clases/Clase 8 - Taller de aplicacion del ciclo de vida/Presentacion.pptx
@@ -7264,118 +7264,14 @@
       </p:sp>
       <p:sp>
         <p:nvSpPr>
-          <p:cNvPr id="5" name="Rounded Rectangle 4"/>
-          <p:cNvSpPr/>
-          <p:nvPr/>
-        </p:nvSpPr>
-        <p:spPr>
-          <a:xfrm>
-            <a:off x="5797149" y="1573813"/>
-            <a:ext cx="6010497" cy="4057845"/>
-          </a:xfrm>
-          <a:prstGeom prst="roundRect">
-            <a:avLst>
-              <a:gd name="adj" fmla="val 4000"/>
-            </a:avLst>
-          </a:prstGeom>
-          <a:solidFill>
-            <a:srgbClr val="E8EEF4"/>
-          </a:solidFill>
-          <a:ln>
-            <a:noFill/>
-          </a:ln>
-        </p:spPr>
-        <p:style>
-          <a:lnRef idx="1">
-            <a:schemeClr val="accent1"/>
-          </a:lnRef>
-          <a:fillRef idx="3">
-            <a:schemeClr val="accent1"/>
-          </a:fillRef>
-          <a:effectRef idx="2">
-            <a:schemeClr val="accent1"/>
-          </a:effectRef>
-          <a:fontRef idx="minor">
-            <a:schemeClr val="lt1"/>
-          </a:fontRef>
-        </p:style>
-        <p:txBody>
-          <a:bodyPr rtlCol="0" anchor="ctr"/>
-          <a:lstStyle/>
-          <a:p>
-            <a:pPr algn="ctr"/>
-          </a:p>
-        </p:txBody>
-      </p:sp>
-      <p:pic>
-        <p:nvPicPr>
-          <p:cNvPr id="6" name="Picture 5" descr="students-learning-laptops-classroom.jpg"/>
-          <p:cNvPicPr>
-            <a:picLocks noChangeAspect="1"/>
-          </p:cNvPicPr>
-          <p:nvPr/>
-        </p:nvPicPr>
-        <p:blipFill>
-          <a:blip r:embed="rId2"/>
-          <a:stretch>
-            <a:fillRect/>
-          </a:stretch>
-        </p:blipFill>
-        <p:spPr>
-          <a:xfrm>
-            <a:off x="5870301" y="1646965"/>
-            <a:ext cx="5864193" cy="3911541"/>
-          </a:xfrm>
-          <a:prstGeom prst="rect">
-            <a:avLst/>
-          </a:prstGeom>
-        </p:spPr>
-      </p:pic>
-      <p:sp>
-        <p:nvSpPr>
-          <p:cNvPr id="7" name="TextBox 6"/>
+          <p:cNvPr id="5" name="TextBox 4"/>
           <p:cNvSpPr txBox="1"/>
           <p:nvPr/>
         </p:nvSpPr>
         <p:spPr>
           <a:xfrm>
-            <a:off x="5870301" y="5961888"/>
-            <a:ext cx="5864193" cy="320040"/>
-          </a:xfrm>
-          <a:prstGeom prst="rect">
-            <a:avLst/>
-          </a:prstGeom>
-          <a:noFill/>
-        </p:spPr>
-        <p:txBody>
-          <a:bodyPr wrap="square">
-            <a:spAutoFit/>
-          </a:bodyPr>
-          <a:lstStyle/>
-          <a:p>
-            <a:pPr algn="ctr"/>
-            <a:r>
-              <a:rPr sz="1100" b="0" i="1">
-                <a:solidFill>
-                  <a:srgbClr val="666666"/>
-                </a:solidFill>
-                <a:latin typeface="Calibri"/>
-              </a:rPr>
-              <a:t>Foto: Mikhail Nilov · Pexels</a:t>
-            </a:r>
-          </a:p>
-        </p:txBody>
-      </p:sp>
-      <p:sp>
-        <p:nvSpPr>
-          <p:cNvPr id="8" name="TextBox 7"/>
-          <p:cNvSpPr txBox="1"/>
-          <p:nvPr/>
-        </p:nvSpPr>
-        <p:spPr>
-          <a:xfrm>
-            <a:off x="457200" y="1353312"/>
-            <a:ext cx="5093061" cy="5047488"/>
+            <a:off x="457200" y="1170432"/>
+            <a:ext cx="11277295" cy="5230368"/>
           </a:xfrm>
           <a:prstGeom prst="rect">
             <a:avLst/>
@@ -7527,7 +7423,7 @@
       </p:sp>
       <p:sp>
         <p:nvSpPr>
-          <p:cNvPr id="9" name="TextBox 8"/>
+          <p:cNvPr id="6" name="TextBox 5"/>
           <p:cNvSpPr txBox="1"/>
           <p:nvPr/>
         </p:nvSpPr>
